--- a/AI_PBMS_Full_Deck.pptx
+++ b/AI_PBMS_Full_Deck.pptx
@@ -636,7 +636,7 @@
           </a:p>
           <a:p>
             <a:r>
-              <a:t>the misses go: twenty-eight point six percent of true imbalance samples get</a:t>
+              <a:t>the misses go: twenty-eight point seven percent of true imbalance samples get</a:t>
             </a:r>
           </a:p>
           <a:p>
@@ -2456,37 +2456,62 @@
           <a:lstStyle/>
           <a:p>
             <a:r>
-              <a:t>Tabular sensor data with fifty-one engineered features is what gradient-boosted</a:t>
-            </a:r>
-          </a:p>
-          <a:p>
-            <a:r>
-              <a:t>trees are good at, and each alternative fails a constraint we actually have. The</a:t>
-            </a:r>
-          </a:p>
-          <a:p>
-            <a:r>
-              <a:t>Transformer and the LSTM need a sequence buffer — latency and memory we do not</a:t>
-            </a:r>
-          </a:p>
-          <a:p>
-            <a:r>
-              <a:t>have — and neither gives an attribution an engineer can argue with. Random</a:t>
-            </a:r>
-          </a:p>
-          <a:p>
-            <a:r>
-              <a:t>Forest needs a much bigger model for the same accuracy. A rule-based BMS only</a:t>
-            </a:r>
-          </a:p>
-          <a:p>
-            <a:r>
-              <a:t>reacts after a threshold is already breached. XGBoost: 98.55 percent, 0.85</a:t>
-            </a:r>
-          </a:p>
-          <a:p>
-            <a:r>
-              <a:t>milliseconds on the Pi 5, and inspectable.</a:t>
+              <a:t>We did not argue about which model to use — we trained all six on the identical</a:t>
+            </a:r>
+          </a:p>
+          <a:p>
+            <a:r>
+              <a:t>split and measured them. The Transformer is actually the most accurate at 95.11</a:t>
+            </a:r>
+          </a:p>
+          <a:p>
+            <a:r>
+              <a:t>percent, a point ahead of XGBoost. We still shipped XGBoost, and here is the</a:t>
+            </a:r>
+          </a:p>
+          <a:p>
+            <a:r>
+              <a:t>honest reason: the Transformer needs a sixty-row lookback, which at one hertz</a:t>
+            </a:r>
+          </a:p>
+          <a:p>
+            <a:r>
+              <a:t>means a full minute of buffered data before it can say anything, plus a torch</a:t>
+            </a:r>
+          </a:p>
+          <a:p>
+            <a:r>
+              <a:t>runtime on the Pi and no feature attribution an engineer can interrogate.</a:t>
+            </a:r>
+          </a:p>
+          <a:p>
+            <a:r>
+              <a:t>XGBoost predicts from a single row, instantly, and tells you which features</a:t>
+            </a:r>
+          </a:p>
+          <a:p>
+            <a:r>
+              <a:t>drove it. Random Forest is 176 megabytes and seventy-three times slower for</a:t>
+            </a:r>
+          </a:p>
+          <a:p>
+            <a:r>
+              <a:t>worse accuracy. And look at the bottom row: a conventional rule-based BMS scores</a:t>
+            </a:r>
+          </a:p>
+          <a:p>
+            <a:r>
+              <a:t>twenty-two percent — because cell one's chronic gap puts eighty-four percent of</a:t>
+            </a:r>
+          </a:p>
+          <a:p>
+            <a:r>
+              <a:t>healthy rows over the imbalance threshold, so it false-alarms constantly and</a:t>
+            </a:r>
+          </a:p>
+          <a:p>
+            <a:r>
+              <a:t>still never detects a weak cell.</a:t>
             </a:r>
           </a:p>
         </p:txBody>
@@ -6301,7 +6326,7 @@
                 </a:solidFill>
                 <a:latin typeface="Inter"/>
               </a:rPr>
-              <a:t>28.6% of true Cell Imbalance samples are predicted Undervoltage. The two share a signature: one cell drops, pack voltage follows. Separating them needs more real imbalance events, not more synthetic ones — which is exactly what the next data campaign is for.</a:t>
+              <a:t>28.7% of true Cell Imbalance samples are predicted Undervoltage. The two share a signature: one cell drops, pack voltage follows. Separating them needs more real imbalance events, not more synthetic ones — which is exactly what the next data campaign is for.</a:t>
             </a:r>
           </a:p>
         </p:txBody>
@@ -20299,7 +20324,7 @@
                 </a:solidFill>
                 <a:latin typeface="Inter"/>
               </a:rPr>
-              <a:t>Why XGBoost, and not the obvious alternatives</a:t>
+              <a:t>We benchmarked all six on the same split</a:t>
             </a:r>
           </a:p>
         </p:txBody>
@@ -20480,8 +20505,8 @@
         </p:nvSpPr>
         <p:spPr>
           <a:xfrm>
-            <a:off x="566928" y="1481328"/>
-            <a:ext cx="11057839" cy="402336"/>
+            <a:off x="566928" y="1444752"/>
+            <a:ext cx="11057839" cy="384048"/>
           </a:xfrm>
           <a:prstGeom prst="rect">
             <a:avLst/>
@@ -20524,8 +20549,8 @@
         </p:nvSpPr>
         <p:spPr>
           <a:xfrm>
-            <a:off x="649224" y="1481328"/>
-            <a:ext cx="1805482" cy="402336"/>
+            <a:off x="649224" y="1444752"/>
+            <a:ext cx="1869033" cy="384048"/>
           </a:xfrm>
           <a:prstGeom prst="rect">
             <a:avLst/>
@@ -20547,7 +20572,7 @@
               </a:spcAft>
             </a:pPr>
             <a:r>
-              <a:rPr sz="1050" b="1">
+              <a:rPr sz="1000" b="1">
                 <a:solidFill>
                   <a:srgbClr val="0F172A"/>
                 </a:solidFill>
@@ -20566,8 +20591,8 @@
         </p:nvSpPr>
         <p:spPr>
           <a:xfrm>
-            <a:off x="2619298" y="1481328"/>
-            <a:ext cx="1106424" cy="402336"/>
+            <a:off x="2682849" y="1444752"/>
+            <a:ext cx="1169974" cy="384048"/>
           </a:xfrm>
           <a:prstGeom prst="rect">
             <a:avLst/>
@@ -20589,7 +20614,7 @@
               </a:spcAft>
             </a:pPr>
             <a:r>
-              <a:rPr sz="1050" b="1">
+              <a:rPr sz="1000" b="1">
                 <a:solidFill>
                   <a:srgbClr val="0F172A"/>
                 </a:solidFill>
@@ -20608,8 +20633,8 @@
         </p:nvSpPr>
         <p:spPr>
           <a:xfrm>
-            <a:off x="3890314" y="1481328"/>
-            <a:ext cx="1106424" cy="402336"/>
+            <a:off x="4017416" y="1444752"/>
+            <a:ext cx="1106424" cy="384048"/>
           </a:xfrm>
           <a:prstGeom prst="rect">
             <a:avLst/>
@@ -20631,13 +20656,13 @@
               </a:spcAft>
             </a:pPr>
             <a:r>
-              <a:rPr sz="1050" b="1">
+              <a:rPr sz="1000" b="1">
                 <a:solidFill>
                   <a:srgbClr val="0F172A"/>
                 </a:solidFill>
                 <a:latin typeface="Inter"/>
               </a:rPr>
-              <a:t>Latency</a:t>
+              <a:t>Macro F1</a:t>
             </a:r>
           </a:p>
         </p:txBody>
@@ -20650,8 +20675,8 @@
         </p:nvSpPr>
         <p:spPr>
           <a:xfrm>
-            <a:off x="5161330" y="1481328"/>
-            <a:ext cx="915771" cy="402336"/>
+            <a:off x="5288432" y="1444752"/>
+            <a:ext cx="1106424" cy="384048"/>
           </a:xfrm>
           <a:prstGeom prst="rect">
             <a:avLst/>
@@ -20673,13 +20698,13 @@
               </a:spcAft>
             </a:pPr>
             <a:r>
-              <a:rPr sz="1050" b="1">
+              <a:rPr sz="1000" b="1">
                 <a:solidFill>
                   <a:srgbClr val="0F172A"/>
                 </a:solidFill>
                 <a:latin typeface="Inter"/>
               </a:rPr>
-              <a:t>Size</a:t>
+              <a:t>Latency</a:t>
             </a:r>
           </a:p>
         </p:txBody>
@@ -20692,8 +20717,8 @@
         </p:nvSpPr>
         <p:spPr>
           <a:xfrm>
-            <a:off x="6241694" y="1481328"/>
-            <a:ext cx="915771" cy="402336"/>
+            <a:off x="6559448" y="1444752"/>
+            <a:ext cx="1042873" cy="384048"/>
           </a:xfrm>
           <a:prstGeom prst="rect">
             <a:avLst/>
@@ -20715,13 +20740,13 @@
               </a:spcAft>
             </a:pPr>
             <a:r>
-              <a:rPr sz="1050" b="1">
+              <a:rPr sz="1000" b="1">
                 <a:solidFill>
                   <a:srgbClr val="0F172A"/>
                 </a:solidFill>
                 <a:latin typeface="Inter"/>
               </a:rPr>
-              <a:t>Edge</a:t>
+              <a:t>Size</a:t>
             </a:r>
           </a:p>
         </p:txBody>
@@ -20734,8 +20759,8 @@
         </p:nvSpPr>
         <p:spPr>
           <a:xfrm>
-            <a:off x="7322058" y="1481328"/>
-            <a:ext cx="1360627" cy="402336"/>
+            <a:off x="7766913" y="1444752"/>
+            <a:ext cx="852220" cy="384048"/>
           </a:xfrm>
           <a:prstGeom prst="rect">
             <a:avLst/>
@@ -20757,13 +20782,13 @@
               </a:spcAft>
             </a:pPr>
             <a:r>
-              <a:rPr sz="1050" b="1">
+              <a:rPr sz="1000" b="1">
                 <a:solidFill>
                   <a:srgbClr val="0F172A"/>
                 </a:solidFill>
                 <a:latin typeface="Inter"/>
               </a:rPr>
-              <a:t>Interpretable</a:t>
+              <a:t>Edge</a:t>
             </a:r>
           </a:p>
         </p:txBody>
@@ -20776,8 +20801,8 @@
         </p:nvSpPr>
         <p:spPr>
           <a:xfrm>
-            <a:off x="8847277" y="1481328"/>
-            <a:ext cx="2695194" cy="402336"/>
+            <a:off x="8783726" y="1444752"/>
+            <a:ext cx="2758744" cy="384048"/>
           </a:xfrm>
           <a:prstGeom prst="rect">
             <a:avLst/>
@@ -20799,7 +20824,7 @@
               </a:spcAft>
             </a:pPr>
             <a:r>
-              <a:rPr sz="1050" b="1">
+              <a:rPr sz="1000" b="1">
                 <a:solidFill>
                   <a:srgbClr val="0F172A"/>
                 </a:solidFill>
@@ -20818,8 +20843,8 @@
         </p:nvSpPr>
         <p:spPr>
           <a:xfrm>
-            <a:off x="566928" y="1883664"/>
-            <a:ext cx="11057839" cy="457200"/>
+            <a:off x="566928" y="1828800"/>
+            <a:ext cx="11057839" cy="420624"/>
           </a:xfrm>
           <a:prstGeom prst="rect">
             <a:avLst/>
@@ -20862,8 +20887,8 @@
         </p:nvSpPr>
         <p:spPr>
           <a:xfrm>
-            <a:off x="649224" y="1883664"/>
-            <a:ext cx="1805482" cy="457200"/>
+            <a:off x="649224" y="1828800"/>
+            <a:ext cx="1869033" cy="420624"/>
           </a:xfrm>
           <a:prstGeom prst="rect">
             <a:avLst/>
@@ -20885,7 +20910,7 @@
               </a:spcAft>
             </a:pPr>
             <a:r>
-              <a:rPr sz="1150" b="1">
+              <a:rPr sz="1100" b="1">
                 <a:solidFill>
                   <a:srgbClr val="0F172A"/>
                 </a:solidFill>
@@ -20904,8 +20929,8 @@
         </p:nvSpPr>
         <p:spPr>
           <a:xfrm>
-            <a:off x="2619298" y="1883664"/>
-            <a:ext cx="1106424" cy="457200"/>
+            <a:off x="2682849" y="1828800"/>
+            <a:ext cx="1169974" cy="420624"/>
           </a:xfrm>
           <a:prstGeom prst="rect">
             <a:avLst/>
@@ -20927,13 +20952,13 @@
               </a:spcAft>
             </a:pPr>
             <a:r>
-              <a:rPr sz="1150" b="1">
+              <a:rPr sz="1100" b="1">
                 <a:solidFill>
                   <a:srgbClr val="0E7490"/>
                 </a:solidFill>
                 <a:latin typeface="Inter"/>
               </a:rPr>
-              <a:t>98.55%</a:t>
+              <a:t>94.19%</a:t>
             </a:r>
           </a:p>
         </p:txBody>
@@ -20946,8 +20971,8 @@
         </p:nvSpPr>
         <p:spPr>
           <a:xfrm>
-            <a:off x="3890314" y="1883664"/>
-            <a:ext cx="1106424" cy="457200"/>
+            <a:off x="4017416" y="1828800"/>
+            <a:ext cx="1106424" cy="420624"/>
           </a:xfrm>
           <a:prstGeom prst="rect">
             <a:avLst/>
@@ -20969,13 +20994,13 @@
               </a:spcAft>
             </a:pPr>
             <a:r>
-              <a:rPr sz="1150" b="1">
-                <a:solidFill>
-                  <a:srgbClr val="0E7490"/>
-                </a:solidFill>
-                <a:latin typeface="Inter"/>
-              </a:rPr>
-              <a:t>0.85 ms</a:t>
+              <a:rPr sz="1100" b="0">
+                <a:solidFill>
+                  <a:srgbClr val="475569"/>
+                </a:solidFill>
+                <a:latin typeface="Inter"/>
+              </a:rPr>
+              <a:t>0.905</a:t>
             </a:r>
           </a:p>
         </p:txBody>
@@ -20988,8 +21013,8 @@
         </p:nvSpPr>
         <p:spPr>
           <a:xfrm>
-            <a:off x="5161330" y="1883664"/>
-            <a:ext cx="915771" cy="457200"/>
+            <a:off x="5288432" y="1828800"/>
+            <a:ext cx="1106424" cy="420624"/>
           </a:xfrm>
           <a:prstGeom prst="rect">
             <a:avLst/>
@@ -21011,13 +21036,13 @@
               </a:spcAft>
             </a:pPr>
             <a:r>
-              <a:rPr sz="1150" b="0">
-                <a:solidFill>
-                  <a:srgbClr val="0F172A"/>
-                </a:solidFill>
-                <a:latin typeface="Inter"/>
-              </a:rPr>
-              <a:t>~1.4 MB</a:t>
+              <a:rPr sz="1100" b="1">
+                <a:solidFill>
+                  <a:srgbClr val="0E7490"/>
+                </a:solidFill>
+                <a:latin typeface="Inter"/>
+              </a:rPr>
+              <a:t>0.462 ms</a:t>
             </a:r>
           </a:p>
         </p:txBody>
@@ -21030,8 +21055,8 @@
         </p:nvSpPr>
         <p:spPr>
           <a:xfrm>
-            <a:off x="6241694" y="1883664"/>
-            <a:ext cx="915771" cy="457200"/>
+            <a:off x="6559448" y="1828800"/>
+            <a:ext cx="1042873" cy="420624"/>
           </a:xfrm>
           <a:prstGeom prst="rect">
             <a:avLst/>
@@ -21053,13 +21078,13 @@
               </a:spcAft>
             </a:pPr>
             <a:r>
-              <a:rPr sz="1150" b="1">
-                <a:solidFill>
-                  <a:srgbClr val="0E7490"/>
-                </a:solidFill>
-                <a:latin typeface="Inter"/>
-              </a:rPr>
-              <a:t>Yes</a:t>
+              <a:rPr sz="1100" b="0">
+                <a:solidFill>
+                  <a:srgbClr val="475569"/>
+                </a:solidFill>
+                <a:latin typeface="Inter"/>
+              </a:rPr>
+              <a:t>1.40 MB</a:t>
             </a:r>
           </a:p>
         </p:txBody>
@@ -21072,8 +21097,8 @@
         </p:nvSpPr>
         <p:spPr>
           <a:xfrm>
-            <a:off x="7322058" y="1883664"/>
-            <a:ext cx="1360627" cy="457200"/>
+            <a:off x="7766913" y="1828800"/>
+            <a:ext cx="852220" cy="420624"/>
           </a:xfrm>
           <a:prstGeom prst="rect">
             <a:avLst/>
@@ -21095,7 +21120,7 @@
               </a:spcAft>
             </a:pPr>
             <a:r>
-              <a:rPr sz="1150" b="1">
+              <a:rPr sz="1100" b="0">
                 <a:solidFill>
                   <a:srgbClr val="0E7490"/>
                 </a:solidFill>
@@ -21114,8 +21139,8 @@
         </p:nvSpPr>
         <p:spPr>
           <a:xfrm>
-            <a:off x="8847277" y="1883664"/>
-            <a:ext cx="2695194" cy="457200"/>
+            <a:off x="8783726" y="1828800"/>
+            <a:ext cx="2758744" cy="420624"/>
           </a:xfrm>
           <a:prstGeom prst="rect">
             <a:avLst/>
@@ -21137,13 +21162,13 @@
               </a:spcAft>
             </a:pPr>
             <a:r>
-              <a:rPr sz="1150" b="1">
+              <a:rPr sz="1100" b="1">
                 <a:solidFill>
                   <a:srgbClr val="0E7490"/>
                 </a:solidFill>
                 <a:latin typeface="Inter"/>
               </a:rPr>
-              <a:t>Deployed</a:t>
+              <a:t>Deployed — 1 row, no buffer</a:t>
             </a:r>
           </a:p>
         </p:txBody>
@@ -21156,7 +21181,7 @@
         </p:nvSpPr>
         <p:spPr>
           <a:xfrm>
-            <a:off x="566928" y="2798064"/>
+            <a:off x="566928" y="2670048"/>
             <a:ext cx="11057839" cy="10972"/>
           </a:xfrm>
           <a:prstGeom prst="rect">
@@ -21198,8 +21223,8 @@
         </p:nvSpPr>
         <p:spPr>
           <a:xfrm>
-            <a:off x="649224" y="2340864"/>
-            <a:ext cx="1805482" cy="457200"/>
+            <a:off x="649224" y="2249424"/>
+            <a:ext cx="1869033" cy="420624"/>
           </a:xfrm>
           <a:prstGeom prst="rect">
             <a:avLst/>
@@ -21221,7 +21246,7 @@
               </a:spcAft>
             </a:pPr>
             <a:r>
-              <a:rPr sz="1150" b="0">
+              <a:rPr sz="1100" b="0">
                 <a:solidFill>
                   <a:srgbClr val="0F172A"/>
                 </a:solidFill>
@@ -21240,8 +21265,8 @@
         </p:nvSpPr>
         <p:spPr>
           <a:xfrm>
-            <a:off x="2619298" y="2340864"/>
-            <a:ext cx="1106424" cy="457200"/>
+            <a:off x="2682849" y="2249424"/>
+            <a:ext cx="1169974" cy="420624"/>
           </a:xfrm>
           <a:prstGeom prst="rect">
             <a:avLst/>
@@ -21263,13 +21288,13 @@
               </a:spcAft>
             </a:pPr>
             <a:r>
-              <a:rPr sz="1150" b="0">
-                <a:solidFill>
-                  <a:srgbClr val="475569"/>
-                </a:solidFill>
-                <a:latin typeface="Inter"/>
-              </a:rPr>
-              <a:t>—</a:t>
+              <a:rPr sz="1100" b="0">
+                <a:solidFill>
+                  <a:srgbClr val="0F172A"/>
+                </a:solidFill>
+                <a:latin typeface="Inter"/>
+              </a:rPr>
+              <a:t>95.11%</a:t>
             </a:r>
           </a:p>
         </p:txBody>
@@ -21282,8 +21307,8 @@
         </p:nvSpPr>
         <p:spPr>
           <a:xfrm>
-            <a:off x="3890314" y="2340864"/>
-            <a:ext cx="1106424" cy="457200"/>
+            <a:off x="4017416" y="2249424"/>
+            <a:ext cx="1106424" cy="420624"/>
           </a:xfrm>
           <a:prstGeom prst="rect">
             <a:avLst/>
@@ -21305,13 +21330,13 @@
               </a:spcAft>
             </a:pPr>
             <a:r>
-              <a:rPr sz="1150" b="0">
+              <a:rPr sz="1100" b="0">
                 <a:solidFill>
                   <a:srgbClr val="475569"/>
                 </a:solidFill>
                 <a:latin typeface="Inter"/>
               </a:rPr>
-              <a:t>—</a:t>
+              <a:t>0.918</a:t>
             </a:r>
           </a:p>
         </p:txBody>
@@ -21324,8 +21349,8 @@
         </p:nvSpPr>
         <p:spPr>
           <a:xfrm>
-            <a:off x="5161330" y="2340864"/>
-            <a:ext cx="915771" cy="457200"/>
+            <a:off x="5288432" y="2249424"/>
+            <a:ext cx="1106424" cy="420624"/>
           </a:xfrm>
           <a:prstGeom prst="rect">
             <a:avLst/>
@@ -21347,13 +21372,13 @@
               </a:spcAft>
             </a:pPr>
             <a:r>
-              <a:rPr sz="1150" b="0">
-                <a:solidFill>
-                  <a:srgbClr val="0F172A"/>
-                </a:solidFill>
-                <a:latin typeface="Inter"/>
-              </a:rPr>
-              <a:t>~1.6 MB</a:t>
+              <a:rPr sz="1100" b="0">
+                <a:solidFill>
+                  <a:srgbClr val="475569"/>
+                </a:solidFill>
+                <a:latin typeface="Inter"/>
+              </a:rPr>
+              <a:t>0.419 ms</a:t>
             </a:r>
           </a:p>
         </p:txBody>
@@ -21366,8 +21391,8 @@
         </p:nvSpPr>
         <p:spPr>
           <a:xfrm>
-            <a:off x="6241694" y="2340864"/>
-            <a:ext cx="915771" cy="457200"/>
+            <a:off x="6559448" y="2249424"/>
+            <a:ext cx="1042873" cy="420624"/>
           </a:xfrm>
           <a:prstGeom prst="rect">
             <a:avLst/>
@@ -21389,13 +21414,13 @@
               </a:spcAft>
             </a:pPr>
             <a:r>
-              <a:rPr sz="1150" b="0">
-                <a:solidFill>
-                  <a:srgbClr val="B45309"/>
-                </a:solidFill>
-                <a:latin typeface="Inter"/>
-              </a:rPr>
-              <a:t>Marginal</a:t>
+              <a:rPr sz="1100" b="0">
+                <a:solidFill>
+                  <a:srgbClr val="475569"/>
+                </a:solidFill>
+                <a:latin typeface="Inter"/>
+              </a:rPr>
+              <a:t>0.31 MB</a:t>
             </a:r>
           </a:p>
         </p:txBody>
@@ -21408,8 +21433,8 @@
         </p:nvSpPr>
         <p:spPr>
           <a:xfrm>
-            <a:off x="7322058" y="2340864"/>
-            <a:ext cx="1360627" cy="457200"/>
+            <a:off x="7766913" y="2249424"/>
+            <a:ext cx="852220" cy="420624"/>
           </a:xfrm>
           <a:prstGeom prst="rect">
             <a:avLst/>
@@ -21431,13 +21456,13 @@
               </a:spcAft>
             </a:pPr>
             <a:r>
-              <a:rPr sz="1150" b="0">
-                <a:solidFill>
-                  <a:srgbClr val="B91C1C"/>
-                </a:solidFill>
-                <a:latin typeface="Inter"/>
-              </a:rPr>
-              <a:t>No</a:t>
+              <a:rPr sz="1100" b="0">
+                <a:solidFill>
+                  <a:srgbClr val="B45309"/>
+                </a:solidFill>
+                <a:latin typeface="Inter"/>
+              </a:rPr>
+              <a:t>Warn</a:t>
             </a:r>
           </a:p>
         </p:txBody>
@@ -21450,8 +21475,8 @@
         </p:nvSpPr>
         <p:spPr>
           <a:xfrm>
-            <a:off x="8847277" y="2340864"/>
-            <a:ext cx="2695194" cy="457200"/>
+            <a:off x="8783726" y="2249424"/>
+            <a:ext cx="2758744" cy="420624"/>
           </a:xfrm>
           <a:prstGeom prst="rect">
             <a:avLst/>
@@ -21473,13 +21498,13 @@
               </a:spcAft>
             </a:pPr>
             <a:r>
-              <a:rPr sz="1150" b="0">
-                <a:solidFill>
-                  <a:srgbClr val="0F172A"/>
-                </a:solidFill>
-                <a:latin typeface="Inter"/>
-              </a:rPr>
-              <a:t>Needs sequence buffer</a:t>
+              <a:rPr sz="1100" b="0">
+                <a:solidFill>
+                  <a:srgbClr val="B45309"/>
+                </a:solidFill>
+                <a:latin typeface="Inter"/>
+              </a:rPr>
+              <a:t>Best accuracy; 60-row warm-up</a:t>
             </a:r>
           </a:p>
         </p:txBody>
@@ -21492,7 +21517,7 @@
         </p:nvSpPr>
         <p:spPr>
           <a:xfrm>
-            <a:off x="566928" y="3255264"/>
+            <a:off x="566928" y="3090672"/>
             <a:ext cx="11057839" cy="10972"/>
           </a:xfrm>
           <a:prstGeom prst="rect">
@@ -21534,8 +21559,8 @@
         </p:nvSpPr>
         <p:spPr>
           <a:xfrm>
-            <a:off x="649224" y="2798064"/>
-            <a:ext cx="1805482" cy="457200"/>
+            <a:off x="649224" y="2670048"/>
+            <a:ext cx="1869033" cy="420624"/>
           </a:xfrm>
           <a:prstGeom prst="rect">
             <a:avLst/>
@@ -21557,7 +21582,7 @@
               </a:spcAft>
             </a:pPr>
             <a:r>
-              <a:rPr sz="1150" b="0">
+              <a:rPr sz="1100" b="0">
                 <a:solidFill>
                   <a:srgbClr val="0F172A"/>
                 </a:solidFill>
@@ -21576,8 +21601,8 @@
         </p:nvSpPr>
         <p:spPr>
           <a:xfrm>
-            <a:off x="2619298" y="2798064"/>
-            <a:ext cx="1106424" cy="457200"/>
+            <a:off x="2682849" y="2670048"/>
+            <a:ext cx="1169974" cy="420624"/>
           </a:xfrm>
           <a:prstGeom prst="rect">
             <a:avLst/>
@@ -21599,13 +21624,13 @@
               </a:spcAft>
             </a:pPr>
             <a:r>
-              <a:rPr sz="1150" b="0">
-                <a:solidFill>
-                  <a:srgbClr val="475569"/>
-                </a:solidFill>
-                <a:latin typeface="Inter"/>
-              </a:rPr>
-              <a:t>—</a:t>
+              <a:rPr sz="1100" b="0">
+                <a:solidFill>
+                  <a:srgbClr val="0F172A"/>
+                </a:solidFill>
+                <a:latin typeface="Inter"/>
+              </a:rPr>
+              <a:t>87.03%</a:t>
             </a:r>
           </a:p>
         </p:txBody>
@@ -21618,8 +21643,8 @@
         </p:nvSpPr>
         <p:spPr>
           <a:xfrm>
-            <a:off x="3890314" y="2798064"/>
-            <a:ext cx="1106424" cy="457200"/>
+            <a:off x="4017416" y="2670048"/>
+            <a:ext cx="1106424" cy="420624"/>
           </a:xfrm>
           <a:prstGeom prst="rect">
             <a:avLst/>
@@ -21641,13 +21666,13 @@
               </a:spcAft>
             </a:pPr>
             <a:r>
-              <a:rPr sz="1150" b="0">
+              <a:rPr sz="1100" b="0">
                 <a:solidFill>
                   <a:srgbClr val="475569"/>
                 </a:solidFill>
                 <a:latin typeface="Inter"/>
               </a:rPr>
-              <a:t>—</a:t>
+              <a:t>0.776</a:t>
             </a:r>
           </a:p>
         </p:txBody>
@@ -21660,8 +21685,8 @@
         </p:nvSpPr>
         <p:spPr>
           <a:xfrm>
-            <a:off x="5161330" y="2798064"/>
-            <a:ext cx="915771" cy="457200"/>
+            <a:off x="5288432" y="2670048"/>
+            <a:ext cx="1106424" cy="420624"/>
           </a:xfrm>
           <a:prstGeom prst="rect">
             <a:avLst/>
@@ -21683,13 +21708,13 @@
               </a:spcAft>
             </a:pPr>
             <a:r>
-              <a:rPr sz="1150" b="0">
+              <a:rPr sz="1100" b="0">
                 <a:solidFill>
                   <a:srgbClr val="475569"/>
                 </a:solidFill>
                 <a:latin typeface="Inter"/>
               </a:rPr>
-              <a:t>—</a:t>
+              <a:t>0.532 ms</a:t>
             </a:r>
           </a:p>
         </p:txBody>
@@ -21702,8 +21727,8 @@
         </p:nvSpPr>
         <p:spPr>
           <a:xfrm>
-            <a:off x="6241694" y="2798064"/>
-            <a:ext cx="915771" cy="457200"/>
+            <a:off x="6559448" y="2670048"/>
+            <a:ext cx="1042873" cy="420624"/>
           </a:xfrm>
           <a:prstGeom prst="rect">
             <a:avLst/>
@@ -21725,13 +21750,13 @@
               </a:spcAft>
             </a:pPr>
             <a:r>
-              <a:rPr sz="1150" b="0">
-                <a:solidFill>
-                  <a:srgbClr val="B45309"/>
-                </a:solidFill>
-                <a:latin typeface="Inter"/>
-              </a:rPr>
-              <a:t>Marginal</a:t>
+              <a:rPr sz="1100" b="0">
+                <a:solidFill>
+                  <a:srgbClr val="475569"/>
+                </a:solidFill>
+                <a:latin typeface="Inter"/>
+              </a:rPr>
+              <a:t>0.28 MB</a:t>
             </a:r>
           </a:p>
         </p:txBody>
@@ -21744,8 +21769,8 @@
         </p:nvSpPr>
         <p:spPr>
           <a:xfrm>
-            <a:off x="7322058" y="2798064"/>
-            <a:ext cx="1360627" cy="457200"/>
+            <a:off x="7766913" y="2670048"/>
+            <a:ext cx="852220" cy="420624"/>
           </a:xfrm>
           <a:prstGeom prst="rect">
             <a:avLst/>
@@ -21767,13 +21792,13 @@
               </a:spcAft>
             </a:pPr>
             <a:r>
-              <a:rPr sz="1150" b="0">
-                <a:solidFill>
-                  <a:srgbClr val="B91C1C"/>
-                </a:solidFill>
-                <a:latin typeface="Inter"/>
-              </a:rPr>
-              <a:t>No</a:t>
+              <a:rPr sz="1100" b="0">
+                <a:solidFill>
+                  <a:srgbClr val="B45309"/>
+                </a:solidFill>
+                <a:latin typeface="Inter"/>
+              </a:rPr>
+              <a:t>Warn</a:t>
             </a:r>
           </a:p>
         </p:txBody>
@@ -21786,8 +21811,8 @@
         </p:nvSpPr>
         <p:spPr>
           <a:xfrm>
-            <a:off x="8847277" y="2798064"/>
-            <a:ext cx="2695194" cy="457200"/>
+            <a:off x="8783726" y="2670048"/>
+            <a:ext cx="2758744" cy="420624"/>
           </a:xfrm>
           <a:prstGeom prst="rect">
             <a:avLst/>
@@ -21809,13 +21834,13 @@
               </a:spcAft>
             </a:pPr>
             <a:r>
-              <a:rPr sz="1150" b="0">
-                <a:solidFill>
-                  <a:srgbClr val="0F172A"/>
-                </a:solidFill>
-                <a:latin typeface="Inter"/>
-              </a:rPr>
-              <a:t>Sequential, hard to batch</a:t>
+              <a:rPr sz="1100" b="0">
+                <a:solidFill>
+                  <a:srgbClr val="475569"/>
+                </a:solidFill>
+                <a:latin typeface="Inter"/>
+              </a:rPr>
+              <a:t>Sequential, weakest F1</a:t>
             </a:r>
           </a:p>
         </p:txBody>
@@ -21828,7 +21853,7 @@
         </p:nvSpPr>
         <p:spPr>
           <a:xfrm>
-            <a:off x="566928" y="3712464"/>
+            <a:off x="566928" y="3511296"/>
             <a:ext cx="11057839" cy="10972"/>
           </a:xfrm>
           <a:prstGeom prst="rect">
@@ -21870,8 +21895,8 @@
         </p:nvSpPr>
         <p:spPr>
           <a:xfrm>
-            <a:off x="649224" y="3255264"/>
-            <a:ext cx="1805482" cy="457200"/>
+            <a:off x="649224" y="3090672"/>
+            <a:ext cx="1869033" cy="420624"/>
           </a:xfrm>
           <a:prstGeom prst="rect">
             <a:avLst/>
@@ -21893,7 +21918,7 @@
               </a:spcAft>
             </a:pPr>
             <a:r>
-              <a:rPr sz="1150" b="0">
+              <a:rPr sz="1100" b="0">
                 <a:solidFill>
                   <a:srgbClr val="0F172A"/>
                 </a:solidFill>
@@ -21912,8 +21937,8 @@
         </p:nvSpPr>
         <p:spPr>
           <a:xfrm>
-            <a:off x="2619298" y="3255264"/>
-            <a:ext cx="1106424" cy="457200"/>
+            <a:off x="2682849" y="3090672"/>
+            <a:ext cx="1169974" cy="420624"/>
           </a:xfrm>
           <a:prstGeom prst="rect">
             <a:avLst/>
@@ -21935,13 +21960,13 @@
               </a:spcAft>
             </a:pPr>
             <a:r>
-              <a:rPr sz="1150" b="0">
-                <a:solidFill>
-                  <a:srgbClr val="475569"/>
-                </a:solidFill>
-                <a:latin typeface="Inter"/>
-              </a:rPr>
-              <a:t>—</a:t>
+              <a:rPr sz="1100" b="0">
+                <a:solidFill>
+                  <a:srgbClr val="0F172A"/>
+                </a:solidFill>
+                <a:latin typeface="Inter"/>
+              </a:rPr>
+              <a:t>89.37%</a:t>
             </a:r>
           </a:p>
         </p:txBody>
@@ -21954,8 +21979,8 @@
         </p:nvSpPr>
         <p:spPr>
           <a:xfrm>
-            <a:off x="3890314" y="3255264"/>
-            <a:ext cx="1106424" cy="457200"/>
+            <a:off x="4017416" y="3090672"/>
+            <a:ext cx="1106424" cy="420624"/>
           </a:xfrm>
           <a:prstGeom prst="rect">
             <a:avLst/>
@@ -21977,13 +22002,13 @@
               </a:spcAft>
             </a:pPr>
             <a:r>
-              <a:rPr sz="1150" b="0">
+              <a:rPr sz="1100" b="0">
                 <a:solidFill>
                   <a:srgbClr val="475569"/>
                 </a:solidFill>
                 <a:latin typeface="Inter"/>
               </a:rPr>
-              <a:t>—</a:t>
+              <a:t>0.824</a:t>
             </a:r>
           </a:p>
         </p:txBody>
@@ -21996,8 +22021,8 @@
         </p:nvSpPr>
         <p:spPr>
           <a:xfrm>
-            <a:off x="5161330" y="3255264"/>
-            <a:ext cx="915771" cy="457200"/>
+            <a:off x="5288432" y="3090672"/>
+            <a:ext cx="1106424" cy="420624"/>
           </a:xfrm>
           <a:prstGeom prst="rect">
             <a:avLst/>
@@ -22019,13 +22044,13 @@
               </a:spcAft>
             </a:pPr>
             <a:r>
-              <a:rPr sz="1150" b="0">
+              <a:rPr sz="1100" b="0">
                 <a:solidFill>
                   <a:srgbClr val="475569"/>
                 </a:solidFill>
                 <a:latin typeface="Inter"/>
               </a:rPr>
-              <a:t>—</a:t>
+              <a:t>33.770 ms</a:t>
             </a:r>
           </a:p>
         </p:txBody>
@@ -22038,8 +22063,8 @@
         </p:nvSpPr>
         <p:spPr>
           <a:xfrm>
-            <a:off x="6241694" y="3255264"/>
-            <a:ext cx="915771" cy="457200"/>
+            <a:off x="6559448" y="3090672"/>
+            <a:ext cx="1042873" cy="420624"/>
           </a:xfrm>
           <a:prstGeom prst="rect">
             <a:avLst/>
@@ -22061,13 +22086,13 @@
               </a:spcAft>
             </a:pPr>
             <a:r>
-              <a:rPr sz="1150" b="0">
-                <a:solidFill>
-                  <a:srgbClr val="0E7490"/>
-                </a:solidFill>
-                <a:latin typeface="Inter"/>
-              </a:rPr>
-              <a:t>Yes</a:t>
+              <a:rPr sz="1100" b="0">
+                <a:solidFill>
+                  <a:srgbClr val="475569"/>
+                </a:solidFill>
+                <a:latin typeface="Inter"/>
+              </a:rPr>
+              <a:t>176.41 MB</a:t>
             </a:r>
           </a:p>
         </p:txBody>
@@ -22080,8 +22105,8 @@
         </p:nvSpPr>
         <p:spPr>
           <a:xfrm>
-            <a:off x="7322058" y="3255264"/>
-            <a:ext cx="1360627" cy="457200"/>
+            <a:off x="7766913" y="3090672"/>
+            <a:ext cx="852220" cy="420624"/>
           </a:xfrm>
           <a:prstGeom prst="rect">
             <a:avLst/>
@@ -22103,13 +22128,13 @@
               </a:spcAft>
             </a:pPr>
             <a:r>
-              <a:rPr sz="1150" b="0">
-                <a:solidFill>
-                  <a:srgbClr val="0E7490"/>
-                </a:solidFill>
-                <a:latin typeface="Inter"/>
-              </a:rPr>
-              <a:t>Yes</a:t>
+              <a:rPr sz="1100" b="0">
+                <a:solidFill>
+                  <a:srgbClr val="B91C1C"/>
+                </a:solidFill>
+                <a:latin typeface="Inter"/>
+              </a:rPr>
+              <a:t>No</a:t>
             </a:r>
           </a:p>
         </p:txBody>
@@ -22122,8 +22147,8 @@
         </p:nvSpPr>
         <p:spPr>
           <a:xfrm>
-            <a:off x="8847277" y="3255264"/>
-            <a:ext cx="2695194" cy="457200"/>
+            <a:off x="8783726" y="3090672"/>
+            <a:ext cx="2758744" cy="420624"/>
           </a:xfrm>
           <a:prstGeom prst="rect">
             <a:avLst/>
@@ -22145,13 +22170,13 @@
               </a:spcAft>
             </a:pPr>
             <a:r>
-              <a:rPr sz="1150" b="0">
-                <a:solidFill>
-                  <a:srgbClr val="0F172A"/>
-                </a:solidFill>
-                <a:latin typeface="Inter"/>
-              </a:rPr>
-              <a:t>Larger for same accuracy</a:t>
+              <a:rPr sz="1100" b="0">
+                <a:solidFill>
+                  <a:srgbClr val="B91C1C"/>
+                </a:solidFill>
+                <a:latin typeface="Inter"/>
+              </a:rPr>
+              <a:t>176 MB, 73× the latency</a:t>
             </a:r>
           </a:p>
         </p:txBody>
@@ -22164,7 +22189,7 @@
         </p:nvSpPr>
         <p:spPr>
           <a:xfrm>
-            <a:off x="566928" y="4169664"/>
+            <a:off x="566928" y="3931920"/>
             <a:ext cx="11057839" cy="10972"/>
           </a:xfrm>
           <a:prstGeom prst="rect">
@@ -22206,8 +22231,8 @@
         </p:nvSpPr>
         <p:spPr>
           <a:xfrm>
-            <a:off x="649224" y="3712464"/>
-            <a:ext cx="1805482" cy="457200"/>
+            <a:off x="649224" y="3511296"/>
+            <a:ext cx="1869033" cy="420624"/>
           </a:xfrm>
           <a:prstGeom prst="rect">
             <a:avLst/>
@@ -22229,13 +22254,13 @@
               </a:spcAft>
             </a:pPr>
             <a:r>
-              <a:rPr sz="1150" b="0">
+              <a:rPr sz="1100" b="0">
                 <a:solidFill>
                   <a:srgbClr val="0F172A"/>
                 </a:solidFill>
                 <a:latin typeface="Inter"/>
               </a:rPr>
-              <a:t>SVM</a:t>
+              <a:t>SVM (RBF)</a:t>
             </a:r>
           </a:p>
         </p:txBody>
@@ -22248,8 +22273,8 @@
         </p:nvSpPr>
         <p:spPr>
           <a:xfrm>
-            <a:off x="2619298" y="3712464"/>
-            <a:ext cx="1106424" cy="457200"/>
+            <a:off x="2682849" y="3511296"/>
+            <a:ext cx="1169974" cy="420624"/>
           </a:xfrm>
           <a:prstGeom prst="rect">
             <a:avLst/>
@@ -22271,13 +22296,13 @@
               </a:spcAft>
             </a:pPr>
             <a:r>
-              <a:rPr sz="1150" b="0">
-                <a:solidFill>
-                  <a:srgbClr val="475569"/>
-                </a:solidFill>
-                <a:latin typeface="Inter"/>
-              </a:rPr>
-              <a:t>—</a:t>
+              <a:rPr sz="1100" b="0">
+                <a:solidFill>
+                  <a:srgbClr val="0F172A"/>
+                </a:solidFill>
+                <a:latin typeface="Inter"/>
+              </a:rPr>
+              <a:t>88.53%</a:t>
             </a:r>
           </a:p>
         </p:txBody>
@@ -22290,8 +22315,8 @@
         </p:nvSpPr>
         <p:spPr>
           <a:xfrm>
-            <a:off x="3890314" y="3712464"/>
-            <a:ext cx="1106424" cy="457200"/>
+            <a:off x="4017416" y="3511296"/>
+            <a:ext cx="1106424" cy="420624"/>
           </a:xfrm>
           <a:prstGeom prst="rect">
             <a:avLst/>
@@ -22313,13 +22338,13 @@
               </a:spcAft>
             </a:pPr>
             <a:r>
-              <a:rPr sz="1150" b="0">
+              <a:rPr sz="1100" b="0">
                 <a:solidFill>
                   <a:srgbClr val="475569"/>
                 </a:solidFill>
                 <a:latin typeface="Inter"/>
               </a:rPr>
-              <a:t>—</a:t>
+              <a:t>0.807</a:t>
             </a:r>
           </a:p>
         </p:txBody>
@@ -22332,8 +22357,8 @@
         </p:nvSpPr>
         <p:spPr>
           <a:xfrm>
-            <a:off x="5161330" y="3712464"/>
-            <a:ext cx="915771" cy="457200"/>
+            <a:off x="5288432" y="3511296"/>
+            <a:ext cx="1106424" cy="420624"/>
           </a:xfrm>
           <a:prstGeom prst="rect">
             <a:avLst/>
@@ -22355,13 +22380,13 @@
               </a:spcAft>
             </a:pPr>
             <a:r>
-              <a:rPr sz="1150" b="0">
+              <a:rPr sz="1100" b="0">
                 <a:solidFill>
                   <a:srgbClr val="475569"/>
                 </a:solidFill>
                 <a:latin typeface="Inter"/>
               </a:rPr>
-              <a:t>—</a:t>
+              <a:t>0.568 ms</a:t>
             </a:r>
           </a:p>
         </p:txBody>
@@ -22374,8 +22399,8 @@
         </p:nvSpPr>
         <p:spPr>
           <a:xfrm>
-            <a:off x="6241694" y="3712464"/>
-            <a:ext cx="915771" cy="457200"/>
+            <a:off x="6559448" y="3511296"/>
+            <a:ext cx="1042873" cy="420624"/>
           </a:xfrm>
           <a:prstGeom prst="rect">
             <a:avLst/>
@@ -22397,13 +22422,13 @@
               </a:spcAft>
             </a:pPr>
             <a:r>
-              <a:rPr sz="1150" b="0">
-                <a:solidFill>
-                  <a:srgbClr val="0E7490"/>
-                </a:solidFill>
-                <a:latin typeface="Inter"/>
-              </a:rPr>
-              <a:t>Yes</a:t>
+              <a:rPr sz="1100" b="0">
+                <a:solidFill>
+                  <a:srgbClr val="475569"/>
+                </a:solidFill>
+                <a:latin typeface="Inter"/>
+              </a:rPr>
+              <a:t>2.82 MB</a:t>
             </a:r>
           </a:p>
         </p:txBody>
@@ -22416,8 +22441,8 @@
         </p:nvSpPr>
         <p:spPr>
           <a:xfrm>
-            <a:off x="7322058" y="3712464"/>
-            <a:ext cx="1360627" cy="457200"/>
+            <a:off x="7766913" y="3511296"/>
+            <a:ext cx="852220" cy="420624"/>
           </a:xfrm>
           <a:prstGeom prst="rect">
             <a:avLst/>
@@ -22439,13 +22464,13 @@
               </a:spcAft>
             </a:pPr>
             <a:r>
-              <a:rPr sz="1150" b="0">
-                <a:solidFill>
-                  <a:srgbClr val="B45309"/>
-                </a:solidFill>
-                <a:latin typeface="Inter"/>
-              </a:rPr>
-              <a:t>Partly</a:t>
+              <a:rPr sz="1100" b="0">
+                <a:solidFill>
+                  <a:srgbClr val="0E7490"/>
+                </a:solidFill>
+                <a:latin typeface="Inter"/>
+              </a:rPr>
+              <a:t>Yes</a:t>
             </a:r>
           </a:p>
         </p:txBody>
@@ -22458,8 +22483,8 @@
         </p:nvSpPr>
         <p:spPr>
           <a:xfrm>
-            <a:off x="8847277" y="3712464"/>
-            <a:ext cx="2695194" cy="457200"/>
+            <a:off x="8783726" y="3511296"/>
+            <a:ext cx="2758744" cy="420624"/>
           </a:xfrm>
           <a:prstGeom prst="rect">
             <a:avLst/>
@@ -22481,13 +22506,13 @@
               </a:spcAft>
             </a:pPr>
             <a:r>
-              <a:rPr sz="1150" b="0">
-                <a:solidFill>
-                  <a:srgbClr val="0F172A"/>
-                </a:solidFill>
-                <a:latin typeface="Inter"/>
-              </a:rPr>
-              <a:t>Poor on 51-feature tabular</a:t>
+              <a:rPr sz="1100" b="0">
+                <a:solidFill>
+                  <a:srgbClr val="475569"/>
+                </a:solidFill>
+                <a:latin typeface="Inter"/>
+              </a:rPr>
+              <a:t>Would not scale past 20k rows</a:t>
             </a:r>
           </a:p>
         </p:txBody>
@@ -22500,7 +22525,7 @@
         </p:nvSpPr>
         <p:spPr>
           <a:xfrm>
-            <a:off x="566928" y="4626864"/>
+            <a:off x="566928" y="4352544"/>
             <a:ext cx="11057839" cy="10972"/>
           </a:xfrm>
           <a:prstGeom prst="rect">
@@ -22542,8 +22567,8 @@
         </p:nvSpPr>
         <p:spPr>
           <a:xfrm>
-            <a:off x="649224" y="4169664"/>
-            <a:ext cx="1805482" cy="457200"/>
+            <a:off x="649224" y="3931920"/>
+            <a:ext cx="1869033" cy="420624"/>
           </a:xfrm>
           <a:prstGeom prst="rect">
             <a:avLst/>
@@ -22565,7 +22590,7 @@
               </a:spcAft>
             </a:pPr>
             <a:r>
-              <a:rPr sz="1150" b="0">
+              <a:rPr sz="1100" b="0">
                 <a:solidFill>
                   <a:srgbClr val="0F172A"/>
                 </a:solidFill>
@@ -22584,8 +22609,8 @@
         </p:nvSpPr>
         <p:spPr>
           <a:xfrm>
-            <a:off x="2619298" y="4169664"/>
-            <a:ext cx="1106424" cy="457200"/>
+            <a:off x="2682849" y="3931920"/>
+            <a:ext cx="1169974" cy="420624"/>
           </a:xfrm>
           <a:prstGeom prst="rect">
             <a:avLst/>
@@ -22607,13 +22632,13 @@
               </a:spcAft>
             </a:pPr>
             <a:r>
-              <a:rPr sz="1150" b="0">
-                <a:solidFill>
-                  <a:srgbClr val="475569"/>
-                </a:solidFill>
-                <a:latin typeface="Inter"/>
-              </a:rPr>
-              <a:t>—</a:t>
+              <a:rPr sz="1100" b="0">
+                <a:solidFill>
+                  <a:srgbClr val="0F172A"/>
+                </a:solidFill>
+                <a:latin typeface="Inter"/>
+              </a:rPr>
+              <a:t>22.09%</a:t>
             </a:r>
           </a:p>
         </p:txBody>
@@ -22626,8 +22651,8 @@
         </p:nvSpPr>
         <p:spPr>
           <a:xfrm>
-            <a:off x="3890314" y="4169664"/>
-            <a:ext cx="1106424" cy="457200"/>
+            <a:off x="4017416" y="3931920"/>
+            <a:ext cx="1106424" cy="420624"/>
           </a:xfrm>
           <a:prstGeom prst="rect">
             <a:avLst/>
@@ -22649,13 +22674,13 @@
               </a:spcAft>
             </a:pPr>
             <a:r>
-              <a:rPr sz="1150" b="0">
+              <a:rPr sz="1100" b="0">
                 <a:solidFill>
                   <a:srgbClr val="475569"/>
                 </a:solidFill>
                 <a:latin typeface="Inter"/>
               </a:rPr>
-              <a:t>—</a:t>
+              <a:t>0.224</a:t>
             </a:r>
           </a:p>
         </p:txBody>
@@ -22668,8 +22693,8 @@
         </p:nvSpPr>
         <p:spPr>
           <a:xfrm>
-            <a:off x="5161330" y="4169664"/>
-            <a:ext cx="915771" cy="457200"/>
+            <a:off x="5288432" y="3931920"/>
+            <a:ext cx="1106424" cy="420624"/>
           </a:xfrm>
           <a:prstGeom prst="rect">
             <a:avLst/>
@@ -22691,13 +22716,13 @@
               </a:spcAft>
             </a:pPr>
             <a:r>
-              <a:rPr sz="1150" b="0">
-                <a:solidFill>
-                  <a:srgbClr val="0F172A"/>
-                </a:solidFill>
-                <a:latin typeface="Inter"/>
-              </a:rPr>
-              <a:t>trivial</a:t>
+              <a:rPr sz="1100" b="0">
+                <a:solidFill>
+                  <a:srgbClr val="475569"/>
+                </a:solidFill>
+                <a:latin typeface="Inter"/>
+              </a:rPr>
+              <a:t>5 µs</a:t>
             </a:r>
           </a:p>
         </p:txBody>
@@ -22710,8 +22735,8 @@
         </p:nvSpPr>
         <p:spPr>
           <a:xfrm>
-            <a:off x="6241694" y="4169664"/>
-            <a:ext cx="915771" cy="457200"/>
+            <a:off x="6559448" y="3931920"/>
+            <a:ext cx="1042873" cy="420624"/>
           </a:xfrm>
           <a:prstGeom prst="rect">
             <a:avLst/>
@@ -22733,13 +22758,13 @@
               </a:spcAft>
             </a:pPr>
             <a:r>
-              <a:rPr sz="1150" b="0">
-                <a:solidFill>
-                  <a:srgbClr val="0E7490"/>
-                </a:solidFill>
-                <a:latin typeface="Inter"/>
-              </a:rPr>
-              <a:t>Yes</a:t>
+              <a:rPr sz="1100" b="0">
+                <a:solidFill>
+                  <a:srgbClr val="475569"/>
+                </a:solidFill>
+                <a:latin typeface="Inter"/>
+              </a:rPr>
+              <a:t>~0 MB</a:t>
             </a:r>
           </a:p>
         </p:txBody>
@@ -22752,8 +22777,8 @@
         </p:nvSpPr>
         <p:spPr>
           <a:xfrm>
-            <a:off x="7322058" y="4169664"/>
-            <a:ext cx="1360627" cy="457200"/>
+            <a:off x="7766913" y="3931920"/>
+            <a:ext cx="852220" cy="420624"/>
           </a:xfrm>
           <a:prstGeom prst="rect">
             <a:avLst/>
@@ -22775,7 +22800,7 @@
               </a:spcAft>
             </a:pPr>
             <a:r>
-              <a:rPr sz="1150" b="0">
+              <a:rPr sz="1100" b="0">
                 <a:solidFill>
                   <a:srgbClr val="0E7490"/>
                 </a:solidFill>
@@ -22794,8 +22819,8 @@
         </p:nvSpPr>
         <p:spPr>
           <a:xfrm>
-            <a:off x="8847277" y="4169664"/>
-            <a:ext cx="2695194" cy="457200"/>
+            <a:off x="8783726" y="3931920"/>
+            <a:ext cx="2758744" cy="420624"/>
           </a:xfrm>
           <a:prstGeom prst="rect">
             <a:avLst/>
@@ -22817,104 +22842,20 @@
               </a:spcAft>
             </a:pPr>
             <a:r>
-              <a:rPr sz="1150" b="0">
+              <a:rPr sz="1100" b="0">
                 <a:solidFill>
                   <a:srgbClr val="B91C1C"/>
                 </a:solidFill>
                 <a:latin typeface="Inter"/>
               </a:rPr>
-              <a:t>Reacts, never predicts</a:t>
-            </a:r>
-          </a:p>
-        </p:txBody>
-      </p:sp>
-      <p:sp>
-        <p:nvSpPr>
-          <p:cNvPr id="63" name="TextBox 62"/>
-          <p:cNvSpPr txBox="1"/>
-          <p:nvPr/>
-        </p:nvSpPr>
-        <p:spPr>
-          <a:xfrm>
-            <a:off x="566928" y="4901184"/>
-            <a:ext cx="5577840" cy="310896"/>
-          </a:xfrm>
-          <a:prstGeom prst="rect">
-            <a:avLst/>
-          </a:prstGeom>
-          <a:noFill/>
-        </p:spPr>
-        <p:txBody>
-          <a:bodyPr wrap="square" anchor="t" lIns="0" rIns="0" tIns="0" bIns="0">
-            <a:spAutoFit/>
-          </a:bodyPr>
-          <a:lstStyle/>
-          <a:p>
-            <a:pPr algn="l">
-              <a:lnSpc>
-                <a:spcPct val="118000"/>
-              </a:lnSpc>
-              <a:spcAft>
-                <a:spcPts val="0"/>
-              </a:spcAft>
-            </a:pPr>
-            <a:r>
-              <a:rPr sz="1000" b="1">
-                <a:solidFill>
-                  <a:srgbClr val="0E7490"/>
-                </a:solidFill>
-                <a:latin typeface="Inter"/>
-              </a:rPr>
-              <a:t>WHAT DECIDED IT</a:t>
-            </a:r>
-          </a:p>
-        </p:txBody>
-      </p:sp>
-      <p:sp>
-        <p:nvSpPr>
-          <p:cNvPr id="64" name="TextBox 63"/>
-          <p:cNvSpPr txBox="1"/>
-          <p:nvPr/>
-        </p:nvSpPr>
-        <p:spPr>
-          <a:xfrm>
-            <a:off x="566928" y="5193792"/>
-            <a:ext cx="5577840" cy="822960"/>
-          </a:xfrm>
-          <a:prstGeom prst="rect">
-            <a:avLst/>
-          </a:prstGeom>
-          <a:noFill/>
-        </p:spPr>
-        <p:txBody>
-          <a:bodyPr wrap="square" anchor="t" lIns="0" rIns="0" tIns="0" bIns="0">
-            <a:spAutoFit/>
-          </a:bodyPr>
-          <a:lstStyle/>
-          <a:p>
-            <a:pPr algn="l">
-              <a:lnSpc>
-                <a:spcPct val="128000"/>
-              </a:lnSpc>
-              <a:spcAft>
-                <a:spcPts val="0"/>
-              </a:spcAft>
-            </a:pPr>
-            <a:r>
-              <a:rPr sz="1150" b="0">
-                <a:solidFill>
-                  <a:srgbClr val="475569"/>
-                </a:solidFill>
-                <a:latin typeface="Inter"/>
-              </a:rPr>
-              <a:t>Fifty-one engineered tabular features, a hard latency budget on the Pi and a reviewer who has to be able to ask why — gradient-boosted trees win all three. “—” means not measured here: we instrumented the model we shipped.</a:t>
+              <a:t>0% recall on Weak Cell</a:t>
             </a:r>
           </a:p>
         </p:txBody>
       </p:sp>
       <p:pic>
         <p:nvPicPr>
-          <p:cNvPr id="65" name="Picture 64" descr="fig_model_performance.png"/>
+          <p:cNvPr id="63" name="Picture 62" descr="fig_model_benchmark.png"/>
           <p:cNvPicPr>
             <a:picLocks noChangeAspect="1"/>
           </p:cNvPicPr>
@@ -22928,14 +22869,56 @@
         </p:blipFill>
         <p:spPr>
           <a:xfrm>
-            <a:off x="7875454" y="4773168"/>
-            <a:ext cx="2338666" cy="1389888"/>
+            <a:off x="4739618" y="4480559"/>
+            <a:ext cx="2712457" cy="1426463"/>
           </a:xfrm>
           <a:prstGeom prst="rect">
             <a:avLst/>
           </a:prstGeom>
         </p:spPr>
       </p:pic>
+      <p:sp>
+        <p:nvSpPr>
+          <p:cNvPr id="64" name="TextBox 63"/>
+          <p:cNvSpPr txBox="1"/>
+          <p:nvPr/>
+        </p:nvSpPr>
+        <p:spPr>
+          <a:xfrm>
+            <a:off x="566928" y="5998464"/>
+            <a:ext cx="11057839" cy="384048"/>
+          </a:xfrm>
+          <a:prstGeom prst="rect">
+            <a:avLst/>
+          </a:prstGeom>
+          <a:noFill/>
+        </p:spPr>
+        <p:txBody>
+          <a:bodyPr wrap="square" anchor="t" lIns="0" rIns="0" tIns="0" bIns="0">
+            <a:spAutoFit/>
+          </a:bodyPr>
+          <a:lstStyle/>
+          <a:p>
+            <a:pPr algn="l">
+              <a:lnSpc>
+                <a:spcPct val="124000"/>
+              </a:lnSpc>
+              <a:spcAft>
+                <a:spcPts val="0"/>
+              </a:spcAft>
+            </a:pPr>
+            <a:r>
+              <a:rPr sz="819" b="0">
+                <a:solidFill>
+                  <a:srgbClr val="475569"/>
+                </a:solidFill>
+                <a:latin typeface="Inter"/>
+              </a:rPr>
+              <a:t>All six trained and scored here on the identical 30,000-row held-out split with the same 51 features; latency is the median single-row prediction on a 4-core CPU, not a Pi 5. Sequence models additionally see a 60-row lookback. SVM trained on a stratified 20k subsample — full-data RBF did not converge in usable time, which is part of the verdict.</a:t>
+            </a:r>
+          </a:p>
+        </p:txBody>
+      </p:sp>
     </p:spTree>
   </p:cSld>
   <p:clrMapOvr>

--- a/AI_PBMS_Full_Deck.pptx
+++ b/AI_PBMS_Full_Deck.pptx
@@ -2461,57 +2461,57 @@
           </a:p>
           <a:p>
             <a:r>
-              <a:t>split and measured them. The Transformer is actually the most accurate at 95.11</a:t>
-            </a:r>
-          </a:p>
-          <a:p>
-            <a:r>
-              <a:t>percent, a point ahead of XGBoost. We still shipped XGBoost, and here is the</a:t>
-            </a:r>
-          </a:p>
-          <a:p>
-            <a:r>
-              <a:t>honest reason: the Transformer needs a sixty-row lookback, which at one hertz</a:t>
-            </a:r>
-          </a:p>
-          <a:p>
-            <a:r>
-              <a:t>means a full minute of buffered data before it can say anything, plus a torch</a:t>
-            </a:r>
-          </a:p>
-          <a:p>
-            <a:r>
-              <a:t>runtime on the Pi and no feature attribution an engineer can interrogate.</a:t>
-            </a:r>
-          </a:p>
-          <a:p>
-            <a:r>
-              <a:t>XGBoost predicts from a single row, instantly, and tells you which features</a:t>
-            </a:r>
-          </a:p>
-          <a:p>
-            <a:r>
-              <a:t>drove it. Random Forest is 176 megabytes and seventy-three times slower for</a:t>
-            </a:r>
-          </a:p>
-          <a:p>
-            <a:r>
-              <a:t>worse accuracy. And look at the bottom row: a conventional rule-based BMS scores</a:t>
-            </a:r>
-          </a:p>
-          <a:p>
-            <a:r>
-              <a:t>twenty-two percent — because cell one's chronic gap puts eighty-four percent of</a:t>
-            </a:r>
-          </a:p>
-          <a:p>
-            <a:r>
-              <a:t>healthy rows over the imbalance threshold, so it false-alarms constantly and</a:t>
-            </a:r>
-          </a:p>
-          <a:p>
-            <a:r>
-              <a:t>still never detects a weak cell.</a:t>
+              <a:t>split and measured them. Two rows matter. The bottom one: a conventional</a:t>
+            </a:r>
+          </a:p>
+          <a:p>
+            <a:r>
+              <a:t>rule-based BMS scores twenty-two percent, because cell one’s chronic gap puts</a:t>
+            </a:r>
+          </a:p>
+          <a:p>
+            <a:r>
+              <a:t>eighty-four percent of healthy rows over the imbalance threshold. It false-alarms</a:t>
+            </a:r>
+          </a:p>
+          <a:p>
+            <a:r>
+              <a:t>constantly and never detects a weak cell at all. And the second row: the</a:t>
+            </a:r>
+          </a:p>
+          <a:p>
+            <a:r>
+              <a:t>Transformer edges us by under a point — but only because it is fed a sixty-row</a:t>
+            </a:r>
+          </a:p>
+          <a:p>
+            <a:r>
+              <a:t>window, sixty times the input per prediction. On our hardware that window is</a:t>
+            </a:r>
+          </a:p>
+          <a:p>
+            <a:r>
+              <a:t>disqualifying. At one hertz it is blind for a full minute after every restart,</a:t>
+            </a:r>
+          </a:p>
+          <a:p>
+            <a:r>
+              <a:t>its positional encoding pins the input at exactly sixty rows, torch is five times</a:t>
+            </a:r>
+          </a:p>
+          <a:p>
+            <a:r>
+              <a:t>the runtime footprint of xgboost on the Pi, and it gives no per-feature</a:t>
+            </a:r>
+          </a:p>
+          <a:p>
+            <a:r>
+              <a:t>attribution an engineer can audit. XGBoost predicts from a single row, instantly,</a:t>
+            </a:r>
+          </a:p>
+          <a:p>
+            <a:r>
+              <a:t>explains itself, and retrains from the browser. That is why it ships.</a:t>
             </a:r>
           </a:p>
         </p:txBody>
@@ -20324,7 +20324,7 @@
                 </a:solidFill>
                 <a:latin typeface="Inter"/>
               </a:rPr>
-              <a:t>We benchmarked all six on the same split</a:t>
+              <a:t>We benchmarked all six — XGBoost still ships</a:t>
             </a:r>
           </a:p>
         </p:txBody>
@@ -21504,7 +21504,7 @@
                 </a:solidFill>
                 <a:latin typeface="Inter"/>
               </a:rPr>
-              <a:t>Best accuracy; 60-row warm-up</a:t>
+              <a:t>Edges accuracy; 60-row buffer</a:t>
             </a:r>
           </a:p>
         </p:txBody>
@@ -22855,7 +22855,7 @@
       </p:sp>
       <p:pic>
         <p:nvPicPr>
-          <p:cNvPr id="63" name="Picture 62" descr="fig_model_benchmark.png"/>
+          <p:cNvPr id="63" name="Picture 62" descr="fig_deployment_tradeoff.png"/>
           <p:cNvPicPr>
             <a:picLocks noChangeAspect="1"/>
           </p:cNvPicPr>
@@ -22869,8 +22869,8 @@
         </p:blipFill>
         <p:spPr>
           <a:xfrm>
-            <a:off x="4739618" y="4480559"/>
-            <a:ext cx="2712457" cy="1426463"/>
+            <a:off x="4092368" y="4443983"/>
+            <a:ext cx="4006958" cy="1463040"/>
           </a:xfrm>
           <a:prstGeom prst="rect">
             <a:avLst/>
@@ -22885,8 +22885,8 @@
         </p:nvSpPr>
         <p:spPr>
           <a:xfrm>
-            <a:off x="566928" y="5998464"/>
-            <a:ext cx="11057839" cy="384048"/>
+            <a:off x="566928" y="5980176"/>
+            <a:ext cx="11057839" cy="402336"/>
           </a:xfrm>
           <a:prstGeom prst="rect">
             <a:avLst/>
@@ -22908,13 +22908,13 @@
               </a:spcAft>
             </a:pPr>
             <a:r>
-              <a:rPr sz="819" b="0">
+              <a:rPr sz="800" b="0">
                 <a:solidFill>
                   <a:srgbClr val="475569"/>
                 </a:solidFill>
                 <a:latin typeface="Inter"/>
               </a:rPr>
-              <a:t>All six trained and scored here on the identical 30,000-row held-out split with the same 51 features; latency is the median single-row prediction on a 4-core CPU, not a Pi 5. Sequence models additionally see a 60-row lookback. SVM trained on a stratified 20k subsample — full-data RBF did not converge in usable time, which is part of the verdict.</a:t>
+              <a:t>All six trained and scored on the identical 30,000-row held-out split with the same 51 features; latency is the median single-row prediction on a 4-core CPU, not a Pi 5. The Transformer additionally receives a 60-row lookback window — 60× the input per prediction — which is where its 0.92-point accuracy edge comes from, and also why it cannot run on our hardware. SVM trained on a stratified 20k subsample: full-data RBF did not converge.</a:t>
             </a:r>
           </a:p>
         </p:txBody>

--- a/AI_PBMS_Full_Deck.pptx
+++ b/AI_PBMS_Full_Deck.pptx
@@ -25,6 +25,7 @@
     <p:sldId id="273" r:id="rId25"/>
     <p:sldId id="274" r:id="rId26"/>
     <p:sldId id="275" r:id="rId27"/>
+    <p:sldId id="276" r:id="rId28"/>
   </p:sldIdLst>
   <p:sldSz cx="12191695" cy="6858000" type="screen4x3"/>
   <p:notesSz cx="6858000" cy="9144000"/>
@@ -1777,6 +1778,116 @@
           <a:p>
             <a:r>
               <a:t>from the repository — the figures, the model evaluation and this deck.</a:t>
+            </a:r>
+          </a:p>
+        </p:txBody>
+      </p:sp>
+      <p:sp>
+        <p:nvSpPr>
+          <p:cNvPr id="4" name="Slide Number Placeholder 3"/>
+          <p:cNvSpPr>
+            <a:spLocks noGrp="1"/>
+          </p:cNvSpPr>
+          <p:nvPr>
+            <p:ph type="sldNum" idx="5" sz="quarter"/>
+          </p:nvPr>
+        </p:nvSpPr>
+        <p:spPr/>
+      </p:sp>
+    </p:spTree>
+  </p:cSld>
+  <p:clrMapOvr>
+    <a:masterClrMapping/>
+  </p:clrMapOvr>
+</p:notes>
+</file>
+
+<file path=ppt/notesSlides/notesSlide21.xml><?xml version="1.0" encoding="utf-8"?>
+<p:notes xmlns:a="http://schemas.openxmlformats.org/drawingml/2006/main" xmlns:p="http://schemas.openxmlformats.org/presentationml/2006/main" xmlns:r="http://schemas.openxmlformats.org/officeDocument/2006/relationships">
+  <p:cSld>
+    <p:spTree>
+      <p:nvGrpSpPr>
+        <p:cNvPr id="1" name=""/>
+        <p:cNvGrpSpPr/>
+        <p:nvPr/>
+      </p:nvGrpSpPr>
+      <p:grpSpPr>
+        <a:xfrm>
+          <a:off x="0" y="0"/>
+          <a:ext cx="0" cy="0"/>
+          <a:chOff x="0" y="0"/>
+          <a:chExt cx="0" cy="0"/>
+        </a:xfrm>
+      </p:grpSpPr>
+      <p:sp>
+        <p:nvSpPr>
+          <p:cNvPr id="2" name="Slide Image Placeholder 1"/>
+          <p:cNvSpPr>
+            <a:spLocks noGrp="1"/>
+          </p:cNvSpPr>
+          <p:nvPr>
+            <p:ph type="sldImg" idx="2"/>
+          </p:nvPr>
+        </p:nvSpPr>
+        <p:spPr/>
+      </p:sp>
+      <p:sp>
+        <p:nvSpPr>
+          <p:cNvPr id="3" name="Notes Placeholder 2"/>
+          <p:cNvSpPr>
+            <a:spLocks noGrp="1"/>
+          </p:cNvSpPr>
+          <p:nvPr>
+            <p:ph type="body" idx="3" sz="quarter"/>
+          </p:nvPr>
+        </p:nvSpPr>
+        <p:spPr/>
+        <p:txBody>
+          <a:bodyPr/>
+          <a:lstStyle/>
+          <a:p>
+            <a:r>
+              <a:t>Five papers shaped the approach. The first four are the state-of-the-art we</a:t>
+            </a:r>
+          </a:p>
+          <a:p>
+            <a:r>
+              <a:t>benchmarked our thinking against for state-of-charge and remaining-useful-life</a:t>
+            </a:r>
+          </a:p>
+          <a:p>
+            <a:r>
+              <a:t>prediction — bimodal image encoding, single-cycle charging features, multidomain</a:t>
+            </a:r>
+          </a:p>
+          <a:p>
+            <a:r>
+              <a:t>features with CatBoost, and the CNN-BiLSTM-BiGRU attention stack. The fifth,</a:t>
+            </a:r>
+          </a:p>
+          <a:p>
+            <a:r>
+              <a:t>Yang, Xu and Peng in Electronics, is where our confidence-scoring and fault</a:t>
+            </a:r>
+          </a:p>
+          <a:p>
+            <a:r>
+              <a:t>grading framework comes from — that is the source of the three-tier abstain,</a:t>
+            </a:r>
+          </a:p>
+          <a:p>
+            <a:r>
+              <a:t>warn, alert structure on slide five. On the right are the primary sources: the</a:t>
+            </a:r>
+          </a:p>
+          <a:p>
+            <a:r>
+              <a:t>manufacturer datasheets the threshold matrix is parsed from, and the JBD</a:t>
+            </a:r>
+          </a:p>
+          <a:p>
+            <a:r>
+              <a:t>protocol spec the logger was written against. Happy to take questions.</a:t>
             </a:r>
           </a:p>
         </p:txBody>
@@ -15600,6 +15711,2358 @@
                 <a:latin typeface="Inter"/>
               </a:rPr>
               <a:t>Everything shown today is reproducible from this repository — figures, model and deck all rebuild from source.</a:t>
+            </a:r>
+          </a:p>
+        </p:txBody>
+      </p:sp>
+    </p:spTree>
+  </p:cSld>
+  <p:clrMapOvr>
+    <a:masterClrMapping/>
+  </p:clrMapOvr>
+</p:sld>
+</file>
+
+<file path=ppt/slides/slide21.xml><?xml version="1.0" encoding="utf-8"?>
+<p:sld xmlns:a="http://schemas.openxmlformats.org/drawingml/2006/main" xmlns:p="http://schemas.openxmlformats.org/presentationml/2006/main" xmlns:r="http://schemas.openxmlformats.org/officeDocument/2006/relationships">
+  <p:cSld>
+    <p:bg>
+      <p:bgPr>
+        <a:solidFill>
+          <a:srgbClr val="FFFFFF"/>
+        </a:solidFill>
+        <a:effectLst/>
+      </p:bgPr>
+    </p:bg>
+    <p:spTree>
+      <p:nvGrpSpPr>
+        <p:cNvPr id="1" name=""/>
+        <p:cNvGrpSpPr/>
+        <p:nvPr/>
+      </p:nvGrpSpPr>
+      <p:grpSpPr/>
+      <p:sp>
+        <p:nvSpPr>
+          <p:cNvPr id="2" name="TextBox 1"/>
+          <p:cNvSpPr txBox="1"/>
+          <p:nvPr/>
+        </p:nvSpPr>
+        <p:spPr>
+          <a:xfrm>
+            <a:off x="566928" y="365760"/>
+            <a:ext cx="11057839" cy="713232"/>
+          </a:xfrm>
+          <a:prstGeom prst="rect">
+            <a:avLst/>
+          </a:prstGeom>
+          <a:noFill/>
+        </p:spPr>
+        <p:txBody>
+          <a:bodyPr wrap="square" anchor="t" lIns="0" rIns="0" tIns="0" bIns="0">
+            <a:spAutoFit/>
+          </a:bodyPr>
+          <a:lstStyle/>
+          <a:p>
+            <a:pPr algn="l">
+              <a:lnSpc>
+                <a:spcPct val="102000"/>
+              </a:lnSpc>
+              <a:spcAft>
+                <a:spcPts val="0"/>
+              </a:spcAft>
+            </a:pPr>
+            <a:r>
+              <a:rPr sz="3300" b="1">
+                <a:solidFill>
+                  <a:srgbClr val="0F172A"/>
+                </a:solidFill>
+                <a:latin typeface="Inter"/>
+              </a:rPr>
+              <a:t>References</a:t>
+            </a:r>
+          </a:p>
+        </p:txBody>
+      </p:sp>
+      <p:sp>
+        <p:nvSpPr>
+          <p:cNvPr id="3" name="Rectangle 2"/>
+          <p:cNvSpPr/>
+          <p:nvPr/>
+        </p:nvSpPr>
+        <p:spPr>
+          <a:xfrm>
+            <a:off x="566928" y="1152144"/>
+            <a:ext cx="1965960" cy="32004"/>
+          </a:xfrm>
+          <a:prstGeom prst="rect">
+            <a:avLst/>
+          </a:prstGeom>
+          <a:solidFill>
+            <a:srgbClr val="0E7490"/>
+          </a:solidFill>
+          <a:ln>
+            <a:noFill/>
+          </a:ln>
+          <a:effectLst/>
+        </p:spPr>
+        <p:style>
+          <a:lnRef idx="1">
+            <a:schemeClr val="accent1"/>
+          </a:lnRef>
+          <a:fillRef idx="3">
+            <a:schemeClr val="accent1"/>
+          </a:fillRef>
+          <a:effectRef idx="2">
+            <a:schemeClr val="accent1"/>
+          </a:effectRef>
+          <a:fontRef idx="minor">
+            <a:schemeClr val="lt1"/>
+          </a:fontRef>
+        </p:style>
+        <p:txBody>
+          <a:bodyPr rtlCol="0" anchor="ctr"/>
+          <a:lstStyle/>
+          <a:p/>
+        </p:txBody>
+      </p:sp>
+      <p:sp>
+        <p:nvSpPr>
+          <p:cNvPr id="4" name="Rectangle 3"/>
+          <p:cNvSpPr/>
+          <p:nvPr/>
+        </p:nvSpPr>
+        <p:spPr>
+          <a:xfrm>
+            <a:off x="2532888" y="1152144"/>
+            <a:ext cx="9091879" cy="32004"/>
+          </a:xfrm>
+          <a:prstGeom prst="rect">
+            <a:avLst/>
+          </a:prstGeom>
+          <a:solidFill>
+            <a:srgbClr val="CBD5E1"/>
+          </a:solidFill>
+          <a:ln>
+            <a:noFill/>
+          </a:ln>
+          <a:effectLst/>
+        </p:spPr>
+        <p:style>
+          <a:lnRef idx="1">
+            <a:schemeClr val="accent1"/>
+          </a:lnRef>
+          <a:fillRef idx="3">
+            <a:schemeClr val="accent1"/>
+          </a:fillRef>
+          <a:effectRef idx="2">
+            <a:schemeClr val="accent1"/>
+          </a:effectRef>
+          <a:fontRef idx="minor">
+            <a:schemeClr val="lt1"/>
+          </a:fontRef>
+        </p:style>
+        <p:txBody>
+          <a:bodyPr rtlCol="0" anchor="ctr"/>
+          <a:lstStyle/>
+          <a:p/>
+        </p:txBody>
+      </p:sp>
+      <p:sp>
+        <p:nvSpPr>
+          <p:cNvPr id="5" name="TextBox 4"/>
+          <p:cNvSpPr txBox="1"/>
+          <p:nvPr/>
+        </p:nvSpPr>
+        <p:spPr>
+          <a:xfrm>
+            <a:off x="566928" y="6400800"/>
+            <a:ext cx="4572000" cy="237744"/>
+          </a:xfrm>
+          <a:prstGeom prst="rect">
+            <a:avLst/>
+          </a:prstGeom>
+          <a:noFill/>
+        </p:spPr>
+        <p:txBody>
+          <a:bodyPr wrap="square" anchor="t" lIns="0" rIns="0" tIns="0" bIns="0">
+            <a:spAutoFit/>
+          </a:bodyPr>
+          <a:lstStyle/>
+          <a:p>
+            <a:pPr algn="l">
+              <a:lnSpc>
+                <a:spcPct val="118000"/>
+              </a:lnSpc>
+              <a:spcAft>
+                <a:spcPts val="0"/>
+              </a:spcAft>
+            </a:pPr>
+            <a:r>
+              <a:rPr sz="950" b="0">
+                <a:solidFill>
+                  <a:srgbClr val="475569"/>
+                </a:solidFill>
+                <a:latin typeface="Inter"/>
+              </a:rPr>
+              <a:t>AI-PBMS  ·  Team ANS_4X</a:t>
+            </a:r>
+          </a:p>
+        </p:txBody>
+      </p:sp>
+      <p:sp>
+        <p:nvSpPr>
+          <p:cNvPr id="6" name="TextBox 5"/>
+          <p:cNvSpPr txBox="1"/>
+          <p:nvPr/>
+        </p:nvSpPr>
+        <p:spPr>
+          <a:xfrm>
+            <a:off x="10527487" y="6400800"/>
+            <a:ext cx="1097280" cy="237744"/>
+          </a:xfrm>
+          <a:prstGeom prst="rect">
+            <a:avLst/>
+          </a:prstGeom>
+          <a:noFill/>
+        </p:spPr>
+        <p:txBody>
+          <a:bodyPr wrap="square" anchor="t" lIns="0" rIns="0" tIns="0" bIns="0">
+            <a:spAutoFit/>
+          </a:bodyPr>
+          <a:lstStyle/>
+          <a:p>
+            <a:pPr algn="r">
+              <a:lnSpc>
+                <a:spcPct val="118000"/>
+              </a:lnSpc>
+              <a:spcAft>
+                <a:spcPts val="0"/>
+              </a:spcAft>
+            </a:pPr>
+            <a:r>
+              <a:rPr sz="1050" b="0">
+                <a:solidFill>
+                  <a:srgbClr val="475569"/>
+                </a:solidFill>
+                <a:latin typeface="Inter"/>
+              </a:rPr>
+              <a:t>21</a:t>
+            </a:r>
+          </a:p>
+        </p:txBody>
+      </p:sp>
+      <p:sp>
+        <p:nvSpPr>
+          <p:cNvPr id="7" name="TextBox 6"/>
+          <p:cNvSpPr txBox="1"/>
+          <p:nvPr/>
+        </p:nvSpPr>
+        <p:spPr>
+          <a:xfrm>
+            <a:off x="566928" y="1444752"/>
+            <a:ext cx="5797296" cy="219456"/>
+          </a:xfrm>
+          <a:prstGeom prst="rect">
+            <a:avLst/>
+          </a:prstGeom>
+          <a:noFill/>
+        </p:spPr>
+        <p:txBody>
+          <a:bodyPr wrap="square" anchor="t" lIns="0" rIns="0" tIns="0" bIns="0">
+            <a:spAutoFit/>
+          </a:bodyPr>
+          <a:lstStyle/>
+          <a:p>
+            <a:pPr algn="l">
+              <a:lnSpc>
+                <a:spcPct val="118000"/>
+              </a:lnSpc>
+              <a:spcAft>
+                <a:spcPts val="0"/>
+              </a:spcAft>
+            </a:pPr>
+            <a:r>
+              <a:rPr sz="950" b="1">
+                <a:solidFill>
+                  <a:srgbClr val="0E7490"/>
+                </a:solidFill>
+                <a:latin typeface="Inter"/>
+              </a:rPr>
+              <a:t>LITERATURE — SOC, RUL AND FAULT GRADING</a:t>
+            </a:r>
+          </a:p>
+        </p:txBody>
+      </p:sp>
+      <p:sp>
+        <p:nvSpPr>
+          <p:cNvPr id="8" name="Rectangle 7"/>
+          <p:cNvSpPr/>
+          <p:nvPr/>
+        </p:nvSpPr>
+        <p:spPr>
+          <a:xfrm>
+            <a:off x="566928" y="1769363"/>
+            <a:ext cx="237744" cy="237744"/>
+          </a:xfrm>
+          <a:prstGeom prst="rect">
+            <a:avLst/>
+          </a:prstGeom>
+          <a:solidFill>
+            <a:srgbClr val="F1F5F9"/>
+          </a:solidFill>
+          <a:ln w="7620">
+            <a:solidFill>
+              <a:srgbClr val="CBD5E1"/>
+            </a:solidFill>
+          </a:ln>
+          <a:effectLst/>
+        </p:spPr>
+        <p:style>
+          <a:lnRef idx="1">
+            <a:schemeClr val="accent1"/>
+          </a:lnRef>
+          <a:fillRef idx="3">
+            <a:schemeClr val="accent1"/>
+          </a:fillRef>
+          <a:effectRef idx="2">
+            <a:schemeClr val="accent1"/>
+          </a:effectRef>
+          <a:fontRef idx="minor">
+            <a:schemeClr val="lt1"/>
+          </a:fontRef>
+        </p:style>
+        <p:txBody>
+          <a:bodyPr rtlCol="0" anchor="ctr"/>
+          <a:lstStyle/>
+          <a:p/>
+        </p:txBody>
+      </p:sp>
+      <p:sp>
+        <p:nvSpPr>
+          <p:cNvPr id="9" name="TextBox 8"/>
+          <p:cNvSpPr txBox="1"/>
+          <p:nvPr/>
+        </p:nvSpPr>
+        <p:spPr>
+          <a:xfrm>
+            <a:off x="566928" y="1769363"/>
+            <a:ext cx="237744" cy="237744"/>
+          </a:xfrm>
+          <a:prstGeom prst="rect">
+            <a:avLst/>
+          </a:prstGeom>
+          <a:noFill/>
+        </p:spPr>
+        <p:txBody>
+          <a:bodyPr wrap="square" anchor="ctr" lIns="0" rIns="0" tIns="0" bIns="0">
+            <a:spAutoFit/>
+          </a:bodyPr>
+          <a:lstStyle/>
+          <a:p>
+            <a:pPr algn="ctr">
+              <a:lnSpc>
+                <a:spcPct val="118000"/>
+              </a:lnSpc>
+              <a:spcAft>
+                <a:spcPts val="0"/>
+              </a:spcAft>
+            </a:pPr>
+            <a:r>
+              <a:rPr sz="1000" b="1">
+                <a:solidFill>
+                  <a:srgbClr val="0E7490"/>
+                </a:solidFill>
+                <a:latin typeface="Inter"/>
+              </a:rPr>
+              <a:t>1</a:t>
+            </a:r>
+          </a:p>
+        </p:txBody>
+      </p:sp>
+      <p:sp>
+        <p:nvSpPr>
+          <p:cNvPr id="10" name="TextBox 9"/>
+          <p:cNvSpPr txBox="1"/>
+          <p:nvPr/>
+        </p:nvSpPr>
+        <p:spPr>
+          <a:xfrm>
+            <a:off x="932688" y="1755648"/>
+            <a:ext cx="5431536" cy="274320"/>
+          </a:xfrm>
+          <a:prstGeom prst="rect">
+            <a:avLst/>
+          </a:prstGeom>
+          <a:noFill/>
+        </p:spPr>
+        <p:txBody>
+          <a:bodyPr wrap="square" anchor="t" lIns="0" rIns="0" tIns="0" bIns="0">
+            <a:spAutoFit/>
+          </a:bodyPr>
+          <a:lstStyle/>
+          <a:p>
+            <a:pPr algn="l">
+              <a:lnSpc>
+                <a:spcPct val="122000"/>
+              </a:lnSpc>
+              <a:spcAft>
+                <a:spcPts val="0"/>
+              </a:spcAft>
+            </a:pPr>
+            <a:r>
+              <a:rPr sz="1150" b="0">
+                <a:solidFill>
+                  <a:srgbClr val="0F172A"/>
+                </a:solidFill>
+                <a:latin typeface="Inter"/>
+              </a:rPr>
+              <a:t>Bimodal images + BFRN</a:t>
+            </a:r>
+          </a:p>
+        </p:txBody>
+      </p:sp>
+      <p:sp>
+        <p:nvSpPr>
+          <p:cNvPr id="11" name="TextBox 10"/>
+          <p:cNvSpPr txBox="1"/>
+          <p:nvPr/>
+        </p:nvSpPr>
+        <p:spPr>
+          <a:xfrm>
+            <a:off x="932688" y="2011680"/>
+            <a:ext cx="5431536" cy="201168"/>
+          </a:xfrm>
+          <a:prstGeom prst="rect">
+            <a:avLst/>
+          </a:prstGeom>
+          <a:noFill/>
+        </p:spPr>
+        <p:txBody>
+          <a:bodyPr wrap="square" anchor="t" lIns="0" rIns="0" tIns="0" bIns="0">
+            <a:spAutoFit/>
+          </a:bodyPr>
+          <a:lstStyle/>
+          <a:p>
+            <a:pPr algn="l">
+              <a:lnSpc>
+                <a:spcPct val="118000"/>
+              </a:lnSpc>
+              <a:spcAft>
+                <a:spcPts val="0"/>
+              </a:spcAft>
+            </a:pPr>
+            <a:r>
+              <a:rPr sz="900" b="0">
+                <a:solidFill>
+                  <a:srgbClr val="475569"/>
+                </a:solidFill>
+                <a:latin typeface="Inter"/>
+              </a:rPr>
+              <a:t>Energy, 2024  ·  doi.org/10.1016/j.energy.2024.131700</a:t>
+            </a:r>
+          </a:p>
+        </p:txBody>
+      </p:sp>
+      <p:sp>
+        <p:nvSpPr>
+          <p:cNvPr id="12" name="Rectangle 11"/>
+          <p:cNvSpPr/>
+          <p:nvPr/>
+        </p:nvSpPr>
+        <p:spPr>
+          <a:xfrm>
+            <a:off x="566928" y="2391156"/>
+            <a:ext cx="237744" cy="237744"/>
+          </a:xfrm>
+          <a:prstGeom prst="rect">
+            <a:avLst/>
+          </a:prstGeom>
+          <a:solidFill>
+            <a:srgbClr val="F1F5F9"/>
+          </a:solidFill>
+          <a:ln w="7620">
+            <a:solidFill>
+              <a:srgbClr val="CBD5E1"/>
+            </a:solidFill>
+          </a:ln>
+          <a:effectLst/>
+        </p:spPr>
+        <p:style>
+          <a:lnRef idx="1">
+            <a:schemeClr val="accent1"/>
+          </a:lnRef>
+          <a:fillRef idx="3">
+            <a:schemeClr val="accent1"/>
+          </a:fillRef>
+          <a:effectRef idx="2">
+            <a:schemeClr val="accent1"/>
+          </a:effectRef>
+          <a:fontRef idx="minor">
+            <a:schemeClr val="lt1"/>
+          </a:fontRef>
+        </p:style>
+        <p:txBody>
+          <a:bodyPr rtlCol="0" anchor="ctr"/>
+          <a:lstStyle/>
+          <a:p/>
+        </p:txBody>
+      </p:sp>
+      <p:sp>
+        <p:nvSpPr>
+          <p:cNvPr id="13" name="TextBox 12"/>
+          <p:cNvSpPr txBox="1"/>
+          <p:nvPr/>
+        </p:nvSpPr>
+        <p:spPr>
+          <a:xfrm>
+            <a:off x="566928" y="2391156"/>
+            <a:ext cx="237744" cy="237744"/>
+          </a:xfrm>
+          <a:prstGeom prst="rect">
+            <a:avLst/>
+          </a:prstGeom>
+          <a:noFill/>
+        </p:spPr>
+        <p:txBody>
+          <a:bodyPr wrap="square" anchor="ctr" lIns="0" rIns="0" tIns="0" bIns="0">
+            <a:spAutoFit/>
+          </a:bodyPr>
+          <a:lstStyle/>
+          <a:p>
+            <a:pPr algn="ctr">
+              <a:lnSpc>
+                <a:spcPct val="118000"/>
+              </a:lnSpc>
+              <a:spcAft>
+                <a:spcPts val="0"/>
+              </a:spcAft>
+            </a:pPr>
+            <a:r>
+              <a:rPr sz="1000" b="1">
+                <a:solidFill>
+                  <a:srgbClr val="0E7490"/>
+                </a:solidFill>
+                <a:latin typeface="Inter"/>
+              </a:rPr>
+              <a:t>2</a:t>
+            </a:r>
+          </a:p>
+        </p:txBody>
+      </p:sp>
+      <p:sp>
+        <p:nvSpPr>
+          <p:cNvPr id="14" name="TextBox 13"/>
+          <p:cNvSpPr txBox="1"/>
+          <p:nvPr/>
+        </p:nvSpPr>
+        <p:spPr>
+          <a:xfrm>
+            <a:off x="932688" y="2377439"/>
+            <a:ext cx="5431536" cy="274320"/>
+          </a:xfrm>
+          <a:prstGeom prst="rect">
+            <a:avLst/>
+          </a:prstGeom>
+          <a:noFill/>
+        </p:spPr>
+        <p:txBody>
+          <a:bodyPr wrap="square" anchor="t" lIns="0" rIns="0" tIns="0" bIns="0">
+            <a:spAutoFit/>
+          </a:bodyPr>
+          <a:lstStyle/>
+          <a:p>
+            <a:pPr algn="l">
+              <a:lnSpc>
+                <a:spcPct val="122000"/>
+              </a:lnSpc>
+              <a:spcAft>
+                <a:spcPts val="0"/>
+              </a:spcAft>
+            </a:pPr>
+            <a:r>
+              <a:rPr sz="1150" b="0">
+                <a:solidFill>
+                  <a:srgbClr val="0F172A"/>
+                </a:solidFill>
+                <a:latin typeface="Inter"/>
+              </a:rPr>
+              <a:t>Single-cycle charging</a:t>
+            </a:r>
+          </a:p>
+        </p:txBody>
+      </p:sp>
+      <p:sp>
+        <p:nvSpPr>
+          <p:cNvPr id="15" name="TextBox 14"/>
+          <p:cNvSpPr txBox="1"/>
+          <p:nvPr/>
+        </p:nvSpPr>
+        <p:spPr>
+          <a:xfrm>
+            <a:off x="932688" y="2633472"/>
+            <a:ext cx="5431536" cy="201168"/>
+          </a:xfrm>
+          <a:prstGeom prst="rect">
+            <a:avLst/>
+          </a:prstGeom>
+          <a:noFill/>
+        </p:spPr>
+        <p:txBody>
+          <a:bodyPr wrap="square" anchor="t" lIns="0" rIns="0" tIns="0" bIns="0">
+            <a:spAutoFit/>
+          </a:bodyPr>
+          <a:lstStyle/>
+          <a:p>
+            <a:pPr algn="l">
+              <a:lnSpc>
+                <a:spcPct val="118000"/>
+              </a:lnSpc>
+              <a:spcAft>
+                <a:spcPts val="0"/>
+              </a:spcAft>
+            </a:pPr>
+            <a:r>
+              <a:rPr sz="900" b="0">
+                <a:solidFill>
+                  <a:srgbClr val="475569"/>
+                </a:solidFill>
+                <a:latin typeface="Inter"/>
+              </a:rPr>
+              <a:t>Energy, 2025  ·  doi.org/10.1016/j.energy.2025.138351</a:t>
+            </a:r>
+          </a:p>
+        </p:txBody>
+      </p:sp>
+      <p:sp>
+        <p:nvSpPr>
+          <p:cNvPr id="16" name="Rectangle 15"/>
+          <p:cNvSpPr/>
+          <p:nvPr/>
+        </p:nvSpPr>
+        <p:spPr>
+          <a:xfrm>
+            <a:off x="566928" y="3012947"/>
+            <a:ext cx="237744" cy="237744"/>
+          </a:xfrm>
+          <a:prstGeom prst="rect">
+            <a:avLst/>
+          </a:prstGeom>
+          <a:solidFill>
+            <a:srgbClr val="F1F5F9"/>
+          </a:solidFill>
+          <a:ln w="7620">
+            <a:solidFill>
+              <a:srgbClr val="CBD5E1"/>
+            </a:solidFill>
+          </a:ln>
+          <a:effectLst/>
+        </p:spPr>
+        <p:style>
+          <a:lnRef idx="1">
+            <a:schemeClr val="accent1"/>
+          </a:lnRef>
+          <a:fillRef idx="3">
+            <a:schemeClr val="accent1"/>
+          </a:fillRef>
+          <a:effectRef idx="2">
+            <a:schemeClr val="accent1"/>
+          </a:effectRef>
+          <a:fontRef idx="minor">
+            <a:schemeClr val="lt1"/>
+          </a:fontRef>
+        </p:style>
+        <p:txBody>
+          <a:bodyPr rtlCol="0" anchor="ctr"/>
+          <a:lstStyle/>
+          <a:p/>
+        </p:txBody>
+      </p:sp>
+      <p:sp>
+        <p:nvSpPr>
+          <p:cNvPr id="17" name="TextBox 16"/>
+          <p:cNvSpPr txBox="1"/>
+          <p:nvPr/>
+        </p:nvSpPr>
+        <p:spPr>
+          <a:xfrm>
+            <a:off x="566928" y="3012947"/>
+            <a:ext cx="237744" cy="237744"/>
+          </a:xfrm>
+          <a:prstGeom prst="rect">
+            <a:avLst/>
+          </a:prstGeom>
+          <a:noFill/>
+        </p:spPr>
+        <p:txBody>
+          <a:bodyPr wrap="square" anchor="ctr" lIns="0" rIns="0" tIns="0" bIns="0">
+            <a:spAutoFit/>
+          </a:bodyPr>
+          <a:lstStyle/>
+          <a:p>
+            <a:pPr algn="ctr">
+              <a:lnSpc>
+                <a:spcPct val="118000"/>
+              </a:lnSpc>
+              <a:spcAft>
+                <a:spcPts val="0"/>
+              </a:spcAft>
+            </a:pPr>
+            <a:r>
+              <a:rPr sz="1000" b="1">
+                <a:solidFill>
+                  <a:srgbClr val="0E7490"/>
+                </a:solidFill>
+                <a:latin typeface="Inter"/>
+              </a:rPr>
+              <a:t>3</a:t>
+            </a:r>
+          </a:p>
+        </p:txBody>
+      </p:sp>
+      <p:sp>
+        <p:nvSpPr>
+          <p:cNvPr id="18" name="TextBox 17"/>
+          <p:cNvSpPr txBox="1"/>
+          <p:nvPr/>
+        </p:nvSpPr>
+        <p:spPr>
+          <a:xfrm>
+            <a:off x="932688" y="2999231"/>
+            <a:ext cx="5431536" cy="274320"/>
+          </a:xfrm>
+          <a:prstGeom prst="rect">
+            <a:avLst/>
+          </a:prstGeom>
+          <a:noFill/>
+        </p:spPr>
+        <p:txBody>
+          <a:bodyPr wrap="square" anchor="t" lIns="0" rIns="0" tIns="0" bIns="0">
+            <a:spAutoFit/>
+          </a:bodyPr>
+          <a:lstStyle/>
+          <a:p>
+            <a:pPr algn="l">
+              <a:lnSpc>
+                <a:spcPct val="122000"/>
+              </a:lnSpc>
+              <a:spcAft>
+                <a:spcPts val="0"/>
+              </a:spcAft>
+            </a:pPr>
+            <a:r>
+              <a:rPr sz="1150" b="0">
+                <a:solidFill>
+                  <a:srgbClr val="0F172A"/>
+                </a:solidFill>
+                <a:latin typeface="Inter"/>
+              </a:rPr>
+              <a:t>Multidomain features + CatBoost</a:t>
+            </a:r>
+          </a:p>
+        </p:txBody>
+      </p:sp>
+      <p:sp>
+        <p:nvSpPr>
+          <p:cNvPr id="19" name="TextBox 18"/>
+          <p:cNvSpPr txBox="1"/>
+          <p:nvPr/>
+        </p:nvSpPr>
+        <p:spPr>
+          <a:xfrm>
+            <a:off x="932688" y="3255263"/>
+            <a:ext cx="5431536" cy="201168"/>
+          </a:xfrm>
+          <a:prstGeom prst="rect">
+            <a:avLst/>
+          </a:prstGeom>
+          <a:noFill/>
+        </p:spPr>
+        <p:txBody>
+          <a:bodyPr wrap="square" anchor="t" lIns="0" rIns="0" tIns="0" bIns="0">
+            <a:spAutoFit/>
+          </a:bodyPr>
+          <a:lstStyle/>
+          <a:p>
+            <a:pPr algn="l">
+              <a:lnSpc>
+                <a:spcPct val="118000"/>
+              </a:lnSpc>
+              <a:spcAft>
+                <a:spcPts val="0"/>
+              </a:spcAft>
+            </a:pPr>
+            <a:r>
+              <a:rPr sz="900" b="0">
+                <a:solidFill>
+                  <a:srgbClr val="475569"/>
+                </a:solidFill>
+                <a:latin typeface="Inter"/>
+              </a:rPr>
+              <a:t>Energy Science &amp; Engineering, 2023  ·  doi.org/10.1002/ese3.1506</a:t>
+            </a:r>
+          </a:p>
+        </p:txBody>
+      </p:sp>
+      <p:sp>
+        <p:nvSpPr>
+          <p:cNvPr id="20" name="Rectangle 19"/>
+          <p:cNvSpPr/>
+          <p:nvPr/>
+        </p:nvSpPr>
+        <p:spPr>
+          <a:xfrm>
+            <a:off x="566928" y="3634739"/>
+            <a:ext cx="237744" cy="237744"/>
+          </a:xfrm>
+          <a:prstGeom prst="rect">
+            <a:avLst/>
+          </a:prstGeom>
+          <a:solidFill>
+            <a:srgbClr val="F1F5F9"/>
+          </a:solidFill>
+          <a:ln w="7620">
+            <a:solidFill>
+              <a:srgbClr val="CBD5E1"/>
+            </a:solidFill>
+          </a:ln>
+          <a:effectLst/>
+        </p:spPr>
+        <p:style>
+          <a:lnRef idx="1">
+            <a:schemeClr val="accent1"/>
+          </a:lnRef>
+          <a:fillRef idx="3">
+            <a:schemeClr val="accent1"/>
+          </a:fillRef>
+          <a:effectRef idx="2">
+            <a:schemeClr val="accent1"/>
+          </a:effectRef>
+          <a:fontRef idx="minor">
+            <a:schemeClr val="lt1"/>
+          </a:fontRef>
+        </p:style>
+        <p:txBody>
+          <a:bodyPr rtlCol="0" anchor="ctr"/>
+          <a:lstStyle/>
+          <a:p/>
+        </p:txBody>
+      </p:sp>
+      <p:sp>
+        <p:nvSpPr>
+          <p:cNvPr id="21" name="TextBox 20"/>
+          <p:cNvSpPr txBox="1"/>
+          <p:nvPr/>
+        </p:nvSpPr>
+        <p:spPr>
+          <a:xfrm>
+            <a:off x="566928" y="3634739"/>
+            <a:ext cx="237744" cy="237744"/>
+          </a:xfrm>
+          <a:prstGeom prst="rect">
+            <a:avLst/>
+          </a:prstGeom>
+          <a:noFill/>
+        </p:spPr>
+        <p:txBody>
+          <a:bodyPr wrap="square" anchor="ctr" lIns="0" rIns="0" tIns="0" bIns="0">
+            <a:spAutoFit/>
+          </a:bodyPr>
+          <a:lstStyle/>
+          <a:p>
+            <a:pPr algn="ctr">
+              <a:lnSpc>
+                <a:spcPct val="118000"/>
+              </a:lnSpc>
+              <a:spcAft>
+                <a:spcPts val="0"/>
+              </a:spcAft>
+            </a:pPr>
+            <a:r>
+              <a:rPr sz="1000" b="1">
+                <a:solidFill>
+                  <a:srgbClr val="0E7490"/>
+                </a:solidFill>
+                <a:latin typeface="Inter"/>
+              </a:rPr>
+              <a:t>4</a:t>
+            </a:r>
+          </a:p>
+        </p:txBody>
+      </p:sp>
+      <p:sp>
+        <p:nvSpPr>
+          <p:cNvPr id="22" name="TextBox 21"/>
+          <p:cNvSpPr txBox="1"/>
+          <p:nvPr/>
+        </p:nvSpPr>
+        <p:spPr>
+          <a:xfrm>
+            <a:off x="932688" y="3621023"/>
+            <a:ext cx="5431536" cy="274320"/>
+          </a:xfrm>
+          <a:prstGeom prst="rect">
+            <a:avLst/>
+          </a:prstGeom>
+          <a:noFill/>
+        </p:spPr>
+        <p:txBody>
+          <a:bodyPr wrap="square" anchor="t" lIns="0" rIns="0" tIns="0" bIns="0">
+            <a:spAutoFit/>
+          </a:bodyPr>
+          <a:lstStyle/>
+          <a:p>
+            <a:pPr algn="l">
+              <a:lnSpc>
+                <a:spcPct val="122000"/>
+              </a:lnSpc>
+              <a:spcAft>
+                <a:spcPts val="0"/>
+              </a:spcAft>
+            </a:pPr>
+            <a:r>
+              <a:rPr sz="1150" b="0">
+                <a:solidFill>
+                  <a:srgbClr val="0F172A"/>
+                </a:solidFill>
+                <a:latin typeface="Inter"/>
+              </a:rPr>
+              <a:t>CNN-BiLSTM-BiGRU with attention</a:t>
+            </a:r>
+          </a:p>
+        </p:txBody>
+      </p:sp>
+      <p:sp>
+        <p:nvSpPr>
+          <p:cNvPr id="23" name="TextBox 22"/>
+          <p:cNvSpPr txBox="1"/>
+          <p:nvPr/>
+        </p:nvSpPr>
+        <p:spPr>
+          <a:xfrm>
+            <a:off x="932688" y="3877055"/>
+            <a:ext cx="5431536" cy="201168"/>
+          </a:xfrm>
+          <a:prstGeom prst="rect">
+            <a:avLst/>
+          </a:prstGeom>
+          <a:noFill/>
+        </p:spPr>
+        <p:txBody>
+          <a:bodyPr wrap="square" anchor="t" lIns="0" rIns="0" tIns="0" bIns="0">
+            <a:spAutoFit/>
+          </a:bodyPr>
+          <a:lstStyle/>
+          <a:p>
+            <a:pPr algn="l">
+              <a:lnSpc>
+                <a:spcPct val="118000"/>
+              </a:lnSpc>
+              <a:spcAft>
+                <a:spcPts val="0"/>
+              </a:spcAft>
+            </a:pPr>
+            <a:r>
+              <a:rPr sz="900" b="0">
+                <a:solidFill>
+                  <a:srgbClr val="475569"/>
+                </a:solidFill>
+                <a:latin typeface="Inter"/>
+              </a:rPr>
+              <a:t>Journal of Energy Storage, 2024  ·  doi.org/10.1016/j.est.2024.113074</a:t>
+            </a:r>
+          </a:p>
+        </p:txBody>
+      </p:sp>
+      <p:sp>
+        <p:nvSpPr>
+          <p:cNvPr id="24" name="Rectangle 23"/>
+          <p:cNvSpPr/>
+          <p:nvPr/>
+        </p:nvSpPr>
+        <p:spPr>
+          <a:xfrm>
+            <a:off x="566928" y="4256531"/>
+            <a:ext cx="237744" cy="237744"/>
+          </a:xfrm>
+          <a:prstGeom prst="rect">
+            <a:avLst/>
+          </a:prstGeom>
+          <a:solidFill>
+            <a:srgbClr val="F1F5F9"/>
+          </a:solidFill>
+          <a:ln w="7620">
+            <a:solidFill>
+              <a:srgbClr val="CBD5E1"/>
+            </a:solidFill>
+          </a:ln>
+          <a:effectLst/>
+        </p:spPr>
+        <p:style>
+          <a:lnRef idx="1">
+            <a:schemeClr val="accent1"/>
+          </a:lnRef>
+          <a:fillRef idx="3">
+            <a:schemeClr val="accent1"/>
+          </a:fillRef>
+          <a:effectRef idx="2">
+            <a:schemeClr val="accent1"/>
+          </a:effectRef>
+          <a:fontRef idx="minor">
+            <a:schemeClr val="lt1"/>
+          </a:fontRef>
+        </p:style>
+        <p:txBody>
+          <a:bodyPr rtlCol="0" anchor="ctr"/>
+          <a:lstStyle/>
+          <a:p/>
+        </p:txBody>
+      </p:sp>
+      <p:sp>
+        <p:nvSpPr>
+          <p:cNvPr id="25" name="TextBox 24"/>
+          <p:cNvSpPr txBox="1"/>
+          <p:nvPr/>
+        </p:nvSpPr>
+        <p:spPr>
+          <a:xfrm>
+            <a:off x="566928" y="4256531"/>
+            <a:ext cx="237744" cy="237744"/>
+          </a:xfrm>
+          <a:prstGeom prst="rect">
+            <a:avLst/>
+          </a:prstGeom>
+          <a:noFill/>
+        </p:spPr>
+        <p:txBody>
+          <a:bodyPr wrap="square" anchor="ctr" lIns="0" rIns="0" tIns="0" bIns="0">
+            <a:spAutoFit/>
+          </a:bodyPr>
+          <a:lstStyle/>
+          <a:p>
+            <a:pPr algn="ctr">
+              <a:lnSpc>
+                <a:spcPct val="118000"/>
+              </a:lnSpc>
+              <a:spcAft>
+                <a:spcPts val="0"/>
+              </a:spcAft>
+            </a:pPr>
+            <a:r>
+              <a:rPr sz="1000" b="1">
+                <a:solidFill>
+                  <a:srgbClr val="0E7490"/>
+                </a:solidFill>
+                <a:latin typeface="Inter"/>
+              </a:rPr>
+              <a:t>5</a:t>
+            </a:r>
+          </a:p>
+        </p:txBody>
+      </p:sp>
+      <p:sp>
+        <p:nvSpPr>
+          <p:cNvPr id="26" name="TextBox 25"/>
+          <p:cNvSpPr txBox="1"/>
+          <p:nvPr/>
+        </p:nvSpPr>
+        <p:spPr>
+          <a:xfrm>
+            <a:off x="932688" y="4242815"/>
+            <a:ext cx="5431536" cy="493776"/>
+          </a:xfrm>
+          <a:prstGeom prst="rect">
+            <a:avLst/>
+          </a:prstGeom>
+          <a:noFill/>
+        </p:spPr>
+        <p:txBody>
+          <a:bodyPr wrap="square" anchor="t" lIns="0" rIns="0" tIns="0" bIns="0">
+            <a:spAutoFit/>
+          </a:bodyPr>
+          <a:lstStyle/>
+          <a:p>
+            <a:pPr algn="l">
+              <a:lnSpc>
+                <a:spcPct val="122000"/>
+              </a:lnSpc>
+              <a:spcAft>
+                <a:spcPts val="0"/>
+              </a:spcAft>
+            </a:pPr>
+            <a:r>
+              <a:rPr sz="1150" b="0">
+                <a:solidFill>
+                  <a:srgbClr val="0F172A"/>
+                </a:solidFill>
+                <a:latin typeface="Inter"/>
+              </a:rPr>
+              <a:t>Yang, S., Xu, B., Peng, H. — “Isolation and Grading of Faults in
+Battery Packs Based on Machine Learning Methods”</a:t>
+            </a:r>
+          </a:p>
+        </p:txBody>
+      </p:sp>
+      <p:sp>
+        <p:nvSpPr>
+          <p:cNvPr id="27" name="TextBox 26"/>
+          <p:cNvSpPr txBox="1"/>
+          <p:nvPr/>
+        </p:nvSpPr>
+        <p:spPr>
+          <a:xfrm>
+            <a:off x="932688" y="4718303"/>
+            <a:ext cx="5431536" cy="201168"/>
+          </a:xfrm>
+          <a:prstGeom prst="rect">
+            <a:avLst/>
+          </a:prstGeom>
+          <a:noFill/>
+        </p:spPr>
+        <p:txBody>
+          <a:bodyPr wrap="square" anchor="t" lIns="0" rIns="0" tIns="0" bIns="0">
+            <a:spAutoFit/>
+          </a:bodyPr>
+          <a:lstStyle/>
+          <a:p>
+            <a:pPr algn="l">
+              <a:lnSpc>
+                <a:spcPct val="118000"/>
+              </a:lnSpc>
+              <a:spcAft>
+                <a:spcPts val="0"/>
+              </a:spcAft>
+            </a:pPr>
+            <a:r>
+              <a:rPr sz="900" b="0">
+                <a:solidFill>
+                  <a:srgbClr val="475569"/>
+                </a:solidFill>
+                <a:latin typeface="Inter"/>
+              </a:rPr>
+              <a:t>Electronics, 11(9), 1494, 2022  ·  mdpi.com/2079-9292/11/9/1494</a:t>
+            </a:r>
+          </a:p>
+        </p:txBody>
+      </p:sp>
+      <p:sp>
+        <p:nvSpPr>
+          <p:cNvPr id="28" name="Rectangle 27"/>
+          <p:cNvSpPr/>
+          <p:nvPr/>
+        </p:nvSpPr>
+        <p:spPr>
+          <a:xfrm>
+            <a:off x="6693408" y="1444752"/>
+            <a:ext cx="4931359" cy="2139696"/>
+          </a:xfrm>
+          <a:prstGeom prst="rect">
+            <a:avLst/>
+          </a:prstGeom>
+          <a:solidFill>
+            <a:srgbClr val="F1F5F9"/>
+          </a:solidFill>
+          <a:ln w="9525">
+            <a:solidFill>
+              <a:srgbClr val="CBD5E1"/>
+            </a:solidFill>
+          </a:ln>
+          <a:effectLst/>
+        </p:spPr>
+        <p:style>
+          <a:lnRef idx="1">
+            <a:schemeClr val="accent1"/>
+          </a:lnRef>
+          <a:fillRef idx="3">
+            <a:schemeClr val="accent1"/>
+          </a:fillRef>
+          <a:effectRef idx="2">
+            <a:schemeClr val="accent1"/>
+          </a:effectRef>
+          <a:fontRef idx="minor">
+            <a:schemeClr val="lt1"/>
+          </a:fontRef>
+        </p:style>
+        <p:txBody>
+          <a:bodyPr rtlCol="0" anchor="ctr"/>
+          <a:lstStyle/>
+          <a:p/>
+        </p:txBody>
+      </p:sp>
+      <p:sp>
+        <p:nvSpPr>
+          <p:cNvPr id="29" name="TextBox 28"/>
+          <p:cNvSpPr txBox="1"/>
+          <p:nvPr/>
+        </p:nvSpPr>
+        <p:spPr>
+          <a:xfrm>
+            <a:off x="6894576" y="1572768"/>
+            <a:ext cx="4529023" cy="219456"/>
+          </a:xfrm>
+          <a:prstGeom prst="rect">
+            <a:avLst/>
+          </a:prstGeom>
+          <a:noFill/>
+        </p:spPr>
+        <p:txBody>
+          <a:bodyPr wrap="square" anchor="t" lIns="0" rIns="0" tIns="0" bIns="0">
+            <a:spAutoFit/>
+          </a:bodyPr>
+          <a:lstStyle/>
+          <a:p>
+            <a:pPr algn="l">
+              <a:lnSpc>
+                <a:spcPct val="118000"/>
+              </a:lnSpc>
+              <a:spcAft>
+                <a:spcPts val="0"/>
+              </a:spcAft>
+            </a:pPr>
+            <a:r>
+              <a:rPr sz="950" b="1">
+                <a:solidFill>
+                  <a:srgbClr val="0E7490"/>
+                </a:solidFill>
+                <a:latin typeface="Inter"/>
+              </a:rPr>
+              <a:t>PRIMARY SOURCES — MANUFACTURER DATASHEETS</a:t>
+            </a:r>
+          </a:p>
+        </p:txBody>
+      </p:sp>
+      <p:sp>
+        <p:nvSpPr>
+          <p:cNvPr id="30" name="Oval 29"/>
+          <p:cNvSpPr/>
+          <p:nvPr/>
+        </p:nvSpPr>
+        <p:spPr>
+          <a:xfrm>
+            <a:off x="6912864" y="1947672"/>
+            <a:ext cx="82296" cy="82296"/>
+          </a:xfrm>
+          <a:prstGeom prst="ellipse">
+            <a:avLst/>
+          </a:prstGeom>
+          <a:solidFill>
+            <a:srgbClr val="0E7490"/>
+          </a:solidFill>
+          <a:ln>
+            <a:noFill/>
+          </a:ln>
+          <a:effectLst/>
+        </p:spPr>
+        <p:style>
+          <a:lnRef idx="1">
+            <a:schemeClr val="accent1"/>
+          </a:lnRef>
+          <a:fillRef idx="3">
+            <a:schemeClr val="accent1"/>
+          </a:fillRef>
+          <a:effectRef idx="2">
+            <a:schemeClr val="accent1"/>
+          </a:effectRef>
+          <a:fontRef idx="minor">
+            <a:schemeClr val="lt1"/>
+          </a:fontRef>
+        </p:style>
+        <p:txBody>
+          <a:bodyPr rtlCol="0" anchor="ctr"/>
+          <a:lstStyle/>
+          <a:p/>
+        </p:txBody>
+      </p:sp>
+      <p:sp>
+        <p:nvSpPr>
+          <p:cNvPr id="31" name="TextBox 30"/>
+          <p:cNvSpPr txBox="1"/>
+          <p:nvPr/>
+        </p:nvSpPr>
+        <p:spPr>
+          <a:xfrm>
+            <a:off x="7114032" y="1865376"/>
+            <a:ext cx="2788920" cy="237744"/>
+          </a:xfrm>
+          <a:prstGeom prst="rect">
+            <a:avLst/>
+          </a:prstGeom>
+          <a:noFill/>
+        </p:spPr>
+        <p:txBody>
+          <a:bodyPr wrap="square" anchor="t" lIns="0" rIns="0" tIns="0" bIns="0">
+            <a:spAutoFit/>
+          </a:bodyPr>
+          <a:lstStyle/>
+          <a:p>
+            <a:pPr algn="l">
+              <a:lnSpc>
+                <a:spcPct val="118000"/>
+              </a:lnSpc>
+              <a:spcAft>
+                <a:spcPts val="0"/>
+              </a:spcAft>
+            </a:pPr>
+            <a:r>
+              <a:rPr sz="1050" b="0">
+                <a:solidFill>
+                  <a:srgbClr val="0F172A"/>
+                </a:solidFill>
+                <a:latin typeface="Inter"/>
+              </a:rPr>
+              <a:t>LG Energy Solution INR21700-M50</a:t>
+            </a:r>
+          </a:p>
+        </p:txBody>
+      </p:sp>
+      <p:sp>
+        <p:nvSpPr>
+          <p:cNvPr id="32" name="TextBox 31"/>
+          <p:cNvSpPr txBox="1"/>
+          <p:nvPr/>
+        </p:nvSpPr>
+        <p:spPr>
+          <a:xfrm>
+            <a:off x="9893808" y="1874519"/>
+            <a:ext cx="1529791" cy="219456"/>
+          </a:xfrm>
+          <a:prstGeom prst="rect">
+            <a:avLst/>
+          </a:prstGeom>
+          <a:noFill/>
+        </p:spPr>
+        <p:txBody>
+          <a:bodyPr wrap="square" anchor="t" lIns="0" rIns="0" tIns="0" bIns="0">
+            <a:spAutoFit/>
+          </a:bodyPr>
+          <a:lstStyle/>
+          <a:p>
+            <a:pPr algn="l">
+              <a:lnSpc>
+                <a:spcPct val="118000"/>
+              </a:lnSpc>
+              <a:spcAft>
+                <a:spcPts val="0"/>
+              </a:spcAft>
+            </a:pPr>
+            <a:r>
+              <a:rPr sz="900" b="0">
+                <a:solidFill>
+                  <a:srgbClr val="475569"/>
+                </a:solidFill>
+                <a:latin typeface="Inter"/>
+              </a:rPr>
+              <a:t>cell used in the 8S2P pack</a:t>
+            </a:r>
+          </a:p>
+        </p:txBody>
+      </p:sp>
+      <p:sp>
+        <p:nvSpPr>
+          <p:cNvPr id="33" name="Oval 32"/>
+          <p:cNvSpPr/>
+          <p:nvPr/>
+        </p:nvSpPr>
+        <p:spPr>
+          <a:xfrm>
+            <a:off x="6912864" y="2295144"/>
+            <a:ext cx="82296" cy="82296"/>
+          </a:xfrm>
+          <a:prstGeom prst="ellipse">
+            <a:avLst/>
+          </a:prstGeom>
+          <a:solidFill>
+            <a:srgbClr val="0E7490"/>
+          </a:solidFill>
+          <a:ln>
+            <a:noFill/>
+          </a:ln>
+          <a:effectLst/>
+        </p:spPr>
+        <p:style>
+          <a:lnRef idx="1">
+            <a:schemeClr val="accent1"/>
+          </a:lnRef>
+          <a:fillRef idx="3">
+            <a:schemeClr val="accent1"/>
+          </a:fillRef>
+          <a:effectRef idx="2">
+            <a:schemeClr val="accent1"/>
+          </a:effectRef>
+          <a:fontRef idx="minor">
+            <a:schemeClr val="lt1"/>
+          </a:fontRef>
+        </p:style>
+        <p:txBody>
+          <a:bodyPr rtlCol="0" anchor="ctr"/>
+          <a:lstStyle/>
+          <a:p/>
+        </p:txBody>
+      </p:sp>
+      <p:sp>
+        <p:nvSpPr>
+          <p:cNvPr id="34" name="TextBox 33"/>
+          <p:cNvSpPr txBox="1"/>
+          <p:nvPr/>
+        </p:nvSpPr>
+        <p:spPr>
+          <a:xfrm>
+            <a:off x="7114032" y="2212848"/>
+            <a:ext cx="2788920" cy="237744"/>
+          </a:xfrm>
+          <a:prstGeom prst="rect">
+            <a:avLst/>
+          </a:prstGeom>
+          <a:noFill/>
+        </p:spPr>
+        <p:txBody>
+          <a:bodyPr wrap="square" anchor="t" lIns="0" rIns="0" tIns="0" bIns="0">
+            <a:spAutoFit/>
+          </a:bodyPr>
+          <a:lstStyle/>
+          <a:p>
+            <a:pPr algn="l">
+              <a:lnSpc>
+                <a:spcPct val="118000"/>
+              </a:lnSpc>
+              <a:spcAft>
+                <a:spcPts val="0"/>
+              </a:spcAft>
+            </a:pPr>
+            <a:r>
+              <a:rPr sz="1050" b="0">
+                <a:solidFill>
+                  <a:srgbClr val="0F172A"/>
+                </a:solidFill>
+                <a:latin typeface="Inter"/>
+              </a:rPr>
+              <a:t>DMEGC INR21700-45E</a:t>
+            </a:r>
+          </a:p>
+        </p:txBody>
+      </p:sp>
+      <p:sp>
+        <p:nvSpPr>
+          <p:cNvPr id="35" name="TextBox 34"/>
+          <p:cNvSpPr txBox="1"/>
+          <p:nvPr/>
+        </p:nvSpPr>
+        <p:spPr>
+          <a:xfrm>
+            <a:off x="9893808" y="2221991"/>
+            <a:ext cx="1529791" cy="219456"/>
+          </a:xfrm>
+          <a:prstGeom prst="rect">
+            <a:avLst/>
+          </a:prstGeom>
+          <a:noFill/>
+        </p:spPr>
+        <p:txBody>
+          <a:bodyPr wrap="square" anchor="t" lIns="0" rIns="0" tIns="0" bIns="0">
+            <a:spAutoFit/>
+          </a:bodyPr>
+          <a:lstStyle/>
+          <a:p>
+            <a:pPr algn="l">
+              <a:lnSpc>
+                <a:spcPct val="118000"/>
+              </a:lnSpc>
+              <a:spcAft>
+                <a:spcPts val="0"/>
+              </a:spcAft>
+            </a:pPr>
+            <a:r>
+              <a:rPr sz="900" b="0">
+                <a:solidFill>
+                  <a:srgbClr val="475569"/>
+                </a:solidFill>
+                <a:latin typeface="Inter"/>
+              </a:rPr>
+              <a:t>alternate NMC cell, parsed</a:t>
+            </a:r>
+          </a:p>
+        </p:txBody>
+      </p:sp>
+      <p:sp>
+        <p:nvSpPr>
+          <p:cNvPr id="36" name="Oval 35"/>
+          <p:cNvSpPr/>
+          <p:nvPr/>
+        </p:nvSpPr>
+        <p:spPr>
+          <a:xfrm>
+            <a:off x="6912864" y="2642615"/>
+            <a:ext cx="82296" cy="82296"/>
+          </a:xfrm>
+          <a:prstGeom prst="ellipse">
+            <a:avLst/>
+          </a:prstGeom>
+          <a:solidFill>
+            <a:srgbClr val="0E7490"/>
+          </a:solidFill>
+          <a:ln>
+            <a:noFill/>
+          </a:ln>
+          <a:effectLst/>
+        </p:spPr>
+        <p:style>
+          <a:lnRef idx="1">
+            <a:schemeClr val="accent1"/>
+          </a:lnRef>
+          <a:fillRef idx="3">
+            <a:schemeClr val="accent1"/>
+          </a:fillRef>
+          <a:effectRef idx="2">
+            <a:schemeClr val="accent1"/>
+          </a:effectRef>
+          <a:fontRef idx="minor">
+            <a:schemeClr val="lt1"/>
+          </a:fontRef>
+        </p:style>
+        <p:txBody>
+          <a:bodyPr rtlCol="0" anchor="ctr"/>
+          <a:lstStyle/>
+          <a:p/>
+        </p:txBody>
+      </p:sp>
+      <p:sp>
+        <p:nvSpPr>
+          <p:cNvPr id="37" name="TextBox 36"/>
+          <p:cNvSpPr txBox="1"/>
+          <p:nvPr/>
+        </p:nvSpPr>
+        <p:spPr>
+          <a:xfrm>
+            <a:off x="7114032" y="2560320"/>
+            <a:ext cx="2788920" cy="237744"/>
+          </a:xfrm>
+          <a:prstGeom prst="rect">
+            <a:avLst/>
+          </a:prstGeom>
+          <a:noFill/>
+        </p:spPr>
+        <p:txBody>
+          <a:bodyPr wrap="square" anchor="t" lIns="0" rIns="0" tIns="0" bIns="0">
+            <a:spAutoFit/>
+          </a:bodyPr>
+          <a:lstStyle/>
+          <a:p>
+            <a:pPr algn="l">
+              <a:lnSpc>
+                <a:spcPct val="118000"/>
+              </a:lnSpc>
+              <a:spcAft>
+                <a:spcPts val="0"/>
+              </a:spcAft>
+            </a:pPr>
+            <a:r>
+              <a:rPr sz="1050" b="0">
+                <a:solidFill>
+                  <a:srgbClr val="0F172A"/>
+                </a:solidFill>
+                <a:latin typeface="Inter"/>
+              </a:rPr>
+              <a:t>Panasonic NCR18650B</a:t>
+            </a:r>
+          </a:p>
+        </p:txBody>
+      </p:sp>
+      <p:sp>
+        <p:nvSpPr>
+          <p:cNvPr id="38" name="TextBox 37"/>
+          <p:cNvSpPr txBox="1"/>
+          <p:nvPr/>
+        </p:nvSpPr>
+        <p:spPr>
+          <a:xfrm>
+            <a:off x="9893808" y="2569463"/>
+            <a:ext cx="1529791" cy="219456"/>
+          </a:xfrm>
+          <a:prstGeom prst="rect">
+            <a:avLst/>
+          </a:prstGeom>
+          <a:noFill/>
+        </p:spPr>
+        <p:txBody>
+          <a:bodyPr wrap="square" anchor="t" lIns="0" rIns="0" tIns="0" bIns="0">
+            <a:spAutoFit/>
+          </a:bodyPr>
+          <a:lstStyle/>
+          <a:p>
+            <a:pPr algn="l">
+              <a:lnSpc>
+                <a:spcPct val="118000"/>
+              </a:lnSpc>
+              <a:spcAft>
+                <a:spcPts val="0"/>
+              </a:spcAft>
+            </a:pPr>
+            <a:r>
+              <a:rPr sz="900" b="0">
+                <a:solidFill>
+                  <a:srgbClr val="475569"/>
+                </a:solidFill>
+                <a:latin typeface="Inter"/>
+              </a:rPr>
+              <a:t>NCA tier reference</a:t>
+            </a:r>
+          </a:p>
+        </p:txBody>
+      </p:sp>
+      <p:sp>
+        <p:nvSpPr>
+          <p:cNvPr id="39" name="Oval 38"/>
+          <p:cNvSpPr/>
+          <p:nvPr/>
+        </p:nvSpPr>
+        <p:spPr>
+          <a:xfrm>
+            <a:off x="6912864" y="2990087"/>
+            <a:ext cx="82296" cy="82296"/>
+          </a:xfrm>
+          <a:prstGeom prst="ellipse">
+            <a:avLst/>
+          </a:prstGeom>
+          <a:solidFill>
+            <a:srgbClr val="0E7490"/>
+          </a:solidFill>
+          <a:ln>
+            <a:noFill/>
+          </a:ln>
+          <a:effectLst/>
+        </p:spPr>
+        <p:style>
+          <a:lnRef idx="1">
+            <a:schemeClr val="accent1"/>
+          </a:lnRef>
+          <a:fillRef idx="3">
+            <a:schemeClr val="accent1"/>
+          </a:fillRef>
+          <a:effectRef idx="2">
+            <a:schemeClr val="accent1"/>
+          </a:effectRef>
+          <a:fontRef idx="minor">
+            <a:schemeClr val="lt1"/>
+          </a:fontRef>
+        </p:style>
+        <p:txBody>
+          <a:bodyPr rtlCol="0" anchor="ctr"/>
+          <a:lstStyle/>
+          <a:p/>
+        </p:txBody>
+      </p:sp>
+      <p:sp>
+        <p:nvSpPr>
+          <p:cNvPr id="40" name="TextBox 39"/>
+          <p:cNvSpPr txBox="1"/>
+          <p:nvPr/>
+        </p:nvSpPr>
+        <p:spPr>
+          <a:xfrm>
+            <a:off x="7114032" y="2907791"/>
+            <a:ext cx="2788920" cy="237744"/>
+          </a:xfrm>
+          <a:prstGeom prst="rect">
+            <a:avLst/>
+          </a:prstGeom>
+          <a:noFill/>
+        </p:spPr>
+        <p:txBody>
+          <a:bodyPr wrap="square" anchor="t" lIns="0" rIns="0" tIns="0" bIns="0">
+            <a:spAutoFit/>
+          </a:bodyPr>
+          <a:lstStyle/>
+          <a:p>
+            <a:pPr algn="l">
+              <a:lnSpc>
+                <a:spcPct val="118000"/>
+              </a:lnSpc>
+              <a:spcAft>
+                <a:spcPts val="0"/>
+              </a:spcAft>
+            </a:pPr>
+            <a:r>
+              <a:rPr sz="1050" b="0">
+                <a:solidFill>
+                  <a:srgbClr val="0F172A"/>
+                </a:solidFill>
+                <a:latin typeface="Inter"/>
+              </a:rPr>
+              <a:t>P3 3232 LFP 26650</a:t>
+            </a:r>
+          </a:p>
+        </p:txBody>
+      </p:sp>
+      <p:sp>
+        <p:nvSpPr>
+          <p:cNvPr id="41" name="TextBox 40"/>
+          <p:cNvSpPr txBox="1"/>
+          <p:nvPr/>
+        </p:nvSpPr>
+        <p:spPr>
+          <a:xfrm>
+            <a:off x="9893808" y="2916935"/>
+            <a:ext cx="1529791" cy="219456"/>
+          </a:xfrm>
+          <a:prstGeom prst="rect">
+            <a:avLst/>
+          </a:prstGeom>
+          <a:noFill/>
+        </p:spPr>
+        <p:txBody>
+          <a:bodyPr wrap="square" anchor="t" lIns="0" rIns="0" tIns="0" bIns="0">
+            <a:spAutoFit/>
+          </a:bodyPr>
+          <a:lstStyle/>
+          <a:p>
+            <a:pPr algn="l">
+              <a:lnSpc>
+                <a:spcPct val="118000"/>
+              </a:lnSpc>
+              <a:spcAft>
+                <a:spcPts val="0"/>
+              </a:spcAft>
+            </a:pPr>
+            <a:r>
+              <a:rPr sz="900" b="0">
+                <a:solidFill>
+                  <a:srgbClr val="475569"/>
+                </a:solidFill>
+                <a:latin typeface="Inter"/>
+              </a:rPr>
+              <a:t>LFP tier reference</a:t>
+            </a:r>
+          </a:p>
+        </p:txBody>
+      </p:sp>
+      <p:sp>
+        <p:nvSpPr>
+          <p:cNvPr id="42" name="Oval 41"/>
+          <p:cNvSpPr/>
+          <p:nvPr/>
+        </p:nvSpPr>
+        <p:spPr>
+          <a:xfrm>
+            <a:off x="6912864" y="3337559"/>
+            <a:ext cx="82296" cy="82296"/>
+          </a:xfrm>
+          <a:prstGeom prst="ellipse">
+            <a:avLst/>
+          </a:prstGeom>
+          <a:solidFill>
+            <a:srgbClr val="0E7490"/>
+          </a:solidFill>
+          <a:ln>
+            <a:noFill/>
+          </a:ln>
+          <a:effectLst/>
+        </p:spPr>
+        <p:style>
+          <a:lnRef idx="1">
+            <a:schemeClr val="accent1"/>
+          </a:lnRef>
+          <a:fillRef idx="3">
+            <a:schemeClr val="accent1"/>
+          </a:fillRef>
+          <a:effectRef idx="2">
+            <a:schemeClr val="accent1"/>
+          </a:effectRef>
+          <a:fontRef idx="minor">
+            <a:schemeClr val="lt1"/>
+          </a:fontRef>
+        </p:style>
+        <p:txBody>
+          <a:bodyPr rtlCol="0" anchor="ctr"/>
+          <a:lstStyle/>
+          <a:p/>
+        </p:txBody>
+      </p:sp>
+      <p:sp>
+        <p:nvSpPr>
+          <p:cNvPr id="43" name="TextBox 42"/>
+          <p:cNvSpPr txBox="1"/>
+          <p:nvPr/>
+        </p:nvSpPr>
+        <p:spPr>
+          <a:xfrm>
+            <a:off x="7114032" y="3255263"/>
+            <a:ext cx="2788920" cy="237744"/>
+          </a:xfrm>
+          <a:prstGeom prst="rect">
+            <a:avLst/>
+          </a:prstGeom>
+          <a:noFill/>
+        </p:spPr>
+        <p:txBody>
+          <a:bodyPr wrap="square" anchor="t" lIns="0" rIns="0" tIns="0" bIns="0">
+            <a:spAutoFit/>
+          </a:bodyPr>
+          <a:lstStyle/>
+          <a:p>
+            <a:pPr algn="l">
+              <a:lnSpc>
+                <a:spcPct val="118000"/>
+              </a:lnSpc>
+              <a:spcAft>
+                <a:spcPts val="0"/>
+              </a:spcAft>
+            </a:pPr>
+            <a:r>
+              <a:rPr sz="1050" b="0">
+                <a:solidFill>
+                  <a:srgbClr val="0F172A"/>
+                </a:solidFill>
+                <a:latin typeface="Inter"/>
+              </a:rPr>
+              <a:t>JBD SP24S007 V1.1</a:t>
+            </a:r>
+          </a:p>
+        </p:txBody>
+      </p:sp>
+      <p:sp>
+        <p:nvSpPr>
+          <p:cNvPr id="44" name="TextBox 43"/>
+          <p:cNvSpPr txBox="1"/>
+          <p:nvPr/>
+        </p:nvSpPr>
+        <p:spPr>
+          <a:xfrm>
+            <a:off x="9893808" y="3264407"/>
+            <a:ext cx="1529791" cy="219456"/>
+          </a:xfrm>
+          <a:prstGeom prst="rect">
+            <a:avLst/>
+          </a:prstGeom>
+          <a:noFill/>
+        </p:spPr>
+        <p:txBody>
+          <a:bodyPr wrap="square" anchor="t" lIns="0" rIns="0" tIns="0" bIns="0">
+            <a:spAutoFit/>
+          </a:bodyPr>
+          <a:lstStyle/>
+          <a:p>
+            <a:pPr algn="l">
+              <a:lnSpc>
+                <a:spcPct val="118000"/>
+              </a:lnSpc>
+              <a:spcAft>
+                <a:spcPts val="0"/>
+              </a:spcAft>
+            </a:pPr>
+            <a:r>
+              <a:rPr sz="900" b="0">
+                <a:solidFill>
+                  <a:srgbClr val="475569"/>
+                </a:solidFill>
+                <a:latin typeface="Inter"/>
+              </a:rPr>
+              <a:t>BMS protocol + registers</a:t>
+            </a:r>
+          </a:p>
+        </p:txBody>
+      </p:sp>
+      <p:sp>
+        <p:nvSpPr>
+          <p:cNvPr id="45" name="Rectangle 44"/>
+          <p:cNvSpPr/>
+          <p:nvPr/>
+        </p:nvSpPr>
+        <p:spPr>
+          <a:xfrm>
+            <a:off x="6693408" y="3730752"/>
+            <a:ext cx="4931359" cy="1883664"/>
+          </a:xfrm>
+          <a:prstGeom prst="rect">
+            <a:avLst/>
+          </a:prstGeom>
+          <a:solidFill>
+            <a:srgbClr val="F1F5F9"/>
+          </a:solidFill>
+          <a:ln w="9525">
+            <a:solidFill>
+              <a:srgbClr val="CBD5E1"/>
+            </a:solidFill>
+          </a:ln>
+          <a:effectLst/>
+        </p:spPr>
+        <p:style>
+          <a:lnRef idx="1">
+            <a:schemeClr val="accent1"/>
+          </a:lnRef>
+          <a:fillRef idx="3">
+            <a:schemeClr val="accent1"/>
+          </a:fillRef>
+          <a:effectRef idx="2">
+            <a:schemeClr val="accent1"/>
+          </a:effectRef>
+          <a:fontRef idx="minor">
+            <a:schemeClr val="lt1"/>
+          </a:fontRef>
+        </p:style>
+        <p:txBody>
+          <a:bodyPr rtlCol="0" anchor="ctr"/>
+          <a:lstStyle/>
+          <a:p/>
+        </p:txBody>
+      </p:sp>
+      <p:sp>
+        <p:nvSpPr>
+          <p:cNvPr id="46" name="TextBox 45"/>
+          <p:cNvSpPr txBox="1"/>
+          <p:nvPr/>
+        </p:nvSpPr>
+        <p:spPr>
+          <a:xfrm>
+            <a:off x="6894576" y="3858768"/>
+            <a:ext cx="4529023" cy="219456"/>
+          </a:xfrm>
+          <a:prstGeom prst="rect">
+            <a:avLst/>
+          </a:prstGeom>
+          <a:noFill/>
+        </p:spPr>
+        <p:txBody>
+          <a:bodyPr wrap="square" anchor="t" lIns="0" rIns="0" tIns="0" bIns="0">
+            <a:spAutoFit/>
+          </a:bodyPr>
+          <a:lstStyle/>
+          <a:p>
+            <a:pPr algn="l">
+              <a:lnSpc>
+                <a:spcPct val="118000"/>
+              </a:lnSpc>
+              <a:spcAft>
+                <a:spcPts val="0"/>
+              </a:spcAft>
+            </a:pPr>
+            <a:r>
+              <a:rPr sz="950" b="1">
+                <a:solidFill>
+                  <a:srgbClr val="B45309"/>
+                </a:solidFill>
+                <a:latin typeface="Inter"/>
+              </a:rPr>
+              <a:t>METHODS</a:t>
+            </a:r>
+          </a:p>
+        </p:txBody>
+      </p:sp>
+      <p:sp>
+        <p:nvSpPr>
+          <p:cNvPr id="47" name="TextBox 46"/>
+          <p:cNvSpPr txBox="1"/>
+          <p:nvPr/>
+        </p:nvSpPr>
+        <p:spPr>
+          <a:xfrm>
+            <a:off x="6912864" y="4151376"/>
+            <a:ext cx="4492447" cy="201168"/>
+          </a:xfrm>
+          <a:prstGeom prst="rect">
+            <a:avLst/>
+          </a:prstGeom>
+          <a:noFill/>
+        </p:spPr>
+        <p:txBody>
+          <a:bodyPr wrap="square" anchor="t" lIns="0" rIns="0" tIns="0" bIns="0">
+            <a:spAutoFit/>
+          </a:bodyPr>
+          <a:lstStyle/>
+          <a:p>
+            <a:pPr algn="l">
+              <a:lnSpc>
+                <a:spcPct val="118000"/>
+              </a:lnSpc>
+              <a:spcAft>
+                <a:spcPts val="0"/>
+              </a:spcAft>
+            </a:pPr>
+            <a:r>
+              <a:rPr sz="1050" b="1">
+                <a:solidFill>
+                  <a:srgbClr val="0F172A"/>
+                </a:solidFill>
+                <a:latin typeface="Inter"/>
+              </a:rPr>
+              <a:t>Chen, T. &amp; Guestrin, C.</a:t>
+            </a:r>
+          </a:p>
+        </p:txBody>
+      </p:sp>
+      <p:sp>
+        <p:nvSpPr>
+          <p:cNvPr id="48" name="TextBox 47"/>
+          <p:cNvSpPr txBox="1"/>
+          <p:nvPr/>
+        </p:nvSpPr>
+        <p:spPr>
+          <a:xfrm>
+            <a:off x="6912864" y="4325112"/>
+            <a:ext cx="4492447" cy="201168"/>
+          </a:xfrm>
+          <a:prstGeom prst="rect">
+            <a:avLst/>
+          </a:prstGeom>
+          <a:noFill/>
+        </p:spPr>
+        <p:txBody>
+          <a:bodyPr wrap="square" anchor="t" lIns="0" rIns="0" tIns="0" bIns="0">
+            <a:spAutoFit/>
+          </a:bodyPr>
+          <a:lstStyle/>
+          <a:p>
+            <a:pPr algn="l">
+              <a:lnSpc>
+                <a:spcPct val="118000"/>
+              </a:lnSpc>
+              <a:spcAft>
+                <a:spcPts val="0"/>
+              </a:spcAft>
+            </a:pPr>
+            <a:r>
+              <a:rPr sz="900" b="0">
+                <a:solidFill>
+                  <a:srgbClr val="475569"/>
+                </a:solidFill>
+                <a:latin typeface="Inter"/>
+              </a:rPr>
+              <a:t>“XGBoost: A Scalable Tree Boosting System”, KDD 2016</a:t>
+            </a:r>
+          </a:p>
+        </p:txBody>
+      </p:sp>
+      <p:sp>
+        <p:nvSpPr>
+          <p:cNvPr id="49" name="TextBox 48"/>
+          <p:cNvSpPr txBox="1"/>
+          <p:nvPr/>
+        </p:nvSpPr>
+        <p:spPr>
+          <a:xfrm>
+            <a:off x="6912864" y="4517136"/>
+            <a:ext cx="4492447" cy="201168"/>
+          </a:xfrm>
+          <a:prstGeom prst="rect">
+            <a:avLst/>
+          </a:prstGeom>
+          <a:noFill/>
+        </p:spPr>
+        <p:txBody>
+          <a:bodyPr wrap="square" anchor="t" lIns="0" rIns="0" tIns="0" bIns="0">
+            <a:spAutoFit/>
+          </a:bodyPr>
+          <a:lstStyle/>
+          <a:p>
+            <a:pPr algn="l">
+              <a:lnSpc>
+                <a:spcPct val="118000"/>
+              </a:lnSpc>
+              <a:spcAft>
+                <a:spcPts val="0"/>
+              </a:spcAft>
+            </a:pPr>
+            <a:r>
+              <a:rPr sz="1050" b="1">
+                <a:solidFill>
+                  <a:srgbClr val="0F172A"/>
+                </a:solidFill>
+                <a:latin typeface="Inter"/>
+              </a:rPr>
+              <a:t>Liu, F. T., Ting, K. M. &amp; Zhou, Z.-H.</a:t>
+            </a:r>
+          </a:p>
+        </p:txBody>
+      </p:sp>
+      <p:sp>
+        <p:nvSpPr>
+          <p:cNvPr id="50" name="TextBox 49"/>
+          <p:cNvSpPr txBox="1"/>
+          <p:nvPr/>
+        </p:nvSpPr>
+        <p:spPr>
+          <a:xfrm>
+            <a:off x="6912864" y="4690872"/>
+            <a:ext cx="4492447" cy="201168"/>
+          </a:xfrm>
+          <a:prstGeom prst="rect">
+            <a:avLst/>
+          </a:prstGeom>
+          <a:noFill/>
+        </p:spPr>
+        <p:txBody>
+          <a:bodyPr wrap="square" anchor="t" lIns="0" rIns="0" tIns="0" bIns="0">
+            <a:spAutoFit/>
+          </a:bodyPr>
+          <a:lstStyle/>
+          <a:p>
+            <a:pPr algn="l">
+              <a:lnSpc>
+                <a:spcPct val="118000"/>
+              </a:lnSpc>
+              <a:spcAft>
+                <a:spcPts val="0"/>
+              </a:spcAft>
+            </a:pPr>
+            <a:r>
+              <a:rPr sz="900" b="0">
+                <a:solidFill>
+                  <a:srgbClr val="475569"/>
+                </a:solidFill>
+                <a:latin typeface="Inter"/>
+              </a:rPr>
+              <a:t>“Isolation Forest”, ICDM 2008</a:t>
+            </a:r>
+          </a:p>
+        </p:txBody>
+      </p:sp>
+      <p:sp>
+        <p:nvSpPr>
+          <p:cNvPr id="51" name="TextBox 50"/>
+          <p:cNvSpPr txBox="1"/>
+          <p:nvPr/>
+        </p:nvSpPr>
+        <p:spPr>
+          <a:xfrm>
+            <a:off x="6912864" y="4882896"/>
+            <a:ext cx="4492447" cy="201168"/>
+          </a:xfrm>
+          <a:prstGeom prst="rect">
+            <a:avLst/>
+          </a:prstGeom>
+          <a:noFill/>
+        </p:spPr>
+        <p:txBody>
+          <a:bodyPr wrap="square" anchor="t" lIns="0" rIns="0" tIns="0" bIns="0">
+            <a:spAutoFit/>
+          </a:bodyPr>
+          <a:lstStyle/>
+          <a:p>
+            <a:pPr algn="l">
+              <a:lnSpc>
+                <a:spcPct val="118000"/>
+              </a:lnSpc>
+              <a:spcAft>
+                <a:spcPts val="0"/>
+              </a:spcAft>
+            </a:pPr>
+            <a:r>
+              <a:rPr sz="1050" b="1">
+                <a:solidFill>
+                  <a:srgbClr val="0F172A"/>
+                </a:solidFill>
+                <a:latin typeface="Inter"/>
+              </a:rPr>
+              <a:t>Vaswani, A. et al.</a:t>
+            </a:r>
+          </a:p>
+        </p:txBody>
+      </p:sp>
+      <p:sp>
+        <p:nvSpPr>
+          <p:cNvPr id="52" name="TextBox 51"/>
+          <p:cNvSpPr txBox="1"/>
+          <p:nvPr/>
+        </p:nvSpPr>
+        <p:spPr>
+          <a:xfrm>
+            <a:off x="6912864" y="5056632"/>
+            <a:ext cx="4492447" cy="201168"/>
+          </a:xfrm>
+          <a:prstGeom prst="rect">
+            <a:avLst/>
+          </a:prstGeom>
+          <a:noFill/>
+        </p:spPr>
+        <p:txBody>
+          <a:bodyPr wrap="square" anchor="t" lIns="0" rIns="0" tIns="0" bIns="0">
+            <a:spAutoFit/>
+          </a:bodyPr>
+          <a:lstStyle/>
+          <a:p>
+            <a:pPr algn="l">
+              <a:lnSpc>
+                <a:spcPct val="118000"/>
+              </a:lnSpc>
+              <a:spcAft>
+                <a:spcPts val="0"/>
+              </a:spcAft>
+            </a:pPr>
+            <a:r>
+              <a:rPr sz="900" b="0">
+                <a:solidFill>
+                  <a:srgbClr val="475569"/>
+                </a:solidFill>
+                <a:latin typeface="Inter"/>
+              </a:rPr>
+              <a:t>“Attention Is All You Need”, NeurIPS 2017</a:t>
+            </a:r>
+          </a:p>
+        </p:txBody>
+      </p:sp>
+      <p:sp>
+        <p:nvSpPr>
+          <p:cNvPr id="53" name="TextBox 52"/>
+          <p:cNvSpPr txBox="1"/>
+          <p:nvPr/>
+        </p:nvSpPr>
+        <p:spPr>
+          <a:xfrm>
+            <a:off x="6912864" y="5248656"/>
+            <a:ext cx="4492447" cy="201168"/>
+          </a:xfrm>
+          <a:prstGeom prst="rect">
+            <a:avLst/>
+          </a:prstGeom>
+          <a:noFill/>
+        </p:spPr>
+        <p:txBody>
+          <a:bodyPr wrap="square" anchor="t" lIns="0" rIns="0" tIns="0" bIns="0">
+            <a:spAutoFit/>
+          </a:bodyPr>
+          <a:lstStyle/>
+          <a:p>
+            <a:pPr algn="l">
+              <a:lnSpc>
+                <a:spcPct val="118000"/>
+              </a:lnSpc>
+              <a:spcAft>
+                <a:spcPts val="0"/>
+              </a:spcAft>
+            </a:pPr>
+            <a:r>
+              <a:rPr sz="1050" b="1">
+                <a:solidFill>
+                  <a:srgbClr val="0F172A"/>
+                </a:solidFill>
+                <a:latin typeface="Inter"/>
+              </a:rPr>
+              <a:t>Pedregosa, F. et al.</a:t>
+            </a:r>
+          </a:p>
+        </p:txBody>
+      </p:sp>
+      <p:sp>
+        <p:nvSpPr>
+          <p:cNvPr id="54" name="TextBox 53"/>
+          <p:cNvSpPr txBox="1"/>
+          <p:nvPr/>
+        </p:nvSpPr>
+        <p:spPr>
+          <a:xfrm>
+            <a:off x="6912864" y="5422392"/>
+            <a:ext cx="4492447" cy="201168"/>
+          </a:xfrm>
+          <a:prstGeom prst="rect">
+            <a:avLst/>
+          </a:prstGeom>
+          <a:noFill/>
+        </p:spPr>
+        <p:txBody>
+          <a:bodyPr wrap="square" anchor="t" lIns="0" rIns="0" tIns="0" bIns="0">
+            <a:spAutoFit/>
+          </a:bodyPr>
+          <a:lstStyle/>
+          <a:p>
+            <a:pPr algn="l">
+              <a:lnSpc>
+                <a:spcPct val="118000"/>
+              </a:lnSpc>
+              <a:spcAft>
+                <a:spcPts val="0"/>
+              </a:spcAft>
+            </a:pPr>
+            <a:r>
+              <a:rPr sz="900" b="0">
+                <a:solidFill>
+                  <a:srgbClr val="475569"/>
+                </a:solidFill>
+                <a:latin typeface="Inter"/>
+              </a:rPr>
+              <a:t>“Scikit-learn: Machine Learning in Python”, JMLR 12, 2011</a:t>
+            </a:r>
+          </a:p>
+        </p:txBody>
+      </p:sp>
+      <p:sp>
+        <p:nvSpPr>
+          <p:cNvPr id="55" name="TextBox 54"/>
+          <p:cNvSpPr txBox="1"/>
+          <p:nvPr/>
+        </p:nvSpPr>
+        <p:spPr>
+          <a:xfrm>
+            <a:off x="6693408" y="5760720"/>
+            <a:ext cx="4931359" cy="219456"/>
+          </a:xfrm>
+          <a:prstGeom prst="rect">
+            <a:avLst/>
+          </a:prstGeom>
+          <a:noFill/>
+        </p:spPr>
+        <p:txBody>
+          <a:bodyPr wrap="square" anchor="t" lIns="0" rIns="0" tIns="0" bIns="0">
+            <a:spAutoFit/>
+          </a:bodyPr>
+          <a:lstStyle/>
+          <a:p>
+            <a:pPr algn="l">
+              <a:lnSpc>
+                <a:spcPct val="118000"/>
+              </a:lnSpc>
+              <a:spcAft>
+                <a:spcPts val="0"/>
+              </a:spcAft>
+            </a:pPr>
+            <a:r>
+              <a:rPr sz="950" b="1">
+                <a:solidFill>
+                  <a:srgbClr val="475569"/>
+                </a:solidFill>
+                <a:latin typeface="Inter"/>
+              </a:rPr>
+              <a:t>STACK</a:t>
+            </a:r>
+          </a:p>
+        </p:txBody>
+      </p:sp>
+      <p:sp>
+        <p:nvSpPr>
+          <p:cNvPr id="56" name="TextBox 55"/>
+          <p:cNvSpPr txBox="1"/>
+          <p:nvPr/>
+        </p:nvSpPr>
+        <p:spPr>
+          <a:xfrm>
+            <a:off x="6693408" y="5998464"/>
+            <a:ext cx="4931359" cy="475488"/>
+          </a:xfrm>
+          <a:prstGeom prst="rect">
+            <a:avLst/>
+          </a:prstGeom>
+          <a:noFill/>
+        </p:spPr>
+        <p:txBody>
+          <a:bodyPr wrap="square" anchor="t" lIns="0" rIns="0" tIns="0" bIns="0">
+            <a:spAutoFit/>
+          </a:bodyPr>
+          <a:lstStyle/>
+          <a:p>
+            <a:pPr algn="l">
+              <a:lnSpc>
+                <a:spcPct val="132000"/>
+              </a:lnSpc>
+              <a:spcAft>
+                <a:spcPts val="0"/>
+              </a:spcAft>
+            </a:pPr>
+            <a:r>
+              <a:rPr sz="900" b="0">
+                <a:solidFill>
+                  <a:srgbClr val="475569"/>
+                </a:solidFill>
+                <a:latin typeface="Inter"/>
+              </a:rPr>
+              <a:t>xgboost 3.2.0  ·  scikit-learn 1.9.1  ·  torch 2.14.0  ·  numpy 2.4.6
+bleak  ·  Flask  ·  PostgreSQL  ·  Cloudflare Tunnel  ·  MATLAB / Simulink</a:t>
             </a:r>
           </a:p>
         </p:txBody>

--- a/AI_PBMS_Full_Deck.pptx
+++ b/AI_PBMS_Full_Deck.pptx
@@ -2592,37 +2592,52 @@
           </a:p>
           <a:p>
             <a:r>
-              <a:t>Transformer edges us by under a point — but only because it is fed a sixty-row</a:t>
-            </a:r>
-          </a:p>
-          <a:p>
-            <a:r>
-              <a:t>window, sixty times the input per prediction. On our hardware that window is</a:t>
-            </a:r>
-          </a:p>
-          <a:p>
-            <a:r>
-              <a:t>disqualifying. At one hertz it is blind for a full minute after every restart,</a:t>
-            </a:r>
-          </a:p>
-          <a:p>
-            <a:r>
-              <a:t>its positional encoding pins the input at exactly sixty rows, torch is five times</a:t>
-            </a:r>
-          </a:p>
-          <a:p>
-            <a:r>
-              <a:t>the runtime footprint of xgboost on the Pi, and it gives no per-feature</a:t>
-            </a:r>
-          </a:p>
-          <a:p>
-            <a:r>
-              <a:t>attribution an engineer can audit. XGBoost predicts from a single row, instantly,</a:t>
-            </a:r>
-          </a:p>
-          <a:p>
-            <a:r>
-              <a:t>explains itself, and retrains from the browser. That is why it ships.</a:t>
+              <a:t>Transformer edges us by under a point — but look at what it costs. Both models</a:t>
+            </a:r>
+          </a:p>
+          <a:p>
+            <a:r>
+              <a:t>sit behind the same sixty-row buffer in our pipeline. The difference is that</a:t>
+            </a:r>
+          </a:p>
+          <a:p>
+            <a:r>
+              <a:t>XGBoost only eats the last row of it, and its deepest feature is a ten-sample</a:t>
+            </a:r>
+          </a:p>
+          <a:p>
+            <a:r>
+              <a:t>rolling window, so that sixty is a constant we chose and could shorten to ten</a:t>
+            </a:r>
+          </a:p>
+          <a:p>
+            <a:r>
+              <a:t>tomorrow. The Transformer eats all sixty, and its positional encoding fixes that</a:t>
+            </a:r>
+          </a:p>
+          <a:p>
+            <a:r>
+              <a:t>length inside the weights — you cannot shorten it without retraining. On top of</a:t>
+            </a:r>
+          </a:p>
+          <a:p>
+            <a:r>
+              <a:t>that, torch is five times the runtime footprint of xgboost on the Pi, it gives no</a:t>
+            </a:r>
+          </a:p>
+          <a:p>
+            <a:r>
+              <a:t>per-feature attribution an engineer can audit, and it cannot be retrained from</a:t>
+            </a:r>
+          </a:p>
+          <a:p>
+            <a:r>
+              <a:t>the browser the way our configurator retrains XGBoost today. That is why it</a:t>
+            </a:r>
+          </a:p>
+          <a:p>
+            <a:r>
+              <a:t>ships.</a:t>
             </a:r>
           </a:p>
         </p:txBody>
@@ -23631,7 +23646,7 @@
                 </a:solidFill>
                 <a:latin typeface="Inter"/>
               </a:rPr>
-              <a:t>Deployed — 1 row, no buffer</a:t>
+              <a:t>Deployed — 1-row input, 10-row context</a:t>
             </a:r>
           </a:p>
         </p:txBody>
@@ -23967,7 +23982,7 @@
                 </a:solidFill>
                 <a:latin typeface="Inter"/>
               </a:rPr>
-              <a:t>Edges accuracy; 60-row buffer</a:t>
+              <a:t>+0.92% acc; 60 rows locked in</a:t>
             </a:r>
           </a:p>
         </p:txBody>
@@ -25332,8 +25347,8 @@
         </p:blipFill>
         <p:spPr>
           <a:xfrm>
-            <a:off x="4092368" y="4443983"/>
-            <a:ext cx="4006958" cy="1463040"/>
+            <a:off x="4107213" y="4443983"/>
+            <a:ext cx="3977268" cy="1463040"/>
           </a:xfrm>
           <a:prstGeom prst="rect">
             <a:avLst/>
@@ -25377,7 +25392,7 @@
                 </a:solidFill>
                 <a:latin typeface="Inter"/>
               </a:rPr>
-              <a:t>All six trained and scored on the identical 30,000-row held-out split with the same 51 features; latency is the median single-row prediction on a 4-core CPU, not a Pi 5. The Transformer additionally receives a 60-row lookback window — 60× the input per prediction — which is where its 0.92-point accuracy edge comes from, and also why it cannot run on our hardware. SVM trained on a stratified 20k subsample: full-data RBF did not converge.</a:t>
+              <a:t>All six trained and scored on the identical 30,000-row held-out split with the same 51 features; latency is the median single-row prediction on a 4-core CPU, not a Pi 5. Both models sit behind the same 60-row pipeline buffer, but XGBoost consumes only the last row and its deepest feature is a 10-sample rolling window, so that 60 is a constant we chose; the Transformer consumes all 60 and its positional encoding fixes the length in the weights. SVM trained on a stratified 20k subsample: full-data RBF did not converge.</a:t>
             </a:r>
           </a:p>
         </p:txBody>

--- a/AI_PBMS_Full_Deck.pptx
+++ b/AI_PBMS_Full_Deck.pptx
@@ -937,12 +937,12 @@
           </a:p>
           <a:p>
             <a:r>
-              <a:t>four thermistors, pack voltage and current. The Pi 5 runs the logger, the</a:t>
-            </a:r>
-          </a:p>
-          <a:p>
-            <a:r>
-              <a:t>inference and the dashboard. Inference sits at the edge deliberately — push it</a:t>
+              <a:t>four thermistors, pack voltage and current. The Pi 5 runs the logger and the</a:t>
+            </a:r>
+          </a:p>
+          <a:p>
+            <a:r>
+              <a:t>inference. Inference sits at the edge deliberately — push it</a:t>
             </a:r>
           </a:p>
           <a:p>
@@ -1042,32 +1042,32 @@
           </a:p>
           <a:p>
             <a:r>
-              <a:t>needs the network to keep the battery safe. In the middle, a Flask service</a:t>
-            </a:r>
-          </a:p>
-          <a:p>
-            <a:r>
-              <a:t>exposes REST and server-sent events, with PostgreSQL holding telemetry, cycle</a:t>
-            </a:r>
-          </a:p>
-          <a:p>
-            <a:r>
-              <a:t>history and the active chemistry profile. On the right, three browser surfaces.</a:t>
-            </a:r>
-          </a:p>
-          <a:p>
-            <a:r>
-              <a:t>All of it goes out through a Cloudflare tunnel, which means we never open an</a:t>
-            </a:r>
-          </a:p>
-          <a:p>
-            <a:r>
-              <a:t>inbound port on the Pi — a reviewer can open the dashboard from anywhere and the</a:t>
-            </a:r>
-          </a:p>
-          <a:p>
-            <a:r>
-              <a:t>attack surface stays closed.</a:t>
+              <a:t>needs the network to keep the battery safe. In the middle, Railway hosts the Flask</a:t>
+            </a:r>
+          </a:p>
+          <a:p>
+            <a:r>
+              <a:t>dashboard — REST and server-sent events — with PostgreSQL holding telemetry,</a:t>
+            </a:r>
+          </a:p>
+          <a:p>
+            <a:r>
+              <a:t>cycle history and the active chemistry profile. On the right, three browser surfaces.</a:t>
+            </a:r>
+          </a:p>
+          <a:p>
+            <a:r>
+              <a:t>The Pi pushes results up to Railway, which means we never open an</a:t>
+            </a:r>
+          </a:p>
+          <a:p>
+            <a:r>
+              <a:t>inbound port on the pack — a reviewer can open the dashboard from anywhere and</a:t>
+            </a:r>
+          </a:p>
+          <a:p>
+            <a:r>
+              <a:t>the attack surface on the hardware stays closed.</a:t>
             </a:r>
           </a:p>
         </p:txBody>
@@ -1137,7 +1137,7 @@
           <a:lstStyle/>
           <a:p>
             <a:r>
-              <a:t>The dashboard is Flask on the Pi, published through a Cloudflare tunnel. It is</a:t>
+              <a:t>The dashboard is a Flask service on Railway, fed by the Pi. It is</a:t>
             </a:r>
           </a:p>
           <a:p>
@@ -8789,7 +8789,7 @@
                 </a:solidFill>
                 <a:latin typeface="Inter"/>
               </a:rPr>
-              <a:t>Zynq-7000 SoC moves the same tree traversal into programmable logic, freeing the CPU for the dashboard and the BLE link.</a:t>
+              <a:t>Zynq-7000 SoC moves the same tree traversal into programmable logic, freeing the CPU for the logger and the BLE link.</a:t>
             </a:r>
           </a:p>
         </p:txBody>
@@ -9591,7 +9591,7 @@
                 </a:solidFill>
                 <a:latin typeface="Inter"/>
               </a:rPr>
-              <a:t>SERVICE</a:t>
+              <a:t>CLOUD</a:t>
             </a:r>
           </a:p>
         </p:txBody>
@@ -9633,7 +9633,7 @@
                 </a:solidFill>
                 <a:latin typeface="Inter"/>
               </a:rPr>
-              <a:t>Flask exposes REST and server-sent events; PostgreSQL holds telemetry, cycle history and the active chemistry profile.</a:t>
+              <a:t>Railway hosts the Flask dashboard — REST and server-sent events — with PostgreSQL for telemetry, cycle history and the active profile.</a:t>
             </a:r>
           </a:p>
         </p:txBody>
@@ -9803,7 +9803,7 @@
                 </a:solidFill>
                 <a:latin typeface="Inter"/>
               </a:rPr>
-              <a:t>Three browser surfaces over one Cloudflare tunnel — no inbound port is ever opened on the Pi.</a:t>
+              <a:t>Three browser surfaces served from Railway; the Pi only ever dials out, so no inbound port is opened on the pack.</a:t>
             </a:r>
           </a:p>
         </p:txBody>
@@ -10087,7 +10087,7 @@
                 </a:solidFill>
                 <a:latin typeface="Inter"/>
               </a:rPr>
-              <a:t>Flask on the Pi, exposed over a Cloudflare tunnel.</a:t>
+              <a:t>Flask dashboard deployed on Railway.</a:t>
             </a:r>
           </a:p>
           <a:p>
@@ -15343,7 +15343,7 @@
                 </a:solidFill>
                 <a:latin typeface="Inter"/>
               </a:rPr>
-              <a:t>Tree traversal in programmable logic frees the CPU for the dashboard and the BLE link.</a:t>
+              <a:t>Tree traversal in programmable logic frees the CPU for the logger and the BLE link.</a:t>
             </a:r>
           </a:p>
         </p:txBody>
@@ -18077,7 +18077,7 @@
                 <a:latin typeface="Inter"/>
               </a:rPr>
               <a:t>xgboost 3.2.0  ·  scikit-learn 1.9.1  ·  torch 2.14.0  ·  numpy 2.4.6
-bleak  ·  Flask  ·  PostgreSQL  ·  Cloudflare Tunnel  ·  MATLAB / Simulink</a:t>
+bleak  ·  Flask  ·  PostgreSQL  ·  Railway  ·  MATLAB / Simulink</a:t>
             </a:r>
           </a:p>
         </p:txBody>

--- a/AI_PBMS_Full_Deck.pptx
+++ b/AI_PBMS_Full_Deck.pptx
@@ -26,6 +26,7 @@
     <p:sldId id="274" r:id="rId26"/>
     <p:sldId id="275" r:id="rId27"/>
     <p:sldId id="276" r:id="rId28"/>
+    <p:sldId id="277" r:id="rId29"/>
   </p:sldIdLst>
   <p:sldSz cx="12191695" cy="6858000" type="screen4x3"/>
   <p:notesSz cx="6858000" cy="9144000"/>
@@ -932,37 +933,72 @@
           <a:lstStyle/>
           <a:p>
             <a:r>
-              <a:t>Three tiers, each doing what the others cannot. The JBD BMS senses: eight taps,</a:t>
-            </a:r>
-          </a:p>
-          <a:p>
-            <a:r>
-              <a:t>four thermistors, pack voltage and current. The Pi 5 runs the logger and the</a:t>
-            </a:r>
-          </a:p>
-          <a:p>
-            <a:r>
-              <a:t>inference. Inference sits at the edge deliberately — push it</a:t>
-            </a:r>
-          </a:p>
-          <a:p>
-            <a:r>
-              <a:t>to a server and every network hiccup becomes an unmonitored window. The third</a:t>
-            </a:r>
-          </a:p>
-          <a:p>
-            <a:r>
-              <a:t>tier exists because general-purpose computers hang. An Arduino on its own rail</a:t>
-            </a:r>
-          </a:p>
-          <a:p>
-            <a:r>
-              <a:t>watches for a heartbeat and pulls the Pi's RUN pin if it stops. Zynq-7000 is our</a:t>
-            </a:r>
-          </a:p>
-          <a:p>
-            <a:r>
-              <a:t>path to take inference off the CPU entirely.</a:t>
+              <a:t>This is the whole fault path on one slide. Five stages. Acquisition: the BMS</a:t>
+            </a:r>
+          </a:p>
+          <a:p>
+            <a:r>
+              <a:t>senses, BLE carries it at one hertz, and we reject any row that is NaN or all</a:t>
+            </a:r>
+          </a:p>
+          <a:p>
+            <a:r>
+              <a:t>zeros before it reaches the model. Context: we resolve the operating mode first,</a:t>
+            </a:r>
+          </a:p>
+          <a:p>
+            <a:r>
+              <a:t>because a voltage sag under acceleration is normal and the same sag at idle is a</a:t>
+            </a:r>
+          </a:p>
+          <a:p>
+            <a:r>
+              <a:t>fault — the mode flags are twelve percent of the model's gain. Detection: the</a:t>
+            </a:r>
+          </a:p>
+          <a:p>
+            <a:r>
+              <a:t>IsolationForest gate runs before the classifier, so an unfamiliar window is</a:t>
+            </a:r>
+          </a:p>
+          <a:p>
+            <a:r>
+              <a:t>escalated rather than forced into one of six labels. Risk: the class probability</a:t>
+            </a:r>
+          </a:p>
+          <a:p>
+            <a:r>
+              <a:t>is multiplied by a physical severity derived from how far past the datasheet</a:t>
+            </a:r>
+          </a:p>
+          <a:p>
+            <a:r>
+              <a:t>warning limit we are, raised further if the fault persists. Action: corrective</a:t>
+            </a:r>
+          </a:p>
+          <a:p>
+            <a:r>
+              <a:t>instruction, logged alert, and comparison against the cycle history. And</a:t>
+            </a:r>
+          </a:p>
+          <a:p>
+            <a:r>
+              <a:t>underneath all of it, the lane that does not depend on any of this — the JBD</a:t>
+            </a:r>
+          </a:p>
+          <a:p>
+            <a:r>
+              <a:t>protection logic switching the MOSFETs at the pack, and the Arduino watchdog that</a:t>
+            </a:r>
+          </a:p>
+          <a:p>
+            <a:r>
+              <a:t>resets the Pi. If every line of our software failed, that lane still opens the</a:t>
+            </a:r>
+          </a:p>
+          <a:p>
+            <a:r>
+              <a:t>contactor.</a:t>
             </a:r>
           </a:p>
         </p:txBody>
@@ -1032,42 +1068,37 @@
           <a:lstStyle/>
           <a:p>
             <a:r>
-              <a:t>This is the whole system on one slide. Three columns. On the edge, sampling,</a:t>
-            </a:r>
-          </a:p>
-          <a:p>
-            <a:r>
-              <a:t>feature engineering and inference all happen on the pack itself — the Pi never</a:t>
-            </a:r>
-          </a:p>
-          <a:p>
-            <a:r>
-              <a:t>needs the network to keep the battery safe. In the middle, Railway hosts the Flask</a:t>
-            </a:r>
-          </a:p>
-          <a:p>
-            <a:r>
-              <a:t>dashboard — REST and server-sent events — with PostgreSQL holding telemetry,</a:t>
-            </a:r>
-          </a:p>
-          <a:p>
-            <a:r>
-              <a:t>cycle history and the active chemistry profile. On the right, three browser surfaces.</a:t>
-            </a:r>
-          </a:p>
-          <a:p>
-            <a:r>
-              <a:t>The Pi pushes results up to Railway, which means we never open an</a:t>
-            </a:r>
-          </a:p>
-          <a:p>
-            <a:r>
-              <a:t>inbound port on the pack — a reviewer can open the dashboard from anywhere and</a:t>
-            </a:r>
-          </a:p>
-          <a:p>
-            <a:r>
-              <a:t>the attack surface on the hardware stays closed.</a:t>
+              <a:t>Three tiers, each doing what the others cannot. The JBD BMS senses: eight taps,</a:t>
+            </a:r>
+          </a:p>
+          <a:p>
+            <a:r>
+              <a:t>four thermistors, pack voltage and current. The Pi 5 runs the logger and the</a:t>
+            </a:r>
+          </a:p>
+          <a:p>
+            <a:r>
+              <a:t>inference. Inference sits at the edge deliberately — push it</a:t>
+            </a:r>
+          </a:p>
+          <a:p>
+            <a:r>
+              <a:t>to a server and every network hiccup becomes an unmonitored window. The third</a:t>
+            </a:r>
+          </a:p>
+          <a:p>
+            <a:r>
+              <a:t>tier exists because general-purpose computers hang. An Arduino on its own rail</a:t>
+            </a:r>
+          </a:p>
+          <a:p>
+            <a:r>
+              <a:t>watches for a heartbeat and pulls the Pi's RUN pin if it stops. Zynq-7000 is our</a:t>
+            </a:r>
+          </a:p>
+          <a:p>
+            <a:r>
+              <a:t>path to take inference off the CPU entirely.</a:t>
             </a:r>
           </a:p>
         </p:txBody>
@@ -1137,37 +1168,42 @@
           <a:lstStyle/>
           <a:p>
             <a:r>
-              <a:t>The dashboard is a Flask service on Railway, fed by the Pi. It is</a:t>
-            </a:r>
-          </a:p>
-          <a:p>
-            <a:r>
-              <a:t>operator-facing, not engineer-facing: live per-cell voltages, pack current with</a:t>
-            </a:r>
-          </a:p>
-          <a:p>
-            <a:r>
-              <a:t>direction, four thermal zones, and a charge or discharge ETA smoothed with an</a:t>
-            </a:r>
-          </a:p>
-          <a:p>
-            <a:r>
-              <a:t>EMA so it does not jitter. The piece worth noting is driving context. Four modes</a:t>
-            </a:r>
-          </a:p>
-          <a:p>
-            <a:r>
-              <a:t>from the change in current magnitude between samples — because a voltage sag</a:t>
-            </a:r>
-          </a:p>
-          <a:p>
-            <a:r>
-              <a:t>under hard acceleration is normal, and the same sag at idle is a fault.</a:t>
-            </a:r>
-          </a:p>
-          <a:p>
-            <a:r>
-              <a:t>Thresholds follow the mode.</a:t>
+              <a:t>This is the whole system on one slide. Three columns. On the edge, sampling,</a:t>
+            </a:r>
+          </a:p>
+          <a:p>
+            <a:r>
+              <a:t>feature engineering and inference all happen on the pack itself — the Pi never</a:t>
+            </a:r>
+          </a:p>
+          <a:p>
+            <a:r>
+              <a:t>needs the network to keep the battery safe. In the middle, Railway hosts the Flask</a:t>
+            </a:r>
+          </a:p>
+          <a:p>
+            <a:r>
+              <a:t>dashboard — REST and server-sent events — with PostgreSQL holding telemetry,</a:t>
+            </a:r>
+          </a:p>
+          <a:p>
+            <a:r>
+              <a:t>cycle history and the active chemistry profile. On the right, three browser surfaces.</a:t>
+            </a:r>
+          </a:p>
+          <a:p>
+            <a:r>
+              <a:t>The Pi pushes results up to Railway, which means we never open an</a:t>
+            </a:r>
+          </a:p>
+          <a:p>
+            <a:r>
+              <a:t>inbound port on the pack — a reviewer can open the dashboard from anywhere and</a:t>
+            </a:r>
+          </a:p>
+          <a:p>
+            <a:r>
+              <a:t>the attack surface on the hardware stays closed.</a:t>
             </a:r>
           </a:p>
         </p:txBody>
@@ -1237,42 +1273,37 @@
           <a:lstStyle/>
           <a:p>
             <a:r>
-              <a:t>Two things the model leans on that are easy to overlook. First, thermal</a:t>
-            </a:r>
-          </a:p>
-          <a:p>
-            <a:r>
-              <a:t>resolution: the four thermistors diverge by as much as eight point three degrees</a:t>
-            </a:r>
-          </a:p>
-          <a:p>
-            <a:r>
-              <a:t>within a single pack, and that spread goes into the model as a feature rather</a:t>
-            </a:r>
-          </a:p>
-          <a:p>
-            <a:r>
-              <a:t>than just onto the dashboard. Second, operating mode, set from the change in</a:t>
-            </a:r>
-          </a:p>
-          <a:p>
-            <a:r>
-              <a:t>current magnitude with a five-sample hysteresis so it does not flap on noise.</a:t>
-            </a:r>
-          </a:p>
-          <a:p>
-            <a:r>
-              <a:t>Together, the mode flags and the thermal spread account for nearly a fifth of</a:t>
-            </a:r>
-          </a:p>
-          <a:p>
-            <a:r>
-              <a:t>the model's total gain. That is context the pack-level sensors alone could never</a:t>
-            </a:r>
-          </a:p>
-          <a:p>
-            <a:r>
-              <a:t>give us.</a:t>
+              <a:t>The dashboard is a Flask service on Railway, fed by the Pi. It is</a:t>
+            </a:r>
+          </a:p>
+          <a:p>
+            <a:r>
+              <a:t>operator-facing, not engineer-facing: live per-cell voltages, pack current with</a:t>
+            </a:r>
+          </a:p>
+          <a:p>
+            <a:r>
+              <a:t>direction, four thermal zones, and a charge or discharge ETA smoothed with an</a:t>
+            </a:r>
+          </a:p>
+          <a:p>
+            <a:r>
+              <a:t>EMA so it does not jitter. The piece worth noting is driving context. Four modes</a:t>
+            </a:r>
+          </a:p>
+          <a:p>
+            <a:r>
+              <a:t>from the change in current magnitude between samples — because a voltage sag</a:t>
+            </a:r>
+          </a:p>
+          <a:p>
+            <a:r>
+              <a:t>under hard acceleration is normal, and the same sag at idle is a fault.</a:t>
+            </a:r>
+          </a:p>
+          <a:p>
+            <a:r>
+              <a:t>Thresholds follow the mode.</a:t>
             </a:r>
           </a:p>
         </p:txBody>
@@ -1342,42 +1373,42 @@
           <a:lstStyle/>
           <a:p>
             <a:r>
-              <a:t>The last analytical layer is prognosis. We keep a history of every cycle the</a:t>
-            </a:r>
-          </a:p>
-          <a:p>
-            <a:r>
-              <a:t>pack has run — thirty-nine so far, twenty-one discharge and eighteen charge, all</a:t>
-            </a:r>
-          </a:p>
-          <a:p>
-            <a:r>
-              <a:t>scoring one point zero on data quality. For each live cycle the system computes</a:t>
-            </a:r>
-          </a:p>
-          <a:p>
-            <a:r>
-              <a:t>an expected voltage sag from the load, then compares it to the actual sag. A</a:t>
-            </a:r>
-          </a:p>
-          <a:p>
-            <a:r>
-              <a:t>cycle that sags worse than its own history is degrading, and we can say that</a:t>
-            </a:r>
-          </a:p>
-          <a:p>
-            <a:r>
-              <a:t>long before any absolute threshold is breached. The chart on the right also</a:t>
-            </a:r>
-          </a:p>
-          <a:p>
-            <a:r>
-              <a:t>shows the balancing working: end-of-cycle spread is consistently below</a:t>
-            </a:r>
-          </a:p>
-          <a:p>
-            <a:r>
-              <a:t>start-of-cycle spread.</a:t>
+              <a:t>Two things the model leans on that are easy to overlook. First, thermal</a:t>
+            </a:r>
+          </a:p>
+          <a:p>
+            <a:r>
+              <a:t>resolution: the four thermistors diverge by as much as eight point three degrees</a:t>
+            </a:r>
+          </a:p>
+          <a:p>
+            <a:r>
+              <a:t>within a single pack, and that spread goes into the model as a feature rather</a:t>
+            </a:r>
+          </a:p>
+          <a:p>
+            <a:r>
+              <a:t>than just onto the dashboard. Second, operating mode, set from the change in</a:t>
+            </a:r>
+          </a:p>
+          <a:p>
+            <a:r>
+              <a:t>current magnitude with a five-sample hysteresis so it does not flap on noise.</a:t>
+            </a:r>
+          </a:p>
+          <a:p>
+            <a:r>
+              <a:t>Together, the mode flags and the thermal spread account for nearly a fifth of</a:t>
+            </a:r>
+          </a:p>
+          <a:p>
+            <a:r>
+              <a:t>the model's total gain. That is context the pack-level sensors alone could never</a:t>
+            </a:r>
+          </a:p>
+          <a:p>
+            <a:r>
+              <a:t>give us.</a:t>
             </a:r>
           </a:p>
         </p:txBody>
@@ -1447,42 +1478,42 @@
           <a:lstStyle/>
           <a:p>
             <a:r>
-              <a:t>This is the onboarding flow in full. Two upload targets. Drop the manufacturer</a:t>
-            </a:r>
-          </a:p>
-          <a:p>
-            <a:r>
-              <a:t>PDF and the parser pulls out chemistry, nominal, maximum and minimum voltage,</a:t>
-            </a:r>
-          </a:p>
-          <a:p>
-            <a:r>
-              <a:t>capacity, current limits and thermal envelopes. Drop a CSV or spreadsheet and</a:t>
-            </a:r>
-          </a:p>
-          <a:p>
-            <a:r>
-              <a:t>the dataset gets profiled and previewed. There is no YAML file, no redeploy and</a:t>
-            </a:r>
-          </a:p>
-          <a:p>
-            <a:r>
-              <a:t>no developer in the loop. The parsed values land in an editable form — shown</a:t>
-            </a:r>
-          </a:p>
-          <a:p>
-            <a:r>
-              <a:t>underneath — so an engineer can correct anything the parser got wrong before it</a:t>
-            </a:r>
-          </a:p>
-          <a:p>
-            <a:r>
-              <a:t>becomes the active profile. That same screen feeds both the threshold matrix and</a:t>
-            </a:r>
-          </a:p>
-          <a:p>
-            <a:r>
-              <a:t>the retrainer.</a:t>
+              <a:t>The last analytical layer is prognosis. We keep a history of every cycle the</a:t>
+            </a:r>
+          </a:p>
+          <a:p>
+            <a:r>
+              <a:t>pack has run — thirty-nine so far, twenty-one discharge and eighteen charge, all</a:t>
+            </a:r>
+          </a:p>
+          <a:p>
+            <a:r>
+              <a:t>scoring one point zero on data quality. For each live cycle the system computes</a:t>
+            </a:r>
+          </a:p>
+          <a:p>
+            <a:r>
+              <a:t>an expected voltage sag from the load, then compares it to the actual sag. A</a:t>
+            </a:r>
+          </a:p>
+          <a:p>
+            <a:r>
+              <a:t>cycle that sags worse than its own history is degrading, and we can say that</a:t>
+            </a:r>
+          </a:p>
+          <a:p>
+            <a:r>
+              <a:t>long before any absolute threshold is breached. The chart on the right also</a:t>
+            </a:r>
+          </a:p>
+          <a:p>
+            <a:r>
+              <a:t>shows the balancing working: end-of-cycle spread is consistently below</a:t>
+            </a:r>
+          </a:p>
+          <a:p>
+            <a:r>
+              <a:t>start-of-cycle spread.</a:t>
             </a:r>
           </a:p>
         </p:txBody>
@@ -1552,37 +1583,42 @@
           <a:lstStyle/>
           <a:p>
             <a:r>
-              <a:t>This is what makes it reusable. The parser pulls the limits, pack sizing derives</a:t>
-            </a:r>
-          </a:p>
-          <a:p>
-            <a:r>
-              <a:t>the series and parallel counts, and then the chemistry gets tiered. NMC is</a:t>
-            </a:r>
-          </a:p>
-          <a:p>
-            <a:r>
-              <a:t>direct reuse because that is what we characterised. NCA and LCO share the 4.2</a:t>
-            </a:r>
-          </a:p>
-          <a:p>
-            <a:r>
-              <a:t>volt ceiling, so they only need a threshold shift. LFP needs a real remap to a</a:t>
-            </a:r>
-          </a:p>
-          <a:p>
-            <a:r>
-              <a:t>2.50 to 3.65 volt window — remember that flat OCV curve. And LTO, at 2.4 volts</a:t>
-            </a:r>
-          </a:p>
-          <a:p>
-            <a:r>
-              <a:t>nominal, needs every limit rescaled. Thresholds are two-tier, and the active</a:t>
-            </a:r>
-          </a:p>
-          <a:p>
-            <a:r>
-              <a:t>profile syncs to PostgreSQL live with no server restart.</a:t>
+              <a:t>This is the onboarding flow in full. Two upload targets. Drop the manufacturer</a:t>
+            </a:r>
+          </a:p>
+          <a:p>
+            <a:r>
+              <a:t>PDF and the parser pulls out chemistry, nominal, maximum and minimum voltage,</a:t>
+            </a:r>
+          </a:p>
+          <a:p>
+            <a:r>
+              <a:t>capacity, current limits and thermal envelopes. Drop a CSV or spreadsheet and</a:t>
+            </a:r>
+          </a:p>
+          <a:p>
+            <a:r>
+              <a:t>the dataset gets profiled and previewed. There is no YAML file, no redeploy and</a:t>
+            </a:r>
+          </a:p>
+          <a:p>
+            <a:r>
+              <a:t>no developer in the loop. The parsed values land in an editable form — shown</a:t>
+            </a:r>
+          </a:p>
+          <a:p>
+            <a:r>
+              <a:t>underneath — so an engineer can correct anything the parser got wrong before it</a:t>
+            </a:r>
+          </a:p>
+          <a:p>
+            <a:r>
+              <a:t>becomes the active profile. That same screen feeds both the threshold matrix and</a:t>
+            </a:r>
+          </a:p>
+          <a:p>
+            <a:r>
+              <a:t>the retrainer.</a:t>
             </a:r>
           </a:p>
         </p:txBody>
@@ -1747,37 +1783,37 @@
           <a:lstStyle/>
           <a:p>
             <a:r>
-              <a:t>I want to close on what is not finished. Cell Imbalance recall sits at sixty-five</a:t>
-            </a:r>
-          </a:p>
-          <a:p>
-            <a:r>
-              <a:t>percent — that is the weakest number in the deck and it needs real imbalance</a:t>
-            </a:r>
-          </a:p>
-          <a:p>
-            <a:r>
-              <a:t>events, not more synthetic ones. The unknown-fault gate never raises a false</a:t>
-            </a:r>
-          </a:p>
-          <a:p>
-            <a:r>
-              <a:t>alarm but only catches one unknown in four. The Zynq path would take inference</a:t>
-            </a:r>
-          </a:p>
-          <a:p>
-            <a:r>
-              <a:t>off the CPU. LFP is remapped from a datasheet, not characterised on a bench.</a:t>
-            </a:r>
-          </a:p>
-          <a:p>
-            <a:r>
-              <a:t>And state of health is the natural next model. Everything you have seen rebuilds</a:t>
-            </a:r>
-          </a:p>
-          <a:p>
-            <a:r>
-              <a:t>from the repository — the figures, the model evaluation and this deck.</a:t>
+              <a:t>This is what makes it reusable. The parser pulls the limits, pack sizing derives</a:t>
+            </a:r>
+          </a:p>
+          <a:p>
+            <a:r>
+              <a:t>the series and parallel counts, and then the chemistry gets tiered. NMC is</a:t>
+            </a:r>
+          </a:p>
+          <a:p>
+            <a:r>
+              <a:t>direct reuse because that is what we characterised. NCA and LCO share the 4.2</a:t>
+            </a:r>
+          </a:p>
+          <a:p>
+            <a:r>
+              <a:t>volt ceiling, so they only need a threshold shift. LFP needs a real remap to a</a:t>
+            </a:r>
+          </a:p>
+          <a:p>
+            <a:r>
+              <a:t>2.50 to 3.65 volt window — remember that flat OCV curve. And LTO, at 2.4 volts</a:t>
+            </a:r>
+          </a:p>
+          <a:p>
+            <a:r>
+              <a:t>nominal, needs every limit rescaled. Thresholds are two-tier, and the active</a:t>
+            </a:r>
+          </a:p>
+          <a:p>
+            <a:r>
+              <a:t>profile syncs to PostgreSQL live with no server restart.</a:t>
             </a:r>
           </a:p>
         </p:txBody>
@@ -1803,6 +1839,106 @@
 </file>
 
 <file path=ppt/notesSlides/notesSlide21.xml><?xml version="1.0" encoding="utf-8"?>
+<p:notes xmlns:a="http://schemas.openxmlformats.org/drawingml/2006/main" xmlns:p="http://schemas.openxmlformats.org/presentationml/2006/main" xmlns:r="http://schemas.openxmlformats.org/officeDocument/2006/relationships">
+  <p:cSld>
+    <p:spTree>
+      <p:nvGrpSpPr>
+        <p:cNvPr id="1" name=""/>
+        <p:cNvGrpSpPr/>
+        <p:nvPr/>
+      </p:nvGrpSpPr>
+      <p:grpSpPr>
+        <a:xfrm>
+          <a:off x="0" y="0"/>
+          <a:ext cx="0" cy="0"/>
+          <a:chOff x="0" y="0"/>
+          <a:chExt cx="0" cy="0"/>
+        </a:xfrm>
+      </p:grpSpPr>
+      <p:sp>
+        <p:nvSpPr>
+          <p:cNvPr id="2" name="Slide Image Placeholder 1"/>
+          <p:cNvSpPr>
+            <a:spLocks noGrp="1"/>
+          </p:cNvSpPr>
+          <p:nvPr>
+            <p:ph type="sldImg" idx="2"/>
+          </p:nvPr>
+        </p:nvSpPr>
+        <p:spPr/>
+      </p:sp>
+      <p:sp>
+        <p:nvSpPr>
+          <p:cNvPr id="3" name="Notes Placeholder 2"/>
+          <p:cNvSpPr>
+            <a:spLocks noGrp="1"/>
+          </p:cNvSpPr>
+          <p:nvPr>
+            <p:ph type="body" idx="3" sz="quarter"/>
+          </p:nvPr>
+        </p:nvSpPr>
+        <p:spPr/>
+        <p:txBody>
+          <a:bodyPr/>
+          <a:lstStyle/>
+          <a:p>
+            <a:r>
+              <a:t>I want to close on what is not finished. Cell Imbalance recall sits at sixty-five</a:t>
+            </a:r>
+          </a:p>
+          <a:p>
+            <a:r>
+              <a:t>percent — that is the weakest number in the deck and it needs real imbalance</a:t>
+            </a:r>
+          </a:p>
+          <a:p>
+            <a:r>
+              <a:t>events, not more synthetic ones. The unknown-fault gate never raises a false</a:t>
+            </a:r>
+          </a:p>
+          <a:p>
+            <a:r>
+              <a:t>alarm but only catches one unknown in four. The Zynq path would take inference</a:t>
+            </a:r>
+          </a:p>
+          <a:p>
+            <a:r>
+              <a:t>off the CPU. LFP is remapped from a datasheet, not characterised on a bench.</a:t>
+            </a:r>
+          </a:p>
+          <a:p>
+            <a:r>
+              <a:t>And state of health is the natural next model. Everything you have seen rebuilds</a:t>
+            </a:r>
+          </a:p>
+          <a:p>
+            <a:r>
+              <a:t>from the repository — the figures, the model evaluation and this deck.</a:t>
+            </a:r>
+          </a:p>
+        </p:txBody>
+      </p:sp>
+      <p:sp>
+        <p:nvSpPr>
+          <p:cNvPr id="4" name="Slide Number Placeholder 3"/>
+          <p:cNvSpPr>
+            <a:spLocks noGrp="1"/>
+          </p:cNvSpPr>
+          <p:nvPr>
+            <p:ph type="sldNum" idx="5" sz="quarter"/>
+          </p:nvPr>
+        </p:nvSpPr>
+        <p:spPr/>
+      </p:sp>
+    </p:spTree>
+  </p:cSld>
+  <p:clrMapOvr>
+    <a:masterClrMapping/>
+  </p:clrMapOvr>
+</p:notes>
+</file>
+
+<file path=ppt/notesSlides/notesSlide22.xml><?xml version="1.0" encoding="utf-8"?>
 <p:notes xmlns:a="http://schemas.openxmlformats.org/drawingml/2006/main" xmlns:p="http://schemas.openxmlformats.org/presentationml/2006/main" xmlns:r="http://schemas.openxmlformats.org/officeDocument/2006/relationships">
   <p:cSld>
     <p:spTree>
@@ -8345,7 +8481,7 @@
                 </a:solidFill>
                 <a:latin typeface="Inter"/>
               </a:rPr>
-              <a:t>Three tiers, no single point of failure</a:t>
+              <a:t>Fault detection, end to end</a:t>
             </a:r>
           </a:p>
         </p:txBody>
@@ -8518,154 +8654,30 @@
           </a:p>
         </p:txBody>
       </p:sp>
-      <p:sp>
-        <p:nvSpPr>
-          <p:cNvPr id="7" name="TextBox 6"/>
-          <p:cNvSpPr txBox="1"/>
-          <p:nvPr/>
-        </p:nvSpPr>
-        <p:spPr>
-          <a:xfrm>
-            <a:off x="566928" y="1517904"/>
-            <a:ext cx="5797296" cy="2834640"/>
-          </a:xfrm>
-          <a:prstGeom prst="rect">
-            <a:avLst/>
-          </a:prstGeom>
-          <a:noFill/>
-        </p:spPr>
-        <p:txBody>
-          <a:bodyPr wrap="square" lIns="0" rIns="0" tIns="0" bIns="0">
-            <a:spAutoFit/>
-          </a:bodyPr>
-          <a:lstStyle/>
-          <a:p>
-            <a:pPr marL="274320" indent="-274320">
-              <a:lnSpc>
-                <a:spcPct val="116000"/>
-              </a:lnSpc>
-              <a:spcAft>
-                <a:spcPts val="900"/>
-              </a:spcAft>
-              <a:buClr>
-                <a:srgbClr val="0E7490"/>
-              </a:buClr>
-              <a:buSzPct val="62000"/>
-              <a:buFont typeface="Arial" pitchFamily="34" charset="0"/>
-              <a:buChar char="●"/>
-            </a:pPr>
-            <a:r>
-              <a:rPr sz="1650">
-                <a:solidFill>
-                  <a:srgbClr val="0F172A"/>
-                </a:solidFill>
-                <a:latin typeface="Inter"/>
-              </a:rPr>
-              <a:t>Tier 1 — JBD BMS senses eight cell taps and four NTCs.</a:t>
-            </a:r>
-          </a:p>
-          <a:p>
-            <a:pPr marL="274320" indent="-274320">
-              <a:lnSpc>
-                <a:spcPct val="116000"/>
-              </a:lnSpc>
-              <a:spcAft>
-                <a:spcPts val="900"/>
-              </a:spcAft>
-              <a:buClr>
-                <a:srgbClr val="0E7490"/>
-              </a:buClr>
-              <a:buSzPct val="62000"/>
-              <a:buFont typeface="Arial" pitchFamily="34" charset="0"/>
-              <a:buChar char="●"/>
-            </a:pPr>
-            <a:r>
-              <a:rPr sz="1650">
-                <a:solidFill>
-                  <a:srgbClr val="0F172A"/>
-                </a:solidFill>
-                <a:latin typeface="Inter"/>
-              </a:rPr>
-              <a:t>Tier 2 — Pi 5 runs logger, XGBoost inference and dashboard.</a:t>
-            </a:r>
-          </a:p>
-          <a:p>
-            <a:pPr marL="274320" indent="-274320">
-              <a:lnSpc>
-                <a:spcPct val="116000"/>
-              </a:lnSpc>
-              <a:spcAft>
-                <a:spcPts val="900"/>
-              </a:spcAft>
-              <a:buClr>
-                <a:srgbClr val="0E7490"/>
-              </a:buClr>
-              <a:buSzPct val="62000"/>
-              <a:buFont typeface="Arial" pitchFamily="34" charset="0"/>
-              <a:buChar char="●"/>
-            </a:pPr>
-            <a:r>
-              <a:rPr sz="1650">
-                <a:solidFill>
-                  <a:srgbClr val="0F172A"/>
-                </a:solidFill>
-                <a:latin typeface="Inter"/>
-              </a:rPr>
-              <a:t>Tier 3 — Arduino Uno R4 watches the Pi's heartbeat.</a:t>
-            </a:r>
-          </a:p>
-          <a:p>
-            <a:pPr marL="274320" indent="-274320">
-              <a:lnSpc>
-                <a:spcPct val="116000"/>
-              </a:lnSpc>
-              <a:spcAft>
-                <a:spcPts val="900"/>
-              </a:spcAft>
-              <a:buClr>
-                <a:srgbClr val="0E7490"/>
-              </a:buClr>
-              <a:buSzPct val="62000"/>
-              <a:buFont typeface="Arial" pitchFamily="34" charset="0"/>
-              <a:buChar char="●"/>
-            </a:pPr>
-            <a:r>
-              <a:rPr sz="1650">
-                <a:solidFill>
-                  <a:srgbClr val="0F172A"/>
-                </a:solidFill>
-                <a:latin typeface="Inter"/>
-              </a:rPr>
-              <a:t>Missed heartbeat pulls the RUN pin and resets the Pi.</a:t>
-            </a:r>
-          </a:p>
-          <a:p>
-            <a:pPr marL="274320" indent="-274320">
-              <a:lnSpc>
-                <a:spcPct val="116000"/>
-              </a:lnSpc>
-              <a:spcAft>
-                <a:spcPts val="900"/>
-              </a:spcAft>
-              <a:buClr>
-                <a:srgbClr val="0E7490"/>
-              </a:buClr>
-              <a:buSzPct val="62000"/>
-              <a:buFont typeface="Arial" pitchFamily="34" charset="0"/>
-              <a:buChar char="●"/>
-            </a:pPr>
-            <a:r>
-              <a:rPr sz="1650">
-                <a:solidFill>
-                  <a:srgbClr val="0F172A"/>
-                </a:solidFill>
-                <a:latin typeface="Inter"/>
-              </a:rPr>
-              <a:t>Inference stays at the edge: no link, no safety gap.</a:t>
-            </a:r>
-          </a:p>
-        </p:txBody>
-      </p:sp>
+      <p:pic>
+        <p:nvPicPr>
+          <p:cNvPr id="7" name="Picture 6" descr="diag_fault_flow.png"/>
+          <p:cNvPicPr>
+            <a:picLocks noChangeAspect="1"/>
+          </p:cNvPicPr>
+          <p:nvPr/>
+        </p:nvPicPr>
+        <p:blipFill>
+          <a:blip r:embed="rId2"/>
+          <a:stretch>
+            <a:fillRect/>
+          </a:stretch>
+        </p:blipFill>
+        <p:spPr>
+          <a:xfrm>
+            <a:off x="2404340" y="1353312"/>
+            <a:ext cx="7383013" cy="3913632"/>
+          </a:xfrm>
+          <a:prstGeom prst="rect">
+            <a:avLst/>
+          </a:prstGeom>
+        </p:spPr>
+      </p:pic>
       <p:sp>
         <p:nvSpPr>
           <p:cNvPr id="8" name="Rectangle 7"/>
@@ -8674,8 +8686,8 @@
         </p:nvSpPr>
         <p:spPr>
           <a:xfrm>
-            <a:off x="566928" y="4718304"/>
-            <a:ext cx="5797296" cy="1188720"/>
+            <a:off x="566928" y="5321808"/>
+            <a:ext cx="3539642" cy="1005840"/>
           </a:xfrm>
           <a:prstGeom prst="rect">
             <a:avLst/>
@@ -8712,14 +8724,56 @@
       </p:sp>
       <p:sp>
         <p:nvSpPr>
-          <p:cNvPr id="9" name="TextBox 8"/>
-          <p:cNvSpPr txBox="1"/>
-          <p:nvPr/>
-        </p:nvSpPr>
-        <p:spPr>
-          <a:xfrm>
-            <a:off x="768096" y="4846320"/>
-            <a:ext cx="5394959" cy="237744"/>
+          <p:cNvPr id="9" name="Rectangle 8"/>
+          <p:cNvSpPr/>
+          <p:nvPr/>
+        </p:nvSpPr>
+        <p:spPr>
+          <a:xfrm>
+            <a:off x="566928" y="5321808"/>
+            <a:ext cx="3539642" cy="50292"/>
+          </a:xfrm>
+          <a:prstGeom prst="rect">
+            <a:avLst/>
+          </a:prstGeom>
+          <a:solidFill>
+            <a:srgbClr val="0E7490"/>
+          </a:solidFill>
+          <a:ln>
+            <a:noFill/>
+          </a:ln>
+          <a:effectLst/>
+        </p:spPr>
+        <p:style>
+          <a:lnRef idx="1">
+            <a:schemeClr val="accent1"/>
+          </a:lnRef>
+          <a:fillRef idx="3">
+            <a:schemeClr val="accent1"/>
+          </a:fillRef>
+          <a:effectRef idx="2">
+            <a:schemeClr val="accent1"/>
+          </a:effectRef>
+          <a:fontRef idx="minor">
+            <a:schemeClr val="lt1"/>
+          </a:fontRef>
+        </p:style>
+        <p:txBody>
+          <a:bodyPr rtlCol="0" anchor="ctr"/>
+          <a:lstStyle/>
+          <a:p/>
+        </p:txBody>
+      </p:sp>
+      <p:sp>
+        <p:nvSpPr>
+          <p:cNvPr id="10" name="TextBox 9"/>
+          <p:cNvSpPr txBox="1"/>
+          <p:nvPr/>
+        </p:nvSpPr>
+        <p:spPr>
+          <a:xfrm>
+            <a:off x="749808" y="5449824"/>
+            <a:ext cx="3173882" cy="201168"/>
           </a:xfrm>
           <a:prstGeom prst="rect">
             <a:avLst/>
@@ -8741,27 +8795,27 @@
               </a:spcAft>
             </a:pPr>
             <a:r>
-              <a:rPr sz="1000" b="1">
+              <a:rPr sz="900" b="1">
                 <a:solidFill>
                   <a:srgbClr val="0E7490"/>
                 </a:solidFill>
                 <a:latin typeface="Inter"/>
               </a:rPr>
-              <a:t>ACCELERATION PATH</a:t>
-            </a:r>
-          </a:p>
-        </p:txBody>
-      </p:sp>
-      <p:sp>
-        <p:nvSpPr>
-          <p:cNvPr id="10" name="TextBox 9"/>
-          <p:cNvSpPr txBox="1"/>
-          <p:nvPr/>
-        </p:nvSpPr>
-        <p:spPr>
-          <a:xfrm>
-            <a:off x="768096" y="5120640"/>
-            <a:ext cx="5394959" cy="694944"/>
+              <a:t>FIVE STAGES</a:t>
+            </a:r>
+          </a:p>
+        </p:txBody>
+      </p:sp>
+      <p:sp>
+        <p:nvSpPr>
+          <p:cNvPr id="11" name="TextBox 10"/>
+          <p:cNvSpPr txBox="1"/>
+          <p:nvPr/>
+        </p:nvSpPr>
+        <p:spPr>
+          <a:xfrm>
+            <a:off x="749808" y="5687568"/>
+            <a:ext cx="3173882" cy="585216"/>
           </a:xfrm>
           <a:prstGeom prst="rect">
             <a:avLst/>
@@ -8783,41 +8837,17 @@
               </a:spcAft>
             </a:pPr>
             <a:r>
-              <a:rPr sz="1300" b="0">
+              <a:rPr sz="950" b="0">
                 <a:solidFill>
                   <a:srgbClr val="0F172A"/>
                 </a:solidFill>
                 <a:latin typeface="Inter"/>
               </a:rPr>
-              <a:t>Zynq-7000 SoC moves the same tree traversal into programmable logic, freeing the CPU for the logger and the BLE link.</a:t>
-            </a:r>
-          </a:p>
-        </p:txBody>
-      </p:sp>
-      <p:pic>
-        <p:nvPicPr>
-          <p:cNvPr id="11" name="Picture 10" descr="diag_hardware.png"/>
-          <p:cNvPicPr>
-            <a:picLocks noChangeAspect="1"/>
-          </p:cNvPicPr>
-          <p:nvPr/>
-        </p:nvPicPr>
-        <p:blipFill>
-          <a:blip r:embed="rId2"/>
-          <a:stretch>
-            <a:fillRect/>
-          </a:stretch>
-        </p:blipFill>
-        <p:spPr>
-          <a:xfrm>
-            <a:off x="6693408" y="1467953"/>
-            <a:ext cx="4931359" cy="2742516"/>
-          </a:xfrm>
-          <a:prstGeom prst="rect">
-            <a:avLst/>
-          </a:prstGeom>
-        </p:spPr>
-      </p:pic>
+              <a:t>Acquire → establish context → detect → score risk → act. Every block maps to a module in the repository.</a:t>
+            </a:r>
+          </a:p>
+        </p:txBody>
+      </p:sp>
       <p:sp>
         <p:nvSpPr>
           <p:cNvPr id="12" name="Rectangle 11"/>
@@ -8826,16 +8856,16 @@
         </p:nvSpPr>
         <p:spPr>
           <a:xfrm>
-            <a:off x="7086990" y="4352544"/>
-            <a:ext cx="1587074" cy="1417320"/>
+            <a:off x="4326026" y="5321808"/>
+            <a:ext cx="3539642" cy="1005840"/>
           </a:xfrm>
           <a:prstGeom prst="rect">
             <a:avLst/>
           </a:prstGeom>
           <a:solidFill>
-            <a:srgbClr val="FFFFFF"/>
+            <a:srgbClr val="F1F5F9"/>
           </a:solidFill>
-          <a:ln w="12700">
+          <a:ln w="9525">
             <a:solidFill>
               <a:srgbClr val="CBD5E1"/>
             </a:solidFill>
@@ -8862,48 +8892,150 @@
           <a:p/>
         </p:txBody>
       </p:sp>
-      <p:pic>
-        <p:nvPicPr>
-          <p:cNvPr id="13" name="Picture 12" descr="p06_img1_x51.jpeg"/>
-          <p:cNvPicPr>
-            <a:picLocks noChangeAspect="1"/>
-          </p:cNvPicPr>
-          <p:nvPr/>
-        </p:nvPicPr>
-        <p:blipFill>
-          <a:blip r:embed="rId3"/>
-          <a:stretch>
-            <a:fillRect/>
-          </a:stretch>
-        </p:blipFill>
-        <p:spPr>
-          <a:xfrm>
-            <a:off x="7205862" y="4471416"/>
-            <a:ext cx="1349330" cy="1179576"/>
-          </a:xfrm>
-          <a:prstGeom prst="rect">
-            <a:avLst/>
-          </a:prstGeom>
-        </p:spPr>
-      </p:pic>
-      <p:sp>
-        <p:nvSpPr>
-          <p:cNvPr id="14" name="Rectangle 13"/>
+      <p:sp>
+        <p:nvSpPr>
+          <p:cNvPr id="13" name="Rectangle 12"/>
           <p:cNvSpPr/>
           <p:nvPr/>
         </p:nvSpPr>
         <p:spPr>
           <a:xfrm>
-            <a:off x="9542320" y="4352544"/>
-            <a:ext cx="1790653" cy="1417320"/>
+            <a:off x="4326026" y="5321808"/>
+            <a:ext cx="3539642" cy="50292"/>
           </a:xfrm>
           <a:prstGeom prst="rect">
             <a:avLst/>
           </a:prstGeom>
           <a:solidFill>
-            <a:srgbClr val="FFFFFF"/>
+            <a:srgbClr val="B45309"/>
           </a:solidFill>
-          <a:ln w="12700">
+          <a:ln>
+            <a:noFill/>
+          </a:ln>
+          <a:effectLst/>
+        </p:spPr>
+        <p:style>
+          <a:lnRef idx="1">
+            <a:schemeClr val="accent1"/>
+          </a:lnRef>
+          <a:fillRef idx="3">
+            <a:schemeClr val="accent1"/>
+          </a:fillRef>
+          <a:effectRef idx="2">
+            <a:schemeClr val="accent1"/>
+          </a:effectRef>
+          <a:fontRef idx="minor">
+            <a:schemeClr val="lt1"/>
+          </a:fontRef>
+        </p:style>
+        <p:txBody>
+          <a:bodyPr rtlCol="0" anchor="ctr"/>
+          <a:lstStyle/>
+          <a:p/>
+        </p:txBody>
+      </p:sp>
+      <p:sp>
+        <p:nvSpPr>
+          <p:cNvPr id="14" name="TextBox 13"/>
+          <p:cNvSpPr txBox="1"/>
+          <p:nvPr/>
+        </p:nvSpPr>
+        <p:spPr>
+          <a:xfrm>
+            <a:off x="4508906" y="5449824"/>
+            <a:ext cx="3173882" cy="201168"/>
+          </a:xfrm>
+          <a:prstGeom prst="rect">
+            <a:avLst/>
+          </a:prstGeom>
+          <a:noFill/>
+        </p:spPr>
+        <p:txBody>
+          <a:bodyPr wrap="square" anchor="t" lIns="0" rIns="0" tIns="0" bIns="0">
+            <a:spAutoFit/>
+          </a:bodyPr>
+          <a:lstStyle/>
+          <a:p>
+            <a:pPr algn="l">
+              <a:lnSpc>
+                <a:spcPct val="118000"/>
+              </a:lnSpc>
+              <a:spcAft>
+                <a:spcPts val="0"/>
+              </a:spcAft>
+            </a:pPr>
+            <a:r>
+              <a:rPr sz="900" b="1">
+                <a:solidFill>
+                  <a:srgbClr val="B45309"/>
+                </a:solidFill>
+                <a:latin typeface="Inter"/>
+              </a:rPr>
+              <a:t>MODE FIRST</a:t>
+            </a:r>
+          </a:p>
+        </p:txBody>
+      </p:sp>
+      <p:sp>
+        <p:nvSpPr>
+          <p:cNvPr id="15" name="TextBox 14"/>
+          <p:cNvSpPr txBox="1"/>
+          <p:nvPr/>
+        </p:nvSpPr>
+        <p:spPr>
+          <a:xfrm>
+            <a:off x="4508906" y="5687568"/>
+            <a:ext cx="3173882" cy="585216"/>
+          </a:xfrm>
+          <a:prstGeom prst="rect">
+            <a:avLst/>
+          </a:prstGeom>
+          <a:noFill/>
+        </p:spPr>
+        <p:txBody>
+          <a:bodyPr wrap="square" anchor="t" lIns="0" rIns="0" tIns="0" bIns="0">
+            <a:spAutoFit/>
+          </a:bodyPr>
+          <a:lstStyle/>
+          <a:p>
+            <a:pPr algn="l">
+              <a:lnSpc>
+                <a:spcPct val="122000"/>
+              </a:lnSpc>
+              <a:spcAft>
+                <a:spcPts val="0"/>
+              </a:spcAft>
+            </a:pPr>
+            <a:r>
+              <a:rPr sz="950" b="0">
+                <a:solidFill>
+                  <a:srgbClr val="0F172A"/>
+                </a:solidFill>
+                <a:latin typeface="Inter"/>
+              </a:rPr>
+              <a:t>Context is resolved before detection, because the same voltage sag means different things in ACCEL and IDLE.</a:t>
+            </a:r>
+          </a:p>
+        </p:txBody>
+      </p:sp>
+      <p:sp>
+        <p:nvSpPr>
+          <p:cNvPr id="16" name="Rectangle 15"/>
+          <p:cNvSpPr/>
+          <p:nvPr/>
+        </p:nvSpPr>
+        <p:spPr>
+          <a:xfrm>
+            <a:off x="8085124" y="5321808"/>
+            <a:ext cx="3539642" cy="1005840"/>
+          </a:xfrm>
+          <a:prstGeom prst="rect">
+            <a:avLst/>
+          </a:prstGeom>
+          <a:solidFill>
+            <a:srgbClr val="F1F5F9"/>
+          </a:solidFill>
+          <a:ln w="9525">
             <a:solidFill>
               <a:srgbClr val="CBD5E1"/>
             </a:solidFill>
@@ -8930,40 +9062,58 @@
           <a:p/>
         </p:txBody>
       </p:sp>
-      <p:pic>
-        <p:nvPicPr>
-          <p:cNvPr id="15" name="Picture 14" descr="p06_img2_x52.jpeg"/>
-          <p:cNvPicPr>
-            <a:picLocks noChangeAspect="1"/>
-          </p:cNvPicPr>
-          <p:nvPr/>
-        </p:nvPicPr>
-        <p:blipFill>
-          <a:blip r:embed="rId4"/>
-          <a:stretch>
-            <a:fillRect/>
-          </a:stretch>
-        </p:blipFill>
-        <p:spPr>
-          <a:xfrm>
-            <a:off x="9661192" y="4471416"/>
-            <a:ext cx="1552909" cy="1179576"/>
-          </a:xfrm>
-          <a:prstGeom prst="rect">
-            <a:avLst/>
-          </a:prstGeom>
-        </p:spPr>
-      </p:pic>
-      <p:sp>
-        <p:nvSpPr>
-          <p:cNvPr id="16" name="TextBox 15"/>
-          <p:cNvSpPr txBox="1"/>
-          <p:nvPr/>
-        </p:nvSpPr>
-        <p:spPr>
-          <a:xfrm>
-            <a:off x="6693408" y="5797296"/>
-            <a:ext cx="2374239" cy="237744"/>
+      <p:sp>
+        <p:nvSpPr>
+          <p:cNvPr id="17" name="Rectangle 16"/>
+          <p:cNvSpPr/>
+          <p:nvPr/>
+        </p:nvSpPr>
+        <p:spPr>
+          <a:xfrm>
+            <a:off x="8085124" y="5321808"/>
+            <a:ext cx="3539642" cy="50292"/>
+          </a:xfrm>
+          <a:prstGeom prst="rect">
+            <a:avLst/>
+          </a:prstGeom>
+          <a:solidFill>
+            <a:srgbClr val="B91C1C"/>
+          </a:solidFill>
+          <a:ln>
+            <a:noFill/>
+          </a:ln>
+          <a:effectLst/>
+        </p:spPr>
+        <p:style>
+          <a:lnRef idx="1">
+            <a:schemeClr val="accent1"/>
+          </a:lnRef>
+          <a:fillRef idx="3">
+            <a:schemeClr val="accent1"/>
+          </a:fillRef>
+          <a:effectRef idx="2">
+            <a:schemeClr val="accent1"/>
+          </a:effectRef>
+          <a:fontRef idx="minor">
+            <a:schemeClr val="lt1"/>
+          </a:fontRef>
+        </p:style>
+        <p:txBody>
+          <a:bodyPr rtlCol="0" anchor="ctr"/>
+          <a:lstStyle/>
+          <a:p/>
+        </p:txBody>
+      </p:sp>
+      <p:sp>
+        <p:nvSpPr>
+          <p:cNvPr id="18" name="TextBox 17"/>
+          <p:cNvSpPr txBox="1"/>
+          <p:nvPr/>
+        </p:nvSpPr>
+        <p:spPr>
+          <a:xfrm>
+            <a:off x="8268004" y="5449824"/>
+            <a:ext cx="3173882" cy="201168"/>
           </a:xfrm>
           <a:prstGeom prst="rect">
             <a:avLst/>
@@ -8976,7 +9126,7 @@
           </a:bodyPr>
           <a:lstStyle/>
           <a:p>
-            <a:pPr algn="ctr">
+            <a:pPr algn="l">
               <a:lnSpc>
                 <a:spcPct val="118000"/>
               </a:lnSpc>
@@ -8985,55 +9135,55 @@
               </a:spcAft>
             </a:pPr>
             <a:r>
+              <a:rPr sz="900" b="1">
+                <a:solidFill>
+                  <a:srgbClr val="B91C1C"/>
+                </a:solidFill>
+                <a:latin typeface="Inter"/>
+              </a:rPr>
+              <a:t>TWO PATHS</a:t>
+            </a:r>
+          </a:p>
+        </p:txBody>
+      </p:sp>
+      <p:sp>
+        <p:nvSpPr>
+          <p:cNvPr id="19" name="TextBox 18"/>
+          <p:cNvSpPr txBox="1"/>
+          <p:nvPr/>
+        </p:nvSpPr>
+        <p:spPr>
+          <a:xfrm>
+            <a:off x="8268004" y="5687568"/>
+            <a:ext cx="3173882" cy="585216"/>
+          </a:xfrm>
+          <a:prstGeom prst="rect">
+            <a:avLst/>
+          </a:prstGeom>
+          <a:noFill/>
+        </p:spPr>
+        <p:txBody>
+          <a:bodyPr wrap="square" anchor="t" lIns="0" rIns="0" tIns="0" bIns="0">
+            <a:spAutoFit/>
+          </a:bodyPr>
+          <a:lstStyle/>
+          <a:p>
+            <a:pPr algn="l">
+              <a:lnSpc>
+                <a:spcPct val="122000"/>
+              </a:lnSpc>
+              <a:spcAft>
+                <a:spcPts val="0"/>
+              </a:spcAft>
+            </a:pPr>
+            <a:r>
               <a:rPr sz="950" b="0">
                 <a:solidFill>
-                  <a:srgbClr val="475569"/>
-                </a:solidFill>
-                <a:latin typeface="Inter"/>
-              </a:rPr>
-              <a:t>Raspberry Pi 5</a:t>
-            </a:r>
-          </a:p>
-        </p:txBody>
-      </p:sp>
-      <p:sp>
-        <p:nvSpPr>
-          <p:cNvPr id="17" name="TextBox 16"/>
-          <p:cNvSpPr txBox="1"/>
-          <p:nvPr/>
-        </p:nvSpPr>
-        <p:spPr>
-          <a:xfrm>
-            <a:off x="9250527" y="5797296"/>
-            <a:ext cx="2374239" cy="237744"/>
-          </a:xfrm>
-          <a:prstGeom prst="rect">
-            <a:avLst/>
-          </a:prstGeom>
-          <a:noFill/>
-        </p:spPr>
-        <p:txBody>
-          <a:bodyPr wrap="square" anchor="t" lIns="0" rIns="0" tIns="0" bIns="0">
-            <a:spAutoFit/>
-          </a:bodyPr>
-          <a:lstStyle/>
-          <a:p>
-            <a:pPr algn="ctr">
-              <a:lnSpc>
-                <a:spcPct val="118000"/>
-              </a:lnSpc>
-              <a:spcAft>
-                <a:spcPts val="0"/>
-              </a:spcAft>
-            </a:pPr>
-            <a:r>
-              <a:rPr sz="950" b="0">
-                <a:solidFill>
-                  <a:srgbClr val="475569"/>
-                </a:solidFill>
-                <a:latin typeface="Inter"/>
-              </a:rPr>
-              <a:t>Arduino Uno R4 WiFi</a:t>
+                  <a:srgbClr val="0F172A"/>
+                </a:solidFill>
+                <a:latin typeface="Inter"/>
+              </a:rPr>
+              <a:t>The ML lane can abstain or be wrong. The hardware lane cannot — it runs at the pack, with no software in it.</a:t>
             </a:r>
           </a:p>
         </p:txBody>
@@ -9101,7 +9251,7 @@
                 </a:solidFill>
                 <a:latin typeface="Inter"/>
               </a:rPr>
-              <a:t>How the whole thing fits together</a:t>
+              <a:t>Three tiers, no single point of failure</a:t>
             </a:r>
           </a:p>
         </p:txBody>
@@ -9274,30 +9424,154 @@
           </a:p>
         </p:txBody>
       </p:sp>
-      <p:pic>
-        <p:nvPicPr>
-          <p:cNvPr id="7" name="Picture 6" descr="diag_system_flow.png"/>
-          <p:cNvPicPr>
-            <a:picLocks noChangeAspect="1"/>
-          </p:cNvPicPr>
-          <p:nvPr/>
-        </p:nvPicPr>
-        <p:blipFill>
-          <a:blip r:embed="rId2"/>
-          <a:stretch>
-            <a:fillRect/>
-          </a:stretch>
-        </p:blipFill>
-        <p:spPr>
-          <a:xfrm>
-            <a:off x="2465340" y="1536192"/>
-            <a:ext cx="7261013" cy="3063240"/>
-          </a:xfrm>
-          <a:prstGeom prst="rect">
-            <a:avLst/>
-          </a:prstGeom>
-        </p:spPr>
-      </p:pic>
+      <p:sp>
+        <p:nvSpPr>
+          <p:cNvPr id="7" name="TextBox 6"/>
+          <p:cNvSpPr txBox="1"/>
+          <p:nvPr/>
+        </p:nvSpPr>
+        <p:spPr>
+          <a:xfrm>
+            <a:off x="566928" y="1517904"/>
+            <a:ext cx="5797296" cy="2834640"/>
+          </a:xfrm>
+          <a:prstGeom prst="rect">
+            <a:avLst/>
+          </a:prstGeom>
+          <a:noFill/>
+        </p:spPr>
+        <p:txBody>
+          <a:bodyPr wrap="square" lIns="0" rIns="0" tIns="0" bIns="0">
+            <a:spAutoFit/>
+          </a:bodyPr>
+          <a:lstStyle/>
+          <a:p>
+            <a:pPr marL="274320" indent="-274320">
+              <a:lnSpc>
+                <a:spcPct val="116000"/>
+              </a:lnSpc>
+              <a:spcAft>
+                <a:spcPts val="900"/>
+              </a:spcAft>
+              <a:buClr>
+                <a:srgbClr val="0E7490"/>
+              </a:buClr>
+              <a:buSzPct val="62000"/>
+              <a:buFont typeface="Arial" pitchFamily="34" charset="0"/>
+              <a:buChar char="●"/>
+            </a:pPr>
+            <a:r>
+              <a:rPr sz="1650">
+                <a:solidFill>
+                  <a:srgbClr val="0F172A"/>
+                </a:solidFill>
+                <a:latin typeface="Inter"/>
+              </a:rPr>
+              <a:t>Tier 1 — JBD BMS senses eight cell taps and four NTCs.</a:t>
+            </a:r>
+          </a:p>
+          <a:p>
+            <a:pPr marL="274320" indent="-274320">
+              <a:lnSpc>
+                <a:spcPct val="116000"/>
+              </a:lnSpc>
+              <a:spcAft>
+                <a:spcPts val="900"/>
+              </a:spcAft>
+              <a:buClr>
+                <a:srgbClr val="0E7490"/>
+              </a:buClr>
+              <a:buSzPct val="62000"/>
+              <a:buFont typeface="Arial" pitchFamily="34" charset="0"/>
+              <a:buChar char="●"/>
+            </a:pPr>
+            <a:r>
+              <a:rPr sz="1650">
+                <a:solidFill>
+                  <a:srgbClr val="0F172A"/>
+                </a:solidFill>
+                <a:latin typeface="Inter"/>
+              </a:rPr>
+              <a:t>Tier 2 — Pi 5 runs logger, XGBoost inference and dashboard.</a:t>
+            </a:r>
+          </a:p>
+          <a:p>
+            <a:pPr marL="274320" indent="-274320">
+              <a:lnSpc>
+                <a:spcPct val="116000"/>
+              </a:lnSpc>
+              <a:spcAft>
+                <a:spcPts val="900"/>
+              </a:spcAft>
+              <a:buClr>
+                <a:srgbClr val="0E7490"/>
+              </a:buClr>
+              <a:buSzPct val="62000"/>
+              <a:buFont typeface="Arial" pitchFamily="34" charset="0"/>
+              <a:buChar char="●"/>
+            </a:pPr>
+            <a:r>
+              <a:rPr sz="1650">
+                <a:solidFill>
+                  <a:srgbClr val="0F172A"/>
+                </a:solidFill>
+                <a:latin typeface="Inter"/>
+              </a:rPr>
+              <a:t>Tier 3 — Arduino Uno R4 watches the Pi's heartbeat.</a:t>
+            </a:r>
+          </a:p>
+          <a:p>
+            <a:pPr marL="274320" indent="-274320">
+              <a:lnSpc>
+                <a:spcPct val="116000"/>
+              </a:lnSpc>
+              <a:spcAft>
+                <a:spcPts val="900"/>
+              </a:spcAft>
+              <a:buClr>
+                <a:srgbClr val="0E7490"/>
+              </a:buClr>
+              <a:buSzPct val="62000"/>
+              <a:buFont typeface="Arial" pitchFamily="34" charset="0"/>
+              <a:buChar char="●"/>
+            </a:pPr>
+            <a:r>
+              <a:rPr sz="1650">
+                <a:solidFill>
+                  <a:srgbClr val="0F172A"/>
+                </a:solidFill>
+                <a:latin typeface="Inter"/>
+              </a:rPr>
+              <a:t>Missed heartbeat pulls the RUN pin and resets the Pi.</a:t>
+            </a:r>
+          </a:p>
+          <a:p>
+            <a:pPr marL="274320" indent="-274320">
+              <a:lnSpc>
+                <a:spcPct val="116000"/>
+              </a:lnSpc>
+              <a:spcAft>
+                <a:spcPts val="900"/>
+              </a:spcAft>
+              <a:buClr>
+                <a:srgbClr val="0E7490"/>
+              </a:buClr>
+              <a:buSzPct val="62000"/>
+              <a:buFont typeface="Arial" pitchFamily="34" charset="0"/>
+              <a:buChar char="●"/>
+            </a:pPr>
+            <a:r>
+              <a:rPr sz="1650">
+                <a:solidFill>
+                  <a:srgbClr val="0F172A"/>
+                </a:solidFill>
+                <a:latin typeface="Inter"/>
+              </a:rPr>
+              <a:t>Inference stays at the edge: no link, no safety gap.</a:t>
+            </a:r>
+          </a:p>
+        </p:txBody>
+      </p:sp>
       <p:sp>
         <p:nvSpPr>
           <p:cNvPr id="8" name="Rectangle 7"/>
@@ -9306,8 +9580,8 @@
         </p:nvSpPr>
         <p:spPr>
           <a:xfrm>
-            <a:off x="566928" y="4754880"/>
-            <a:ext cx="3539642" cy="1298448"/>
+            <a:off x="566928" y="4718304"/>
+            <a:ext cx="5797296" cy="1188720"/>
           </a:xfrm>
           <a:prstGeom prst="rect">
             <a:avLst/>
@@ -9344,23 +9618,133 @@
       </p:sp>
       <p:sp>
         <p:nvSpPr>
-          <p:cNvPr id="9" name="Rectangle 8"/>
+          <p:cNvPr id="9" name="TextBox 8"/>
+          <p:cNvSpPr txBox="1"/>
+          <p:nvPr/>
+        </p:nvSpPr>
+        <p:spPr>
+          <a:xfrm>
+            <a:off x="768096" y="4846320"/>
+            <a:ext cx="5394959" cy="237744"/>
+          </a:xfrm>
+          <a:prstGeom prst="rect">
+            <a:avLst/>
+          </a:prstGeom>
+          <a:noFill/>
+        </p:spPr>
+        <p:txBody>
+          <a:bodyPr wrap="square" anchor="t" lIns="0" rIns="0" tIns="0" bIns="0">
+            <a:spAutoFit/>
+          </a:bodyPr>
+          <a:lstStyle/>
+          <a:p>
+            <a:pPr algn="l">
+              <a:lnSpc>
+                <a:spcPct val="118000"/>
+              </a:lnSpc>
+              <a:spcAft>
+                <a:spcPts val="0"/>
+              </a:spcAft>
+            </a:pPr>
+            <a:r>
+              <a:rPr sz="1000" b="1">
+                <a:solidFill>
+                  <a:srgbClr val="0E7490"/>
+                </a:solidFill>
+                <a:latin typeface="Inter"/>
+              </a:rPr>
+              <a:t>ACCELERATION PATH</a:t>
+            </a:r>
+          </a:p>
+        </p:txBody>
+      </p:sp>
+      <p:sp>
+        <p:nvSpPr>
+          <p:cNvPr id="10" name="TextBox 9"/>
+          <p:cNvSpPr txBox="1"/>
+          <p:nvPr/>
+        </p:nvSpPr>
+        <p:spPr>
+          <a:xfrm>
+            <a:off x="768096" y="5120640"/>
+            <a:ext cx="5394959" cy="694944"/>
+          </a:xfrm>
+          <a:prstGeom prst="rect">
+            <a:avLst/>
+          </a:prstGeom>
+          <a:noFill/>
+        </p:spPr>
+        <p:txBody>
+          <a:bodyPr wrap="square" anchor="t" lIns="0" rIns="0" tIns="0" bIns="0">
+            <a:spAutoFit/>
+          </a:bodyPr>
+          <a:lstStyle/>
+          <a:p>
+            <a:pPr algn="l">
+              <a:lnSpc>
+                <a:spcPct val="122000"/>
+              </a:lnSpc>
+              <a:spcAft>
+                <a:spcPts val="0"/>
+              </a:spcAft>
+            </a:pPr>
+            <a:r>
+              <a:rPr sz="1300" b="0">
+                <a:solidFill>
+                  <a:srgbClr val="0F172A"/>
+                </a:solidFill>
+                <a:latin typeface="Inter"/>
+              </a:rPr>
+              <a:t>Zynq-7000 SoC moves the same tree traversal into programmable logic, freeing the CPU for the logger and the BLE link.</a:t>
+            </a:r>
+          </a:p>
+        </p:txBody>
+      </p:sp>
+      <p:pic>
+        <p:nvPicPr>
+          <p:cNvPr id="11" name="Picture 10" descr="diag_hardware.png"/>
+          <p:cNvPicPr>
+            <a:picLocks noChangeAspect="1"/>
+          </p:cNvPicPr>
+          <p:nvPr/>
+        </p:nvPicPr>
+        <p:blipFill>
+          <a:blip r:embed="rId2"/>
+          <a:stretch>
+            <a:fillRect/>
+          </a:stretch>
+        </p:blipFill>
+        <p:spPr>
+          <a:xfrm>
+            <a:off x="6693408" y="1467953"/>
+            <a:ext cx="4931359" cy="2742516"/>
+          </a:xfrm>
+          <a:prstGeom prst="rect">
+            <a:avLst/>
+          </a:prstGeom>
+        </p:spPr>
+      </p:pic>
+      <p:sp>
+        <p:nvSpPr>
+          <p:cNvPr id="12" name="Rectangle 11"/>
           <p:cNvSpPr/>
           <p:nvPr/>
         </p:nvSpPr>
         <p:spPr>
           <a:xfrm>
-            <a:off x="566928" y="4754880"/>
-            <a:ext cx="3539642" cy="59436"/>
+            <a:off x="7086990" y="4352544"/>
+            <a:ext cx="1587074" cy="1417320"/>
           </a:xfrm>
           <a:prstGeom prst="rect">
             <a:avLst/>
           </a:prstGeom>
           <a:solidFill>
-            <a:srgbClr val="0E7490"/>
+            <a:srgbClr val="FFFFFF"/>
           </a:solidFill>
-          <a:ln>
-            <a:noFill/>
+          <a:ln w="12700">
+            <a:solidFill>
+              <a:srgbClr val="CBD5E1"/>
+            </a:solidFill>
           </a:ln>
           <a:effectLst/>
         </p:spPr>
@@ -9384,108 +9768,48 @@
           <a:p/>
         </p:txBody>
       </p:sp>
-      <p:sp>
-        <p:nvSpPr>
-          <p:cNvPr id="10" name="TextBox 9"/>
-          <p:cNvSpPr txBox="1"/>
-          <p:nvPr/>
-        </p:nvSpPr>
-        <p:spPr>
-          <a:xfrm>
-            <a:off x="768096" y="4901184"/>
-            <a:ext cx="3137306" cy="237744"/>
-          </a:xfrm>
-          <a:prstGeom prst="rect">
-            <a:avLst/>
-          </a:prstGeom>
-          <a:noFill/>
-        </p:spPr>
-        <p:txBody>
-          <a:bodyPr wrap="square" anchor="t" lIns="0" rIns="0" tIns="0" bIns="0">
-            <a:spAutoFit/>
-          </a:bodyPr>
-          <a:lstStyle/>
-          <a:p>
-            <a:pPr algn="l">
-              <a:lnSpc>
-                <a:spcPct val="118000"/>
-              </a:lnSpc>
-              <a:spcAft>
-                <a:spcPts val="0"/>
-              </a:spcAft>
-            </a:pPr>
-            <a:r>
-              <a:rPr sz="1050" b="1">
-                <a:solidFill>
-                  <a:srgbClr val="0E7490"/>
-                </a:solidFill>
-                <a:latin typeface="Inter"/>
-              </a:rPr>
-              <a:t>EDGE</a:t>
-            </a:r>
-          </a:p>
-        </p:txBody>
-      </p:sp>
-      <p:sp>
-        <p:nvSpPr>
-          <p:cNvPr id="11" name="TextBox 10"/>
-          <p:cNvSpPr txBox="1"/>
-          <p:nvPr/>
-        </p:nvSpPr>
-        <p:spPr>
-          <a:xfrm>
-            <a:off x="768096" y="5175504"/>
-            <a:ext cx="3137306" cy="804672"/>
-          </a:xfrm>
-          <a:prstGeom prst="rect">
-            <a:avLst/>
-          </a:prstGeom>
-          <a:noFill/>
-        </p:spPr>
-        <p:txBody>
-          <a:bodyPr wrap="square" anchor="t" lIns="0" rIns="0" tIns="0" bIns="0">
-            <a:spAutoFit/>
-          </a:bodyPr>
-          <a:lstStyle/>
-          <a:p>
-            <a:pPr algn="l">
-              <a:lnSpc>
-                <a:spcPct val="126000"/>
-              </a:lnSpc>
-              <a:spcAft>
-                <a:spcPts val="0"/>
-              </a:spcAft>
-            </a:pPr>
-            <a:r>
-              <a:rPr sz="1150" b="0">
-                <a:solidFill>
-                  <a:srgbClr val="0F172A"/>
-                </a:solidFill>
-                <a:latin typeface="Inter"/>
-              </a:rPr>
-              <a:t>Sampling, feature engineering and inference all happen on the pack. The Pi never needs the network to keep the pack safe.</a:t>
-            </a:r>
-          </a:p>
-        </p:txBody>
-      </p:sp>
-      <p:sp>
-        <p:nvSpPr>
-          <p:cNvPr id="12" name="Rectangle 11"/>
+      <p:pic>
+        <p:nvPicPr>
+          <p:cNvPr id="13" name="Picture 12" descr="p06_img1_x51.jpeg"/>
+          <p:cNvPicPr>
+            <a:picLocks noChangeAspect="1"/>
+          </p:cNvPicPr>
+          <p:nvPr/>
+        </p:nvPicPr>
+        <p:blipFill>
+          <a:blip r:embed="rId3"/>
+          <a:stretch>
+            <a:fillRect/>
+          </a:stretch>
+        </p:blipFill>
+        <p:spPr>
+          <a:xfrm>
+            <a:off x="7205862" y="4471416"/>
+            <a:ext cx="1349330" cy="1179576"/>
+          </a:xfrm>
+          <a:prstGeom prst="rect">
+            <a:avLst/>
+          </a:prstGeom>
+        </p:spPr>
+      </p:pic>
+      <p:sp>
+        <p:nvSpPr>
+          <p:cNvPr id="14" name="Rectangle 13"/>
           <p:cNvSpPr/>
           <p:nvPr/>
         </p:nvSpPr>
         <p:spPr>
           <a:xfrm>
-            <a:off x="4326026" y="4754880"/>
-            <a:ext cx="3539642" cy="1298448"/>
+            <a:off x="9542320" y="4352544"/>
+            <a:ext cx="1790653" cy="1417320"/>
           </a:xfrm>
           <a:prstGeom prst="rect">
             <a:avLst/>
           </a:prstGeom>
           <a:solidFill>
-            <a:srgbClr val="F1F5F9"/>
+            <a:srgbClr val="FFFFFF"/>
           </a:solidFill>
-          <a:ln w="9525">
+          <a:ln w="12700">
             <a:solidFill>
               <a:srgbClr val="CBD5E1"/>
             </a:solidFill>
@@ -9512,58 +9836,40 @@
           <a:p/>
         </p:txBody>
       </p:sp>
-      <p:sp>
-        <p:nvSpPr>
-          <p:cNvPr id="13" name="Rectangle 12"/>
-          <p:cNvSpPr/>
-          <p:nvPr/>
-        </p:nvSpPr>
-        <p:spPr>
-          <a:xfrm>
-            <a:off x="4326026" y="4754880"/>
-            <a:ext cx="3539642" cy="59436"/>
-          </a:xfrm>
-          <a:prstGeom prst="rect">
-            <a:avLst/>
-          </a:prstGeom>
-          <a:solidFill>
-            <a:srgbClr val="0E7490"/>
-          </a:solidFill>
-          <a:ln>
-            <a:noFill/>
-          </a:ln>
-          <a:effectLst/>
-        </p:spPr>
-        <p:style>
-          <a:lnRef idx="1">
-            <a:schemeClr val="accent1"/>
-          </a:lnRef>
-          <a:fillRef idx="3">
-            <a:schemeClr val="accent1"/>
-          </a:fillRef>
-          <a:effectRef idx="2">
-            <a:schemeClr val="accent1"/>
-          </a:effectRef>
-          <a:fontRef idx="minor">
-            <a:schemeClr val="lt1"/>
-          </a:fontRef>
-        </p:style>
-        <p:txBody>
-          <a:bodyPr rtlCol="0" anchor="ctr"/>
-          <a:lstStyle/>
-          <a:p/>
-        </p:txBody>
-      </p:sp>
-      <p:sp>
-        <p:nvSpPr>
-          <p:cNvPr id="14" name="TextBox 13"/>
-          <p:cNvSpPr txBox="1"/>
-          <p:nvPr/>
-        </p:nvSpPr>
-        <p:spPr>
-          <a:xfrm>
-            <a:off x="4527194" y="4901184"/>
-            <a:ext cx="3137306" cy="237744"/>
+      <p:pic>
+        <p:nvPicPr>
+          <p:cNvPr id="15" name="Picture 14" descr="p06_img2_x52.jpeg"/>
+          <p:cNvPicPr>
+            <a:picLocks noChangeAspect="1"/>
+          </p:cNvPicPr>
+          <p:nvPr/>
+        </p:nvPicPr>
+        <p:blipFill>
+          <a:blip r:embed="rId4"/>
+          <a:stretch>
+            <a:fillRect/>
+          </a:stretch>
+        </p:blipFill>
+        <p:spPr>
+          <a:xfrm>
+            <a:off x="9661192" y="4471416"/>
+            <a:ext cx="1552909" cy="1179576"/>
+          </a:xfrm>
+          <a:prstGeom prst="rect">
+            <a:avLst/>
+          </a:prstGeom>
+        </p:spPr>
+      </p:pic>
+      <p:sp>
+        <p:nvSpPr>
+          <p:cNvPr id="16" name="TextBox 15"/>
+          <p:cNvSpPr txBox="1"/>
+          <p:nvPr/>
+        </p:nvSpPr>
+        <p:spPr>
+          <a:xfrm>
+            <a:off x="6693408" y="5797296"/>
+            <a:ext cx="2374239" cy="237744"/>
           </a:xfrm>
           <a:prstGeom prst="rect">
             <a:avLst/>
@@ -9576,7 +9882,7 @@
           </a:bodyPr>
           <a:lstStyle/>
           <a:p>
-            <a:pPr algn="l">
+            <a:pPr algn="ctr">
               <a:lnSpc>
                 <a:spcPct val="118000"/>
               </a:lnSpc>
@@ -9585,27 +9891,27 @@
               </a:spcAft>
             </a:pPr>
             <a:r>
-              <a:rPr sz="1050" b="1">
-                <a:solidFill>
-                  <a:srgbClr val="0E7490"/>
-                </a:solidFill>
-                <a:latin typeface="Inter"/>
-              </a:rPr>
-              <a:t>CLOUD</a:t>
-            </a:r>
-          </a:p>
-        </p:txBody>
-      </p:sp>
-      <p:sp>
-        <p:nvSpPr>
-          <p:cNvPr id="15" name="TextBox 14"/>
-          <p:cNvSpPr txBox="1"/>
-          <p:nvPr/>
-        </p:nvSpPr>
-        <p:spPr>
-          <a:xfrm>
-            <a:off x="4527194" y="5175504"/>
-            <a:ext cx="3137306" cy="804672"/>
+              <a:rPr sz="950" b="0">
+                <a:solidFill>
+                  <a:srgbClr val="475569"/>
+                </a:solidFill>
+                <a:latin typeface="Inter"/>
+              </a:rPr>
+              <a:t>Raspberry Pi 5</a:t>
+            </a:r>
+          </a:p>
+        </p:txBody>
+      </p:sp>
+      <p:sp>
+        <p:nvSpPr>
+          <p:cNvPr id="17" name="TextBox 16"/>
+          <p:cNvSpPr txBox="1"/>
+          <p:nvPr/>
+        </p:nvSpPr>
+        <p:spPr>
+          <a:xfrm>
+            <a:off x="9250527" y="5797296"/>
+            <a:ext cx="2374239" cy="237744"/>
           </a:xfrm>
           <a:prstGeom prst="rect">
             <a:avLst/>
@@ -9618,192 +9924,22 @@
           </a:bodyPr>
           <a:lstStyle/>
           <a:p>
-            <a:pPr algn="l">
-              <a:lnSpc>
-                <a:spcPct val="126000"/>
+            <a:pPr algn="ctr">
+              <a:lnSpc>
+                <a:spcPct val="118000"/>
               </a:lnSpc>
               <a:spcAft>
                 <a:spcPts val="0"/>
               </a:spcAft>
             </a:pPr>
             <a:r>
-              <a:rPr sz="1150" b="0">
-                <a:solidFill>
-                  <a:srgbClr val="0F172A"/>
-                </a:solidFill>
-                <a:latin typeface="Inter"/>
-              </a:rPr>
-              <a:t>Railway hosts the Flask dashboard — REST and server-sent events — with PostgreSQL for telemetry, cycle history and the active profile.</a:t>
-            </a:r>
-          </a:p>
-        </p:txBody>
-      </p:sp>
-      <p:sp>
-        <p:nvSpPr>
-          <p:cNvPr id="16" name="Rectangle 15"/>
-          <p:cNvSpPr/>
-          <p:nvPr/>
-        </p:nvSpPr>
-        <p:spPr>
-          <a:xfrm>
-            <a:off x="8085124" y="4754880"/>
-            <a:ext cx="3539642" cy="1298448"/>
-          </a:xfrm>
-          <a:prstGeom prst="rect">
-            <a:avLst/>
-          </a:prstGeom>
-          <a:solidFill>
-            <a:srgbClr val="F1F5F9"/>
-          </a:solidFill>
-          <a:ln w="9525">
-            <a:solidFill>
-              <a:srgbClr val="CBD5E1"/>
-            </a:solidFill>
-          </a:ln>
-          <a:effectLst/>
-        </p:spPr>
-        <p:style>
-          <a:lnRef idx="1">
-            <a:schemeClr val="accent1"/>
-          </a:lnRef>
-          <a:fillRef idx="3">
-            <a:schemeClr val="accent1"/>
-          </a:fillRef>
-          <a:effectRef idx="2">
-            <a:schemeClr val="accent1"/>
-          </a:effectRef>
-          <a:fontRef idx="minor">
-            <a:schemeClr val="lt1"/>
-          </a:fontRef>
-        </p:style>
-        <p:txBody>
-          <a:bodyPr rtlCol="0" anchor="ctr"/>
-          <a:lstStyle/>
-          <a:p/>
-        </p:txBody>
-      </p:sp>
-      <p:sp>
-        <p:nvSpPr>
-          <p:cNvPr id="17" name="Rectangle 16"/>
-          <p:cNvSpPr/>
-          <p:nvPr/>
-        </p:nvSpPr>
-        <p:spPr>
-          <a:xfrm>
-            <a:off x="8085124" y="4754880"/>
-            <a:ext cx="3539642" cy="59436"/>
-          </a:xfrm>
-          <a:prstGeom prst="rect">
-            <a:avLst/>
-          </a:prstGeom>
-          <a:solidFill>
-            <a:srgbClr val="B91C1C"/>
-          </a:solidFill>
-          <a:ln>
-            <a:noFill/>
-          </a:ln>
-          <a:effectLst/>
-        </p:spPr>
-        <p:style>
-          <a:lnRef idx="1">
-            <a:schemeClr val="accent1"/>
-          </a:lnRef>
-          <a:fillRef idx="3">
-            <a:schemeClr val="accent1"/>
-          </a:fillRef>
-          <a:effectRef idx="2">
-            <a:schemeClr val="accent1"/>
-          </a:effectRef>
-          <a:fontRef idx="minor">
-            <a:schemeClr val="lt1"/>
-          </a:fontRef>
-        </p:style>
-        <p:txBody>
-          <a:bodyPr rtlCol="0" anchor="ctr"/>
-          <a:lstStyle/>
-          <a:p/>
-        </p:txBody>
-      </p:sp>
-      <p:sp>
-        <p:nvSpPr>
-          <p:cNvPr id="18" name="TextBox 17"/>
-          <p:cNvSpPr txBox="1"/>
-          <p:nvPr/>
-        </p:nvSpPr>
-        <p:spPr>
-          <a:xfrm>
-            <a:off x="8286292" y="4901184"/>
-            <a:ext cx="3137306" cy="237744"/>
-          </a:xfrm>
-          <a:prstGeom prst="rect">
-            <a:avLst/>
-          </a:prstGeom>
-          <a:noFill/>
-        </p:spPr>
-        <p:txBody>
-          <a:bodyPr wrap="square" anchor="t" lIns="0" rIns="0" tIns="0" bIns="0">
-            <a:spAutoFit/>
-          </a:bodyPr>
-          <a:lstStyle/>
-          <a:p>
-            <a:pPr algn="l">
-              <a:lnSpc>
-                <a:spcPct val="118000"/>
-              </a:lnSpc>
-              <a:spcAft>
-                <a:spcPts val="0"/>
-              </a:spcAft>
-            </a:pPr>
-            <a:r>
-              <a:rPr sz="1050" b="1">
-                <a:solidFill>
-                  <a:srgbClr val="B91C1C"/>
-                </a:solidFill>
-                <a:latin typeface="Inter"/>
-              </a:rPr>
-              <a:t>INTERFACE</a:t>
-            </a:r>
-          </a:p>
-        </p:txBody>
-      </p:sp>
-      <p:sp>
-        <p:nvSpPr>
-          <p:cNvPr id="19" name="TextBox 18"/>
-          <p:cNvSpPr txBox="1"/>
-          <p:nvPr/>
-        </p:nvSpPr>
-        <p:spPr>
-          <a:xfrm>
-            <a:off x="8286292" y="5175504"/>
-            <a:ext cx="3137306" cy="804672"/>
-          </a:xfrm>
-          <a:prstGeom prst="rect">
-            <a:avLst/>
-          </a:prstGeom>
-          <a:noFill/>
-        </p:spPr>
-        <p:txBody>
-          <a:bodyPr wrap="square" anchor="t" lIns="0" rIns="0" tIns="0" bIns="0">
-            <a:spAutoFit/>
-          </a:bodyPr>
-          <a:lstStyle/>
-          <a:p>
-            <a:pPr algn="l">
-              <a:lnSpc>
-                <a:spcPct val="126000"/>
-              </a:lnSpc>
-              <a:spcAft>
-                <a:spcPts val="0"/>
-              </a:spcAft>
-            </a:pPr>
-            <a:r>
-              <a:rPr sz="1150" b="0">
-                <a:solidFill>
-                  <a:srgbClr val="0F172A"/>
-                </a:solidFill>
-                <a:latin typeface="Inter"/>
-              </a:rPr>
-              <a:t>Three browser surfaces served from Railway; the Pi only ever dials out, so no inbound port is opened on the pack.</a:t>
+              <a:rPr sz="950" b="0">
+                <a:solidFill>
+                  <a:srgbClr val="475569"/>
+                </a:solidFill>
+                <a:latin typeface="Inter"/>
+              </a:rPr>
+              <a:t>Arduino Uno R4 WiFi</a:t>
             </a:r>
           </a:p>
         </p:txBody>
@@ -9871,7 +10007,7 @@
                 </a:solidFill>
                 <a:latin typeface="Inter"/>
               </a:rPr>
-              <a:t>The dashboard an operator actually reads</a:t>
+              <a:t>How the whole thing fits together</a:t>
             </a:r>
           </a:p>
         </p:txBody>
@@ -10044,629 +10180,9 @@
           </a:p>
         </p:txBody>
       </p:sp>
-      <p:sp>
-        <p:nvSpPr>
-          <p:cNvPr id="7" name="TextBox 6"/>
-          <p:cNvSpPr txBox="1"/>
-          <p:nvPr/>
-        </p:nvSpPr>
-        <p:spPr>
-          <a:xfrm>
-            <a:off x="566928" y="1517904"/>
-            <a:ext cx="5797296" cy="2834640"/>
-          </a:xfrm>
-          <a:prstGeom prst="rect">
-            <a:avLst/>
-          </a:prstGeom>
-          <a:noFill/>
-        </p:spPr>
-        <p:txBody>
-          <a:bodyPr wrap="square" lIns="0" rIns="0" tIns="0" bIns="0">
-            <a:spAutoFit/>
-          </a:bodyPr>
-          <a:lstStyle/>
-          <a:p>
-            <a:pPr marL="274320" indent="-274320">
-              <a:lnSpc>
-                <a:spcPct val="116000"/>
-              </a:lnSpc>
-              <a:spcAft>
-                <a:spcPts val="900"/>
-              </a:spcAft>
-              <a:buClr>
-                <a:srgbClr val="0E7490"/>
-              </a:buClr>
-              <a:buSzPct val="62000"/>
-              <a:buFont typeface="Arial" pitchFamily="34" charset="0"/>
-              <a:buChar char="●"/>
-            </a:pPr>
-            <a:r>
-              <a:rPr sz="1650">
-                <a:solidFill>
-                  <a:srgbClr val="0F172A"/>
-                </a:solidFill>
-                <a:latin typeface="Inter"/>
-              </a:rPr>
-              <a:t>Flask dashboard deployed on Railway.</a:t>
-            </a:r>
-          </a:p>
-          <a:p>
-            <a:pPr marL="274320" indent="-274320">
-              <a:lnSpc>
-                <a:spcPct val="116000"/>
-              </a:lnSpc>
-              <a:spcAft>
-                <a:spcPts val="900"/>
-              </a:spcAft>
-              <a:buClr>
-                <a:srgbClr val="0E7490"/>
-              </a:buClr>
-              <a:buSzPct val="62000"/>
-              <a:buFont typeface="Arial" pitchFamily="34" charset="0"/>
-              <a:buChar char="●"/>
-            </a:pPr>
-            <a:r>
-              <a:rPr sz="1650">
-                <a:solidFill>
-                  <a:srgbClr val="0F172A"/>
-                </a:solidFill>
-                <a:latin typeface="Inter"/>
-              </a:rPr>
-              <a:t>Live per-cell voltages, pack current and four temperature zones.</a:t>
-            </a:r>
-          </a:p>
-          <a:p>
-            <a:pPr marL="274320" indent="-274320">
-              <a:lnSpc>
-                <a:spcPct val="116000"/>
-              </a:lnSpc>
-              <a:spcAft>
-                <a:spcPts val="900"/>
-              </a:spcAft>
-              <a:buClr>
-                <a:srgbClr val="0E7490"/>
-              </a:buClr>
-              <a:buSzPct val="62000"/>
-              <a:buFont typeface="Arial" pitchFamily="34" charset="0"/>
-              <a:buChar char="●"/>
-            </a:pPr>
-            <a:r>
-              <a:rPr sz="1650">
-                <a:solidFill>
-                  <a:srgbClr val="0F172A"/>
-                </a:solidFill>
-                <a:latin typeface="Inter"/>
-              </a:rPr>
-              <a:t>Charge and discharge ETA smoothed with an EMA filter.</a:t>
-            </a:r>
-          </a:p>
-          <a:p>
-            <a:pPr marL="274320" indent="-274320">
-              <a:lnSpc>
-                <a:spcPct val="116000"/>
-              </a:lnSpc>
-              <a:spcAft>
-                <a:spcPts val="900"/>
-              </a:spcAft>
-              <a:buClr>
-                <a:srgbClr val="0E7490"/>
-              </a:buClr>
-              <a:buSzPct val="62000"/>
-              <a:buFont typeface="Arial" pitchFamily="34" charset="0"/>
-              <a:buChar char="●"/>
-            </a:pPr>
-            <a:r>
-              <a:rPr sz="1650">
-                <a:solidFill>
-                  <a:srgbClr val="0F172A"/>
-                </a:solidFill>
-                <a:latin typeface="Inter"/>
-              </a:rPr>
-              <a:t>Driving context from current magnitude at T versus T-1.</a:t>
-            </a:r>
-          </a:p>
-          <a:p>
-            <a:pPr marL="274320" indent="-274320">
-              <a:lnSpc>
-                <a:spcPct val="116000"/>
-              </a:lnSpc>
-              <a:spcAft>
-                <a:spcPts val="900"/>
-              </a:spcAft>
-              <a:buClr>
-                <a:srgbClr val="0E7490"/>
-              </a:buClr>
-              <a:buSzPct val="62000"/>
-              <a:buFont typeface="Arial" pitchFamily="34" charset="0"/>
-              <a:buChar char="●"/>
-            </a:pPr>
-            <a:r>
-              <a:rPr sz="1650">
-                <a:solidFill>
-                  <a:srgbClr val="0F172A"/>
-                </a:solidFill>
-                <a:latin typeface="Inter"/>
-              </a:rPr>
-              <a:t>Alert history logs value, threshold, severity and resolution time.</a:t>
-            </a:r>
-          </a:p>
-        </p:txBody>
-      </p:sp>
-      <p:sp>
-        <p:nvSpPr>
-          <p:cNvPr id="8" name="TextBox 7"/>
-          <p:cNvSpPr txBox="1"/>
-          <p:nvPr/>
-        </p:nvSpPr>
-        <p:spPr>
-          <a:xfrm>
-            <a:off x="566928" y="4736592"/>
-            <a:ext cx="5797296" cy="256032"/>
-          </a:xfrm>
-          <a:prstGeom prst="rect">
-            <a:avLst/>
-          </a:prstGeom>
-          <a:noFill/>
-        </p:spPr>
-        <p:txBody>
-          <a:bodyPr wrap="square" anchor="t" lIns="0" rIns="0" tIns="0" bIns="0">
-            <a:spAutoFit/>
-          </a:bodyPr>
-          <a:lstStyle/>
-          <a:p>
-            <a:pPr algn="l">
-              <a:lnSpc>
-                <a:spcPct val="118000"/>
-              </a:lnSpc>
-              <a:spcAft>
-                <a:spcPts val="0"/>
-              </a:spcAft>
-            </a:pPr>
-            <a:r>
-              <a:rPr sz="1000" b="1">
-                <a:solidFill>
-                  <a:srgbClr val="0E7490"/>
-                </a:solidFill>
-                <a:latin typeface="Inter"/>
-              </a:rPr>
-              <a:t>FOUR-MODE DRIVING CONTEXT</a:t>
-            </a:r>
-          </a:p>
-        </p:txBody>
-      </p:sp>
-      <p:sp>
-        <p:nvSpPr>
-          <p:cNvPr id="9" name="Rectangle 8"/>
-          <p:cNvSpPr/>
-          <p:nvPr/>
-        </p:nvSpPr>
-        <p:spPr>
-          <a:xfrm>
-            <a:off x="566928" y="5047488"/>
-            <a:ext cx="1353312" cy="566928"/>
-          </a:xfrm>
-          <a:prstGeom prst="rect">
-            <a:avLst/>
-          </a:prstGeom>
-          <a:solidFill>
-            <a:srgbClr val="FFFFFF"/>
-          </a:solidFill>
-          <a:ln w="15875">
-            <a:solidFill>
-              <a:srgbClr val="475569"/>
-            </a:solidFill>
-          </a:ln>
-          <a:effectLst/>
-        </p:spPr>
-        <p:style>
-          <a:lnRef idx="1">
-            <a:schemeClr val="accent1"/>
-          </a:lnRef>
-          <a:fillRef idx="3">
-            <a:schemeClr val="accent1"/>
-          </a:fillRef>
-          <a:effectRef idx="2">
-            <a:schemeClr val="accent1"/>
-          </a:effectRef>
-          <a:fontRef idx="minor">
-            <a:schemeClr val="lt1"/>
-          </a:fontRef>
-        </p:style>
-        <p:txBody>
-          <a:bodyPr rtlCol="0" anchor="ctr"/>
-          <a:lstStyle/>
-          <a:p/>
-        </p:txBody>
-      </p:sp>
-      <p:sp>
-        <p:nvSpPr>
-          <p:cNvPr id="10" name="TextBox 9"/>
-          <p:cNvSpPr txBox="1"/>
-          <p:nvPr/>
-        </p:nvSpPr>
-        <p:spPr>
-          <a:xfrm>
-            <a:off x="566928" y="5047488"/>
-            <a:ext cx="1353312" cy="566928"/>
-          </a:xfrm>
-          <a:prstGeom prst="rect">
-            <a:avLst/>
-          </a:prstGeom>
-          <a:noFill/>
-        </p:spPr>
-        <p:txBody>
-          <a:bodyPr wrap="square" anchor="ctr" lIns="0" rIns="0" tIns="0" bIns="0">
-            <a:spAutoFit/>
-          </a:bodyPr>
-          <a:lstStyle/>
-          <a:p>
-            <a:pPr algn="ctr">
-              <a:lnSpc>
-                <a:spcPct val="118000"/>
-              </a:lnSpc>
-              <a:spcAft>
-                <a:spcPts val="0"/>
-              </a:spcAft>
-            </a:pPr>
-            <a:r>
-              <a:rPr sz="1400" b="1">
-                <a:solidFill>
-                  <a:srgbClr val="475569"/>
-                </a:solidFill>
-                <a:latin typeface="Inter"/>
-              </a:rPr>
-              <a:t>IDLE</a:t>
-            </a:r>
-          </a:p>
-        </p:txBody>
-      </p:sp>
-      <p:sp>
-        <p:nvSpPr>
-          <p:cNvPr id="11" name="Rectangle 10"/>
-          <p:cNvSpPr/>
-          <p:nvPr/>
-        </p:nvSpPr>
-        <p:spPr>
-          <a:xfrm>
-            <a:off x="2048256" y="5047488"/>
-            <a:ext cx="1353312" cy="566928"/>
-          </a:xfrm>
-          <a:prstGeom prst="rect">
-            <a:avLst/>
-          </a:prstGeom>
-          <a:solidFill>
-            <a:srgbClr val="FFFFFF"/>
-          </a:solidFill>
-          <a:ln w="15875">
-            <a:solidFill>
-              <a:srgbClr val="B91C1C"/>
-            </a:solidFill>
-          </a:ln>
-          <a:effectLst/>
-        </p:spPr>
-        <p:style>
-          <a:lnRef idx="1">
-            <a:schemeClr val="accent1"/>
-          </a:lnRef>
-          <a:fillRef idx="3">
-            <a:schemeClr val="accent1"/>
-          </a:fillRef>
-          <a:effectRef idx="2">
-            <a:schemeClr val="accent1"/>
-          </a:effectRef>
-          <a:fontRef idx="minor">
-            <a:schemeClr val="lt1"/>
-          </a:fontRef>
-        </p:style>
-        <p:txBody>
-          <a:bodyPr rtlCol="0" anchor="ctr"/>
-          <a:lstStyle/>
-          <a:p/>
-        </p:txBody>
-      </p:sp>
-      <p:sp>
-        <p:nvSpPr>
-          <p:cNvPr id="12" name="TextBox 11"/>
-          <p:cNvSpPr txBox="1"/>
-          <p:nvPr/>
-        </p:nvSpPr>
-        <p:spPr>
-          <a:xfrm>
-            <a:off x="2048256" y="5047488"/>
-            <a:ext cx="1353312" cy="566928"/>
-          </a:xfrm>
-          <a:prstGeom prst="rect">
-            <a:avLst/>
-          </a:prstGeom>
-          <a:noFill/>
-        </p:spPr>
-        <p:txBody>
-          <a:bodyPr wrap="square" anchor="ctr" lIns="0" rIns="0" tIns="0" bIns="0">
-            <a:spAutoFit/>
-          </a:bodyPr>
-          <a:lstStyle/>
-          <a:p>
-            <a:pPr algn="ctr">
-              <a:lnSpc>
-                <a:spcPct val="118000"/>
-              </a:lnSpc>
-              <a:spcAft>
-                <a:spcPts val="0"/>
-              </a:spcAft>
-            </a:pPr>
-            <a:r>
-              <a:rPr sz="1400" b="1">
-                <a:solidFill>
-                  <a:srgbClr val="B91C1C"/>
-                </a:solidFill>
-                <a:latin typeface="Inter"/>
-              </a:rPr>
-              <a:t>ACCEL</a:t>
-            </a:r>
-          </a:p>
-        </p:txBody>
-      </p:sp>
-      <p:sp>
-        <p:nvSpPr>
-          <p:cNvPr id="13" name="Rectangle 12"/>
-          <p:cNvSpPr/>
-          <p:nvPr/>
-        </p:nvSpPr>
-        <p:spPr>
-          <a:xfrm>
-            <a:off x="3529584" y="5047488"/>
-            <a:ext cx="1353312" cy="566928"/>
-          </a:xfrm>
-          <a:prstGeom prst="rect">
-            <a:avLst/>
-          </a:prstGeom>
-          <a:solidFill>
-            <a:srgbClr val="FFFFFF"/>
-          </a:solidFill>
-          <a:ln w="15875">
-            <a:solidFill>
-              <a:srgbClr val="0E7490"/>
-            </a:solidFill>
-          </a:ln>
-          <a:effectLst/>
-        </p:spPr>
-        <p:style>
-          <a:lnRef idx="1">
-            <a:schemeClr val="accent1"/>
-          </a:lnRef>
-          <a:fillRef idx="3">
-            <a:schemeClr val="accent1"/>
-          </a:fillRef>
-          <a:effectRef idx="2">
-            <a:schemeClr val="accent1"/>
-          </a:effectRef>
-          <a:fontRef idx="minor">
-            <a:schemeClr val="lt1"/>
-          </a:fontRef>
-        </p:style>
-        <p:txBody>
-          <a:bodyPr rtlCol="0" anchor="ctr"/>
-          <a:lstStyle/>
-          <a:p/>
-        </p:txBody>
-      </p:sp>
-      <p:sp>
-        <p:nvSpPr>
-          <p:cNvPr id="14" name="TextBox 13"/>
-          <p:cNvSpPr txBox="1"/>
-          <p:nvPr/>
-        </p:nvSpPr>
-        <p:spPr>
-          <a:xfrm>
-            <a:off x="3529584" y="5047488"/>
-            <a:ext cx="1353312" cy="566928"/>
-          </a:xfrm>
-          <a:prstGeom prst="rect">
-            <a:avLst/>
-          </a:prstGeom>
-          <a:noFill/>
-        </p:spPr>
-        <p:txBody>
-          <a:bodyPr wrap="square" anchor="ctr" lIns="0" rIns="0" tIns="0" bIns="0">
-            <a:spAutoFit/>
-          </a:bodyPr>
-          <a:lstStyle/>
-          <a:p>
-            <a:pPr algn="ctr">
-              <a:lnSpc>
-                <a:spcPct val="118000"/>
-              </a:lnSpc>
-              <a:spcAft>
-                <a:spcPts val="0"/>
-              </a:spcAft>
-            </a:pPr>
-            <a:r>
-              <a:rPr sz="1400" b="1">
-                <a:solidFill>
-                  <a:srgbClr val="0E7490"/>
-                </a:solidFill>
-                <a:latin typeface="Inter"/>
-              </a:rPr>
-              <a:t>CRUISE</a:t>
-            </a:r>
-          </a:p>
-        </p:txBody>
-      </p:sp>
-      <p:sp>
-        <p:nvSpPr>
-          <p:cNvPr id="15" name="Rectangle 14"/>
-          <p:cNvSpPr/>
-          <p:nvPr/>
-        </p:nvSpPr>
-        <p:spPr>
-          <a:xfrm>
-            <a:off x="5010912" y="5047488"/>
-            <a:ext cx="1353312" cy="566928"/>
-          </a:xfrm>
-          <a:prstGeom prst="rect">
-            <a:avLst/>
-          </a:prstGeom>
-          <a:solidFill>
-            <a:srgbClr val="FFFFFF"/>
-          </a:solidFill>
-          <a:ln w="15875">
-            <a:solidFill>
-              <a:srgbClr val="B45309"/>
-            </a:solidFill>
-          </a:ln>
-          <a:effectLst/>
-        </p:spPr>
-        <p:style>
-          <a:lnRef idx="1">
-            <a:schemeClr val="accent1"/>
-          </a:lnRef>
-          <a:fillRef idx="3">
-            <a:schemeClr val="accent1"/>
-          </a:fillRef>
-          <a:effectRef idx="2">
-            <a:schemeClr val="accent1"/>
-          </a:effectRef>
-          <a:fontRef idx="minor">
-            <a:schemeClr val="lt1"/>
-          </a:fontRef>
-        </p:style>
-        <p:txBody>
-          <a:bodyPr rtlCol="0" anchor="ctr"/>
-          <a:lstStyle/>
-          <a:p/>
-        </p:txBody>
-      </p:sp>
-      <p:sp>
-        <p:nvSpPr>
-          <p:cNvPr id="16" name="TextBox 15"/>
-          <p:cNvSpPr txBox="1"/>
-          <p:nvPr/>
-        </p:nvSpPr>
-        <p:spPr>
-          <a:xfrm>
-            <a:off x="5010912" y="5047488"/>
-            <a:ext cx="1353312" cy="566928"/>
-          </a:xfrm>
-          <a:prstGeom prst="rect">
-            <a:avLst/>
-          </a:prstGeom>
-          <a:noFill/>
-        </p:spPr>
-        <p:txBody>
-          <a:bodyPr wrap="square" anchor="ctr" lIns="0" rIns="0" tIns="0" bIns="0">
-            <a:spAutoFit/>
-          </a:bodyPr>
-          <a:lstStyle/>
-          <a:p>
-            <a:pPr algn="ctr">
-              <a:lnSpc>
-                <a:spcPct val="118000"/>
-              </a:lnSpc>
-              <a:spcAft>
-                <a:spcPts val="0"/>
-              </a:spcAft>
-            </a:pPr>
-            <a:r>
-              <a:rPr sz="1400" b="1">
-                <a:solidFill>
-                  <a:srgbClr val="B45309"/>
-                </a:solidFill>
-                <a:latin typeface="Inter"/>
-              </a:rPr>
-              <a:t>DECEL</a:t>
-            </a:r>
-          </a:p>
-        </p:txBody>
-      </p:sp>
-      <p:sp>
-        <p:nvSpPr>
-          <p:cNvPr id="17" name="TextBox 16"/>
-          <p:cNvSpPr txBox="1"/>
-          <p:nvPr/>
-        </p:nvSpPr>
-        <p:spPr>
-          <a:xfrm>
-            <a:off x="566928" y="5724144"/>
-            <a:ext cx="5797296" cy="274320"/>
-          </a:xfrm>
-          <a:prstGeom prst="rect">
-            <a:avLst/>
-          </a:prstGeom>
-          <a:noFill/>
-        </p:spPr>
-        <p:txBody>
-          <a:bodyPr wrap="square" anchor="t" lIns="0" rIns="0" tIns="0" bIns="0">
-            <a:spAutoFit/>
-          </a:bodyPr>
-          <a:lstStyle/>
-          <a:p>
-            <a:pPr algn="l">
-              <a:lnSpc>
-                <a:spcPct val="118000"/>
-              </a:lnSpc>
-              <a:spcAft>
-                <a:spcPts val="0"/>
-              </a:spcAft>
-            </a:pPr>
-            <a:r>
-              <a:rPr sz="1150" b="0">
-                <a:solidFill>
-                  <a:srgbClr val="475569"/>
-                </a:solidFill>
-                <a:latin typeface="Inter"/>
-              </a:rPr>
-              <a:t>Thresholds follow the mode — a sag under ACCEL is not a sag at IDLE.</a:t>
-            </a:r>
-          </a:p>
-        </p:txBody>
-      </p:sp>
-      <p:sp>
-        <p:nvSpPr>
-          <p:cNvPr id="18" name="Rectangle 17"/>
-          <p:cNvSpPr/>
-          <p:nvPr/>
-        </p:nvSpPr>
-        <p:spPr>
-          <a:xfrm>
-            <a:off x="6693408" y="1610461"/>
-            <a:ext cx="4931359" cy="2009444"/>
-          </a:xfrm>
-          <a:prstGeom prst="rect">
-            <a:avLst/>
-          </a:prstGeom>
-          <a:solidFill>
-            <a:srgbClr val="FFFFFF"/>
-          </a:solidFill>
-          <a:ln w="12700">
-            <a:solidFill>
-              <a:srgbClr val="CBD5E1"/>
-            </a:solidFill>
-          </a:ln>
-          <a:effectLst/>
-        </p:spPr>
-        <p:style>
-          <a:lnRef idx="1">
-            <a:schemeClr val="accent1"/>
-          </a:lnRef>
-          <a:fillRef idx="3">
-            <a:schemeClr val="accent1"/>
-          </a:fillRef>
-          <a:effectRef idx="2">
-            <a:schemeClr val="accent1"/>
-          </a:effectRef>
-          <a:fontRef idx="minor">
-            <a:schemeClr val="lt1"/>
-          </a:fontRef>
-        </p:style>
-        <p:txBody>
-          <a:bodyPr rtlCol="0" anchor="ctr"/>
-          <a:lstStyle/>
-          <a:p/>
-        </p:txBody>
-      </p:sp>
       <p:pic>
         <p:nvPicPr>
-          <p:cNvPr id="19" name="Picture 18" descr="p07_img1_x61.jpeg"/>
+          <p:cNvPr id="7" name="Picture 6" descr="diag_system_flow.png"/>
           <p:cNvPicPr>
             <a:picLocks noChangeAspect="1"/>
           </p:cNvPicPr>
@@ -10680,8 +10196,8 @@
         </p:blipFill>
         <p:spPr>
           <a:xfrm>
-            <a:off x="6812280" y="1729333"/>
-            <a:ext cx="4693615" cy="1771700"/>
+            <a:off x="2465340" y="1536192"/>
+            <a:ext cx="7261013" cy="3063240"/>
           </a:xfrm>
           <a:prstGeom prst="rect">
             <a:avLst/>
@@ -10690,22 +10206,22 @@
       </p:pic>
       <p:sp>
         <p:nvSpPr>
-          <p:cNvPr id="20" name="Rectangle 19"/>
+          <p:cNvPr id="8" name="Rectangle 7"/>
           <p:cNvSpPr/>
           <p:nvPr/>
         </p:nvSpPr>
         <p:spPr>
           <a:xfrm>
-            <a:off x="6693408" y="3853669"/>
-            <a:ext cx="4931359" cy="1857285"/>
+            <a:off x="566928" y="4754880"/>
+            <a:ext cx="3539642" cy="1298448"/>
           </a:xfrm>
           <a:prstGeom prst="rect">
             <a:avLst/>
           </a:prstGeom>
           <a:solidFill>
-            <a:srgbClr val="FFFFFF"/>
+            <a:srgbClr val="F1F5F9"/>
           </a:solidFill>
-          <a:ln w="12700">
+          <a:ln w="9525">
             <a:solidFill>
               <a:srgbClr val="CBD5E1"/>
             </a:solidFill>
@@ -10732,40 +10248,58 @@
           <a:p/>
         </p:txBody>
       </p:sp>
-      <p:pic>
-        <p:nvPicPr>
-          <p:cNvPr id="21" name="Picture 20" descr="p08_img2_x68.png"/>
-          <p:cNvPicPr>
-            <a:picLocks noChangeAspect="1"/>
-          </p:cNvPicPr>
-          <p:nvPr/>
-        </p:nvPicPr>
-        <p:blipFill>
-          <a:blip r:embed="rId3"/>
-          <a:stretch>
-            <a:fillRect/>
-          </a:stretch>
-        </p:blipFill>
-        <p:spPr>
-          <a:xfrm>
-            <a:off x="6812280" y="3972541"/>
-            <a:ext cx="4693615" cy="1619541"/>
-          </a:xfrm>
-          <a:prstGeom prst="rect">
-            <a:avLst/>
-          </a:prstGeom>
-        </p:spPr>
-      </p:pic>
-      <p:sp>
-        <p:nvSpPr>
-          <p:cNvPr id="22" name="TextBox 21"/>
-          <p:cNvSpPr txBox="1"/>
-          <p:nvPr/>
-        </p:nvSpPr>
-        <p:spPr>
-          <a:xfrm>
-            <a:off x="6693408" y="5797296"/>
-            <a:ext cx="4931359" cy="237744"/>
+      <p:sp>
+        <p:nvSpPr>
+          <p:cNvPr id="9" name="Rectangle 8"/>
+          <p:cNvSpPr/>
+          <p:nvPr/>
+        </p:nvSpPr>
+        <p:spPr>
+          <a:xfrm>
+            <a:off x="566928" y="4754880"/>
+            <a:ext cx="3539642" cy="59436"/>
+          </a:xfrm>
+          <a:prstGeom prst="rect">
+            <a:avLst/>
+          </a:prstGeom>
+          <a:solidFill>
+            <a:srgbClr val="0E7490"/>
+          </a:solidFill>
+          <a:ln>
+            <a:noFill/>
+          </a:ln>
+          <a:effectLst/>
+        </p:spPr>
+        <p:style>
+          <a:lnRef idx="1">
+            <a:schemeClr val="accent1"/>
+          </a:lnRef>
+          <a:fillRef idx="3">
+            <a:schemeClr val="accent1"/>
+          </a:fillRef>
+          <a:effectRef idx="2">
+            <a:schemeClr val="accent1"/>
+          </a:effectRef>
+          <a:fontRef idx="minor">
+            <a:schemeClr val="lt1"/>
+          </a:fontRef>
+        </p:style>
+        <p:txBody>
+          <a:bodyPr rtlCol="0" anchor="ctr"/>
+          <a:lstStyle/>
+          <a:p/>
+        </p:txBody>
+      </p:sp>
+      <p:sp>
+        <p:nvSpPr>
+          <p:cNvPr id="10" name="TextBox 9"/>
+          <p:cNvSpPr txBox="1"/>
+          <p:nvPr/>
+        </p:nvSpPr>
+        <p:spPr>
+          <a:xfrm>
+            <a:off x="768096" y="4901184"/>
+            <a:ext cx="3137306" cy="237744"/>
           </a:xfrm>
           <a:prstGeom prst="rect">
             <a:avLst/>
@@ -10778,7 +10312,7 @@
           </a:bodyPr>
           <a:lstStyle/>
           <a:p>
-            <a:pPr algn="ctr">
+            <a:pPr algn="l">
               <a:lnSpc>
                 <a:spcPct val="118000"/>
               </a:lnSpc>
@@ -10787,13 +10321,395 @@
               </a:spcAft>
             </a:pPr>
             <a:r>
-              <a:rPr sz="950" b="0">
-                <a:solidFill>
-                  <a:srgbClr val="475569"/>
-                </a:solidFill>
-                <a:latin typeface="Inter"/>
-              </a:rPr>
-              <a:t>Live sensing tiles (top) and the critical-alarm path (bottom)</a:t>
+              <a:rPr sz="1050" b="1">
+                <a:solidFill>
+                  <a:srgbClr val="0E7490"/>
+                </a:solidFill>
+                <a:latin typeface="Inter"/>
+              </a:rPr>
+              <a:t>EDGE</a:t>
+            </a:r>
+          </a:p>
+        </p:txBody>
+      </p:sp>
+      <p:sp>
+        <p:nvSpPr>
+          <p:cNvPr id="11" name="TextBox 10"/>
+          <p:cNvSpPr txBox="1"/>
+          <p:nvPr/>
+        </p:nvSpPr>
+        <p:spPr>
+          <a:xfrm>
+            <a:off x="768096" y="5175504"/>
+            <a:ext cx="3137306" cy="804672"/>
+          </a:xfrm>
+          <a:prstGeom prst="rect">
+            <a:avLst/>
+          </a:prstGeom>
+          <a:noFill/>
+        </p:spPr>
+        <p:txBody>
+          <a:bodyPr wrap="square" anchor="t" lIns="0" rIns="0" tIns="0" bIns="0">
+            <a:spAutoFit/>
+          </a:bodyPr>
+          <a:lstStyle/>
+          <a:p>
+            <a:pPr algn="l">
+              <a:lnSpc>
+                <a:spcPct val="126000"/>
+              </a:lnSpc>
+              <a:spcAft>
+                <a:spcPts val="0"/>
+              </a:spcAft>
+            </a:pPr>
+            <a:r>
+              <a:rPr sz="1150" b="0">
+                <a:solidFill>
+                  <a:srgbClr val="0F172A"/>
+                </a:solidFill>
+                <a:latin typeface="Inter"/>
+              </a:rPr>
+              <a:t>Sampling, feature engineering and inference all happen on the pack. The Pi never needs the network to keep the pack safe.</a:t>
+            </a:r>
+          </a:p>
+        </p:txBody>
+      </p:sp>
+      <p:sp>
+        <p:nvSpPr>
+          <p:cNvPr id="12" name="Rectangle 11"/>
+          <p:cNvSpPr/>
+          <p:nvPr/>
+        </p:nvSpPr>
+        <p:spPr>
+          <a:xfrm>
+            <a:off x="4326026" y="4754880"/>
+            <a:ext cx="3539642" cy="1298448"/>
+          </a:xfrm>
+          <a:prstGeom prst="rect">
+            <a:avLst/>
+          </a:prstGeom>
+          <a:solidFill>
+            <a:srgbClr val="F1F5F9"/>
+          </a:solidFill>
+          <a:ln w="9525">
+            <a:solidFill>
+              <a:srgbClr val="CBD5E1"/>
+            </a:solidFill>
+          </a:ln>
+          <a:effectLst/>
+        </p:spPr>
+        <p:style>
+          <a:lnRef idx="1">
+            <a:schemeClr val="accent1"/>
+          </a:lnRef>
+          <a:fillRef idx="3">
+            <a:schemeClr val="accent1"/>
+          </a:fillRef>
+          <a:effectRef idx="2">
+            <a:schemeClr val="accent1"/>
+          </a:effectRef>
+          <a:fontRef idx="minor">
+            <a:schemeClr val="lt1"/>
+          </a:fontRef>
+        </p:style>
+        <p:txBody>
+          <a:bodyPr rtlCol="0" anchor="ctr"/>
+          <a:lstStyle/>
+          <a:p/>
+        </p:txBody>
+      </p:sp>
+      <p:sp>
+        <p:nvSpPr>
+          <p:cNvPr id="13" name="Rectangle 12"/>
+          <p:cNvSpPr/>
+          <p:nvPr/>
+        </p:nvSpPr>
+        <p:spPr>
+          <a:xfrm>
+            <a:off x="4326026" y="4754880"/>
+            <a:ext cx="3539642" cy="59436"/>
+          </a:xfrm>
+          <a:prstGeom prst="rect">
+            <a:avLst/>
+          </a:prstGeom>
+          <a:solidFill>
+            <a:srgbClr val="0E7490"/>
+          </a:solidFill>
+          <a:ln>
+            <a:noFill/>
+          </a:ln>
+          <a:effectLst/>
+        </p:spPr>
+        <p:style>
+          <a:lnRef idx="1">
+            <a:schemeClr val="accent1"/>
+          </a:lnRef>
+          <a:fillRef idx="3">
+            <a:schemeClr val="accent1"/>
+          </a:fillRef>
+          <a:effectRef idx="2">
+            <a:schemeClr val="accent1"/>
+          </a:effectRef>
+          <a:fontRef idx="minor">
+            <a:schemeClr val="lt1"/>
+          </a:fontRef>
+        </p:style>
+        <p:txBody>
+          <a:bodyPr rtlCol="0" anchor="ctr"/>
+          <a:lstStyle/>
+          <a:p/>
+        </p:txBody>
+      </p:sp>
+      <p:sp>
+        <p:nvSpPr>
+          <p:cNvPr id="14" name="TextBox 13"/>
+          <p:cNvSpPr txBox="1"/>
+          <p:nvPr/>
+        </p:nvSpPr>
+        <p:spPr>
+          <a:xfrm>
+            <a:off x="4527194" y="4901184"/>
+            <a:ext cx="3137306" cy="237744"/>
+          </a:xfrm>
+          <a:prstGeom prst="rect">
+            <a:avLst/>
+          </a:prstGeom>
+          <a:noFill/>
+        </p:spPr>
+        <p:txBody>
+          <a:bodyPr wrap="square" anchor="t" lIns="0" rIns="0" tIns="0" bIns="0">
+            <a:spAutoFit/>
+          </a:bodyPr>
+          <a:lstStyle/>
+          <a:p>
+            <a:pPr algn="l">
+              <a:lnSpc>
+                <a:spcPct val="118000"/>
+              </a:lnSpc>
+              <a:spcAft>
+                <a:spcPts val="0"/>
+              </a:spcAft>
+            </a:pPr>
+            <a:r>
+              <a:rPr sz="1050" b="1">
+                <a:solidFill>
+                  <a:srgbClr val="0E7490"/>
+                </a:solidFill>
+                <a:latin typeface="Inter"/>
+              </a:rPr>
+              <a:t>CLOUD</a:t>
+            </a:r>
+          </a:p>
+        </p:txBody>
+      </p:sp>
+      <p:sp>
+        <p:nvSpPr>
+          <p:cNvPr id="15" name="TextBox 14"/>
+          <p:cNvSpPr txBox="1"/>
+          <p:nvPr/>
+        </p:nvSpPr>
+        <p:spPr>
+          <a:xfrm>
+            <a:off x="4527194" y="5175504"/>
+            <a:ext cx="3137306" cy="804672"/>
+          </a:xfrm>
+          <a:prstGeom prst="rect">
+            <a:avLst/>
+          </a:prstGeom>
+          <a:noFill/>
+        </p:spPr>
+        <p:txBody>
+          <a:bodyPr wrap="square" anchor="t" lIns="0" rIns="0" tIns="0" bIns="0">
+            <a:spAutoFit/>
+          </a:bodyPr>
+          <a:lstStyle/>
+          <a:p>
+            <a:pPr algn="l">
+              <a:lnSpc>
+                <a:spcPct val="126000"/>
+              </a:lnSpc>
+              <a:spcAft>
+                <a:spcPts val="0"/>
+              </a:spcAft>
+            </a:pPr>
+            <a:r>
+              <a:rPr sz="1150" b="0">
+                <a:solidFill>
+                  <a:srgbClr val="0F172A"/>
+                </a:solidFill>
+                <a:latin typeface="Inter"/>
+              </a:rPr>
+              <a:t>Railway hosts the Flask dashboard — REST and server-sent events — with PostgreSQL for telemetry, cycle history and the active profile.</a:t>
+            </a:r>
+          </a:p>
+        </p:txBody>
+      </p:sp>
+      <p:sp>
+        <p:nvSpPr>
+          <p:cNvPr id="16" name="Rectangle 15"/>
+          <p:cNvSpPr/>
+          <p:nvPr/>
+        </p:nvSpPr>
+        <p:spPr>
+          <a:xfrm>
+            <a:off x="8085124" y="4754880"/>
+            <a:ext cx="3539642" cy="1298448"/>
+          </a:xfrm>
+          <a:prstGeom prst="rect">
+            <a:avLst/>
+          </a:prstGeom>
+          <a:solidFill>
+            <a:srgbClr val="F1F5F9"/>
+          </a:solidFill>
+          <a:ln w="9525">
+            <a:solidFill>
+              <a:srgbClr val="CBD5E1"/>
+            </a:solidFill>
+          </a:ln>
+          <a:effectLst/>
+        </p:spPr>
+        <p:style>
+          <a:lnRef idx="1">
+            <a:schemeClr val="accent1"/>
+          </a:lnRef>
+          <a:fillRef idx="3">
+            <a:schemeClr val="accent1"/>
+          </a:fillRef>
+          <a:effectRef idx="2">
+            <a:schemeClr val="accent1"/>
+          </a:effectRef>
+          <a:fontRef idx="minor">
+            <a:schemeClr val="lt1"/>
+          </a:fontRef>
+        </p:style>
+        <p:txBody>
+          <a:bodyPr rtlCol="0" anchor="ctr"/>
+          <a:lstStyle/>
+          <a:p/>
+        </p:txBody>
+      </p:sp>
+      <p:sp>
+        <p:nvSpPr>
+          <p:cNvPr id="17" name="Rectangle 16"/>
+          <p:cNvSpPr/>
+          <p:nvPr/>
+        </p:nvSpPr>
+        <p:spPr>
+          <a:xfrm>
+            <a:off x="8085124" y="4754880"/>
+            <a:ext cx="3539642" cy="59436"/>
+          </a:xfrm>
+          <a:prstGeom prst="rect">
+            <a:avLst/>
+          </a:prstGeom>
+          <a:solidFill>
+            <a:srgbClr val="B91C1C"/>
+          </a:solidFill>
+          <a:ln>
+            <a:noFill/>
+          </a:ln>
+          <a:effectLst/>
+        </p:spPr>
+        <p:style>
+          <a:lnRef idx="1">
+            <a:schemeClr val="accent1"/>
+          </a:lnRef>
+          <a:fillRef idx="3">
+            <a:schemeClr val="accent1"/>
+          </a:fillRef>
+          <a:effectRef idx="2">
+            <a:schemeClr val="accent1"/>
+          </a:effectRef>
+          <a:fontRef idx="minor">
+            <a:schemeClr val="lt1"/>
+          </a:fontRef>
+        </p:style>
+        <p:txBody>
+          <a:bodyPr rtlCol="0" anchor="ctr"/>
+          <a:lstStyle/>
+          <a:p/>
+        </p:txBody>
+      </p:sp>
+      <p:sp>
+        <p:nvSpPr>
+          <p:cNvPr id="18" name="TextBox 17"/>
+          <p:cNvSpPr txBox="1"/>
+          <p:nvPr/>
+        </p:nvSpPr>
+        <p:spPr>
+          <a:xfrm>
+            <a:off x="8286292" y="4901184"/>
+            <a:ext cx="3137306" cy="237744"/>
+          </a:xfrm>
+          <a:prstGeom prst="rect">
+            <a:avLst/>
+          </a:prstGeom>
+          <a:noFill/>
+        </p:spPr>
+        <p:txBody>
+          <a:bodyPr wrap="square" anchor="t" lIns="0" rIns="0" tIns="0" bIns="0">
+            <a:spAutoFit/>
+          </a:bodyPr>
+          <a:lstStyle/>
+          <a:p>
+            <a:pPr algn="l">
+              <a:lnSpc>
+                <a:spcPct val="118000"/>
+              </a:lnSpc>
+              <a:spcAft>
+                <a:spcPts val="0"/>
+              </a:spcAft>
+            </a:pPr>
+            <a:r>
+              <a:rPr sz="1050" b="1">
+                <a:solidFill>
+                  <a:srgbClr val="B91C1C"/>
+                </a:solidFill>
+                <a:latin typeface="Inter"/>
+              </a:rPr>
+              <a:t>INTERFACE</a:t>
+            </a:r>
+          </a:p>
+        </p:txBody>
+      </p:sp>
+      <p:sp>
+        <p:nvSpPr>
+          <p:cNvPr id="19" name="TextBox 18"/>
+          <p:cNvSpPr txBox="1"/>
+          <p:nvPr/>
+        </p:nvSpPr>
+        <p:spPr>
+          <a:xfrm>
+            <a:off x="8286292" y="5175504"/>
+            <a:ext cx="3137306" cy="804672"/>
+          </a:xfrm>
+          <a:prstGeom prst="rect">
+            <a:avLst/>
+          </a:prstGeom>
+          <a:noFill/>
+        </p:spPr>
+        <p:txBody>
+          <a:bodyPr wrap="square" anchor="t" lIns="0" rIns="0" tIns="0" bIns="0">
+            <a:spAutoFit/>
+          </a:bodyPr>
+          <a:lstStyle/>
+          <a:p>
+            <a:pPr algn="l">
+              <a:lnSpc>
+                <a:spcPct val="126000"/>
+              </a:lnSpc>
+              <a:spcAft>
+                <a:spcPts val="0"/>
+              </a:spcAft>
+            </a:pPr>
+            <a:r>
+              <a:rPr sz="1150" b="0">
+                <a:solidFill>
+                  <a:srgbClr val="0F172A"/>
+                </a:solidFill>
+                <a:latin typeface="Inter"/>
+              </a:rPr>
+              <a:t>Three browser surfaces served from Railway; the Pi only ever dials out, so no inbound port is opened on the pack.</a:t>
             </a:r>
           </a:p>
         </p:txBody>
@@ -10861,7 +10777,7 @@
                 </a:solidFill>
                 <a:latin typeface="Inter"/>
               </a:rPr>
-              <a:t>Context is a feature, not a label on a chart</a:t>
+              <a:t>The dashboard an operator actually reads</a:t>
             </a:r>
           </a:p>
         </p:txBody>
@@ -11042,8 +10958,8 @@
         </p:nvSpPr>
         <p:spPr>
           <a:xfrm>
-            <a:off x="566928" y="1554480"/>
-            <a:ext cx="5797296" cy="2331720"/>
+            <a:off x="566928" y="1517904"/>
+            <a:ext cx="5797296" cy="2834640"/>
           </a:xfrm>
           <a:prstGeom prst="rect">
             <a:avLst/>
@@ -11071,13 +10987,13 @@
               <a:buChar char="●"/>
             </a:pPr>
             <a:r>
-              <a:rPr sz="1600">
+              <a:rPr sz="1650">
                 <a:solidFill>
                   <a:srgbClr val="0F172A"/>
                 </a:solidFill>
                 <a:latin typeface="Inter"/>
               </a:rPr>
-              <a:t>Four NTCs diverge by up to 8.3 °C within one pack.</a:t>
+              <a:t>Flask dashboard deployed on Railway.</a:t>
             </a:r>
           </a:p>
           <a:p>
@@ -11096,13 +11012,13 @@
               <a:buChar char="●"/>
             </a:pPr>
             <a:r>
-              <a:rPr sz="1600">
+              <a:rPr sz="1650">
                 <a:solidFill>
                   <a:srgbClr val="0F172A"/>
                 </a:solidFill>
                 <a:latin typeface="Inter"/>
               </a:rPr>
-              <a:t>That spread is fed to the model as ntc_spread.</a:t>
+              <a:t>Live per-cell voltages, pack current and four temperature zones.</a:t>
             </a:r>
           </a:p>
           <a:p>
@@ -11121,13 +11037,13 @@
               <a:buChar char="●"/>
             </a:pPr>
             <a:r>
-              <a:rPr sz="1600">
+              <a:rPr sz="1650">
                 <a:solidFill>
                   <a:srgbClr val="0F172A"/>
                 </a:solidFill>
                 <a:latin typeface="Inter"/>
               </a:rPr>
-              <a:t>Mode is set from |I(T)| versus |I(T-1)|, with hysteresis.</a:t>
+              <a:t>Charge and discharge ETA smoothed with an EMA filter.</a:t>
             </a:r>
           </a:p>
           <a:p>
@@ -11146,35 +11062,488 @@
               <a:buChar char="●"/>
             </a:pPr>
             <a:r>
-              <a:rPr sz="1600">
+              <a:rPr sz="1650">
                 <a:solidFill>
                   <a:srgbClr val="0F172A"/>
                 </a:solidFill>
                 <a:latin typeface="Inter"/>
               </a:rPr>
-              <a:t>Five-sample hysteresis stops mode flapping on noise.</a:t>
-            </a:r>
-          </a:p>
-        </p:txBody>
-      </p:sp>
-      <p:sp>
-        <p:nvSpPr>
-          <p:cNvPr id="8" name="Rectangle 7"/>
+              <a:t>Driving context from current magnitude at T versus T-1.</a:t>
+            </a:r>
+          </a:p>
+          <a:p>
+            <a:pPr marL="274320" indent="-274320">
+              <a:lnSpc>
+                <a:spcPct val="116000"/>
+              </a:lnSpc>
+              <a:spcAft>
+                <a:spcPts val="900"/>
+              </a:spcAft>
+              <a:buClr>
+                <a:srgbClr val="0E7490"/>
+              </a:buClr>
+              <a:buSzPct val="62000"/>
+              <a:buFont typeface="Arial" pitchFamily="34" charset="0"/>
+              <a:buChar char="●"/>
+            </a:pPr>
+            <a:r>
+              <a:rPr sz="1650">
+                <a:solidFill>
+                  <a:srgbClr val="0F172A"/>
+                </a:solidFill>
+                <a:latin typeface="Inter"/>
+              </a:rPr>
+              <a:t>Alert history logs value, threshold, severity and resolution time.</a:t>
+            </a:r>
+          </a:p>
+        </p:txBody>
+      </p:sp>
+      <p:sp>
+        <p:nvSpPr>
+          <p:cNvPr id="8" name="TextBox 7"/>
+          <p:cNvSpPr txBox="1"/>
+          <p:nvPr/>
+        </p:nvSpPr>
+        <p:spPr>
+          <a:xfrm>
+            <a:off x="566928" y="4736592"/>
+            <a:ext cx="5797296" cy="256032"/>
+          </a:xfrm>
+          <a:prstGeom prst="rect">
+            <a:avLst/>
+          </a:prstGeom>
+          <a:noFill/>
+        </p:spPr>
+        <p:txBody>
+          <a:bodyPr wrap="square" anchor="t" lIns="0" rIns="0" tIns="0" bIns="0">
+            <a:spAutoFit/>
+          </a:bodyPr>
+          <a:lstStyle/>
+          <a:p>
+            <a:pPr algn="l">
+              <a:lnSpc>
+                <a:spcPct val="118000"/>
+              </a:lnSpc>
+              <a:spcAft>
+                <a:spcPts val="0"/>
+              </a:spcAft>
+            </a:pPr>
+            <a:r>
+              <a:rPr sz="1000" b="1">
+                <a:solidFill>
+                  <a:srgbClr val="0E7490"/>
+                </a:solidFill>
+                <a:latin typeface="Inter"/>
+              </a:rPr>
+              <a:t>FOUR-MODE DRIVING CONTEXT</a:t>
+            </a:r>
+          </a:p>
+        </p:txBody>
+      </p:sp>
+      <p:sp>
+        <p:nvSpPr>
+          <p:cNvPr id="9" name="Rectangle 8"/>
           <p:cNvSpPr/>
           <p:nvPr/>
         </p:nvSpPr>
         <p:spPr>
           <a:xfrm>
-            <a:off x="566928" y="3986784"/>
-            <a:ext cx="5797296" cy="2029968"/>
+            <a:off x="566928" y="5047488"/>
+            <a:ext cx="1353312" cy="566928"/>
           </a:xfrm>
           <a:prstGeom prst="rect">
             <a:avLst/>
           </a:prstGeom>
           <a:solidFill>
-            <a:srgbClr val="F1F5F9"/>
+            <a:srgbClr val="FFFFFF"/>
           </a:solidFill>
-          <a:ln w="9525">
+          <a:ln w="15875">
+            <a:solidFill>
+              <a:srgbClr val="475569"/>
+            </a:solidFill>
+          </a:ln>
+          <a:effectLst/>
+        </p:spPr>
+        <p:style>
+          <a:lnRef idx="1">
+            <a:schemeClr val="accent1"/>
+          </a:lnRef>
+          <a:fillRef idx="3">
+            <a:schemeClr val="accent1"/>
+          </a:fillRef>
+          <a:effectRef idx="2">
+            <a:schemeClr val="accent1"/>
+          </a:effectRef>
+          <a:fontRef idx="minor">
+            <a:schemeClr val="lt1"/>
+          </a:fontRef>
+        </p:style>
+        <p:txBody>
+          <a:bodyPr rtlCol="0" anchor="ctr"/>
+          <a:lstStyle/>
+          <a:p/>
+        </p:txBody>
+      </p:sp>
+      <p:sp>
+        <p:nvSpPr>
+          <p:cNvPr id="10" name="TextBox 9"/>
+          <p:cNvSpPr txBox="1"/>
+          <p:nvPr/>
+        </p:nvSpPr>
+        <p:spPr>
+          <a:xfrm>
+            <a:off x="566928" y="5047488"/>
+            <a:ext cx="1353312" cy="566928"/>
+          </a:xfrm>
+          <a:prstGeom prst="rect">
+            <a:avLst/>
+          </a:prstGeom>
+          <a:noFill/>
+        </p:spPr>
+        <p:txBody>
+          <a:bodyPr wrap="square" anchor="ctr" lIns="0" rIns="0" tIns="0" bIns="0">
+            <a:spAutoFit/>
+          </a:bodyPr>
+          <a:lstStyle/>
+          <a:p>
+            <a:pPr algn="ctr">
+              <a:lnSpc>
+                <a:spcPct val="118000"/>
+              </a:lnSpc>
+              <a:spcAft>
+                <a:spcPts val="0"/>
+              </a:spcAft>
+            </a:pPr>
+            <a:r>
+              <a:rPr sz="1400" b="1">
+                <a:solidFill>
+                  <a:srgbClr val="475569"/>
+                </a:solidFill>
+                <a:latin typeface="Inter"/>
+              </a:rPr>
+              <a:t>IDLE</a:t>
+            </a:r>
+          </a:p>
+        </p:txBody>
+      </p:sp>
+      <p:sp>
+        <p:nvSpPr>
+          <p:cNvPr id="11" name="Rectangle 10"/>
+          <p:cNvSpPr/>
+          <p:nvPr/>
+        </p:nvSpPr>
+        <p:spPr>
+          <a:xfrm>
+            <a:off x="2048256" y="5047488"/>
+            <a:ext cx="1353312" cy="566928"/>
+          </a:xfrm>
+          <a:prstGeom prst="rect">
+            <a:avLst/>
+          </a:prstGeom>
+          <a:solidFill>
+            <a:srgbClr val="FFFFFF"/>
+          </a:solidFill>
+          <a:ln w="15875">
+            <a:solidFill>
+              <a:srgbClr val="B91C1C"/>
+            </a:solidFill>
+          </a:ln>
+          <a:effectLst/>
+        </p:spPr>
+        <p:style>
+          <a:lnRef idx="1">
+            <a:schemeClr val="accent1"/>
+          </a:lnRef>
+          <a:fillRef idx="3">
+            <a:schemeClr val="accent1"/>
+          </a:fillRef>
+          <a:effectRef idx="2">
+            <a:schemeClr val="accent1"/>
+          </a:effectRef>
+          <a:fontRef idx="minor">
+            <a:schemeClr val="lt1"/>
+          </a:fontRef>
+        </p:style>
+        <p:txBody>
+          <a:bodyPr rtlCol="0" anchor="ctr"/>
+          <a:lstStyle/>
+          <a:p/>
+        </p:txBody>
+      </p:sp>
+      <p:sp>
+        <p:nvSpPr>
+          <p:cNvPr id="12" name="TextBox 11"/>
+          <p:cNvSpPr txBox="1"/>
+          <p:nvPr/>
+        </p:nvSpPr>
+        <p:spPr>
+          <a:xfrm>
+            <a:off x="2048256" y="5047488"/>
+            <a:ext cx="1353312" cy="566928"/>
+          </a:xfrm>
+          <a:prstGeom prst="rect">
+            <a:avLst/>
+          </a:prstGeom>
+          <a:noFill/>
+        </p:spPr>
+        <p:txBody>
+          <a:bodyPr wrap="square" anchor="ctr" lIns="0" rIns="0" tIns="0" bIns="0">
+            <a:spAutoFit/>
+          </a:bodyPr>
+          <a:lstStyle/>
+          <a:p>
+            <a:pPr algn="ctr">
+              <a:lnSpc>
+                <a:spcPct val="118000"/>
+              </a:lnSpc>
+              <a:spcAft>
+                <a:spcPts val="0"/>
+              </a:spcAft>
+            </a:pPr>
+            <a:r>
+              <a:rPr sz="1400" b="1">
+                <a:solidFill>
+                  <a:srgbClr val="B91C1C"/>
+                </a:solidFill>
+                <a:latin typeface="Inter"/>
+              </a:rPr>
+              <a:t>ACCEL</a:t>
+            </a:r>
+          </a:p>
+        </p:txBody>
+      </p:sp>
+      <p:sp>
+        <p:nvSpPr>
+          <p:cNvPr id="13" name="Rectangle 12"/>
+          <p:cNvSpPr/>
+          <p:nvPr/>
+        </p:nvSpPr>
+        <p:spPr>
+          <a:xfrm>
+            <a:off x="3529584" y="5047488"/>
+            <a:ext cx="1353312" cy="566928"/>
+          </a:xfrm>
+          <a:prstGeom prst="rect">
+            <a:avLst/>
+          </a:prstGeom>
+          <a:solidFill>
+            <a:srgbClr val="FFFFFF"/>
+          </a:solidFill>
+          <a:ln w="15875">
+            <a:solidFill>
+              <a:srgbClr val="0E7490"/>
+            </a:solidFill>
+          </a:ln>
+          <a:effectLst/>
+        </p:spPr>
+        <p:style>
+          <a:lnRef idx="1">
+            <a:schemeClr val="accent1"/>
+          </a:lnRef>
+          <a:fillRef idx="3">
+            <a:schemeClr val="accent1"/>
+          </a:fillRef>
+          <a:effectRef idx="2">
+            <a:schemeClr val="accent1"/>
+          </a:effectRef>
+          <a:fontRef idx="minor">
+            <a:schemeClr val="lt1"/>
+          </a:fontRef>
+        </p:style>
+        <p:txBody>
+          <a:bodyPr rtlCol="0" anchor="ctr"/>
+          <a:lstStyle/>
+          <a:p/>
+        </p:txBody>
+      </p:sp>
+      <p:sp>
+        <p:nvSpPr>
+          <p:cNvPr id="14" name="TextBox 13"/>
+          <p:cNvSpPr txBox="1"/>
+          <p:nvPr/>
+        </p:nvSpPr>
+        <p:spPr>
+          <a:xfrm>
+            <a:off x="3529584" y="5047488"/>
+            <a:ext cx="1353312" cy="566928"/>
+          </a:xfrm>
+          <a:prstGeom prst="rect">
+            <a:avLst/>
+          </a:prstGeom>
+          <a:noFill/>
+        </p:spPr>
+        <p:txBody>
+          <a:bodyPr wrap="square" anchor="ctr" lIns="0" rIns="0" tIns="0" bIns="0">
+            <a:spAutoFit/>
+          </a:bodyPr>
+          <a:lstStyle/>
+          <a:p>
+            <a:pPr algn="ctr">
+              <a:lnSpc>
+                <a:spcPct val="118000"/>
+              </a:lnSpc>
+              <a:spcAft>
+                <a:spcPts val="0"/>
+              </a:spcAft>
+            </a:pPr>
+            <a:r>
+              <a:rPr sz="1400" b="1">
+                <a:solidFill>
+                  <a:srgbClr val="0E7490"/>
+                </a:solidFill>
+                <a:latin typeface="Inter"/>
+              </a:rPr>
+              <a:t>CRUISE</a:t>
+            </a:r>
+          </a:p>
+        </p:txBody>
+      </p:sp>
+      <p:sp>
+        <p:nvSpPr>
+          <p:cNvPr id="15" name="Rectangle 14"/>
+          <p:cNvSpPr/>
+          <p:nvPr/>
+        </p:nvSpPr>
+        <p:spPr>
+          <a:xfrm>
+            <a:off x="5010912" y="5047488"/>
+            <a:ext cx="1353312" cy="566928"/>
+          </a:xfrm>
+          <a:prstGeom prst="rect">
+            <a:avLst/>
+          </a:prstGeom>
+          <a:solidFill>
+            <a:srgbClr val="FFFFFF"/>
+          </a:solidFill>
+          <a:ln w="15875">
+            <a:solidFill>
+              <a:srgbClr val="B45309"/>
+            </a:solidFill>
+          </a:ln>
+          <a:effectLst/>
+        </p:spPr>
+        <p:style>
+          <a:lnRef idx="1">
+            <a:schemeClr val="accent1"/>
+          </a:lnRef>
+          <a:fillRef idx="3">
+            <a:schemeClr val="accent1"/>
+          </a:fillRef>
+          <a:effectRef idx="2">
+            <a:schemeClr val="accent1"/>
+          </a:effectRef>
+          <a:fontRef idx="minor">
+            <a:schemeClr val="lt1"/>
+          </a:fontRef>
+        </p:style>
+        <p:txBody>
+          <a:bodyPr rtlCol="0" anchor="ctr"/>
+          <a:lstStyle/>
+          <a:p/>
+        </p:txBody>
+      </p:sp>
+      <p:sp>
+        <p:nvSpPr>
+          <p:cNvPr id="16" name="TextBox 15"/>
+          <p:cNvSpPr txBox="1"/>
+          <p:nvPr/>
+        </p:nvSpPr>
+        <p:spPr>
+          <a:xfrm>
+            <a:off x="5010912" y="5047488"/>
+            <a:ext cx="1353312" cy="566928"/>
+          </a:xfrm>
+          <a:prstGeom prst="rect">
+            <a:avLst/>
+          </a:prstGeom>
+          <a:noFill/>
+        </p:spPr>
+        <p:txBody>
+          <a:bodyPr wrap="square" anchor="ctr" lIns="0" rIns="0" tIns="0" bIns="0">
+            <a:spAutoFit/>
+          </a:bodyPr>
+          <a:lstStyle/>
+          <a:p>
+            <a:pPr algn="ctr">
+              <a:lnSpc>
+                <a:spcPct val="118000"/>
+              </a:lnSpc>
+              <a:spcAft>
+                <a:spcPts val="0"/>
+              </a:spcAft>
+            </a:pPr>
+            <a:r>
+              <a:rPr sz="1400" b="1">
+                <a:solidFill>
+                  <a:srgbClr val="B45309"/>
+                </a:solidFill>
+                <a:latin typeface="Inter"/>
+              </a:rPr>
+              <a:t>DECEL</a:t>
+            </a:r>
+          </a:p>
+        </p:txBody>
+      </p:sp>
+      <p:sp>
+        <p:nvSpPr>
+          <p:cNvPr id="17" name="TextBox 16"/>
+          <p:cNvSpPr txBox="1"/>
+          <p:nvPr/>
+        </p:nvSpPr>
+        <p:spPr>
+          <a:xfrm>
+            <a:off x="566928" y="5724144"/>
+            <a:ext cx="5797296" cy="274320"/>
+          </a:xfrm>
+          <a:prstGeom prst="rect">
+            <a:avLst/>
+          </a:prstGeom>
+          <a:noFill/>
+        </p:spPr>
+        <p:txBody>
+          <a:bodyPr wrap="square" anchor="t" lIns="0" rIns="0" tIns="0" bIns="0">
+            <a:spAutoFit/>
+          </a:bodyPr>
+          <a:lstStyle/>
+          <a:p>
+            <a:pPr algn="l">
+              <a:lnSpc>
+                <a:spcPct val="118000"/>
+              </a:lnSpc>
+              <a:spcAft>
+                <a:spcPts val="0"/>
+              </a:spcAft>
+            </a:pPr>
+            <a:r>
+              <a:rPr sz="1150" b="0">
+                <a:solidFill>
+                  <a:srgbClr val="475569"/>
+                </a:solidFill>
+                <a:latin typeface="Inter"/>
+              </a:rPr>
+              <a:t>Thresholds follow the mode — a sag under ACCEL is not a sag at IDLE.</a:t>
+            </a:r>
+          </a:p>
+        </p:txBody>
+      </p:sp>
+      <p:sp>
+        <p:nvSpPr>
+          <p:cNvPr id="18" name="Rectangle 17"/>
+          <p:cNvSpPr/>
+          <p:nvPr/>
+        </p:nvSpPr>
+        <p:spPr>
+          <a:xfrm>
+            <a:off x="6693408" y="1610461"/>
+            <a:ext cx="4931359" cy="2009444"/>
+          </a:xfrm>
+          <a:prstGeom prst="rect">
+            <a:avLst/>
+          </a:prstGeom>
+          <a:solidFill>
+            <a:srgbClr val="FFFFFF"/>
+          </a:solidFill>
+          <a:ln w="12700">
             <a:solidFill>
               <a:srgbClr val="CBD5E1"/>
             </a:solidFill>
@@ -11201,93 +11570,9 @@
           <a:p/>
         </p:txBody>
       </p:sp>
-      <p:sp>
-        <p:nvSpPr>
-          <p:cNvPr id="9" name="TextBox 8"/>
-          <p:cNvSpPr txBox="1"/>
-          <p:nvPr/>
-        </p:nvSpPr>
-        <p:spPr>
-          <a:xfrm>
-            <a:off x="768096" y="4114800"/>
-            <a:ext cx="5394959" cy="237744"/>
-          </a:xfrm>
-          <a:prstGeom prst="rect">
-            <a:avLst/>
-          </a:prstGeom>
-          <a:noFill/>
-        </p:spPr>
-        <p:txBody>
-          <a:bodyPr wrap="square" anchor="t" lIns="0" rIns="0" tIns="0" bIns="0">
-            <a:spAutoFit/>
-          </a:bodyPr>
-          <a:lstStyle/>
-          <a:p>
-            <a:pPr algn="l">
-              <a:lnSpc>
-                <a:spcPct val="118000"/>
-              </a:lnSpc>
-              <a:spcAft>
-                <a:spcPts val="0"/>
-              </a:spcAft>
-            </a:pPr>
-            <a:r>
-              <a:rPr sz="1000" b="1">
-                <a:solidFill>
-                  <a:srgbClr val="0E7490"/>
-                </a:solidFill>
-                <a:latin typeface="Inter"/>
-              </a:rPr>
-              <a:t>WHY THE MODEL CARES</a:t>
-            </a:r>
-          </a:p>
-        </p:txBody>
-      </p:sp>
-      <p:sp>
-        <p:nvSpPr>
-          <p:cNvPr id="10" name="TextBox 9"/>
-          <p:cNvSpPr txBox="1"/>
-          <p:nvPr/>
-        </p:nvSpPr>
-        <p:spPr>
-          <a:xfrm>
-            <a:off x="768096" y="4389120"/>
-            <a:ext cx="5394959" cy="1499616"/>
-          </a:xfrm>
-          <a:prstGeom prst="rect">
-            <a:avLst/>
-          </a:prstGeom>
-          <a:noFill/>
-        </p:spPr>
-        <p:txBody>
-          <a:bodyPr wrap="square" anchor="t" lIns="0" rIns="0" tIns="0" bIns="0">
-            <a:spAutoFit/>
-          </a:bodyPr>
-          <a:lstStyle/>
-          <a:p>
-            <a:pPr algn="l">
-              <a:lnSpc>
-                <a:spcPct val="126000"/>
-              </a:lnSpc>
-              <a:spcAft>
-                <a:spcPts val="0"/>
-              </a:spcAft>
-            </a:pPr>
-            <a:r>
-              <a:rPr sz="1250" b="0">
-                <a:solidFill>
-                  <a:srgbClr val="0F172A"/>
-                </a:solidFill>
-                <a:latin typeface="Inter"/>
-              </a:rPr>
-              <a:t>mode_IDLE, mode_DECEL and mode_CRUISE together carry 12.4% of the model's total gain, and ntc_spread another 5.0%. Nearly a fifth of the decision comes from context the pack-level sensors alone could never provide.</a:t>
-            </a:r>
-          </a:p>
-        </p:txBody>
-      </p:sp>
       <p:pic>
         <p:nvPicPr>
-          <p:cNvPr id="11" name="Picture 10" descr="fig_thermal_zones.png"/>
+          <p:cNvPr id="19" name="Picture 18" descr="p07_img1_x61.jpeg"/>
           <p:cNvPicPr>
             <a:picLocks noChangeAspect="1"/>
           </p:cNvPicPr>
@@ -11301,17 +11586,61 @@
         </p:blipFill>
         <p:spPr>
           <a:xfrm>
-            <a:off x="7351336" y="1444752"/>
-            <a:ext cx="3615503" cy="2834640"/>
+            <a:off x="6812280" y="1729333"/>
+            <a:ext cx="4693615" cy="1771700"/>
           </a:xfrm>
           <a:prstGeom prst="rect">
             <a:avLst/>
           </a:prstGeom>
         </p:spPr>
       </p:pic>
+      <p:sp>
+        <p:nvSpPr>
+          <p:cNvPr id="20" name="Rectangle 19"/>
+          <p:cNvSpPr/>
+          <p:nvPr/>
+        </p:nvSpPr>
+        <p:spPr>
+          <a:xfrm>
+            <a:off x="6693408" y="3853669"/>
+            <a:ext cx="4931359" cy="1857285"/>
+          </a:xfrm>
+          <a:prstGeom prst="rect">
+            <a:avLst/>
+          </a:prstGeom>
+          <a:solidFill>
+            <a:srgbClr val="FFFFFF"/>
+          </a:solidFill>
+          <a:ln w="12700">
+            <a:solidFill>
+              <a:srgbClr val="CBD5E1"/>
+            </a:solidFill>
+          </a:ln>
+          <a:effectLst/>
+        </p:spPr>
+        <p:style>
+          <a:lnRef idx="1">
+            <a:schemeClr val="accent1"/>
+          </a:lnRef>
+          <a:fillRef idx="3">
+            <a:schemeClr val="accent1"/>
+          </a:fillRef>
+          <a:effectRef idx="2">
+            <a:schemeClr val="accent1"/>
+          </a:effectRef>
+          <a:fontRef idx="minor">
+            <a:schemeClr val="lt1"/>
+          </a:fontRef>
+        </p:style>
+        <p:txBody>
+          <a:bodyPr rtlCol="0" anchor="ctr"/>
+          <a:lstStyle/>
+          <a:p/>
+        </p:txBody>
+      </p:sp>
       <p:pic>
         <p:nvPicPr>
-          <p:cNvPr id="12" name="Picture 11" descr="fig_driving_modes.png"/>
+          <p:cNvPr id="21" name="Picture 20" descr="p08_img2_x68.png"/>
           <p:cNvPicPr>
             <a:picLocks noChangeAspect="1"/>
           </p:cNvPicPr>
@@ -11325,14 +11654,56 @@
         </p:blipFill>
         <p:spPr>
           <a:xfrm>
-            <a:off x="7836681" y="4352544"/>
-            <a:ext cx="2644811" cy="1691640"/>
+            <a:off x="6812280" y="3972541"/>
+            <a:ext cx="4693615" cy="1619541"/>
           </a:xfrm>
           <a:prstGeom prst="rect">
             <a:avLst/>
           </a:prstGeom>
         </p:spPr>
       </p:pic>
+      <p:sp>
+        <p:nvSpPr>
+          <p:cNvPr id="22" name="TextBox 21"/>
+          <p:cNvSpPr txBox="1"/>
+          <p:nvPr/>
+        </p:nvSpPr>
+        <p:spPr>
+          <a:xfrm>
+            <a:off x="6693408" y="5797296"/>
+            <a:ext cx="4931359" cy="237744"/>
+          </a:xfrm>
+          <a:prstGeom prst="rect">
+            <a:avLst/>
+          </a:prstGeom>
+          <a:noFill/>
+        </p:spPr>
+        <p:txBody>
+          <a:bodyPr wrap="square" anchor="t" lIns="0" rIns="0" tIns="0" bIns="0">
+            <a:spAutoFit/>
+          </a:bodyPr>
+          <a:lstStyle/>
+          <a:p>
+            <a:pPr algn="ctr">
+              <a:lnSpc>
+                <a:spcPct val="118000"/>
+              </a:lnSpc>
+              <a:spcAft>
+                <a:spcPts val="0"/>
+              </a:spcAft>
+            </a:pPr>
+            <a:r>
+              <a:rPr sz="950" b="0">
+                <a:solidFill>
+                  <a:srgbClr val="475569"/>
+                </a:solidFill>
+                <a:latin typeface="Inter"/>
+              </a:rPr>
+              <a:t>Live sensing tiles (top) and the critical-alarm path (bottom)</a:t>
+            </a:r>
+          </a:p>
+        </p:txBody>
+      </p:sp>
     </p:spTree>
   </p:cSld>
   <p:clrMapOvr>
@@ -11396,7 +11767,7 @@
                 </a:solidFill>
                 <a:latin typeface="Inter"/>
               </a:rPr>
-              <a:t>Comparing this cycle against every cycle before it</a:t>
+              <a:t>Context is a feature, not a label on a chart</a:t>
             </a:r>
           </a:p>
         </p:txBody>
@@ -11578,7 +11949,7 @@
         <p:spPr>
           <a:xfrm>
             <a:off x="566928" y="1554480"/>
-            <a:ext cx="5797296" cy="2788920"/>
+            <a:ext cx="5797296" cy="2331720"/>
           </a:xfrm>
           <a:prstGeom prst="rect">
             <a:avLst/>
@@ -11612,7 +11983,7 @@
                 </a:solidFill>
                 <a:latin typeface="Inter"/>
               </a:rPr>
-              <a:t>39 cycles logged: 21 discharge, 18 charge.</a:t>
+              <a:t>Four NTCs diverge by up to 8.3 °C within one pack.</a:t>
             </a:r>
           </a:p>
           <a:p>
@@ -11637,7 +12008,7 @@
                 </a:solidFill>
                 <a:latin typeface="Inter"/>
               </a:rPr>
-              <a:t>Every cycle scored 1.0 on data quality; zero alerts raised.</a:t>
+              <a:t>That spread is fed to the model as ntc_spread.</a:t>
             </a:r>
           </a:p>
           <a:p>
@@ -11662,7 +12033,7 @@
                 </a:solidFill>
                 <a:latin typeface="Inter"/>
               </a:rPr>
-              <a:t>Expected sag is computed from load, then compared to actual.</a:t>
+              <a:t>Mode is set from |I(T)| versus |I(T-1)|, with hysteresis.</a:t>
             </a:r>
           </a:p>
           <a:p>
@@ -11687,32 +12058,7 @@
                 </a:solidFill>
                 <a:latin typeface="Inter"/>
               </a:rPr>
-              <a:t>Deviation from history flags degradation before a threshold breaks.</a:t>
-            </a:r>
-          </a:p>
-          <a:p>
-            <a:pPr marL="274320" indent="-274320">
-              <a:lnSpc>
-                <a:spcPct val="116000"/>
-              </a:lnSpc>
-              <a:spcAft>
-                <a:spcPts val="900"/>
-              </a:spcAft>
-              <a:buClr>
-                <a:srgbClr val="0E7490"/>
-              </a:buClr>
-              <a:buSzPct val="62000"/>
-              <a:buFont typeface="Arial" pitchFamily="34" charset="0"/>
-              <a:buChar char="●"/>
-            </a:pPr>
-            <a:r>
-              <a:rPr sz="1600">
-                <a:solidFill>
-                  <a:srgbClr val="0F172A"/>
-                </a:solidFill>
-                <a:latin typeface="Inter"/>
-              </a:rPr>
-              <a:t>Balancing is visible: end-of-cycle spread falls below start.</a:t>
+              <a:t>Five-sample hysteresis stops mode flapping on noise.</a:t>
             </a:r>
           </a:p>
         </p:txBody>
@@ -11725,8 +12071,8 @@
         </p:nvSpPr>
         <p:spPr>
           <a:xfrm>
-            <a:off x="566928" y="4828032"/>
-            <a:ext cx="1339595" cy="786384"/>
+            <a:off x="566928" y="3986784"/>
+            <a:ext cx="5797296" cy="2029968"/>
           </a:xfrm>
           <a:prstGeom prst="rect">
             <a:avLst/>
@@ -11769,8 +12115,8 @@
         </p:nvSpPr>
         <p:spPr>
           <a:xfrm>
-            <a:off x="566928" y="4919472"/>
-            <a:ext cx="1339595" cy="329184"/>
+            <a:off x="768096" y="4114800"/>
+            <a:ext cx="5394959" cy="237744"/>
           </a:xfrm>
           <a:prstGeom prst="rect">
             <a:avLst/>
@@ -11783,7 +12129,7 @@
           </a:bodyPr>
           <a:lstStyle/>
           <a:p>
-            <a:pPr algn="ctr">
+            <a:pPr algn="l">
               <a:lnSpc>
                 <a:spcPct val="118000"/>
               </a:lnSpc>
@@ -11792,13 +12138,13 @@
               </a:spcAft>
             </a:pPr>
             <a:r>
-              <a:rPr sz="1600" b="1">
+              <a:rPr sz="1000" b="1">
                 <a:solidFill>
                   <a:srgbClr val="0E7490"/>
                 </a:solidFill>
                 <a:latin typeface="Inter"/>
               </a:rPr>
-              <a:t>39</a:t>
+              <a:t>WHY THE MODEL CARES</a:t>
             </a:r>
           </a:p>
         </p:txBody>
@@ -11811,8 +12157,8 @@
         </p:nvSpPr>
         <p:spPr>
           <a:xfrm>
-            <a:off x="566928" y="5285232"/>
-            <a:ext cx="1339595" cy="256032"/>
+            <a:off x="768096" y="4389120"/>
+            <a:ext cx="5394959" cy="1499616"/>
           </a:xfrm>
           <a:prstGeom prst="rect">
             <a:avLst/>
@@ -11825,413 +12171,29 @@
           </a:bodyPr>
           <a:lstStyle/>
           <a:p>
-            <a:pPr algn="ctr">
-              <a:lnSpc>
-                <a:spcPct val="118000"/>
+            <a:pPr algn="l">
+              <a:lnSpc>
+                <a:spcPct val="126000"/>
               </a:lnSpc>
               <a:spcAft>
                 <a:spcPts val="0"/>
               </a:spcAft>
             </a:pPr>
             <a:r>
-              <a:rPr sz="900" b="0">
-                <a:solidFill>
-                  <a:srgbClr val="475569"/>
-                </a:solidFill>
-                <a:latin typeface="Inter"/>
-              </a:rPr>
-              <a:t>cycles logged</a:t>
-            </a:r>
-          </a:p>
-        </p:txBody>
-      </p:sp>
-      <p:sp>
-        <p:nvSpPr>
-          <p:cNvPr id="11" name="Rectangle 10"/>
-          <p:cNvSpPr/>
-          <p:nvPr/>
-        </p:nvSpPr>
-        <p:spPr>
-          <a:xfrm>
-            <a:off x="2052827" y="4828032"/>
-            <a:ext cx="1339595" cy="786384"/>
-          </a:xfrm>
-          <a:prstGeom prst="rect">
-            <a:avLst/>
-          </a:prstGeom>
-          <a:solidFill>
-            <a:srgbClr val="F1F5F9"/>
-          </a:solidFill>
-          <a:ln w="9525">
-            <a:solidFill>
-              <a:srgbClr val="CBD5E1"/>
-            </a:solidFill>
-          </a:ln>
-          <a:effectLst/>
-        </p:spPr>
-        <p:style>
-          <a:lnRef idx="1">
-            <a:schemeClr val="accent1"/>
-          </a:lnRef>
-          <a:fillRef idx="3">
-            <a:schemeClr val="accent1"/>
-          </a:fillRef>
-          <a:effectRef idx="2">
-            <a:schemeClr val="accent1"/>
-          </a:effectRef>
-          <a:fontRef idx="minor">
-            <a:schemeClr val="lt1"/>
-          </a:fontRef>
-        </p:style>
-        <p:txBody>
-          <a:bodyPr rtlCol="0" anchor="ctr"/>
-          <a:lstStyle/>
-          <a:p/>
-        </p:txBody>
-      </p:sp>
-      <p:sp>
-        <p:nvSpPr>
-          <p:cNvPr id="12" name="TextBox 11"/>
-          <p:cNvSpPr txBox="1"/>
-          <p:nvPr/>
-        </p:nvSpPr>
-        <p:spPr>
-          <a:xfrm>
-            <a:off x="2052827" y="4919472"/>
-            <a:ext cx="1339595" cy="329184"/>
-          </a:xfrm>
-          <a:prstGeom prst="rect">
-            <a:avLst/>
-          </a:prstGeom>
-          <a:noFill/>
-        </p:spPr>
-        <p:txBody>
-          <a:bodyPr wrap="square" anchor="t" lIns="0" rIns="0" tIns="0" bIns="0">
-            <a:spAutoFit/>
-          </a:bodyPr>
-          <a:lstStyle/>
-          <a:p>
-            <a:pPr algn="ctr">
-              <a:lnSpc>
-                <a:spcPct val="118000"/>
-              </a:lnSpc>
-              <a:spcAft>
-                <a:spcPts val="0"/>
-              </a:spcAft>
-            </a:pPr>
-            <a:r>
-              <a:rPr sz="1600" b="1">
-                <a:solidFill>
-                  <a:srgbClr val="0E7490"/>
-                </a:solidFill>
-                <a:latin typeface="Inter"/>
-              </a:rPr>
-              <a:t>21 / 18</a:t>
-            </a:r>
-          </a:p>
-        </p:txBody>
-      </p:sp>
-      <p:sp>
-        <p:nvSpPr>
-          <p:cNvPr id="13" name="TextBox 12"/>
-          <p:cNvSpPr txBox="1"/>
-          <p:nvPr/>
-        </p:nvSpPr>
-        <p:spPr>
-          <a:xfrm>
-            <a:off x="2052827" y="5285232"/>
-            <a:ext cx="1339595" cy="256032"/>
-          </a:xfrm>
-          <a:prstGeom prst="rect">
-            <a:avLst/>
-          </a:prstGeom>
-          <a:noFill/>
-        </p:spPr>
-        <p:txBody>
-          <a:bodyPr wrap="square" anchor="t" lIns="0" rIns="0" tIns="0" bIns="0">
-            <a:spAutoFit/>
-          </a:bodyPr>
-          <a:lstStyle/>
-          <a:p>
-            <a:pPr algn="ctr">
-              <a:lnSpc>
-                <a:spcPct val="118000"/>
-              </a:lnSpc>
-              <a:spcAft>
-                <a:spcPts val="0"/>
-              </a:spcAft>
-            </a:pPr>
-            <a:r>
-              <a:rPr sz="900" b="0">
-                <a:solidFill>
-                  <a:srgbClr val="475569"/>
-                </a:solidFill>
-                <a:latin typeface="Inter"/>
-              </a:rPr>
-              <a:t>discharge / charge</a:t>
-            </a:r>
-          </a:p>
-        </p:txBody>
-      </p:sp>
-      <p:sp>
-        <p:nvSpPr>
-          <p:cNvPr id="14" name="Rectangle 13"/>
-          <p:cNvSpPr/>
-          <p:nvPr/>
-        </p:nvSpPr>
-        <p:spPr>
-          <a:xfrm>
-            <a:off x="3538727" y="4828032"/>
-            <a:ext cx="1339595" cy="786384"/>
-          </a:xfrm>
-          <a:prstGeom prst="rect">
-            <a:avLst/>
-          </a:prstGeom>
-          <a:solidFill>
-            <a:srgbClr val="F1F5F9"/>
-          </a:solidFill>
-          <a:ln w="9525">
-            <a:solidFill>
-              <a:srgbClr val="CBD5E1"/>
-            </a:solidFill>
-          </a:ln>
-          <a:effectLst/>
-        </p:spPr>
-        <p:style>
-          <a:lnRef idx="1">
-            <a:schemeClr val="accent1"/>
-          </a:lnRef>
-          <a:fillRef idx="3">
-            <a:schemeClr val="accent1"/>
-          </a:fillRef>
-          <a:effectRef idx="2">
-            <a:schemeClr val="accent1"/>
-          </a:effectRef>
-          <a:fontRef idx="minor">
-            <a:schemeClr val="lt1"/>
-          </a:fontRef>
-        </p:style>
-        <p:txBody>
-          <a:bodyPr rtlCol="0" anchor="ctr"/>
-          <a:lstStyle/>
-          <a:p/>
-        </p:txBody>
-      </p:sp>
-      <p:sp>
-        <p:nvSpPr>
-          <p:cNvPr id="15" name="TextBox 14"/>
-          <p:cNvSpPr txBox="1"/>
-          <p:nvPr/>
-        </p:nvSpPr>
-        <p:spPr>
-          <a:xfrm>
-            <a:off x="3538727" y="4919472"/>
-            <a:ext cx="1339595" cy="329184"/>
-          </a:xfrm>
-          <a:prstGeom prst="rect">
-            <a:avLst/>
-          </a:prstGeom>
-          <a:noFill/>
-        </p:spPr>
-        <p:txBody>
-          <a:bodyPr wrap="square" anchor="t" lIns="0" rIns="0" tIns="0" bIns="0">
-            <a:spAutoFit/>
-          </a:bodyPr>
-          <a:lstStyle/>
-          <a:p>
-            <a:pPr algn="ctr">
-              <a:lnSpc>
-                <a:spcPct val="118000"/>
-              </a:lnSpc>
-              <a:spcAft>
-                <a:spcPts val="0"/>
-              </a:spcAft>
-            </a:pPr>
-            <a:r>
-              <a:rPr sz="1600" b="1">
-                <a:solidFill>
-                  <a:srgbClr val="0E7490"/>
-                </a:solidFill>
-                <a:latin typeface="Inter"/>
-              </a:rPr>
-              <a:t>1.0</a:t>
-            </a:r>
-          </a:p>
-        </p:txBody>
-      </p:sp>
-      <p:sp>
-        <p:nvSpPr>
-          <p:cNvPr id="16" name="TextBox 15"/>
-          <p:cNvSpPr txBox="1"/>
-          <p:nvPr/>
-        </p:nvSpPr>
-        <p:spPr>
-          <a:xfrm>
-            <a:off x="3538727" y="5285232"/>
-            <a:ext cx="1339595" cy="256032"/>
-          </a:xfrm>
-          <a:prstGeom prst="rect">
-            <a:avLst/>
-          </a:prstGeom>
-          <a:noFill/>
-        </p:spPr>
-        <p:txBody>
-          <a:bodyPr wrap="square" anchor="t" lIns="0" rIns="0" tIns="0" bIns="0">
-            <a:spAutoFit/>
-          </a:bodyPr>
-          <a:lstStyle/>
-          <a:p>
-            <a:pPr algn="ctr">
-              <a:lnSpc>
-                <a:spcPct val="118000"/>
-              </a:lnSpc>
-              <a:spcAft>
-                <a:spcPts val="0"/>
-              </a:spcAft>
-            </a:pPr>
-            <a:r>
-              <a:rPr sz="900" b="0">
-                <a:solidFill>
-                  <a:srgbClr val="475569"/>
-                </a:solidFill>
-                <a:latin typeface="Inter"/>
-              </a:rPr>
-              <a:t>data quality</a:t>
-            </a:r>
-          </a:p>
-        </p:txBody>
-      </p:sp>
-      <p:sp>
-        <p:nvSpPr>
-          <p:cNvPr id="17" name="Rectangle 16"/>
-          <p:cNvSpPr/>
-          <p:nvPr/>
-        </p:nvSpPr>
-        <p:spPr>
-          <a:xfrm>
-            <a:off x="5024627" y="4828032"/>
-            <a:ext cx="1339595" cy="786384"/>
-          </a:xfrm>
-          <a:prstGeom prst="rect">
-            <a:avLst/>
-          </a:prstGeom>
-          <a:solidFill>
-            <a:srgbClr val="F1F5F9"/>
-          </a:solidFill>
-          <a:ln w="9525">
-            <a:solidFill>
-              <a:srgbClr val="CBD5E1"/>
-            </a:solidFill>
-          </a:ln>
-          <a:effectLst/>
-        </p:spPr>
-        <p:style>
-          <a:lnRef idx="1">
-            <a:schemeClr val="accent1"/>
-          </a:lnRef>
-          <a:fillRef idx="3">
-            <a:schemeClr val="accent1"/>
-          </a:fillRef>
-          <a:effectRef idx="2">
-            <a:schemeClr val="accent1"/>
-          </a:effectRef>
-          <a:fontRef idx="minor">
-            <a:schemeClr val="lt1"/>
-          </a:fontRef>
-        </p:style>
-        <p:txBody>
-          <a:bodyPr rtlCol="0" anchor="ctr"/>
-          <a:lstStyle/>
-          <a:p/>
-        </p:txBody>
-      </p:sp>
-      <p:sp>
-        <p:nvSpPr>
-          <p:cNvPr id="18" name="TextBox 17"/>
-          <p:cNvSpPr txBox="1"/>
-          <p:nvPr/>
-        </p:nvSpPr>
-        <p:spPr>
-          <a:xfrm>
-            <a:off x="5024627" y="4919472"/>
-            <a:ext cx="1339595" cy="329184"/>
-          </a:xfrm>
-          <a:prstGeom prst="rect">
-            <a:avLst/>
-          </a:prstGeom>
-          <a:noFill/>
-        </p:spPr>
-        <p:txBody>
-          <a:bodyPr wrap="square" anchor="t" lIns="0" rIns="0" tIns="0" bIns="0">
-            <a:spAutoFit/>
-          </a:bodyPr>
-          <a:lstStyle/>
-          <a:p>
-            <a:pPr algn="ctr">
-              <a:lnSpc>
-                <a:spcPct val="118000"/>
-              </a:lnSpc>
-              <a:spcAft>
-                <a:spcPts val="0"/>
-              </a:spcAft>
-            </a:pPr>
-            <a:r>
-              <a:rPr sz="1600" b="1">
-                <a:solidFill>
-                  <a:srgbClr val="475569"/>
-                </a:solidFill>
-                <a:latin typeface="Inter"/>
-              </a:rPr>
-              <a:t>0</a:t>
-            </a:r>
-          </a:p>
-        </p:txBody>
-      </p:sp>
-      <p:sp>
-        <p:nvSpPr>
-          <p:cNvPr id="19" name="TextBox 18"/>
-          <p:cNvSpPr txBox="1"/>
-          <p:nvPr/>
-        </p:nvSpPr>
-        <p:spPr>
-          <a:xfrm>
-            <a:off x="5024627" y="5285232"/>
-            <a:ext cx="1339595" cy="256032"/>
-          </a:xfrm>
-          <a:prstGeom prst="rect">
-            <a:avLst/>
-          </a:prstGeom>
-          <a:noFill/>
-        </p:spPr>
-        <p:txBody>
-          <a:bodyPr wrap="square" anchor="t" lIns="0" rIns="0" tIns="0" bIns="0">
-            <a:spAutoFit/>
-          </a:bodyPr>
-          <a:lstStyle/>
-          <a:p>
-            <a:pPr algn="ctr">
-              <a:lnSpc>
-                <a:spcPct val="118000"/>
-              </a:lnSpc>
-              <a:spcAft>
-                <a:spcPts val="0"/>
-              </a:spcAft>
-            </a:pPr>
-            <a:r>
-              <a:rPr sz="900" b="0">
-                <a:solidFill>
-                  <a:srgbClr val="475569"/>
-                </a:solidFill>
-                <a:latin typeface="Inter"/>
-              </a:rPr>
-              <a:t>alerts raised</a:t>
+              <a:rPr sz="1250" b="0">
+                <a:solidFill>
+                  <a:srgbClr val="0F172A"/>
+                </a:solidFill>
+                <a:latin typeface="Inter"/>
+              </a:rPr>
+              <a:t>mode_IDLE, mode_DECEL and mode_CRUISE together carry 12.4% of the model's total gain, and ntc_spread another 5.0%. Nearly a fifth of the decision comes from context the pack-level sensors alone could never provide.</a:t>
             </a:r>
           </a:p>
         </p:txBody>
       </p:sp>
       <p:pic>
         <p:nvPicPr>
-          <p:cNvPr id="20" name="Picture 19" descr="fig_cycle_history.png"/>
+          <p:cNvPr id="11" name="Picture 10" descr="fig_thermal_zones.png"/>
           <p:cNvPicPr>
             <a:picLocks noChangeAspect="1"/>
           </p:cNvPicPr>
@@ -12245,61 +12207,17 @@
         </p:blipFill>
         <p:spPr>
           <a:xfrm>
-            <a:off x="6693408" y="1969675"/>
-            <a:ext cx="4931359" cy="2754057"/>
+            <a:off x="7351336" y="1444752"/>
+            <a:ext cx="3615503" cy="2834640"/>
           </a:xfrm>
           <a:prstGeom prst="rect">
             <a:avLst/>
           </a:prstGeom>
         </p:spPr>
       </p:pic>
-      <p:sp>
-        <p:nvSpPr>
-          <p:cNvPr id="21" name="Rectangle 20"/>
-          <p:cNvSpPr/>
-          <p:nvPr/>
-        </p:nvSpPr>
-        <p:spPr>
-          <a:xfrm>
-            <a:off x="7879732" y="5010912"/>
-            <a:ext cx="2558710" cy="1234440"/>
-          </a:xfrm>
-          <a:prstGeom prst="rect">
-            <a:avLst/>
-          </a:prstGeom>
-          <a:solidFill>
-            <a:srgbClr val="FFFFFF"/>
-          </a:solidFill>
-          <a:ln w="12700">
-            <a:solidFill>
-              <a:srgbClr val="CBD5E1"/>
-            </a:solidFill>
-          </a:ln>
-          <a:effectLst/>
-        </p:spPr>
-        <p:style>
-          <a:lnRef idx="1">
-            <a:schemeClr val="accent1"/>
-          </a:lnRef>
-          <a:fillRef idx="3">
-            <a:schemeClr val="accent1"/>
-          </a:fillRef>
-          <a:effectRef idx="2">
-            <a:schemeClr val="accent1"/>
-          </a:effectRef>
-          <a:fontRef idx="minor">
-            <a:schemeClr val="lt1"/>
-          </a:fontRef>
-        </p:style>
-        <p:txBody>
-          <a:bodyPr rtlCol="0" anchor="ctr"/>
-          <a:lstStyle/>
-          <a:p/>
-        </p:txBody>
-      </p:sp>
       <p:pic>
         <p:nvPicPr>
-          <p:cNvPr id="22" name="Picture 21" descr="p07_img2_x62.jpeg"/>
+          <p:cNvPr id="12" name="Picture 11" descr="fig_driving_modes.png"/>
           <p:cNvPicPr>
             <a:picLocks noChangeAspect="1"/>
           </p:cNvPicPr>
@@ -12313,8 +12231,8 @@
         </p:blipFill>
         <p:spPr>
           <a:xfrm>
-            <a:off x="7998604" y="5129784"/>
-            <a:ext cx="2320966" cy="996696"/>
+            <a:off x="7836681" y="4352544"/>
+            <a:ext cx="2644811" cy="1691640"/>
           </a:xfrm>
           <a:prstGeom prst="rect">
             <a:avLst/>
@@ -12384,7 +12302,7 @@
                 </a:solidFill>
                 <a:latin typeface="Inter"/>
               </a:rPr>
-              <a:t>Two uploads is the entire onboarding flow</a:t>
+              <a:t>Comparing this cycle against every cycle before it</a:t>
             </a:r>
           </a:p>
         </p:txBody>
@@ -12600,7 +12518,7 @@
                 </a:solidFill>
                 <a:latin typeface="Inter"/>
               </a:rPr>
-              <a:t>Drop the manufacturer PDF: chemistry and limits are parsed out.</a:t>
+              <a:t>39 cycles logged: 21 discharge, 18 charge.</a:t>
             </a:r>
           </a:p>
           <a:p>
@@ -12625,7 +12543,7 @@
                 </a:solidFill>
                 <a:latin typeface="Inter"/>
               </a:rPr>
-              <a:t>Drop a CSV or XLSX: the dataset is profiled and previewed.</a:t>
+              <a:t>Every cycle scored 1.0 on data quality; zero alerts raised.</a:t>
             </a:r>
           </a:p>
           <a:p>
@@ -12650,7 +12568,7 @@
                 </a:solidFill>
                 <a:latin typeface="Inter"/>
               </a:rPr>
-              <a:t>No YAML, no config file, no redeploy, no developer.</a:t>
+              <a:t>Expected sag is computed from load, then compared to actual.</a:t>
             </a:r>
           </a:p>
           <a:p>
@@ -12675,7 +12593,7 @@
                 </a:solidFill>
                 <a:latin typeface="Inter"/>
               </a:rPr>
-              <a:t>Parsed values are editable before they become the active profile.</a:t>
+              <a:t>Deviation from history flags degradation before a threshold breaks.</a:t>
             </a:r>
           </a:p>
           <a:p>
@@ -12700,7 +12618,7 @@
                 </a:solidFill>
                 <a:latin typeface="Inter"/>
               </a:rPr>
-              <a:t>The same screen feeds both the thresholds and the retrainer.</a:t>
+              <a:t>Balancing is visible: end-of-cycle spread falls below start.</a:t>
             </a:r>
           </a:p>
         </p:txBody>
@@ -12714,7 +12632,7 @@
         <p:spPr>
           <a:xfrm>
             <a:off x="566928" y="4828032"/>
-            <a:ext cx="5797296" cy="1207008"/>
+            <a:ext cx="1339595" cy="786384"/>
           </a:xfrm>
           <a:prstGeom prst="rect">
             <a:avLst/>
@@ -12757,8 +12675,8 @@
         </p:nvSpPr>
         <p:spPr>
           <a:xfrm>
-            <a:off x="768096" y="4956048"/>
-            <a:ext cx="5394959" cy="237744"/>
+            <a:off x="566928" y="4919472"/>
+            <a:ext cx="1339595" cy="329184"/>
           </a:xfrm>
           <a:prstGeom prst="rect">
             <a:avLst/>
@@ -12771,7 +12689,7 @@
           </a:bodyPr>
           <a:lstStyle/>
           <a:p>
-            <a:pPr algn="l">
+            <a:pPr algn="ctr">
               <a:lnSpc>
                 <a:spcPct val="118000"/>
               </a:lnSpc>
@@ -12780,13 +12698,13 @@
               </a:spcAft>
             </a:pPr>
             <a:r>
-              <a:rPr sz="1000" b="1">
+              <a:rPr sz="1600" b="1">
                 <a:solidFill>
                   <a:srgbClr val="0E7490"/>
                 </a:solidFill>
                 <a:latin typeface="Inter"/>
               </a:rPr>
-              <a:t>WHAT GETS EXTRACTED</a:t>
+              <a:t>39</a:t>
             </a:r>
           </a:p>
         </p:txBody>
@@ -12799,8 +12717,8 @@
         </p:nvSpPr>
         <p:spPr>
           <a:xfrm>
-            <a:off x="768096" y="5230368"/>
-            <a:ext cx="5394959" cy="731520"/>
+            <a:off x="566928" y="5285232"/>
+            <a:ext cx="1339595" cy="256032"/>
           </a:xfrm>
           <a:prstGeom prst="rect">
             <a:avLst/>
@@ -12813,22 +12731,22 @@
           </a:bodyPr>
           <a:lstStyle/>
           <a:p>
-            <a:pPr algn="l">
-              <a:lnSpc>
-                <a:spcPct val="126000"/>
+            <a:pPr algn="ctr">
+              <a:lnSpc>
+                <a:spcPct val="118000"/>
               </a:lnSpc>
               <a:spcAft>
                 <a:spcPts val="0"/>
               </a:spcAft>
             </a:pPr>
             <a:r>
-              <a:rPr sz="1200" b="0">
-                <a:solidFill>
-                  <a:srgbClr val="0F172A"/>
-                </a:solidFill>
-                <a:latin typeface="Inter"/>
-              </a:rPr>
-              <a:t>Manufacturer · cell model · chemistry · V_nom · V_max · V_min · nominal capacity · charge and discharge current limits · thermal envelopes.</a:t>
+              <a:rPr sz="900" b="0">
+                <a:solidFill>
+                  <a:srgbClr val="475569"/>
+                </a:solidFill>
+                <a:latin typeface="Inter"/>
+              </a:rPr>
+              <a:t>cycles logged</a:t>
             </a:r>
           </a:p>
         </p:txBody>
@@ -12841,8 +12759,416 @@
         </p:nvSpPr>
         <p:spPr>
           <a:xfrm>
-            <a:off x="7084730" y="1929384"/>
-            <a:ext cx="4148715" cy="2331720"/>
+            <a:off x="2052827" y="4828032"/>
+            <a:ext cx="1339595" cy="786384"/>
+          </a:xfrm>
+          <a:prstGeom prst="rect">
+            <a:avLst/>
+          </a:prstGeom>
+          <a:solidFill>
+            <a:srgbClr val="F1F5F9"/>
+          </a:solidFill>
+          <a:ln w="9525">
+            <a:solidFill>
+              <a:srgbClr val="CBD5E1"/>
+            </a:solidFill>
+          </a:ln>
+          <a:effectLst/>
+        </p:spPr>
+        <p:style>
+          <a:lnRef idx="1">
+            <a:schemeClr val="accent1"/>
+          </a:lnRef>
+          <a:fillRef idx="3">
+            <a:schemeClr val="accent1"/>
+          </a:fillRef>
+          <a:effectRef idx="2">
+            <a:schemeClr val="accent1"/>
+          </a:effectRef>
+          <a:fontRef idx="minor">
+            <a:schemeClr val="lt1"/>
+          </a:fontRef>
+        </p:style>
+        <p:txBody>
+          <a:bodyPr rtlCol="0" anchor="ctr"/>
+          <a:lstStyle/>
+          <a:p/>
+        </p:txBody>
+      </p:sp>
+      <p:sp>
+        <p:nvSpPr>
+          <p:cNvPr id="12" name="TextBox 11"/>
+          <p:cNvSpPr txBox="1"/>
+          <p:nvPr/>
+        </p:nvSpPr>
+        <p:spPr>
+          <a:xfrm>
+            <a:off x="2052827" y="4919472"/>
+            <a:ext cx="1339595" cy="329184"/>
+          </a:xfrm>
+          <a:prstGeom prst="rect">
+            <a:avLst/>
+          </a:prstGeom>
+          <a:noFill/>
+        </p:spPr>
+        <p:txBody>
+          <a:bodyPr wrap="square" anchor="t" lIns="0" rIns="0" tIns="0" bIns="0">
+            <a:spAutoFit/>
+          </a:bodyPr>
+          <a:lstStyle/>
+          <a:p>
+            <a:pPr algn="ctr">
+              <a:lnSpc>
+                <a:spcPct val="118000"/>
+              </a:lnSpc>
+              <a:spcAft>
+                <a:spcPts val="0"/>
+              </a:spcAft>
+            </a:pPr>
+            <a:r>
+              <a:rPr sz="1600" b="1">
+                <a:solidFill>
+                  <a:srgbClr val="0E7490"/>
+                </a:solidFill>
+                <a:latin typeface="Inter"/>
+              </a:rPr>
+              <a:t>21 / 18</a:t>
+            </a:r>
+          </a:p>
+        </p:txBody>
+      </p:sp>
+      <p:sp>
+        <p:nvSpPr>
+          <p:cNvPr id="13" name="TextBox 12"/>
+          <p:cNvSpPr txBox="1"/>
+          <p:nvPr/>
+        </p:nvSpPr>
+        <p:spPr>
+          <a:xfrm>
+            <a:off x="2052827" y="5285232"/>
+            <a:ext cx="1339595" cy="256032"/>
+          </a:xfrm>
+          <a:prstGeom prst="rect">
+            <a:avLst/>
+          </a:prstGeom>
+          <a:noFill/>
+        </p:spPr>
+        <p:txBody>
+          <a:bodyPr wrap="square" anchor="t" lIns="0" rIns="0" tIns="0" bIns="0">
+            <a:spAutoFit/>
+          </a:bodyPr>
+          <a:lstStyle/>
+          <a:p>
+            <a:pPr algn="ctr">
+              <a:lnSpc>
+                <a:spcPct val="118000"/>
+              </a:lnSpc>
+              <a:spcAft>
+                <a:spcPts val="0"/>
+              </a:spcAft>
+            </a:pPr>
+            <a:r>
+              <a:rPr sz="900" b="0">
+                <a:solidFill>
+                  <a:srgbClr val="475569"/>
+                </a:solidFill>
+                <a:latin typeface="Inter"/>
+              </a:rPr>
+              <a:t>discharge / charge</a:t>
+            </a:r>
+          </a:p>
+        </p:txBody>
+      </p:sp>
+      <p:sp>
+        <p:nvSpPr>
+          <p:cNvPr id="14" name="Rectangle 13"/>
+          <p:cNvSpPr/>
+          <p:nvPr/>
+        </p:nvSpPr>
+        <p:spPr>
+          <a:xfrm>
+            <a:off x="3538727" y="4828032"/>
+            <a:ext cx="1339595" cy="786384"/>
+          </a:xfrm>
+          <a:prstGeom prst="rect">
+            <a:avLst/>
+          </a:prstGeom>
+          <a:solidFill>
+            <a:srgbClr val="F1F5F9"/>
+          </a:solidFill>
+          <a:ln w="9525">
+            <a:solidFill>
+              <a:srgbClr val="CBD5E1"/>
+            </a:solidFill>
+          </a:ln>
+          <a:effectLst/>
+        </p:spPr>
+        <p:style>
+          <a:lnRef idx="1">
+            <a:schemeClr val="accent1"/>
+          </a:lnRef>
+          <a:fillRef idx="3">
+            <a:schemeClr val="accent1"/>
+          </a:fillRef>
+          <a:effectRef idx="2">
+            <a:schemeClr val="accent1"/>
+          </a:effectRef>
+          <a:fontRef idx="minor">
+            <a:schemeClr val="lt1"/>
+          </a:fontRef>
+        </p:style>
+        <p:txBody>
+          <a:bodyPr rtlCol="0" anchor="ctr"/>
+          <a:lstStyle/>
+          <a:p/>
+        </p:txBody>
+      </p:sp>
+      <p:sp>
+        <p:nvSpPr>
+          <p:cNvPr id="15" name="TextBox 14"/>
+          <p:cNvSpPr txBox="1"/>
+          <p:nvPr/>
+        </p:nvSpPr>
+        <p:spPr>
+          <a:xfrm>
+            <a:off x="3538727" y="4919472"/>
+            <a:ext cx="1339595" cy="329184"/>
+          </a:xfrm>
+          <a:prstGeom prst="rect">
+            <a:avLst/>
+          </a:prstGeom>
+          <a:noFill/>
+        </p:spPr>
+        <p:txBody>
+          <a:bodyPr wrap="square" anchor="t" lIns="0" rIns="0" tIns="0" bIns="0">
+            <a:spAutoFit/>
+          </a:bodyPr>
+          <a:lstStyle/>
+          <a:p>
+            <a:pPr algn="ctr">
+              <a:lnSpc>
+                <a:spcPct val="118000"/>
+              </a:lnSpc>
+              <a:spcAft>
+                <a:spcPts val="0"/>
+              </a:spcAft>
+            </a:pPr>
+            <a:r>
+              <a:rPr sz="1600" b="1">
+                <a:solidFill>
+                  <a:srgbClr val="0E7490"/>
+                </a:solidFill>
+                <a:latin typeface="Inter"/>
+              </a:rPr>
+              <a:t>1.0</a:t>
+            </a:r>
+          </a:p>
+        </p:txBody>
+      </p:sp>
+      <p:sp>
+        <p:nvSpPr>
+          <p:cNvPr id="16" name="TextBox 15"/>
+          <p:cNvSpPr txBox="1"/>
+          <p:nvPr/>
+        </p:nvSpPr>
+        <p:spPr>
+          <a:xfrm>
+            <a:off x="3538727" y="5285232"/>
+            <a:ext cx="1339595" cy="256032"/>
+          </a:xfrm>
+          <a:prstGeom prst="rect">
+            <a:avLst/>
+          </a:prstGeom>
+          <a:noFill/>
+        </p:spPr>
+        <p:txBody>
+          <a:bodyPr wrap="square" anchor="t" lIns="0" rIns="0" tIns="0" bIns="0">
+            <a:spAutoFit/>
+          </a:bodyPr>
+          <a:lstStyle/>
+          <a:p>
+            <a:pPr algn="ctr">
+              <a:lnSpc>
+                <a:spcPct val="118000"/>
+              </a:lnSpc>
+              <a:spcAft>
+                <a:spcPts val="0"/>
+              </a:spcAft>
+            </a:pPr>
+            <a:r>
+              <a:rPr sz="900" b="0">
+                <a:solidFill>
+                  <a:srgbClr val="475569"/>
+                </a:solidFill>
+                <a:latin typeface="Inter"/>
+              </a:rPr>
+              <a:t>data quality</a:t>
+            </a:r>
+          </a:p>
+        </p:txBody>
+      </p:sp>
+      <p:sp>
+        <p:nvSpPr>
+          <p:cNvPr id="17" name="Rectangle 16"/>
+          <p:cNvSpPr/>
+          <p:nvPr/>
+        </p:nvSpPr>
+        <p:spPr>
+          <a:xfrm>
+            <a:off x="5024627" y="4828032"/>
+            <a:ext cx="1339595" cy="786384"/>
+          </a:xfrm>
+          <a:prstGeom prst="rect">
+            <a:avLst/>
+          </a:prstGeom>
+          <a:solidFill>
+            <a:srgbClr val="F1F5F9"/>
+          </a:solidFill>
+          <a:ln w="9525">
+            <a:solidFill>
+              <a:srgbClr val="CBD5E1"/>
+            </a:solidFill>
+          </a:ln>
+          <a:effectLst/>
+        </p:spPr>
+        <p:style>
+          <a:lnRef idx="1">
+            <a:schemeClr val="accent1"/>
+          </a:lnRef>
+          <a:fillRef idx="3">
+            <a:schemeClr val="accent1"/>
+          </a:fillRef>
+          <a:effectRef idx="2">
+            <a:schemeClr val="accent1"/>
+          </a:effectRef>
+          <a:fontRef idx="minor">
+            <a:schemeClr val="lt1"/>
+          </a:fontRef>
+        </p:style>
+        <p:txBody>
+          <a:bodyPr rtlCol="0" anchor="ctr"/>
+          <a:lstStyle/>
+          <a:p/>
+        </p:txBody>
+      </p:sp>
+      <p:sp>
+        <p:nvSpPr>
+          <p:cNvPr id="18" name="TextBox 17"/>
+          <p:cNvSpPr txBox="1"/>
+          <p:nvPr/>
+        </p:nvSpPr>
+        <p:spPr>
+          <a:xfrm>
+            <a:off x="5024627" y="4919472"/>
+            <a:ext cx="1339595" cy="329184"/>
+          </a:xfrm>
+          <a:prstGeom prst="rect">
+            <a:avLst/>
+          </a:prstGeom>
+          <a:noFill/>
+        </p:spPr>
+        <p:txBody>
+          <a:bodyPr wrap="square" anchor="t" lIns="0" rIns="0" tIns="0" bIns="0">
+            <a:spAutoFit/>
+          </a:bodyPr>
+          <a:lstStyle/>
+          <a:p>
+            <a:pPr algn="ctr">
+              <a:lnSpc>
+                <a:spcPct val="118000"/>
+              </a:lnSpc>
+              <a:spcAft>
+                <a:spcPts val="0"/>
+              </a:spcAft>
+            </a:pPr>
+            <a:r>
+              <a:rPr sz="1600" b="1">
+                <a:solidFill>
+                  <a:srgbClr val="475569"/>
+                </a:solidFill>
+                <a:latin typeface="Inter"/>
+              </a:rPr>
+              <a:t>0</a:t>
+            </a:r>
+          </a:p>
+        </p:txBody>
+      </p:sp>
+      <p:sp>
+        <p:nvSpPr>
+          <p:cNvPr id="19" name="TextBox 18"/>
+          <p:cNvSpPr txBox="1"/>
+          <p:nvPr/>
+        </p:nvSpPr>
+        <p:spPr>
+          <a:xfrm>
+            <a:off x="5024627" y="5285232"/>
+            <a:ext cx="1339595" cy="256032"/>
+          </a:xfrm>
+          <a:prstGeom prst="rect">
+            <a:avLst/>
+          </a:prstGeom>
+          <a:noFill/>
+        </p:spPr>
+        <p:txBody>
+          <a:bodyPr wrap="square" anchor="t" lIns="0" rIns="0" tIns="0" bIns="0">
+            <a:spAutoFit/>
+          </a:bodyPr>
+          <a:lstStyle/>
+          <a:p>
+            <a:pPr algn="ctr">
+              <a:lnSpc>
+                <a:spcPct val="118000"/>
+              </a:lnSpc>
+              <a:spcAft>
+                <a:spcPts val="0"/>
+              </a:spcAft>
+            </a:pPr>
+            <a:r>
+              <a:rPr sz="900" b="0">
+                <a:solidFill>
+                  <a:srgbClr val="475569"/>
+                </a:solidFill>
+                <a:latin typeface="Inter"/>
+              </a:rPr>
+              <a:t>alerts raised</a:t>
+            </a:r>
+          </a:p>
+        </p:txBody>
+      </p:sp>
+      <p:pic>
+        <p:nvPicPr>
+          <p:cNvPr id="20" name="Picture 19" descr="fig_cycle_history.png"/>
+          <p:cNvPicPr>
+            <a:picLocks noChangeAspect="1"/>
+          </p:cNvPicPr>
+          <p:nvPr/>
+        </p:nvPicPr>
+        <p:blipFill>
+          <a:blip r:embed="rId2"/>
+          <a:stretch>
+            <a:fillRect/>
+          </a:stretch>
+        </p:blipFill>
+        <p:spPr>
+          <a:xfrm>
+            <a:off x="6693408" y="1969675"/>
+            <a:ext cx="4931359" cy="2754057"/>
+          </a:xfrm>
+          <a:prstGeom prst="rect">
+            <a:avLst/>
+          </a:prstGeom>
+        </p:spPr>
+      </p:pic>
+      <p:sp>
+        <p:nvSpPr>
+          <p:cNvPr id="21" name="Rectangle 20"/>
+          <p:cNvSpPr/>
+          <p:nvPr/>
+        </p:nvSpPr>
+        <p:spPr>
+          <a:xfrm>
+            <a:off x="7879732" y="5010912"/>
+            <a:ext cx="2558710" cy="1234440"/>
           </a:xfrm>
           <a:prstGeom prst="rect">
             <a:avLst/>
@@ -12879,75 +13205,7 @@
       </p:sp>
       <p:pic>
         <p:nvPicPr>
-          <p:cNvPr id="12" name="Picture 11" descr="mock_battery_params.png"/>
-          <p:cNvPicPr>
-            <a:picLocks noChangeAspect="1"/>
-          </p:cNvPicPr>
-          <p:nvPr/>
-        </p:nvPicPr>
-        <p:blipFill>
-          <a:blip r:embed="rId2"/>
-          <a:stretch>
-            <a:fillRect/>
-          </a:stretch>
-        </p:blipFill>
-        <p:spPr>
-          <a:xfrm>
-            <a:off x="7203602" y="2048256"/>
-            <a:ext cx="3910971" cy="2093976"/>
-          </a:xfrm>
-          <a:prstGeom prst="rect">
-            <a:avLst/>
-          </a:prstGeom>
-        </p:spPr>
-      </p:pic>
-      <p:sp>
-        <p:nvSpPr>
-          <p:cNvPr id="13" name="Rectangle 12"/>
-          <p:cNvSpPr/>
-          <p:nvPr/>
-        </p:nvSpPr>
-        <p:spPr>
-          <a:xfrm>
-            <a:off x="7530788" y="4443983"/>
-            <a:ext cx="3256597" cy="1691640"/>
-          </a:xfrm>
-          <a:prstGeom prst="rect">
-            <a:avLst/>
-          </a:prstGeom>
-          <a:solidFill>
-            <a:srgbClr val="FFFFFF"/>
-          </a:solidFill>
-          <a:ln w="12700">
-            <a:solidFill>
-              <a:srgbClr val="CBD5E1"/>
-            </a:solidFill>
-          </a:ln>
-          <a:effectLst/>
-        </p:spPr>
-        <p:style>
-          <a:lnRef idx="1">
-            <a:schemeClr val="accent1"/>
-          </a:lnRef>
-          <a:fillRef idx="3">
-            <a:schemeClr val="accent1"/>
-          </a:fillRef>
-          <a:effectRef idx="2">
-            <a:schemeClr val="accent1"/>
-          </a:effectRef>
-          <a:fontRef idx="minor">
-            <a:schemeClr val="lt1"/>
-          </a:fontRef>
-        </p:style>
-        <p:txBody>
-          <a:bodyPr rtlCol="0" anchor="ctr"/>
-          <a:lstStyle/>
-          <a:p/>
-        </p:txBody>
-      </p:sp>
-      <p:pic>
-        <p:nvPicPr>
-          <p:cNvPr id="14" name="Picture 13" descr="p09_img1_x72.png"/>
+          <p:cNvPr id="22" name="Picture 21" descr="p07_img2_x62.jpeg"/>
           <p:cNvPicPr>
             <a:picLocks noChangeAspect="1"/>
           </p:cNvPicPr>
@@ -12961,56 +13219,14 @@
         </p:blipFill>
         <p:spPr>
           <a:xfrm>
-            <a:off x="7649660" y="4562855"/>
-            <a:ext cx="3018853" cy="1453896"/>
+            <a:off x="7998604" y="5129784"/>
+            <a:ext cx="2320966" cy="996696"/>
           </a:xfrm>
           <a:prstGeom prst="rect">
             <a:avLst/>
           </a:prstGeom>
         </p:spPr>
       </p:pic>
-      <p:sp>
-        <p:nvSpPr>
-          <p:cNvPr id="15" name="TextBox 14"/>
-          <p:cNvSpPr txBox="1"/>
-          <p:nvPr/>
-        </p:nvSpPr>
-        <p:spPr>
-          <a:xfrm>
-            <a:off x="6693408" y="6181344"/>
-            <a:ext cx="4931359" cy="237744"/>
-          </a:xfrm>
-          <a:prstGeom prst="rect">
-            <a:avLst/>
-          </a:prstGeom>
-          <a:noFill/>
-        </p:spPr>
-        <p:txBody>
-          <a:bodyPr wrap="square" anchor="t" lIns="0" rIns="0" tIns="0" bIns="0">
-            <a:spAutoFit/>
-          </a:bodyPr>
-          <a:lstStyle/>
-          <a:p>
-            <a:pPr algn="ctr">
-              <a:lnSpc>
-                <a:spcPct val="118000"/>
-              </a:lnSpc>
-              <a:spcAft>
-                <a:spcPts val="0"/>
-              </a:spcAft>
-            </a:pPr>
-            <a:r>
-              <a:rPr sz="950" b="0">
-                <a:solidFill>
-                  <a:srgbClr val="475569"/>
-                </a:solidFill>
-                <a:latin typeface="Inter"/>
-              </a:rPr>
-              <a:t>Upload screen, and the parsed result</a:t>
-            </a:r>
-          </a:p>
-        </p:txBody>
-      </p:sp>
     </p:spTree>
   </p:cSld>
   <p:clrMapOvr>
@@ -13074,7 +13290,7 @@
                 </a:solidFill>
                 <a:latin typeface="Inter"/>
               </a:rPr>
-              <a:t>Swap the chemistry, not the codebase</a:t>
+              <a:t>Two uploads is the entire onboarding flow</a:t>
             </a:r>
           </a:p>
         </p:txBody>
@@ -13255,8 +13471,8 @@
         </p:nvSpPr>
         <p:spPr>
           <a:xfrm>
-            <a:off x="566928" y="1481328"/>
-            <a:ext cx="5797296" cy="3035808"/>
+            <a:off x="566928" y="1554480"/>
+            <a:ext cx="5797296" cy="2788920"/>
           </a:xfrm>
           <a:prstGeom prst="rect">
             <a:avLst/>
@@ -13274,7 +13490,7 @@
                 <a:spcPct val="116000"/>
               </a:lnSpc>
               <a:spcAft>
-                <a:spcPts val="800"/>
+                <a:spcPts val="900"/>
               </a:spcAft>
               <a:buClr>
                 <a:srgbClr val="0E7490"/>
@@ -13284,13 +13500,13 @@
               <a:buChar char="●"/>
             </a:pPr>
             <a:r>
-              <a:rPr sz="1550">
+              <a:rPr sz="1600">
                 <a:solidFill>
                   <a:srgbClr val="0F172A"/>
                 </a:solidFill>
                 <a:latin typeface="Inter"/>
               </a:rPr>
-              <a:t>Upload a datasheet PDF; the parser reads the limits.</a:t>
+              <a:t>Drop the manufacturer PDF: chemistry and limits are parsed out.</a:t>
             </a:r>
           </a:p>
           <a:p>
@@ -13299,7 +13515,7 @@
                 <a:spcPct val="116000"/>
               </a:lnSpc>
               <a:spcAft>
-                <a:spcPts val="800"/>
+                <a:spcPts val="900"/>
               </a:spcAft>
               <a:buClr>
                 <a:srgbClr val="0E7490"/>
@@ -13309,13 +13525,13 @@
               <a:buChar char="●"/>
             </a:pPr>
             <a:r>
-              <a:rPr sz="1550">
+              <a:rPr sz="1600">
                 <a:solidFill>
                   <a:srgbClr val="0F172A"/>
                 </a:solidFill>
                 <a:latin typeface="Inter"/>
               </a:rPr>
-              <a:t>Extracts V_nom, V_max, V_min, capacity, current, thermal.</a:t>
+              <a:t>Drop a CSV or XLSX: the dataset is profiled and previewed.</a:t>
             </a:r>
           </a:p>
           <a:p>
@@ -13324,7 +13540,7 @@
                 <a:spcPct val="116000"/>
               </a:lnSpc>
               <a:spcAft>
-                <a:spcPts val="800"/>
+                <a:spcPts val="900"/>
               </a:spcAft>
               <a:buClr>
                 <a:srgbClr val="0E7490"/>
@@ -13334,13 +13550,13 @@
               <a:buChar char="●"/>
             </a:pPr>
             <a:r>
-              <a:rPr sz="1550">
+              <a:rPr sz="1600">
                 <a:solidFill>
                   <a:srgbClr val="0F172A"/>
                 </a:solidFill>
                 <a:latin typeface="Inter"/>
               </a:rPr>
-              <a:t>Pack sizing derives S and P from the bus target.</a:t>
+              <a:t>No YAML, no config file, no redeploy, no developer.</a:t>
             </a:r>
           </a:p>
           <a:p>
@@ -13349,7 +13565,7 @@
                 <a:spcPct val="116000"/>
               </a:lnSpc>
               <a:spcAft>
-                <a:spcPts val="800"/>
+                <a:spcPts val="900"/>
               </a:spcAft>
               <a:buClr>
                 <a:srgbClr val="0E7490"/>
@@ -13359,13 +13575,13 @@
               <a:buChar char="●"/>
             </a:pPr>
             <a:r>
-              <a:rPr sz="1550">
+              <a:rPr sz="1600">
                 <a:solidFill>
                   <a:srgbClr val="0F172A"/>
                 </a:solidFill>
                 <a:latin typeface="Inter"/>
               </a:rPr>
-              <a:t>Tiering: NMC reuse, NCA/LCO shift, LFP remap, LTO rescale.</a:t>
+              <a:t>Parsed values are editable before they become the active profile.</a:t>
             </a:r>
           </a:p>
           <a:p>
@@ -13374,7 +13590,7 @@
                 <a:spcPct val="116000"/>
               </a:lnSpc>
               <a:spcAft>
-                <a:spcPts val="800"/>
+                <a:spcPts val="900"/>
               </a:spcAft>
               <a:buClr>
                 <a:srgbClr val="0E7490"/>
@@ -13384,38 +13600,13 @@
               <a:buChar char="●"/>
             </a:pPr>
             <a:r>
-              <a:rPr sz="1550">
+              <a:rPr sz="1600">
                 <a:solidFill>
                   <a:srgbClr val="0F172A"/>
                 </a:solidFill>
                 <a:latin typeface="Inter"/>
               </a:rPr>
-              <a:t>Overvoltage warns 95%, critical 100%; overcurrent 90%.</a:t>
-            </a:r>
-          </a:p>
-          <a:p>
-            <a:pPr marL="274320" indent="-274320">
-              <a:lnSpc>
-                <a:spcPct val="116000"/>
-              </a:lnSpc>
-              <a:spcAft>
-                <a:spcPts val="800"/>
-              </a:spcAft>
-              <a:buClr>
-                <a:srgbClr val="0E7490"/>
-              </a:buClr>
-              <a:buSzPct val="62000"/>
-              <a:buFont typeface="Arial" pitchFamily="34" charset="0"/>
-              <a:buChar char="●"/>
-            </a:pPr>
-            <a:r>
-              <a:rPr sz="1550">
-                <a:solidFill>
-                  <a:srgbClr val="0F172A"/>
-                </a:solidFill>
-                <a:latin typeface="Inter"/>
-              </a:rPr>
-              <a:t>active_profile.json and PostgreSQL sync live, no restart.</a:t>
+              <a:t>The same screen feeds both the thresholds and the retrainer.</a:t>
             </a:r>
           </a:p>
         </p:txBody>
@@ -13428,8 +13619,8 @@
         </p:nvSpPr>
         <p:spPr>
           <a:xfrm>
-            <a:off x="566928" y="4882896"/>
-            <a:ext cx="5797296" cy="1060704"/>
+            <a:off x="566928" y="4828032"/>
+            <a:ext cx="5797296" cy="1207008"/>
           </a:xfrm>
           <a:prstGeom prst="rect">
             <a:avLst/>
@@ -13472,7 +13663,7 @@
         </p:nvSpPr>
         <p:spPr>
           <a:xfrm>
-            <a:off x="768096" y="4992624"/>
+            <a:off x="768096" y="4956048"/>
             <a:ext cx="5394959" cy="237744"/>
           </a:xfrm>
           <a:prstGeom prst="rect">
@@ -13497,11 +13688,11 @@
             <a:r>
               <a:rPr sz="1000" b="1">
                 <a:solidFill>
-                  <a:srgbClr val="B45309"/>
-                </a:solidFill>
-                <a:latin typeface="Inter"/>
-              </a:rPr>
-              <a:t>IN-BROWSER RETRAINING</a:t>
+                  <a:srgbClr val="0E7490"/>
+                </a:solidFill>
+                <a:latin typeface="Inter"/>
+              </a:rPr>
+              <a:t>WHAT GETS EXTRACTED</a:t>
             </a:r>
           </a:p>
         </p:txBody>
@@ -13514,8 +13705,8 @@
         </p:nvSpPr>
         <p:spPr>
           <a:xfrm>
-            <a:off x="768096" y="5248656"/>
-            <a:ext cx="5394959" cy="603504"/>
+            <a:off x="768096" y="5230368"/>
+            <a:ext cx="5394959" cy="731520"/>
           </a:xfrm>
           <a:prstGeom prst="rect">
             <a:avLst/>
@@ -13530,27 +13721,71 @@
           <a:p>
             <a:pPr algn="l">
               <a:lnSpc>
-                <a:spcPct val="122000"/>
+                <a:spcPct val="126000"/>
               </a:lnSpc>
               <a:spcAft>
                 <a:spcPts val="0"/>
               </a:spcAft>
             </a:pPr>
             <a:r>
-              <a:rPr sz="1300" b="0">
+              <a:rPr sz="1200" b="0">
                 <a:solidFill>
                   <a:srgbClr val="0F172A"/>
                 </a:solidFill>
                 <a:latin typeface="Inter"/>
               </a:rPr>
-              <a:t>Upload field telemetry from the new pack and retrain XGBoost from the dashboard — the adaptation loop closes without a developer.</a:t>
-            </a:r>
-          </a:p>
+              <a:t>Manufacturer · cell model · chemistry · V_nom · V_max · V_min · nominal capacity · charge and discharge current limits · thermal envelopes.</a:t>
+            </a:r>
+          </a:p>
+        </p:txBody>
+      </p:sp>
+      <p:sp>
+        <p:nvSpPr>
+          <p:cNvPr id="11" name="Rectangle 10"/>
+          <p:cNvSpPr/>
+          <p:nvPr/>
+        </p:nvSpPr>
+        <p:spPr>
+          <a:xfrm>
+            <a:off x="7084730" y="1929384"/>
+            <a:ext cx="4148715" cy="2331720"/>
+          </a:xfrm>
+          <a:prstGeom prst="rect">
+            <a:avLst/>
+          </a:prstGeom>
+          <a:solidFill>
+            <a:srgbClr val="FFFFFF"/>
+          </a:solidFill>
+          <a:ln w="12700">
+            <a:solidFill>
+              <a:srgbClr val="CBD5E1"/>
+            </a:solidFill>
+          </a:ln>
+          <a:effectLst/>
+        </p:spPr>
+        <p:style>
+          <a:lnRef idx="1">
+            <a:schemeClr val="accent1"/>
+          </a:lnRef>
+          <a:fillRef idx="3">
+            <a:schemeClr val="accent1"/>
+          </a:fillRef>
+          <a:effectRef idx="2">
+            <a:schemeClr val="accent1"/>
+          </a:effectRef>
+          <a:fontRef idx="minor">
+            <a:schemeClr val="lt1"/>
+          </a:fontRef>
+        </p:style>
+        <p:txBody>
+          <a:bodyPr rtlCol="0" anchor="ctr"/>
+          <a:lstStyle/>
+          <a:p/>
         </p:txBody>
       </p:sp>
       <p:pic>
         <p:nvPicPr>
-          <p:cNvPr id="11" name="Picture 10" descr="diag_configurator.png"/>
+          <p:cNvPr id="12" name="Picture 11" descr="mock_battery_params.png"/>
           <p:cNvPicPr>
             <a:picLocks noChangeAspect="1"/>
           </p:cNvPicPr>
@@ -13564,17 +13799,61 @@
         </p:blipFill>
         <p:spPr>
           <a:xfrm>
-            <a:off x="6693408" y="2052450"/>
-            <a:ext cx="2212848" cy="2935978"/>
+            <a:off x="7203602" y="2048256"/>
+            <a:ext cx="3910971" cy="2093976"/>
           </a:xfrm>
           <a:prstGeom prst="rect">
             <a:avLst/>
           </a:prstGeom>
         </p:spPr>
       </p:pic>
+      <p:sp>
+        <p:nvSpPr>
+          <p:cNvPr id="13" name="Rectangle 12"/>
+          <p:cNvSpPr/>
+          <p:nvPr/>
+        </p:nvSpPr>
+        <p:spPr>
+          <a:xfrm>
+            <a:off x="7530788" y="4443983"/>
+            <a:ext cx="3256597" cy="1691640"/>
+          </a:xfrm>
+          <a:prstGeom prst="rect">
+            <a:avLst/>
+          </a:prstGeom>
+          <a:solidFill>
+            <a:srgbClr val="FFFFFF"/>
+          </a:solidFill>
+          <a:ln w="12700">
+            <a:solidFill>
+              <a:srgbClr val="CBD5E1"/>
+            </a:solidFill>
+          </a:ln>
+          <a:effectLst/>
+        </p:spPr>
+        <p:style>
+          <a:lnRef idx="1">
+            <a:schemeClr val="accent1"/>
+          </a:lnRef>
+          <a:fillRef idx="3">
+            <a:schemeClr val="accent1"/>
+          </a:fillRef>
+          <a:effectRef idx="2">
+            <a:schemeClr val="accent1"/>
+          </a:effectRef>
+          <a:fontRef idx="minor">
+            <a:schemeClr val="lt1"/>
+          </a:fontRef>
+        </p:style>
+        <p:txBody>
+          <a:bodyPr rtlCol="0" anchor="ctr"/>
+          <a:lstStyle/>
+          <a:p/>
+        </p:txBody>
+      </p:sp>
       <p:pic>
         <p:nvPicPr>
-          <p:cNvPr id="12" name="Picture 11" descr="diag_chemistry_tiering.png"/>
+          <p:cNvPr id="14" name="Picture 13" descr="p09_img1_x72.png"/>
           <p:cNvPicPr>
             <a:picLocks noChangeAspect="1"/>
           </p:cNvPicPr>
@@ -13588,14 +13867,56 @@
         </p:blipFill>
         <p:spPr>
           <a:xfrm>
-            <a:off x="9089136" y="1489041"/>
-            <a:ext cx="2535631" cy="4062796"/>
+            <a:off x="7649660" y="4562855"/>
+            <a:ext cx="3018853" cy="1453896"/>
           </a:xfrm>
           <a:prstGeom prst="rect">
             <a:avLst/>
           </a:prstGeom>
         </p:spPr>
       </p:pic>
+      <p:sp>
+        <p:nvSpPr>
+          <p:cNvPr id="15" name="TextBox 14"/>
+          <p:cNvSpPr txBox="1"/>
+          <p:nvPr/>
+        </p:nvSpPr>
+        <p:spPr>
+          <a:xfrm>
+            <a:off x="6693408" y="6181344"/>
+            <a:ext cx="4931359" cy="237744"/>
+          </a:xfrm>
+          <a:prstGeom prst="rect">
+            <a:avLst/>
+          </a:prstGeom>
+          <a:noFill/>
+        </p:spPr>
+        <p:txBody>
+          <a:bodyPr wrap="square" anchor="t" lIns="0" rIns="0" tIns="0" bIns="0">
+            <a:spAutoFit/>
+          </a:bodyPr>
+          <a:lstStyle/>
+          <a:p>
+            <a:pPr algn="ctr">
+              <a:lnSpc>
+                <a:spcPct val="118000"/>
+              </a:lnSpc>
+              <a:spcAft>
+                <a:spcPts val="0"/>
+              </a:spcAft>
+            </a:pPr>
+            <a:r>
+              <a:rPr sz="950" b="0">
+                <a:solidFill>
+                  <a:srgbClr val="475569"/>
+                </a:solidFill>
+                <a:latin typeface="Inter"/>
+              </a:rPr>
+              <a:t>Upload screen, and the parsed result</a:t>
+            </a:r>
+          </a:p>
+        </p:txBody>
+      </p:sp>
     </p:spTree>
   </p:cSld>
   <p:clrMapOvr>
@@ -14665,7 +14986,7 @@
                 </a:solidFill>
                 <a:latin typeface="Inter"/>
               </a:rPr>
-              <a:t>What we would build next</a:t>
+              <a:t>Swap the chemistry, not the codebase</a:t>
             </a:r>
           </a:p>
         </p:txBody>
@@ -14840,14 +15161,187 @@
       </p:sp>
       <p:sp>
         <p:nvSpPr>
-          <p:cNvPr id="7" name="Rectangle 6"/>
+          <p:cNvPr id="7" name="TextBox 6"/>
+          <p:cNvSpPr txBox="1"/>
+          <p:nvPr/>
+        </p:nvSpPr>
+        <p:spPr>
+          <a:xfrm>
+            <a:off x="566928" y="1481328"/>
+            <a:ext cx="5797296" cy="3035808"/>
+          </a:xfrm>
+          <a:prstGeom prst="rect">
+            <a:avLst/>
+          </a:prstGeom>
+          <a:noFill/>
+        </p:spPr>
+        <p:txBody>
+          <a:bodyPr wrap="square" lIns="0" rIns="0" tIns="0" bIns="0">
+            <a:spAutoFit/>
+          </a:bodyPr>
+          <a:lstStyle/>
+          <a:p>
+            <a:pPr marL="274320" indent="-274320">
+              <a:lnSpc>
+                <a:spcPct val="116000"/>
+              </a:lnSpc>
+              <a:spcAft>
+                <a:spcPts val="800"/>
+              </a:spcAft>
+              <a:buClr>
+                <a:srgbClr val="0E7490"/>
+              </a:buClr>
+              <a:buSzPct val="62000"/>
+              <a:buFont typeface="Arial" pitchFamily="34" charset="0"/>
+              <a:buChar char="●"/>
+            </a:pPr>
+            <a:r>
+              <a:rPr sz="1550">
+                <a:solidFill>
+                  <a:srgbClr val="0F172A"/>
+                </a:solidFill>
+                <a:latin typeface="Inter"/>
+              </a:rPr>
+              <a:t>Upload a datasheet PDF; the parser reads the limits.</a:t>
+            </a:r>
+          </a:p>
+          <a:p>
+            <a:pPr marL="274320" indent="-274320">
+              <a:lnSpc>
+                <a:spcPct val="116000"/>
+              </a:lnSpc>
+              <a:spcAft>
+                <a:spcPts val="800"/>
+              </a:spcAft>
+              <a:buClr>
+                <a:srgbClr val="0E7490"/>
+              </a:buClr>
+              <a:buSzPct val="62000"/>
+              <a:buFont typeface="Arial" pitchFamily="34" charset="0"/>
+              <a:buChar char="●"/>
+            </a:pPr>
+            <a:r>
+              <a:rPr sz="1550">
+                <a:solidFill>
+                  <a:srgbClr val="0F172A"/>
+                </a:solidFill>
+                <a:latin typeface="Inter"/>
+              </a:rPr>
+              <a:t>Extracts V_nom, V_max, V_min, capacity, current, thermal.</a:t>
+            </a:r>
+          </a:p>
+          <a:p>
+            <a:pPr marL="274320" indent="-274320">
+              <a:lnSpc>
+                <a:spcPct val="116000"/>
+              </a:lnSpc>
+              <a:spcAft>
+                <a:spcPts val="800"/>
+              </a:spcAft>
+              <a:buClr>
+                <a:srgbClr val="0E7490"/>
+              </a:buClr>
+              <a:buSzPct val="62000"/>
+              <a:buFont typeface="Arial" pitchFamily="34" charset="0"/>
+              <a:buChar char="●"/>
+            </a:pPr>
+            <a:r>
+              <a:rPr sz="1550">
+                <a:solidFill>
+                  <a:srgbClr val="0F172A"/>
+                </a:solidFill>
+                <a:latin typeface="Inter"/>
+              </a:rPr>
+              <a:t>Pack sizing derives S and P from the bus target.</a:t>
+            </a:r>
+          </a:p>
+          <a:p>
+            <a:pPr marL="274320" indent="-274320">
+              <a:lnSpc>
+                <a:spcPct val="116000"/>
+              </a:lnSpc>
+              <a:spcAft>
+                <a:spcPts val="800"/>
+              </a:spcAft>
+              <a:buClr>
+                <a:srgbClr val="0E7490"/>
+              </a:buClr>
+              <a:buSzPct val="62000"/>
+              <a:buFont typeface="Arial" pitchFamily="34" charset="0"/>
+              <a:buChar char="●"/>
+            </a:pPr>
+            <a:r>
+              <a:rPr sz="1550">
+                <a:solidFill>
+                  <a:srgbClr val="0F172A"/>
+                </a:solidFill>
+                <a:latin typeface="Inter"/>
+              </a:rPr>
+              <a:t>Tiering: NMC reuse, NCA/LCO shift, LFP remap, LTO rescale.</a:t>
+            </a:r>
+          </a:p>
+          <a:p>
+            <a:pPr marL="274320" indent="-274320">
+              <a:lnSpc>
+                <a:spcPct val="116000"/>
+              </a:lnSpc>
+              <a:spcAft>
+                <a:spcPts val="800"/>
+              </a:spcAft>
+              <a:buClr>
+                <a:srgbClr val="0E7490"/>
+              </a:buClr>
+              <a:buSzPct val="62000"/>
+              <a:buFont typeface="Arial" pitchFamily="34" charset="0"/>
+              <a:buChar char="●"/>
+            </a:pPr>
+            <a:r>
+              <a:rPr sz="1550">
+                <a:solidFill>
+                  <a:srgbClr val="0F172A"/>
+                </a:solidFill>
+                <a:latin typeface="Inter"/>
+              </a:rPr>
+              <a:t>Overvoltage warns 95%, critical 100%; overcurrent 90%.</a:t>
+            </a:r>
+          </a:p>
+          <a:p>
+            <a:pPr marL="274320" indent="-274320">
+              <a:lnSpc>
+                <a:spcPct val="116000"/>
+              </a:lnSpc>
+              <a:spcAft>
+                <a:spcPts val="800"/>
+              </a:spcAft>
+              <a:buClr>
+                <a:srgbClr val="0E7490"/>
+              </a:buClr>
+              <a:buSzPct val="62000"/>
+              <a:buFont typeface="Arial" pitchFamily="34" charset="0"/>
+              <a:buChar char="●"/>
+            </a:pPr>
+            <a:r>
+              <a:rPr sz="1550">
+                <a:solidFill>
+                  <a:srgbClr val="0F172A"/>
+                </a:solidFill>
+                <a:latin typeface="Inter"/>
+              </a:rPr>
+              <a:t>active_profile.json and PostgreSQL sync live, no restart.</a:t>
+            </a:r>
+          </a:p>
+        </p:txBody>
+      </p:sp>
+      <p:sp>
+        <p:nvSpPr>
+          <p:cNvPr id="8" name="Rectangle 7"/>
           <p:cNvSpPr/>
           <p:nvPr/>
         </p:nvSpPr>
         <p:spPr>
           <a:xfrm>
-            <a:off x="566928" y="1463040"/>
-            <a:ext cx="11057839" cy="749808"/>
+            <a:off x="566928" y="4882896"/>
+            <a:ext cx="5797296" cy="1060704"/>
           </a:xfrm>
           <a:prstGeom prst="rect">
             <a:avLst/>
@@ -14884,56 +15378,14 @@
       </p:sp>
       <p:sp>
         <p:nvSpPr>
-          <p:cNvPr id="8" name="Rectangle 7"/>
-          <p:cNvSpPr/>
-          <p:nvPr/>
-        </p:nvSpPr>
-        <p:spPr>
-          <a:xfrm>
-            <a:off x="566928" y="1463040"/>
-            <a:ext cx="68580" cy="749808"/>
-          </a:xfrm>
-          <a:prstGeom prst="rect">
-            <a:avLst/>
-          </a:prstGeom>
-          <a:solidFill>
-            <a:srgbClr val="B91C1C"/>
-          </a:solidFill>
-          <a:ln>
-            <a:noFill/>
-          </a:ln>
-          <a:effectLst/>
-        </p:spPr>
-        <p:style>
-          <a:lnRef idx="1">
-            <a:schemeClr val="accent1"/>
-          </a:lnRef>
-          <a:fillRef idx="3">
-            <a:schemeClr val="accent1"/>
-          </a:fillRef>
-          <a:effectRef idx="2">
-            <a:schemeClr val="accent1"/>
-          </a:effectRef>
-          <a:fontRef idx="minor">
-            <a:schemeClr val="lt1"/>
-          </a:fontRef>
-        </p:style>
-        <p:txBody>
-          <a:bodyPr rtlCol="0" anchor="ctr"/>
-          <a:lstStyle/>
-          <a:p/>
-        </p:txBody>
-      </p:sp>
-      <p:sp>
-        <p:nvSpPr>
           <p:cNvPr id="9" name="TextBox 8"/>
           <p:cNvSpPr txBox="1"/>
           <p:nvPr/>
         </p:nvSpPr>
         <p:spPr>
           <a:xfrm>
-            <a:off x="877824" y="1545336"/>
-            <a:ext cx="3794760" cy="310896"/>
+            <a:off x="768096" y="4992624"/>
+            <a:ext cx="5394959" cy="237744"/>
           </a:xfrm>
           <a:prstGeom prst="rect">
             <a:avLst/>
@@ -14955,781 +15407,107 @@
               </a:spcAft>
             </a:pPr>
             <a:r>
-              <a:rPr sz="1400" b="1">
+              <a:rPr sz="1000" b="1">
+                <a:solidFill>
+                  <a:srgbClr val="B45309"/>
+                </a:solidFill>
+                <a:latin typeface="Inter"/>
+              </a:rPr>
+              <a:t>IN-BROWSER RETRAINING</a:t>
+            </a:r>
+          </a:p>
+        </p:txBody>
+      </p:sp>
+      <p:sp>
+        <p:nvSpPr>
+          <p:cNvPr id="10" name="TextBox 9"/>
+          <p:cNvSpPr txBox="1"/>
+          <p:nvPr/>
+        </p:nvSpPr>
+        <p:spPr>
+          <a:xfrm>
+            <a:off x="768096" y="5248656"/>
+            <a:ext cx="5394959" cy="603504"/>
+          </a:xfrm>
+          <a:prstGeom prst="rect">
+            <a:avLst/>
+          </a:prstGeom>
+          <a:noFill/>
+        </p:spPr>
+        <p:txBody>
+          <a:bodyPr wrap="square" anchor="t" lIns="0" rIns="0" tIns="0" bIns="0">
+            <a:spAutoFit/>
+          </a:bodyPr>
+          <a:lstStyle/>
+          <a:p>
+            <a:pPr algn="l">
+              <a:lnSpc>
+                <a:spcPct val="122000"/>
+              </a:lnSpc>
+              <a:spcAft>
+                <a:spcPts val="0"/>
+              </a:spcAft>
+            </a:pPr>
+            <a:r>
+              <a:rPr sz="1300" b="0">
                 <a:solidFill>
                   <a:srgbClr val="0F172A"/>
                 </a:solidFill>
                 <a:latin typeface="Inter"/>
               </a:rPr>
-              <a:t>Close the Cell Imbalance gap</a:t>
-            </a:r>
-          </a:p>
-        </p:txBody>
-      </p:sp>
-      <p:sp>
-        <p:nvSpPr>
-          <p:cNvPr id="10" name="TextBox 9"/>
-          <p:cNvSpPr txBox="1"/>
-          <p:nvPr/>
-        </p:nvSpPr>
-        <p:spPr>
-          <a:xfrm>
-            <a:off x="4864608" y="1536192"/>
-            <a:ext cx="6440119" cy="603504"/>
-          </a:xfrm>
-          <a:prstGeom prst="rect">
-            <a:avLst/>
-          </a:prstGeom>
-          <a:noFill/>
-        </p:spPr>
-        <p:txBody>
-          <a:bodyPr wrap="square" anchor="t" lIns="0" rIns="0" tIns="0" bIns="0">
-            <a:spAutoFit/>
-          </a:bodyPr>
-          <a:lstStyle/>
-          <a:p>
-            <a:pPr algn="l">
-              <a:lnSpc>
-                <a:spcPct val="126000"/>
-              </a:lnSpc>
-              <a:spcAft>
-                <a:spcPts val="0"/>
-              </a:spcAft>
-            </a:pPr>
-            <a:r>
-              <a:rPr sz="1100" b="0">
-                <a:solidFill>
-                  <a:srgbClr val="475569"/>
-                </a:solidFill>
-                <a:latin typeface="Inter"/>
-              </a:rPr>
-              <a:t>65% recall is the weakest class. More real imbalance events, not more synthetic ones.</a:t>
-            </a:r>
-          </a:p>
-        </p:txBody>
-      </p:sp>
-      <p:sp>
-        <p:nvSpPr>
-          <p:cNvPr id="11" name="Rectangle 10"/>
-          <p:cNvSpPr/>
-          <p:nvPr/>
-        </p:nvSpPr>
-        <p:spPr>
-          <a:xfrm>
-            <a:off x="566928" y="2322576"/>
-            <a:ext cx="11057839" cy="749808"/>
-          </a:xfrm>
-          <a:prstGeom prst="rect">
-            <a:avLst/>
-          </a:prstGeom>
-          <a:solidFill>
-            <a:srgbClr val="F1F5F9"/>
-          </a:solidFill>
-          <a:ln w="9525">
-            <a:solidFill>
-              <a:srgbClr val="CBD5E1"/>
-            </a:solidFill>
-          </a:ln>
-          <a:effectLst/>
-        </p:spPr>
-        <p:style>
-          <a:lnRef idx="1">
-            <a:schemeClr val="accent1"/>
-          </a:lnRef>
-          <a:fillRef idx="3">
-            <a:schemeClr val="accent1"/>
-          </a:fillRef>
-          <a:effectRef idx="2">
-            <a:schemeClr val="accent1"/>
-          </a:effectRef>
-          <a:fontRef idx="minor">
-            <a:schemeClr val="lt1"/>
-          </a:fontRef>
-        </p:style>
-        <p:txBody>
-          <a:bodyPr rtlCol="0" anchor="ctr"/>
-          <a:lstStyle/>
-          <a:p/>
-        </p:txBody>
-      </p:sp>
-      <p:sp>
-        <p:nvSpPr>
-          <p:cNvPr id="12" name="Rectangle 11"/>
-          <p:cNvSpPr/>
-          <p:nvPr/>
-        </p:nvSpPr>
-        <p:spPr>
-          <a:xfrm>
-            <a:off x="566928" y="2322576"/>
-            <a:ext cx="68580" cy="749808"/>
-          </a:xfrm>
-          <a:prstGeom prst="rect">
-            <a:avLst/>
-          </a:prstGeom>
-          <a:solidFill>
-            <a:srgbClr val="B45309"/>
-          </a:solidFill>
-          <a:ln>
-            <a:noFill/>
-          </a:ln>
-          <a:effectLst/>
-        </p:spPr>
-        <p:style>
-          <a:lnRef idx="1">
-            <a:schemeClr val="accent1"/>
-          </a:lnRef>
-          <a:fillRef idx="3">
-            <a:schemeClr val="accent1"/>
-          </a:fillRef>
-          <a:effectRef idx="2">
-            <a:schemeClr val="accent1"/>
-          </a:effectRef>
-          <a:fontRef idx="minor">
-            <a:schemeClr val="lt1"/>
-          </a:fontRef>
-        </p:style>
-        <p:txBody>
-          <a:bodyPr rtlCol="0" anchor="ctr"/>
-          <a:lstStyle/>
-          <a:p/>
-        </p:txBody>
-      </p:sp>
-      <p:sp>
-        <p:nvSpPr>
-          <p:cNvPr id="13" name="TextBox 12"/>
-          <p:cNvSpPr txBox="1"/>
-          <p:nvPr/>
-        </p:nvSpPr>
-        <p:spPr>
-          <a:xfrm>
-            <a:off x="877824" y="2404872"/>
-            <a:ext cx="3794760" cy="310896"/>
-          </a:xfrm>
-          <a:prstGeom prst="rect">
-            <a:avLst/>
-          </a:prstGeom>
-          <a:noFill/>
-        </p:spPr>
-        <p:txBody>
-          <a:bodyPr wrap="square" anchor="t" lIns="0" rIns="0" tIns="0" bIns="0">
-            <a:spAutoFit/>
-          </a:bodyPr>
-          <a:lstStyle/>
-          <a:p>
-            <a:pPr algn="l">
-              <a:lnSpc>
-                <a:spcPct val="118000"/>
-              </a:lnSpc>
-              <a:spcAft>
-                <a:spcPts val="0"/>
-              </a:spcAft>
-            </a:pPr>
-            <a:r>
-              <a:rPr sz="1400" b="1">
-                <a:solidFill>
-                  <a:srgbClr val="0F172A"/>
-                </a:solidFill>
-                <a:latin typeface="Inter"/>
-              </a:rPr>
-              <a:t>Lift OOD recall</a:t>
-            </a:r>
-          </a:p>
-        </p:txBody>
-      </p:sp>
-      <p:sp>
-        <p:nvSpPr>
-          <p:cNvPr id="14" name="TextBox 13"/>
-          <p:cNvSpPr txBox="1"/>
-          <p:nvPr/>
-        </p:nvSpPr>
-        <p:spPr>
-          <a:xfrm>
-            <a:off x="4864608" y="2395728"/>
-            <a:ext cx="6440119" cy="603504"/>
-          </a:xfrm>
-          <a:prstGeom prst="rect">
-            <a:avLst/>
-          </a:prstGeom>
-          <a:noFill/>
-        </p:spPr>
-        <p:txBody>
-          <a:bodyPr wrap="square" anchor="t" lIns="0" rIns="0" tIns="0" bIns="0">
-            <a:spAutoFit/>
-          </a:bodyPr>
-          <a:lstStyle/>
-          <a:p>
-            <a:pPr algn="l">
-              <a:lnSpc>
-                <a:spcPct val="126000"/>
-              </a:lnSpc>
-              <a:spcAft>
-                <a:spcPts val="0"/>
-              </a:spcAft>
-            </a:pPr>
-            <a:r>
-              <a:rPr sz="1100" b="0">
-                <a:solidFill>
-                  <a:srgbClr val="475569"/>
-                </a:solidFill>
-                <a:latin typeface="Inter"/>
-              </a:rPr>
-              <a:t>The gate never cries wolf, but catches one unknown in four. A tighter score threshold trades that off.</a:t>
-            </a:r>
-          </a:p>
-        </p:txBody>
-      </p:sp>
-      <p:sp>
-        <p:nvSpPr>
-          <p:cNvPr id="15" name="Rectangle 14"/>
-          <p:cNvSpPr/>
-          <p:nvPr/>
-        </p:nvSpPr>
-        <p:spPr>
-          <a:xfrm>
-            <a:off x="566928" y="3182112"/>
-            <a:ext cx="11057839" cy="749808"/>
-          </a:xfrm>
-          <a:prstGeom prst="rect">
-            <a:avLst/>
-          </a:prstGeom>
-          <a:solidFill>
-            <a:srgbClr val="F1F5F9"/>
-          </a:solidFill>
-          <a:ln w="9525">
-            <a:solidFill>
-              <a:srgbClr val="CBD5E1"/>
-            </a:solidFill>
-          </a:ln>
-          <a:effectLst/>
-        </p:spPr>
-        <p:style>
-          <a:lnRef idx="1">
-            <a:schemeClr val="accent1"/>
-          </a:lnRef>
-          <a:fillRef idx="3">
-            <a:schemeClr val="accent1"/>
-          </a:fillRef>
-          <a:effectRef idx="2">
-            <a:schemeClr val="accent1"/>
-          </a:effectRef>
-          <a:fontRef idx="minor">
-            <a:schemeClr val="lt1"/>
-          </a:fontRef>
-        </p:style>
-        <p:txBody>
-          <a:bodyPr rtlCol="0" anchor="ctr"/>
-          <a:lstStyle/>
-          <a:p/>
-        </p:txBody>
-      </p:sp>
-      <p:sp>
-        <p:nvSpPr>
-          <p:cNvPr id="16" name="Rectangle 15"/>
-          <p:cNvSpPr/>
-          <p:nvPr/>
-        </p:nvSpPr>
-        <p:spPr>
-          <a:xfrm>
-            <a:off x="566928" y="3182112"/>
-            <a:ext cx="68580" cy="749808"/>
-          </a:xfrm>
-          <a:prstGeom prst="rect">
-            <a:avLst/>
-          </a:prstGeom>
-          <a:solidFill>
-            <a:srgbClr val="0E7490"/>
-          </a:solidFill>
-          <a:ln>
-            <a:noFill/>
-          </a:ln>
-          <a:effectLst/>
-        </p:spPr>
-        <p:style>
-          <a:lnRef idx="1">
-            <a:schemeClr val="accent1"/>
-          </a:lnRef>
-          <a:fillRef idx="3">
-            <a:schemeClr val="accent1"/>
-          </a:fillRef>
-          <a:effectRef idx="2">
-            <a:schemeClr val="accent1"/>
-          </a:effectRef>
-          <a:fontRef idx="minor">
-            <a:schemeClr val="lt1"/>
-          </a:fontRef>
-        </p:style>
-        <p:txBody>
-          <a:bodyPr rtlCol="0" anchor="ctr"/>
-          <a:lstStyle/>
-          <a:p/>
-        </p:txBody>
-      </p:sp>
-      <p:sp>
-        <p:nvSpPr>
-          <p:cNvPr id="17" name="TextBox 16"/>
-          <p:cNvSpPr txBox="1"/>
-          <p:nvPr/>
-        </p:nvSpPr>
-        <p:spPr>
-          <a:xfrm>
-            <a:off x="877824" y="3264408"/>
-            <a:ext cx="3794760" cy="310896"/>
-          </a:xfrm>
-          <a:prstGeom prst="rect">
-            <a:avLst/>
-          </a:prstGeom>
-          <a:noFill/>
-        </p:spPr>
-        <p:txBody>
-          <a:bodyPr wrap="square" anchor="t" lIns="0" rIns="0" tIns="0" bIns="0">
-            <a:spAutoFit/>
-          </a:bodyPr>
-          <a:lstStyle/>
-          <a:p>
-            <a:pPr algn="l">
-              <a:lnSpc>
-                <a:spcPct val="118000"/>
-              </a:lnSpc>
-              <a:spcAft>
-                <a:spcPts val="0"/>
-              </a:spcAft>
-            </a:pPr>
-            <a:r>
-              <a:rPr sz="1400" b="1">
-                <a:solidFill>
-                  <a:srgbClr val="0F172A"/>
-                </a:solidFill>
-                <a:latin typeface="Inter"/>
-              </a:rPr>
-              <a:t>Move inference to the Zynq-7000</a:t>
-            </a:r>
-          </a:p>
-        </p:txBody>
-      </p:sp>
-      <p:sp>
-        <p:nvSpPr>
-          <p:cNvPr id="18" name="TextBox 17"/>
-          <p:cNvSpPr txBox="1"/>
-          <p:nvPr/>
-        </p:nvSpPr>
-        <p:spPr>
-          <a:xfrm>
-            <a:off x="4864608" y="3255264"/>
-            <a:ext cx="6440119" cy="603504"/>
-          </a:xfrm>
-          <a:prstGeom prst="rect">
-            <a:avLst/>
-          </a:prstGeom>
-          <a:noFill/>
-        </p:spPr>
-        <p:txBody>
-          <a:bodyPr wrap="square" anchor="t" lIns="0" rIns="0" tIns="0" bIns="0">
-            <a:spAutoFit/>
-          </a:bodyPr>
-          <a:lstStyle/>
-          <a:p>
-            <a:pPr algn="l">
-              <a:lnSpc>
-                <a:spcPct val="126000"/>
-              </a:lnSpc>
-              <a:spcAft>
-                <a:spcPts val="0"/>
-              </a:spcAft>
-            </a:pPr>
-            <a:r>
-              <a:rPr sz="1100" b="0">
-                <a:solidFill>
-                  <a:srgbClr val="475569"/>
-                </a:solidFill>
-                <a:latin typeface="Inter"/>
-              </a:rPr>
-              <a:t>Tree traversal in programmable logic frees the CPU for the logger and the BLE link.</a:t>
-            </a:r>
-          </a:p>
-        </p:txBody>
-      </p:sp>
-      <p:sp>
-        <p:nvSpPr>
-          <p:cNvPr id="19" name="Rectangle 18"/>
-          <p:cNvSpPr/>
-          <p:nvPr/>
-        </p:nvSpPr>
-        <p:spPr>
-          <a:xfrm>
-            <a:off x="566928" y="4041648"/>
-            <a:ext cx="11057839" cy="749808"/>
-          </a:xfrm>
-          <a:prstGeom prst="rect">
-            <a:avLst/>
-          </a:prstGeom>
-          <a:solidFill>
-            <a:srgbClr val="F1F5F9"/>
-          </a:solidFill>
-          <a:ln w="9525">
-            <a:solidFill>
-              <a:srgbClr val="CBD5E1"/>
-            </a:solidFill>
-          </a:ln>
-          <a:effectLst/>
-        </p:spPr>
-        <p:style>
-          <a:lnRef idx="1">
-            <a:schemeClr val="accent1"/>
-          </a:lnRef>
-          <a:fillRef idx="3">
-            <a:schemeClr val="accent1"/>
-          </a:fillRef>
-          <a:effectRef idx="2">
-            <a:schemeClr val="accent1"/>
-          </a:effectRef>
-          <a:fontRef idx="minor">
-            <a:schemeClr val="lt1"/>
-          </a:fontRef>
-        </p:style>
-        <p:txBody>
-          <a:bodyPr rtlCol="0" anchor="ctr"/>
-          <a:lstStyle/>
-          <a:p/>
-        </p:txBody>
-      </p:sp>
-      <p:sp>
-        <p:nvSpPr>
-          <p:cNvPr id="20" name="Rectangle 19"/>
-          <p:cNvSpPr/>
-          <p:nvPr/>
-        </p:nvSpPr>
-        <p:spPr>
-          <a:xfrm>
-            <a:off x="566928" y="4041648"/>
-            <a:ext cx="68580" cy="749808"/>
-          </a:xfrm>
-          <a:prstGeom prst="rect">
-            <a:avLst/>
-          </a:prstGeom>
-          <a:solidFill>
-            <a:srgbClr val="0E7490"/>
-          </a:solidFill>
-          <a:ln>
-            <a:noFill/>
-          </a:ln>
-          <a:effectLst/>
-        </p:spPr>
-        <p:style>
-          <a:lnRef idx="1">
-            <a:schemeClr val="accent1"/>
-          </a:lnRef>
-          <a:fillRef idx="3">
-            <a:schemeClr val="accent1"/>
-          </a:fillRef>
-          <a:effectRef idx="2">
-            <a:schemeClr val="accent1"/>
-          </a:effectRef>
-          <a:fontRef idx="minor">
-            <a:schemeClr val="lt1"/>
-          </a:fontRef>
-        </p:style>
-        <p:txBody>
-          <a:bodyPr rtlCol="0" anchor="ctr"/>
-          <a:lstStyle/>
-          <a:p/>
-        </p:txBody>
-      </p:sp>
-      <p:sp>
-        <p:nvSpPr>
-          <p:cNvPr id="21" name="TextBox 20"/>
-          <p:cNvSpPr txBox="1"/>
-          <p:nvPr/>
-        </p:nvSpPr>
-        <p:spPr>
-          <a:xfrm>
-            <a:off x="877824" y="4123944"/>
-            <a:ext cx="3794760" cy="310896"/>
-          </a:xfrm>
-          <a:prstGeom prst="rect">
-            <a:avLst/>
-          </a:prstGeom>
-          <a:noFill/>
-        </p:spPr>
-        <p:txBody>
-          <a:bodyPr wrap="square" anchor="t" lIns="0" rIns="0" tIns="0" bIns="0">
-            <a:spAutoFit/>
-          </a:bodyPr>
-          <a:lstStyle/>
-          <a:p>
-            <a:pPr algn="l">
-              <a:lnSpc>
-                <a:spcPct val="118000"/>
-              </a:lnSpc>
-              <a:spcAft>
-                <a:spcPts val="0"/>
-              </a:spcAft>
-            </a:pPr>
-            <a:r>
-              <a:rPr sz="1400" b="1">
-                <a:solidFill>
-                  <a:srgbClr val="0F172A"/>
-                </a:solidFill>
-                <a:latin typeface="Inter"/>
-              </a:rPr>
-              <a:t>Characterise a second chemistry</a:t>
-            </a:r>
-          </a:p>
-        </p:txBody>
-      </p:sp>
-      <p:sp>
-        <p:nvSpPr>
-          <p:cNvPr id="22" name="TextBox 21"/>
-          <p:cNvSpPr txBox="1"/>
-          <p:nvPr/>
-        </p:nvSpPr>
-        <p:spPr>
-          <a:xfrm>
-            <a:off x="4864608" y="4114800"/>
-            <a:ext cx="6440119" cy="603504"/>
-          </a:xfrm>
-          <a:prstGeom prst="rect">
-            <a:avLst/>
-          </a:prstGeom>
-          <a:noFill/>
-        </p:spPr>
-        <p:txBody>
-          <a:bodyPr wrap="square" anchor="t" lIns="0" rIns="0" tIns="0" bIns="0">
-            <a:spAutoFit/>
-          </a:bodyPr>
-          <a:lstStyle/>
-          <a:p>
-            <a:pPr algn="l">
-              <a:lnSpc>
-                <a:spcPct val="126000"/>
-              </a:lnSpc>
-              <a:spcAft>
-                <a:spcPts val="0"/>
-              </a:spcAft>
-            </a:pPr>
-            <a:r>
-              <a:rPr sz="1100" b="0">
-                <a:solidFill>
-                  <a:srgbClr val="475569"/>
-                </a:solidFill>
-                <a:latin typeface="Inter"/>
-              </a:rPr>
-              <a:t>LFP is remapped from its datasheet; it has not been driven on a bench the way NMC has.</a:t>
-            </a:r>
-          </a:p>
-        </p:txBody>
-      </p:sp>
-      <p:sp>
-        <p:nvSpPr>
-          <p:cNvPr id="23" name="Rectangle 22"/>
-          <p:cNvSpPr/>
-          <p:nvPr/>
-        </p:nvSpPr>
-        <p:spPr>
-          <a:xfrm>
-            <a:off x="566928" y="4901183"/>
-            <a:ext cx="11057839" cy="749808"/>
-          </a:xfrm>
-          <a:prstGeom prst="rect">
-            <a:avLst/>
-          </a:prstGeom>
-          <a:solidFill>
-            <a:srgbClr val="F1F5F9"/>
-          </a:solidFill>
-          <a:ln w="9525">
-            <a:solidFill>
-              <a:srgbClr val="CBD5E1"/>
-            </a:solidFill>
-          </a:ln>
-          <a:effectLst/>
-        </p:spPr>
-        <p:style>
-          <a:lnRef idx="1">
-            <a:schemeClr val="accent1"/>
-          </a:lnRef>
-          <a:fillRef idx="3">
-            <a:schemeClr val="accent1"/>
-          </a:fillRef>
-          <a:effectRef idx="2">
-            <a:schemeClr val="accent1"/>
-          </a:effectRef>
-          <a:fontRef idx="minor">
-            <a:schemeClr val="lt1"/>
-          </a:fontRef>
-        </p:style>
-        <p:txBody>
-          <a:bodyPr rtlCol="0" anchor="ctr"/>
-          <a:lstStyle/>
-          <a:p/>
-        </p:txBody>
-      </p:sp>
-      <p:sp>
-        <p:nvSpPr>
-          <p:cNvPr id="24" name="Rectangle 23"/>
-          <p:cNvSpPr/>
-          <p:nvPr/>
-        </p:nvSpPr>
-        <p:spPr>
-          <a:xfrm>
-            <a:off x="566928" y="4901183"/>
-            <a:ext cx="68580" cy="749808"/>
-          </a:xfrm>
-          <a:prstGeom prst="rect">
-            <a:avLst/>
-          </a:prstGeom>
-          <a:solidFill>
-            <a:srgbClr val="0E7490"/>
-          </a:solidFill>
-          <a:ln>
-            <a:noFill/>
-          </a:ln>
-          <a:effectLst/>
-        </p:spPr>
-        <p:style>
-          <a:lnRef idx="1">
-            <a:schemeClr val="accent1"/>
-          </a:lnRef>
-          <a:fillRef idx="3">
-            <a:schemeClr val="accent1"/>
-          </a:fillRef>
-          <a:effectRef idx="2">
-            <a:schemeClr val="accent1"/>
-          </a:effectRef>
-          <a:fontRef idx="minor">
-            <a:schemeClr val="lt1"/>
-          </a:fontRef>
-        </p:style>
-        <p:txBody>
-          <a:bodyPr rtlCol="0" anchor="ctr"/>
-          <a:lstStyle/>
-          <a:p/>
-        </p:txBody>
-      </p:sp>
-      <p:sp>
-        <p:nvSpPr>
-          <p:cNvPr id="25" name="TextBox 24"/>
-          <p:cNvSpPr txBox="1"/>
-          <p:nvPr/>
-        </p:nvSpPr>
-        <p:spPr>
-          <a:xfrm>
-            <a:off x="877824" y="4983479"/>
-            <a:ext cx="3794760" cy="310896"/>
-          </a:xfrm>
-          <a:prstGeom prst="rect">
-            <a:avLst/>
-          </a:prstGeom>
-          <a:noFill/>
-        </p:spPr>
-        <p:txBody>
-          <a:bodyPr wrap="square" anchor="t" lIns="0" rIns="0" tIns="0" bIns="0">
-            <a:spAutoFit/>
-          </a:bodyPr>
-          <a:lstStyle/>
-          <a:p>
-            <a:pPr algn="l">
-              <a:lnSpc>
-                <a:spcPct val="118000"/>
-              </a:lnSpc>
-              <a:spcAft>
-                <a:spcPts val="0"/>
-              </a:spcAft>
-            </a:pPr>
-            <a:r>
-              <a:rPr sz="1400" b="1">
-                <a:solidFill>
-                  <a:srgbClr val="0F172A"/>
-                </a:solidFill>
-                <a:latin typeface="Inter"/>
-              </a:rPr>
-              <a:t>SOH and remaining useful life</a:t>
-            </a:r>
-          </a:p>
-        </p:txBody>
-      </p:sp>
-      <p:sp>
-        <p:nvSpPr>
-          <p:cNvPr id="26" name="TextBox 25"/>
-          <p:cNvSpPr txBox="1"/>
-          <p:nvPr/>
-        </p:nvSpPr>
-        <p:spPr>
-          <a:xfrm>
-            <a:off x="4864608" y="4974336"/>
-            <a:ext cx="6440119" cy="603504"/>
-          </a:xfrm>
-          <a:prstGeom prst="rect">
-            <a:avLst/>
-          </a:prstGeom>
-          <a:noFill/>
-        </p:spPr>
-        <p:txBody>
-          <a:bodyPr wrap="square" anchor="t" lIns="0" rIns="0" tIns="0" bIns="0">
-            <a:spAutoFit/>
-          </a:bodyPr>
-          <a:lstStyle/>
-          <a:p>
-            <a:pPr algn="l">
-              <a:lnSpc>
-                <a:spcPct val="126000"/>
-              </a:lnSpc>
-              <a:spcAft>
-                <a:spcPts val="0"/>
-              </a:spcAft>
-            </a:pPr>
-            <a:r>
-              <a:rPr sz="1100" b="0">
-                <a:solidFill>
-                  <a:srgbClr val="475569"/>
-                </a:solidFill>
-                <a:latin typeface="Inter"/>
-              </a:rPr>
-              <a:t>dV/dt during CC-CV charging is the signal; the 39-cycle history is the starting corpus.</a:t>
-            </a:r>
-          </a:p>
-        </p:txBody>
-      </p:sp>
-      <p:sp>
-        <p:nvSpPr>
-          <p:cNvPr id="27" name="TextBox 26"/>
-          <p:cNvSpPr txBox="1"/>
-          <p:nvPr/>
-        </p:nvSpPr>
-        <p:spPr>
-          <a:xfrm>
-            <a:off x="566928" y="5815583"/>
-            <a:ext cx="11057839" cy="310896"/>
-          </a:xfrm>
-          <a:prstGeom prst="rect">
-            <a:avLst/>
-          </a:prstGeom>
-          <a:noFill/>
-        </p:spPr>
-        <p:txBody>
-          <a:bodyPr wrap="square" anchor="t" lIns="0" rIns="0" tIns="0" bIns="0">
-            <a:spAutoFit/>
-          </a:bodyPr>
-          <a:lstStyle/>
-          <a:p>
-            <a:pPr algn="ctr">
-              <a:lnSpc>
-                <a:spcPct val="118000"/>
-              </a:lnSpc>
-              <a:spcAft>
-                <a:spcPts val="0"/>
-              </a:spcAft>
-            </a:pPr>
-            <a:r>
-              <a:rPr sz="1200" b="1">
-                <a:solidFill>
-                  <a:srgbClr val="0E7490"/>
-                </a:solidFill>
-                <a:latin typeface="Inter"/>
-              </a:rPr>
-              <a:t>Everything shown today is reproducible from this repository — figures, model and deck all rebuild from source.</a:t>
-            </a:r>
-          </a:p>
-        </p:txBody>
-      </p:sp>
+              <a:t>Upload field telemetry from the new pack and retrain XGBoost from the dashboard — the adaptation loop closes without a developer.</a:t>
+            </a:r>
+          </a:p>
+        </p:txBody>
+      </p:sp>
+      <p:pic>
+        <p:nvPicPr>
+          <p:cNvPr id="11" name="Picture 10" descr="diag_configurator.png"/>
+          <p:cNvPicPr>
+            <a:picLocks noChangeAspect="1"/>
+          </p:cNvPicPr>
+          <p:nvPr/>
+        </p:nvPicPr>
+        <p:blipFill>
+          <a:blip r:embed="rId2"/>
+          <a:stretch>
+            <a:fillRect/>
+          </a:stretch>
+        </p:blipFill>
+        <p:spPr>
+          <a:xfrm>
+            <a:off x="6693408" y="2052450"/>
+            <a:ext cx="2212848" cy="2935978"/>
+          </a:xfrm>
+          <a:prstGeom prst="rect">
+            <a:avLst/>
+          </a:prstGeom>
+        </p:spPr>
+      </p:pic>
+      <p:pic>
+        <p:nvPicPr>
+          <p:cNvPr id="12" name="Picture 11" descr="diag_chemistry_tiering.png"/>
+          <p:cNvPicPr>
+            <a:picLocks noChangeAspect="1"/>
+          </p:cNvPicPr>
+          <p:nvPr/>
+        </p:nvPicPr>
+        <p:blipFill>
+          <a:blip r:embed="rId3"/>
+          <a:stretch>
+            <a:fillRect/>
+          </a:stretch>
+        </p:blipFill>
+        <p:spPr>
+          <a:xfrm>
+            <a:off x="9089136" y="1489041"/>
+            <a:ext cx="2535631" cy="4062796"/>
+          </a:xfrm>
+          <a:prstGeom prst="rect">
+            <a:avLst/>
+          </a:prstGeom>
+        </p:spPr>
+      </p:pic>
     </p:spTree>
   </p:cSld>
   <p:clrMapOvr>
@@ -15793,7 +15571,7 @@
                 </a:solidFill>
                 <a:latin typeface="Inter"/>
               </a:rPr>
-              <a:t>References</a:t>
+              <a:t>What we would build next</a:t>
             </a:r>
           </a:p>
         </p:txBody>
@@ -15962,6 +15740,1134 @@
                 <a:latin typeface="Inter"/>
               </a:rPr>
               <a:t>21</a:t>
+            </a:r>
+          </a:p>
+        </p:txBody>
+      </p:sp>
+      <p:sp>
+        <p:nvSpPr>
+          <p:cNvPr id="7" name="Rectangle 6"/>
+          <p:cNvSpPr/>
+          <p:nvPr/>
+        </p:nvSpPr>
+        <p:spPr>
+          <a:xfrm>
+            <a:off x="566928" y="1463040"/>
+            <a:ext cx="11057839" cy="749808"/>
+          </a:xfrm>
+          <a:prstGeom prst="rect">
+            <a:avLst/>
+          </a:prstGeom>
+          <a:solidFill>
+            <a:srgbClr val="F1F5F9"/>
+          </a:solidFill>
+          <a:ln w="9525">
+            <a:solidFill>
+              <a:srgbClr val="CBD5E1"/>
+            </a:solidFill>
+          </a:ln>
+          <a:effectLst/>
+        </p:spPr>
+        <p:style>
+          <a:lnRef idx="1">
+            <a:schemeClr val="accent1"/>
+          </a:lnRef>
+          <a:fillRef idx="3">
+            <a:schemeClr val="accent1"/>
+          </a:fillRef>
+          <a:effectRef idx="2">
+            <a:schemeClr val="accent1"/>
+          </a:effectRef>
+          <a:fontRef idx="minor">
+            <a:schemeClr val="lt1"/>
+          </a:fontRef>
+        </p:style>
+        <p:txBody>
+          <a:bodyPr rtlCol="0" anchor="ctr"/>
+          <a:lstStyle/>
+          <a:p/>
+        </p:txBody>
+      </p:sp>
+      <p:sp>
+        <p:nvSpPr>
+          <p:cNvPr id="8" name="Rectangle 7"/>
+          <p:cNvSpPr/>
+          <p:nvPr/>
+        </p:nvSpPr>
+        <p:spPr>
+          <a:xfrm>
+            <a:off x="566928" y="1463040"/>
+            <a:ext cx="68580" cy="749808"/>
+          </a:xfrm>
+          <a:prstGeom prst="rect">
+            <a:avLst/>
+          </a:prstGeom>
+          <a:solidFill>
+            <a:srgbClr val="B91C1C"/>
+          </a:solidFill>
+          <a:ln>
+            <a:noFill/>
+          </a:ln>
+          <a:effectLst/>
+        </p:spPr>
+        <p:style>
+          <a:lnRef idx="1">
+            <a:schemeClr val="accent1"/>
+          </a:lnRef>
+          <a:fillRef idx="3">
+            <a:schemeClr val="accent1"/>
+          </a:fillRef>
+          <a:effectRef idx="2">
+            <a:schemeClr val="accent1"/>
+          </a:effectRef>
+          <a:fontRef idx="minor">
+            <a:schemeClr val="lt1"/>
+          </a:fontRef>
+        </p:style>
+        <p:txBody>
+          <a:bodyPr rtlCol="0" anchor="ctr"/>
+          <a:lstStyle/>
+          <a:p/>
+        </p:txBody>
+      </p:sp>
+      <p:sp>
+        <p:nvSpPr>
+          <p:cNvPr id="9" name="TextBox 8"/>
+          <p:cNvSpPr txBox="1"/>
+          <p:nvPr/>
+        </p:nvSpPr>
+        <p:spPr>
+          <a:xfrm>
+            <a:off x="877824" y="1545336"/>
+            <a:ext cx="3794760" cy="310896"/>
+          </a:xfrm>
+          <a:prstGeom prst="rect">
+            <a:avLst/>
+          </a:prstGeom>
+          <a:noFill/>
+        </p:spPr>
+        <p:txBody>
+          <a:bodyPr wrap="square" anchor="t" lIns="0" rIns="0" tIns="0" bIns="0">
+            <a:spAutoFit/>
+          </a:bodyPr>
+          <a:lstStyle/>
+          <a:p>
+            <a:pPr algn="l">
+              <a:lnSpc>
+                <a:spcPct val="118000"/>
+              </a:lnSpc>
+              <a:spcAft>
+                <a:spcPts val="0"/>
+              </a:spcAft>
+            </a:pPr>
+            <a:r>
+              <a:rPr sz="1400" b="1">
+                <a:solidFill>
+                  <a:srgbClr val="0F172A"/>
+                </a:solidFill>
+                <a:latin typeface="Inter"/>
+              </a:rPr>
+              <a:t>Close the Cell Imbalance gap</a:t>
+            </a:r>
+          </a:p>
+        </p:txBody>
+      </p:sp>
+      <p:sp>
+        <p:nvSpPr>
+          <p:cNvPr id="10" name="TextBox 9"/>
+          <p:cNvSpPr txBox="1"/>
+          <p:nvPr/>
+        </p:nvSpPr>
+        <p:spPr>
+          <a:xfrm>
+            <a:off x="4864608" y="1536192"/>
+            <a:ext cx="6440119" cy="603504"/>
+          </a:xfrm>
+          <a:prstGeom prst="rect">
+            <a:avLst/>
+          </a:prstGeom>
+          <a:noFill/>
+        </p:spPr>
+        <p:txBody>
+          <a:bodyPr wrap="square" anchor="t" lIns="0" rIns="0" tIns="0" bIns="0">
+            <a:spAutoFit/>
+          </a:bodyPr>
+          <a:lstStyle/>
+          <a:p>
+            <a:pPr algn="l">
+              <a:lnSpc>
+                <a:spcPct val="126000"/>
+              </a:lnSpc>
+              <a:spcAft>
+                <a:spcPts val="0"/>
+              </a:spcAft>
+            </a:pPr>
+            <a:r>
+              <a:rPr sz="1100" b="0">
+                <a:solidFill>
+                  <a:srgbClr val="475569"/>
+                </a:solidFill>
+                <a:latin typeface="Inter"/>
+              </a:rPr>
+              <a:t>65% recall is the weakest class. More real imbalance events, not more synthetic ones.</a:t>
+            </a:r>
+          </a:p>
+        </p:txBody>
+      </p:sp>
+      <p:sp>
+        <p:nvSpPr>
+          <p:cNvPr id="11" name="Rectangle 10"/>
+          <p:cNvSpPr/>
+          <p:nvPr/>
+        </p:nvSpPr>
+        <p:spPr>
+          <a:xfrm>
+            <a:off x="566928" y="2322576"/>
+            <a:ext cx="11057839" cy="749808"/>
+          </a:xfrm>
+          <a:prstGeom prst="rect">
+            <a:avLst/>
+          </a:prstGeom>
+          <a:solidFill>
+            <a:srgbClr val="F1F5F9"/>
+          </a:solidFill>
+          <a:ln w="9525">
+            <a:solidFill>
+              <a:srgbClr val="CBD5E1"/>
+            </a:solidFill>
+          </a:ln>
+          <a:effectLst/>
+        </p:spPr>
+        <p:style>
+          <a:lnRef idx="1">
+            <a:schemeClr val="accent1"/>
+          </a:lnRef>
+          <a:fillRef idx="3">
+            <a:schemeClr val="accent1"/>
+          </a:fillRef>
+          <a:effectRef idx="2">
+            <a:schemeClr val="accent1"/>
+          </a:effectRef>
+          <a:fontRef idx="minor">
+            <a:schemeClr val="lt1"/>
+          </a:fontRef>
+        </p:style>
+        <p:txBody>
+          <a:bodyPr rtlCol="0" anchor="ctr"/>
+          <a:lstStyle/>
+          <a:p/>
+        </p:txBody>
+      </p:sp>
+      <p:sp>
+        <p:nvSpPr>
+          <p:cNvPr id="12" name="Rectangle 11"/>
+          <p:cNvSpPr/>
+          <p:nvPr/>
+        </p:nvSpPr>
+        <p:spPr>
+          <a:xfrm>
+            <a:off x="566928" y="2322576"/>
+            <a:ext cx="68580" cy="749808"/>
+          </a:xfrm>
+          <a:prstGeom prst="rect">
+            <a:avLst/>
+          </a:prstGeom>
+          <a:solidFill>
+            <a:srgbClr val="B45309"/>
+          </a:solidFill>
+          <a:ln>
+            <a:noFill/>
+          </a:ln>
+          <a:effectLst/>
+        </p:spPr>
+        <p:style>
+          <a:lnRef idx="1">
+            <a:schemeClr val="accent1"/>
+          </a:lnRef>
+          <a:fillRef idx="3">
+            <a:schemeClr val="accent1"/>
+          </a:fillRef>
+          <a:effectRef idx="2">
+            <a:schemeClr val="accent1"/>
+          </a:effectRef>
+          <a:fontRef idx="minor">
+            <a:schemeClr val="lt1"/>
+          </a:fontRef>
+        </p:style>
+        <p:txBody>
+          <a:bodyPr rtlCol="0" anchor="ctr"/>
+          <a:lstStyle/>
+          <a:p/>
+        </p:txBody>
+      </p:sp>
+      <p:sp>
+        <p:nvSpPr>
+          <p:cNvPr id="13" name="TextBox 12"/>
+          <p:cNvSpPr txBox="1"/>
+          <p:nvPr/>
+        </p:nvSpPr>
+        <p:spPr>
+          <a:xfrm>
+            <a:off x="877824" y="2404872"/>
+            <a:ext cx="3794760" cy="310896"/>
+          </a:xfrm>
+          <a:prstGeom prst="rect">
+            <a:avLst/>
+          </a:prstGeom>
+          <a:noFill/>
+        </p:spPr>
+        <p:txBody>
+          <a:bodyPr wrap="square" anchor="t" lIns="0" rIns="0" tIns="0" bIns="0">
+            <a:spAutoFit/>
+          </a:bodyPr>
+          <a:lstStyle/>
+          <a:p>
+            <a:pPr algn="l">
+              <a:lnSpc>
+                <a:spcPct val="118000"/>
+              </a:lnSpc>
+              <a:spcAft>
+                <a:spcPts val="0"/>
+              </a:spcAft>
+            </a:pPr>
+            <a:r>
+              <a:rPr sz="1400" b="1">
+                <a:solidFill>
+                  <a:srgbClr val="0F172A"/>
+                </a:solidFill>
+                <a:latin typeface="Inter"/>
+              </a:rPr>
+              <a:t>Lift OOD recall</a:t>
+            </a:r>
+          </a:p>
+        </p:txBody>
+      </p:sp>
+      <p:sp>
+        <p:nvSpPr>
+          <p:cNvPr id="14" name="TextBox 13"/>
+          <p:cNvSpPr txBox="1"/>
+          <p:nvPr/>
+        </p:nvSpPr>
+        <p:spPr>
+          <a:xfrm>
+            <a:off x="4864608" y="2395728"/>
+            <a:ext cx="6440119" cy="603504"/>
+          </a:xfrm>
+          <a:prstGeom prst="rect">
+            <a:avLst/>
+          </a:prstGeom>
+          <a:noFill/>
+        </p:spPr>
+        <p:txBody>
+          <a:bodyPr wrap="square" anchor="t" lIns="0" rIns="0" tIns="0" bIns="0">
+            <a:spAutoFit/>
+          </a:bodyPr>
+          <a:lstStyle/>
+          <a:p>
+            <a:pPr algn="l">
+              <a:lnSpc>
+                <a:spcPct val="126000"/>
+              </a:lnSpc>
+              <a:spcAft>
+                <a:spcPts val="0"/>
+              </a:spcAft>
+            </a:pPr>
+            <a:r>
+              <a:rPr sz="1100" b="0">
+                <a:solidFill>
+                  <a:srgbClr val="475569"/>
+                </a:solidFill>
+                <a:latin typeface="Inter"/>
+              </a:rPr>
+              <a:t>The gate never cries wolf, but catches one unknown in four. A tighter score threshold trades that off.</a:t>
+            </a:r>
+          </a:p>
+        </p:txBody>
+      </p:sp>
+      <p:sp>
+        <p:nvSpPr>
+          <p:cNvPr id="15" name="Rectangle 14"/>
+          <p:cNvSpPr/>
+          <p:nvPr/>
+        </p:nvSpPr>
+        <p:spPr>
+          <a:xfrm>
+            <a:off x="566928" y="3182112"/>
+            <a:ext cx="11057839" cy="749808"/>
+          </a:xfrm>
+          <a:prstGeom prst="rect">
+            <a:avLst/>
+          </a:prstGeom>
+          <a:solidFill>
+            <a:srgbClr val="F1F5F9"/>
+          </a:solidFill>
+          <a:ln w="9525">
+            <a:solidFill>
+              <a:srgbClr val="CBD5E1"/>
+            </a:solidFill>
+          </a:ln>
+          <a:effectLst/>
+        </p:spPr>
+        <p:style>
+          <a:lnRef idx="1">
+            <a:schemeClr val="accent1"/>
+          </a:lnRef>
+          <a:fillRef idx="3">
+            <a:schemeClr val="accent1"/>
+          </a:fillRef>
+          <a:effectRef idx="2">
+            <a:schemeClr val="accent1"/>
+          </a:effectRef>
+          <a:fontRef idx="minor">
+            <a:schemeClr val="lt1"/>
+          </a:fontRef>
+        </p:style>
+        <p:txBody>
+          <a:bodyPr rtlCol="0" anchor="ctr"/>
+          <a:lstStyle/>
+          <a:p/>
+        </p:txBody>
+      </p:sp>
+      <p:sp>
+        <p:nvSpPr>
+          <p:cNvPr id="16" name="Rectangle 15"/>
+          <p:cNvSpPr/>
+          <p:nvPr/>
+        </p:nvSpPr>
+        <p:spPr>
+          <a:xfrm>
+            <a:off x="566928" y="3182112"/>
+            <a:ext cx="68580" cy="749808"/>
+          </a:xfrm>
+          <a:prstGeom prst="rect">
+            <a:avLst/>
+          </a:prstGeom>
+          <a:solidFill>
+            <a:srgbClr val="0E7490"/>
+          </a:solidFill>
+          <a:ln>
+            <a:noFill/>
+          </a:ln>
+          <a:effectLst/>
+        </p:spPr>
+        <p:style>
+          <a:lnRef idx="1">
+            <a:schemeClr val="accent1"/>
+          </a:lnRef>
+          <a:fillRef idx="3">
+            <a:schemeClr val="accent1"/>
+          </a:fillRef>
+          <a:effectRef idx="2">
+            <a:schemeClr val="accent1"/>
+          </a:effectRef>
+          <a:fontRef idx="minor">
+            <a:schemeClr val="lt1"/>
+          </a:fontRef>
+        </p:style>
+        <p:txBody>
+          <a:bodyPr rtlCol="0" anchor="ctr"/>
+          <a:lstStyle/>
+          <a:p/>
+        </p:txBody>
+      </p:sp>
+      <p:sp>
+        <p:nvSpPr>
+          <p:cNvPr id="17" name="TextBox 16"/>
+          <p:cNvSpPr txBox="1"/>
+          <p:nvPr/>
+        </p:nvSpPr>
+        <p:spPr>
+          <a:xfrm>
+            <a:off x="877824" y="3264408"/>
+            <a:ext cx="3794760" cy="310896"/>
+          </a:xfrm>
+          <a:prstGeom prst="rect">
+            <a:avLst/>
+          </a:prstGeom>
+          <a:noFill/>
+        </p:spPr>
+        <p:txBody>
+          <a:bodyPr wrap="square" anchor="t" lIns="0" rIns="0" tIns="0" bIns="0">
+            <a:spAutoFit/>
+          </a:bodyPr>
+          <a:lstStyle/>
+          <a:p>
+            <a:pPr algn="l">
+              <a:lnSpc>
+                <a:spcPct val="118000"/>
+              </a:lnSpc>
+              <a:spcAft>
+                <a:spcPts val="0"/>
+              </a:spcAft>
+            </a:pPr>
+            <a:r>
+              <a:rPr sz="1400" b="1">
+                <a:solidFill>
+                  <a:srgbClr val="0F172A"/>
+                </a:solidFill>
+                <a:latin typeface="Inter"/>
+              </a:rPr>
+              <a:t>Move inference to the Zynq-7000</a:t>
+            </a:r>
+          </a:p>
+        </p:txBody>
+      </p:sp>
+      <p:sp>
+        <p:nvSpPr>
+          <p:cNvPr id="18" name="TextBox 17"/>
+          <p:cNvSpPr txBox="1"/>
+          <p:nvPr/>
+        </p:nvSpPr>
+        <p:spPr>
+          <a:xfrm>
+            <a:off x="4864608" y="3255264"/>
+            <a:ext cx="6440119" cy="603504"/>
+          </a:xfrm>
+          <a:prstGeom prst="rect">
+            <a:avLst/>
+          </a:prstGeom>
+          <a:noFill/>
+        </p:spPr>
+        <p:txBody>
+          <a:bodyPr wrap="square" anchor="t" lIns="0" rIns="0" tIns="0" bIns="0">
+            <a:spAutoFit/>
+          </a:bodyPr>
+          <a:lstStyle/>
+          <a:p>
+            <a:pPr algn="l">
+              <a:lnSpc>
+                <a:spcPct val="126000"/>
+              </a:lnSpc>
+              <a:spcAft>
+                <a:spcPts val="0"/>
+              </a:spcAft>
+            </a:pPr>
+            <a:r>
+              <a:rPr sz="1100" b="0">
+                <a:solidFill>
+                  <a:srgbClr val="475569"/>
+                </a:solidFill>
+                <a:latin typeface="Inter"/>
+              </a:rPr>
+              <a:t>Tree traversal in programmable logic frees the CPU for the logger and the BLE link.</a:t>
+            </a:r>
+          </a:p>
+        </p:txBody>
+      </p:sp>
+      <p:sp>
+        <p:nvSpPr>
+          <p:cNvPr id="19" name="Rectangle 18"/>
+          <p:cNvSpPr/>
+          <p:nvPr/>
+        </p:nvSpPr>
+        <p:spPr>
+          <a:xfrm>
+            <a:off x="566928" y="4041648"/>
+            <a:ext cx="11057839" cy="749808"/>
+          </a:xfrm>
+          <a:prstGeom prst="rect">
+            <a:avLst/>
+          </a:prstGeom>
+          <a:solidFill>
+            <a:srgbClr val="F1F5F9"/>
+          </a:solidFill>
+          <a:ln w="9525">
+            <a:solidFill>
+              <a:srgbClr val="CBD5E1"/>
+            </a:solidFill>
+          </a:ln>
+          <a:effectLst/>
+        </p:spPr>
+        <p:style>
+          <a:lnRef idx="1">
+            <a:schemeClr val="accent1"/>
+          </a:lnRef>
+          <a:fillRef idx="3">
+            <a:schemeClr val="accent1"/>
+          </a:fillRef>
+          <a:effectRef idx="2">
+            <a:schemeClr val="accent1"/>
+          </a:effectRef>
+          <a:fontRef idx="minor">
+            <a:schemeClr val="lt1"/>
+          </a:fontRef>
+        </p:style>
+        <p:txBody>
+          <a:bodyPr rtlCol="0" anchor="ctr"/>
+          <a:lstStyle/>
+          <a:p/>
+        </p:txBody>
+      </p:sp>
+      <p:sp>
+        <p:nvSpPr>
+          <p:cNvPr id="20" name="Rectangle 19"/>
+          <p:cNvSpPr/>
+          <p:nvPr/>
+        </p:nvSpPr>
+        <p:spPr>
+          <a:xfrm>
+            <a:off x="566928" y="4041648"/>
+            <a:ext cx="68580" cy="749808"/>
+          </a:xfrm>
+          <a:prstGeom prst="rect">
+            <a:avLst/>
+          </a:prstGeom>
+          <a:solidFill>
+            <a:srgbClr val="0E7490"/>
+          </a:solidFill>
+          <a:ln>
+            <a:noFill/>
+          </a:ln>
+          <a:effectLst/>
+        </p:spPr>
+        <p:style>
+          <a:lnRef idx="1">
+            <a:schemeClr val="accent1"/>
+          </a:lnRef>
+          <a:fillRef idx="3">
+            <a:schemeClr val="accent1"/>
+          </a:fillRef>
+          <a:effectRef idx="2">
+            <a:schemeClr val="accent1"/>
+          </a:effectRef>
+          <a:fontRef idx="minor">
+            <a:schemeClr val="lt1"/>
+          </a:fontRef>
+        </p:style>
+        <p:txBody>
+          <a:bodyPr rtlCol="0" anchor="ctr"/>
+          <a:lstStyle/>
+          <a:p/>
+        </p:txBody>
+      </p:sp>
+      <p:sp>
+        <p:nvSpPr>
+          <p:cNvPr id="21" name="TextBox 20"/>
+          <p:cNvSpPr txBox="1"/>
+          <p:nvPr/>
+        </p:nvSpPr>
+        <p:spPr>
+          <a:xfrm>
+            <a:off x="877824" y="4123944"/>
+            <a:ext cx="3794760" cy="310896"/>
+          </a:xfrm>
+          <a:prstGeom prst="rect">
+            <a:avLst/>
+          </a:prstGeom>
+          <a:noFill/>
+        </p:spPr>
+        <p:txBody>
+          <a:bodyPr wrap="square" anchor="t" lIns="0" rIns="0" tIns="0" bIns="0">
+            <a:spAutoFit/>
+          </a:bodyPr>
+          <a:lstStyle/>
+          <a:p>
+            <a:pPr algn="l">
+              <a:lnSpc>
+                <a:spcPct val="118000"/>
+              </a:lnSpc>
+              <a:spcAft>
+                <a:spcPts val="0"/>
+              </a:spcAft>
+            </a:pPr>
+            <a:r>
+              <a:rPr sz="1400" b="1">
+                <a:solidFill>
+                  <a:srgbClr val="0F172A"/>
+                </a:solidFill>
+                <a:latin typeface="Inter"/>
+              </a:rPr>
+              <a:t>Characterise a second chemistry</a:t>
+            </a:r>
+          </a:p>
+        </p:txBody>
+      </p:sp>
+      <p:sp>
+        <p:nvSpPr>
+          <p:cNvPr id="22" name="TextBox 21"/>
+          <p:cNvSpPr txBox="1"/>
+          <p:nvPr/>
+        </p:nvSpPr>
+        <p:spPr>
+          <a:xfrm>
+            <a:off x="4864608" y="4114800"/>
+            <a:ext cx="6440119" cy="603504"/>
+          </a:xfrm>
+          <a:prstGeom prst="rect">
+            <a:avLst/>
+          </a:prstGeom>
+          <a:noFill/>
+        </p:spPr>
+        <p:txBody>
+          <a:bodyPr wrap="square" anchor="t" lIns="0" rIns="0" tIns="0" bIns="0">
+            <a:spAutoFit/>
+          </a:bodyPr>
+          <a:lstStyle/>
+          <a:p>
+            <a:pPr algn="l">
+              <a:lnSpc>
+                <a:spcPct val="126000"/>
+              </a:lnSpc>
+              <a:spcAft>
+                <a:spcPts val="0"/>
+              </a:spcAft>
+            </a:pPr>
+            <a:r>
+              <a:rPr sz="1100" b="0">
+                <a:solidFill>
+                  <a:srgbClr val="475569"/>
+                </a:solidFill>
+                <a:latin typeface="Inter"/>
+              </a:rPr>
+              <a:t>LFP is remapped from its datasheet; it has not been driven on a bench the way NMC has.</a:t>
+            </a:r>
+          </a:p>
+        </p:txBody>
+      </p:sp>
+      <p:sp>
+        <p:nvSpPr>
+          <p:cNvPr id="23" name="Rectangle 22"/>
+          <p:cNvSpPr/>
+          <p:nvPr/>
+        </p:nvSpPr>
+        <p:spPr>
+          <a:xfrm>
+            <a:off x="566928" y="4901183"/>
+            <a:ext cx="11057839" cy="749808"/>
+          </a:xfrm>
+          <a:prstGeom prst="rect">
+            <a:avLst/>
+          </a:prstGeom>
+          <a:solidFill>
+            <a:srgbClr val="F1F5F9"/>
+          </a:solidFill>
+          <a:ln w="9525">
+            <a:solidFill>
+              <a:srgbClr val="CBD5E1"/>
+            </a:solidFill>
+          </a:ln>
+          <a:effectLst/>
+        </p:spPr>
+        <p:style>
+          <a:lnRef idx="1">
+            <a:schemeClr val="accent1"/>
+          </a:lnRef>
+          <a:fillRef idx="3">
+            <a:schemeClr val="accent1"/>
+          </a:fillRef>
+          <a:effectRef idx="2">
+            <a:schemeClr val="accent1"/>
+          </a:effectRef>
+          <a:fontRef idx="minor">
+            <a:schemeClr val="lt1"/>
+          </a:fontRef>
+        </p:style>
+        <p:txBody>
+          <a:bodyPr rtlCol="0" anchor="ctr"/>
+          <a:lstStyle/>
+          <a:p/>
+        </p:txBody>
+      </p:sp>
+      <p:sp>
+        <p:nvSpPr>
+          <p:cNvPr id="24" name="Rectangle 23"/>
+          <p:cNvSpPr/>
+          <p:nvPr/>
+        </p:nvSpPr>
+        <p:spPr>
+          <a:xfrm>
+            <a:off x="566928" y="4901183"/>
+            <a:ext cx="68580" cy="749808"/>
+          </a:xfrm>
+          <a:prstGeom prst="rect">
+            <a:avLst/>
+          </a:prstGeom>
+          <a:solidFill>
+            <a:srgbClr val="0E7490"/>
+          </a:solidFill>
+          <a:ln>
+            <a:noFill/>
+          </a:ln>
+          <a:effectLst/>
+        </p:spPr>
+        <p:style>
+          <a:lnRef idx="1">
+            <a:schemeClr val="accent1"/>
+          </a:lnRef>
+          <a:fillRef idx="3">
+            <a:schemeClr val="accent1"/>
+          </a:fillRef>
+          <a:effectRef idx="2">
+            <a:schemeClr val="accent1"/>
+          </a:effectRef>
+          <a:fontRef idx="minor">
+            <a:schemeClr val="lt1"/>
+          </a:fontRef>
+        </p:style>
+        <p:txBody>
+          <a:bodyPr rtlCol="0" anchor="ctr"/>
+          <a:lstStyle/>
+          <a:p/>
+        </p:txBody>
+      </p:sp>
+      <p:sp>
+        <p:nvSpPr>
+          <p:cNvPr id="25" name="TextBox 24"/>
+          <p:cNvSpPr txBox="1"/>
+          <p:nvPr/>
+        </p:nvSpPr>
+        <p:spPr>
+          <a:xfrm>
+            <a:off x="877824" y="4983479"/>
+            <a:ext cx="3794760" cy="310896"/>
+          </a:xfrm>
+          <a:prstGeom prst="rect">
+            <a:avLst/>
+          </a:prstGeom>
+          <a:noFill/>
+        </p:spPr>
+        <p:txBody>
+          <a:bodyPr wrap="square" anchor="t" lIns="0" rIns="0" tIns="0" bIns="0">
+            <a:spAutoFit/>
+          </a:bodyPr>
+          <a:lstStyle/>
+          <a:p>
+            <a:pPr algn="l">
+              <a:lnSpc>
+                <a:spcPct val="118000"/>
+              </a:lnSpc>
+              <a:spcAft>
+                <a:spcPts val="0"/>
+              </a:spcAft>
+            </a:pPr>
+            <a:r>
+              <a:rPr sz="1400" b="1">
+                <a:solidFill>
+                  <a:srgbClr val="0F172A"/>
+                </a:solidFill>
+                <a:latin typeface="Inter"/>
+              </a:rPr>
+              <a:t>SOH and remaining useful life</a:t>
+            </a:r>
+          </a:p>
+        </p:txBody>
+      </p:sp>
+      <p:sp>
+        <p:nvSpPr>
+          <p:cNvPr id="26" name="TextBox 25"/>
+          <p:cNvSpPr txBox="1"/>
+          <p:nvPr/>
+        </p:nvSpPr>
+        <p:spPr>
+          <a:xfrm>
+            <a:off x="4864608" y="4974336"/>
+            <a:ext cx="6440119" cy="603504"/>
+          </a:xfrm>
+          <a:prstGeom prst="rect">
+            <a:avLst/>
+          </a:prstGeom>
+          <a:noFill/>
+        </p:spPr>
+        <p:txBody>
+          <a:bodyPr wrap="square" anchor="t" lIns="0" rIns="0" tIns="0" bIns="0">
+            <a:spAutoFit/>
+          </a:bodyPr>
+          <a:lstStyle/>
+          <a:p>
+            <a:pPr algn="l">
+              <a:lnSpc>
+                <a:spcPct val="126000"/>
+              </a:lnSpc>
+              <a:spcAft>
+                <a:spcPts val="0"/>
+              </a:spcAft>
+            </a:pPr>
+            <a:r>
+              <a:rPr sz="1100" b="0">
+                <a:solidFill>
+                  <a:srgbClr val="475569"/>
+                </a:solidFill>
+                <a:latin typeface="Inter"/>
+              </a:rPr>
+              <a:t>dV/dt during CC-CV charging is the signal; the 39-cycle history is the starting corpus.</a:t>
+            </a:r>
+          </a:p>
+        </p:txBody>
+      </p:sp>
+      <p:sp>
+        <p:nvSpPr>
+          <p:cNvPr id="27" name="TextBox 26"/>
+          <p:cNvSpPr txBox="1"/>
+          <p:nvPr/>
+        </p:nvSpPr>
+        <p:spPr>
+          <a:xfrm>
+            <a:off x="566928" y="5815583"/>
+            <a:ext cx="11057839" cy="310896"/>
+          </a:xfrm>
+          <a:prstGeom prst="rect">
+            <a:avLst/>
+          </a:prstGeom>
+          <a:noFill/>
+        </p:spPr>
+        <p:txBody>
+          <a:bodyPr wrap="square" anchor="t" lIns="0" rIns="0" tIns="0" bIns="0">
+            <a:spAutoFit/>
+          </a:bodyPr>
+          <a:lstStyle/>
+          <a:p>
+            <a:pPr algn="ctr">
+              <a:lnSpc>
+                <a:spcPct val="118000"/>
+              </a:lnSpc>
+              <a:spcAft>
+                <a:spcPts val="0"/>
+              </a:spcAft>
+            </a:pPr>
+            <a:r>
+              <a:rPr sz="1200" b="1">
+                <a:solidFill>
+                  <a:srgbClr val="0E7490"/>
+                </a:solidFill>
+                <a:latin typeface="Inter"/>
+              </a:rPr>
+              <a:t>Everything shown today is reproducible from this repository — figures, model and deck all rebuild from source.</a:t>
+            </a:r>
+          </a:p>
+        </p:txBody>
+      </p:sp>
+    </p:spTree>
+  </p:cSld>
+  <p:clrMapOvr>
+    <a:masterClrMapping/>
+  </p:clrMapOvr>
+</p:sld>
+</file>
+
+<file path=ppt/slides/slide22.xml><?xml version="1.0" encoding="utf-8"?>
+<p:sld xmlns:a="http://schemas.openxmlformats.org/drawingml/2006/main" xmlns:p="http://schemas.openxmlformats.org/presentationml/2006/main" xmlns:r="http://schemas.openxmlformats.org/officeDocument/2006/relationships">
+  <p:cSld>
+    <p:bg>
+      <p:bgPr>
+        <a:solidFill>
+          <a:srgbClr val="FFFFFF"/>
+        </a:solidFill>
+        <a:effectLst/>
+      </p:bgPr>
+    </p:bg>
+    <p:spTree>
+      <p:nvGrpSpPr>
+        <p:cNvPr id="1" name=""/>
+        <p:cNvGrpSpPr/>
+        <p:nvPr/>
+      </p:nvGrpSpPr>
+      <p:grpSpPr/>
+      <p:sp>
+        <p:nvSpPr>
+          <p:cNvPr id="2" name="TextBox 1"/>
+          <p:cNvSpPr txBox="1"/>
+          <p:nvPr/>
+        </p:nvSpPr>
+        <p:spPr>
+          <a:xfrm>
+            <a:off x="566928" y="365760"/>
+            <a:ext cx="11057839" cy="713232"/>
+          </a:xfrm>
+          <a:prstGeom prst="rect">
+            <a:avLst/>
+          </a:prstGeom>
+          <a:noFill/>
+        </p:spPr>
+        <p:txBody>
+          <a:bodyPr wrap="square" anchor="t" lIns="0" rIns="0" tIns="0" bIns="0">
+            <a:spAutoFit/>
+          </a:bodyPr>
+          <a:lstStyle/>
+          <a:p>
+            <a:pPr algn="l">
+              <a:lnSpc>
+                <a:spcPct val="102000"/>
+              </a:lnSpc>
+              <a:spcAft>
+                <a:spcPts val="0"/>
+              </a:spcAft>
+            </a:pPr>
+            <a:r>
+              <a:rPr sz="3300" b="1">
+                <a:solidFill>
+                  <a:srgbClr val="0F172A"/>
+                </a:solidFill>
+                <a:latin typeface="Inter"/>
+              </a:rPr>
+              <a:t>References</a:t>
+            </a:r>
+          </a:p>
+        </p:txBody>
+      </p:sp>
+      <p:sp>
+        <p:nvSpPr>
+          <p:cNvPr id="3" name="Rectangle 2"/>
+          <p:cNvSpPr/>
+          <p:nvPr/>
+        </p:nvSpPr>
+        <p:spPr>
+          <a:xfrm>
+            <a:off x="566928" y="1152144"/>
+            <a:ext cx="1965960" cy="32004"/>
+          </a:xfrm>
+          <a:prstGeom prst="rect">
+            <a:avLst/>
+          </a:prstGeom>
+          <a:solidFill>
+            <a:srgbClr val="0E7490"/>
+          </a:solidFill>
+          <a:ln>
+            <a:noFill/>
+          </a:ln>
+          <a:effectLst/>
+        </p:spPr>
+        <p:style>
+          <a:lnRef idx="1">
+            <a:schemeClr val="accent1"/>
+          </a:lnRef>
+          <a:fillRef idx="3">
+            <a:schemeClr val="accent1"/>
+          </a:fillRef>
+          <a:effectRef idx="2">
+            <a:schemeClr val="accent1"/>
+          </a:effectRef>
+          <a:fontRef idx="minor">
+            <a:schemeClr val="lt1"/>
+          </a:fontRef>
+        </p:style>
+        <p:txBody>
+          <a:bodyPr rtlCol="0" anchor="ctr"/>
+          <a:lstStyle/>
+          <a:p/>
+        </p:txBody>
+      </p:sp>
+      <p:sp>
+        <p:nvSpPr>
+          <p:cNvPr id="4" name="Rectangle 3"/>
+          <p:cNvSpPr/>
+          <p:nvPr/>
+        </p:nvSpPr>
+        <p:spPr>
+          <a:xfrm>
+            <a:off x="2532888" y="1152144"/>
+            <a:ext cx="9091879" cy="32004"/>
+          </a:xfrm>
+          <a:prstGeom prst="rect">
+            <a:avLst/>
+          </a:prstGeom>
+          <a:solidFill>
+            <a:srgbClr val="CBD5E1"/>
+          </a:solidFill>
+          <a:ln>
+            <a:noFill/>
+          </a:ln>
+          <a:effectLst/>
+        </p:spPr>
+        <p:style>
+          <a:lnRef idx="1">
+            <a:schemeClr val="accent1"/>
+          </a:lnRef>
+          <a:fillRef idx="3">
+            <a:schemeClr val="accent1"/>
+          </a:fillRef>
+          <a:effectRef idx="2">
+            <a:schemeClr val="accent1"/>
+          </a:effectRef>
+          <a:fontRef idx="minor">
+            <a:schemeClr val="lt1"/>
+          </a:fontRef>
+        </p:style>
+        <p:txBody>
+          <a:bodyPr rtlCol="0" anchor="ctr"/>
+          <a:lstStyle/>
+          <a:p/>
+        </p:txBody>
+      </p:sp>
+      <p:sp>
+        <p:nvSpPr>
+          <p:cNvPr id="5" name="TextBox 4"/>
+          <p:cNvSpPr txBox="1"/>
+          <p:nvPr/>
+        </p:nvSpPr>
+        <p:spPr>
+          <a:xfrm>
+            <a:off x="566928" y="6400800"/>
+            <a:ext cx="4572000" cy="237744"/>
+          </a:xfrm>
+          <a:prstGeom prst="rect">
+            <a:avLst/>
+          </a:prstGeom>
+          <a:noFill/>
+        </p:spPr>
+        <p:txBody>
+          <a:bodyPr wrap="square" anchor="t" lIns="0" rIns="0" tIns="0" bIns="0">
+            <a:spAutoFit/>
+          </a:bodyPr>
+          <a:lstStyle/>
+          <a:p>
+            <a:pPr algn="l">
+              <a:lnSpc>
+                <a:spcPct val="118000"/>
+              </a:lnSpc>
+              <a:spcAft>
+                <a:spcPts val="0"/>
+              </a:spcAft>
+            </a:pPr>
+            <a:r>
+              <a:rPr sz="950" b="0">
+                <a:solidFill>
+                  <a:srgbClr val="475569"/>
+                </a:solidFill>
+                <a:latin typeface="Inter"/>
+              </a:rPr>
+              <a:t>AI-PBMS  ·  Team ANS_4X</a:t>
+            </a:r>
+          </a:p>
+        </p:txBody>
+      </p:sp>
+      <p:sp>
+        <p:nvSpPr>
+          <p:cNvPr id="6" name="TextBox 5"/>
+          <p:cNvSpPr txBox="1"/>
+          <p:nvPr/>
+        </p:nvSpPr>
+        <p:spPr>
+          <a:xfrm>
+            <a:off x="10527487" y="6400800"/>
+            <a:ext cx="1097280" cy="237744"/>
+          </a:xfrm>
+          <a:prstGeom prst="rect">
+            <a:avLst/>
+          </a:prstGeom>
+          <a:noFill/>
+        </p:spPr>
+        <p:txBody>
+          <a:bodyPr wrap="square" anchor="t" lIns="0" rIns="0" tIns="0" bIns="0">
+            <a:spAutoFit/>
+          </a:bodyPr>
+          <a:lstStyle/>
+          <a:p>
+            <a:pPr algn="r">
+              <a:lnSpc>
+                <a:spcPct val="118000"/>
+              </a:lnSpc>
+              <a:spcAft>
+                <a:spcPts val="0"/>
+              </a:spcAft>
+            </a:pPr>
+            <a:r>
+              <a:rPr sz="1050" b="0">
+                <a:solidFill>
+                  <a:srgbClr val="475569"/>
+                </a:solidFill>
+                <a:latin typeface="Inter"/>
+              </a:rPr>
+              <a:t>22</a:t>
             </a:r>
           </a:p>
         </p:txBody>

--- a/AI_PBMS_Full_Deck.pptx
+++ b/AI_PBMS_Full_Deck.pptx
@@ -988,12 +988,12 @@
           </a:p>
           <a:p>
             <a:r>
-              <a:t>protection logic switching the MOSFETs at the pack, and the Arduino watchdog that</a:t>
-            </a:r>
-          </a:p>
-          <a:p>
-            <a:r>
-              <a:t>resets the Pi. If every line of our software failed, that lane still opens the</a:t>
+              <a:t>protection logic switching the MOSFETs at the pack. If every line of our</a:t>
+            </a:r>
+          </a:p>
+          <a:p>
+            <a:r>
+              <a:t>software failed, that lane still opens the</a:t>
             </a:r>
           </a:p>
           <a:p>
@@ -1068,37 +1068,37 @@
           <a:lstStyle/>
           <a:p>
             <a:r>
-              <a:t>Three tiers, each doing what the others cannot. The JBD BMS senses: eight taps,</a:t>
-            </a:r>
-          </a:p>
-          <a:p>
-            <a:r>
-              <a:t>four thermistors, pack voltage and current. The Pi 5 runs the logger and the</a:t>
-            </a:r>
-          </a:p>
-          <a:p>
-            <a:r>
-              <a:t>inference. Inference sits at the edge deliberately — push it</a:t>
-            </a:r>
-          </a:p>
-          <a:p>
-            <a:r>
-              <a:t>to a server and every network hiccup becomes an unmonitored window. The third</a:t>
-            </a:r>
-          </a:p>
-          <a:p>
-            <a:r>
-              <a:t>tier exists because general-purpose computers hang. An Arduino on its own rail</a:t>
-            </a:r>
-          </a:p>
-          <a:p>
-            <a:r>
-              <a:t>watches for a heartbeat and pulls the Pi's RUN pin if it stops. Zynq-7000 is our</a:t>
-            </a:r>
-          </a:p>
-          <a:p>
-            <a:r>
-              <a:t>path to take inference off the CPU entirely.</a:t>
+              <a:t>Two tiers at the edge, and I want to be precise about what exists. The JBD BMS</a:t>
+            </a:r>
+          </a:p>
+          <a:p>
+            <a:r>
+              <a:t>senses: eight taps, four thermistors, pack voltage and current. The Pi 5 runs</a:t>
+            </a:r>
+          </a:p>
+          <a:p>
+            <a:r>
+              <a:t>the logger and the inference. Inference sits at the edge deliberately — push it</a:t>
+            </a:r>
+          </a:p>
+          <a:p>
+            <a:r>
+              <a:t>to a server and every network hiccup becomes an unmonitored window.</a:t>
+            </a:r>
+          </a:p>
+          <a:p>
+            <a:r>
+              <a:t>A third tier — an independent hardware watchdog on its own power rail — is</a:t>
+            </a:r>
+          </a:p>
+          <a:p>
+            <a:r>
+              <a:t>specified and on the roadmap, but we have not built it, so it is not in this</a:t>
+            </a:r>
+          </a:p>
+          <a:p>
+            <a:r>
+              <a:t>architecture. Zynq-7000 is our path to take inference off the CPU entirely.</a:t>
             </a:r>
           </a:p>
         </p:txBody>
@@ -2208,7 +2208,7 @@
           </a:p>
           <a:p>
             <a:r>
-              <a:t>INR21700-M50 cells in total. And eight series groups means eight sense taps,</a:t>
+              <a:t>NMC cells in total. And eight series groups means eight sense taps,</a:t>
             </a:r>
           </a:p>
           <a:p>
@@ -9251,7 +9251,7 @@
                 </a:solidFill>
                 <a:latin typeface="Inter"/>
               </a:rPr>
-              <a:t>Three tiers, no single point of failure</a:t>
+              <a:t>Two tiers at the edge, as built</a:t>
             </a:r>
           </a:p>
         </p:txBody>
@@ -9433,7 +9433,7 @@
         <p:spPr>
           <a:xfrm>
             <a:off x="566928" y="1517904"/>
-            <a:ext cx="5797296" cy="2834640"/>
+            <a:ext cx="5797296" cy="1828800"/>
           </a:xfrm>
           <a:prstGeom prst="rect">
             <a:avLst/>
@@ -9492,7 +9492,7 @@
                 </a:solidFill>
                 <a:latin typeface="Inter"/>
               </a:rPr>
-              <a:t>Tier 2 — Pi 5 runs logger, XGBoost inference and dashboard.</a:t>
+              <a:t>Tier 2 — Pi 5 runs the logger and XGBoost inference.</a:t>
             </a:r>
           </a:p>
           <a:p>
@@ -9517,7 +9517,7 @@
                 </a:solidFill>
                 <a:latin typeface="Inter"/>
               </a:rPr>
-              <a:t>Tier 3 — Arduino Uno R4 watches the Pi's heartbeat.</a:t>
+              <a:t>Inference stays at the edge: no link, no safety gap.</a:t>
             </a:r>
           </a:p>
           <a:p>
@@ -9542,32 +9542,7 @@
                 </a:solidFill>
                 <a:latin typeface="Inter"/>
               </a:rPr>
-              <a:t>Missed heartbeat pulls the RUN pin and resets the Pi.</a:t>
-            </a:r>
-          </a:p>
-          <a:p>
-            <a:pPr marL="274320" indent="-274320">
-              <a:lnSpc>
-                <a:spcPct val="116000"/>
-              </a:lnSpc>
-              <a:spcAft>
-                <a:spcPts val="900"/>
-              </a:spcAft>
-              <a:buClr>
-                <a:srgbClr val="0E7490"/>
-              </a:buClr>
-              <a:buSzPct val="62000"/>
-              <a:buFont typeface="Arial" pitchFamily="34" charset="0"/>
-              <a:buChar char="●"/>
-            </a:pPr>
-            <a:r>
-              <a:rPr sz="1650">
-                <a:solidFill>
-                  <a:srgbClr val="0F172A"/>
-                </a:solidFill>
-                <a:latin typeface="Inter"/>
-              </a:rPr>
-              <a:t>Inference stays at the edge: no link, no safety gap.</a:t>
+              <a:t>Pi dials out to Railway — no inbound port on the pack.</a:t>
             </a:r>
           </a:p>
         </p:txBody>
@@ -9580,7 +9555,7 @@
         </p:nvSpPr>
         <p:spPr>
           <a:xfrm>
-            <a:off x="566928" y="4718304"/>
+            <a:off x="566928" y="3749039"/>
             <a:ext cx="5797296" cy="1188720"/>
           </a:xfrm>
           <a:prstGeom prst="rect">
@@ -9624,7 +9599,7 @@
         </p:nvSpPr>
         <p:spPr>
           <a:xfrm>
-            <a:off x="768096" y="4846320"/>
+            <a:off x="768096" y="3877056"/>
             <a:ext cx="5394959" cy="237744"/>
           </a:xfrm>
           <a:prstGeom prst="rect">
@@ -9666,7 +9641,7 @@
         </p:nvSpPr>
         <p:spPr>
           <a:xfrm>
-            <a:off x="768096" y="5120640"/>
+            <a:off x="768096" y="4151376"/>
             <a:ext cx="5394959" cy="694944"/>
           </a:xfrm>
           <a:prstGeom prst="rect">
@@ -9716,8 +9691,8 @@
         </p:blipFill>
         <p:spPr>
           <a:xfrm>
-            <a:off x="6693408" y="1467953"/>
-            <a:ext cx="4931359" cy="2742516"/>
+            <a:off x="6693408" y="1617682"/>
+            <a:ext cx="4931359" cy="2443058"/>
           </a:xfrm>
           <a:prstGeom prst="rect">
             <a:avLst/>
@@ -9732,7 +9707,7 @@
         </p:nvSpPr>
         <p:spPr>
           <a:xfrm>
-            <a:off x="7086990" y="4352544"/>
+            <a:off x="8365550" y="4352544"/>
             <a:ext cx="1587074" cy="1417320"/>
           </a:xfrm>
           <a:prstGeom prst="rect">
@@ -9784,7 +9759,7 @@
         </p:blipFill>
         <p:spPr>
           <a:xfrm>
-            <a:off x="7205862" y="4471416"/>
+            <a:off x="8484422" y="4471416"/>
             <a:ext cx="1349330" cy="1179576"/>
           </a:xfrm>
           <a:prstGeom prst="rect">
@@ -9794,82 +9769,14 @@
       </p:pic>
       <p:sp>
         <p:nvSpPr>
-          <p:cNvPr id="14" name="Rectangle 13"/>
-          <p:cNvSpPr/>
-          <p:nvPr/>
-        </p:nvSpPr>
-        <p:spPr>
-          <a:xfrm>
-            <a:off x="9542320" y="4352544"/>
-            <a:ext cx="1790653" cy="1417320"/>
-          </a:xfrm>
-          <a:prstGeom prst="rect">
-            <a:avLst/>
-          </a:prstGeom>
-          <a:solidFill>
-            <a:srgbClr val="FFFFFF"/>
-          </a:solidFill>
-          <a:ln w="12700">
-            <a:solidFill>
-              <a:srgbClr val="CBD5E1"/>
-            </a:solidFill>
-          </a:ln>
-          <a:effectLst/>
-        </p:spPr>
-        <p:style>
-          <a:lnRef idx="1">
-            <a:schemeClr val="accent1"/>
-          </a:lnRef>
-          <a:fillRef idx="3">
-            <a:schemeClr val="accent1"/>
-          </a:fillRef>
-          <a:effectRef idx="2">
-            <a:schemeClr val="accent1"/>
-          </a:effectRef>
-          <a:fontRef idx="minor">
-            <a:schemeClr val="lt1"/>
-          </a:fontRef>
-        </p:style>
-        <p:txBody>
-          <a:bodyPr rtlCol="0" anchor="ctr"/>
-          <a:lstStyle/>
-          <a:p/>
-        </p:txBody>
-      </p:sp>
-      <p:pic>
-        <p:nvPicPr>
-          <p:cNvPr id="15" name="Picture 14" descr="p06_img2_x52.jpeg"/>
-          <p:cNvPicPr>
-            <a:picLocks noChangeAspect="1"/>
-          </p:cNvPicPr>
-          <p:nvPr/>
-        </p:nvPicPr>
-        <p:blipFill>
-          <a:blip r:embed="rId4"/>
-          <a:stretch>
-            <a:fillRect/>
-          </a:stretch>
-        </p:blipFill>
-        <p:spPr>
-          <a:xfrm>
-            <a:off x="9661192" y="4471416"/>
-            <a:ext cx="1552909" cy="1179576"/>
-          </a:xfrm>
-          <a:prstGeom prst="rect">
-            <a:avLst/>
-          </a:prstGeom>
-        </p:spPr>
-      </p:pic>
-      <p:sp>
-        <p:nvSpPr>
-          <p:cNvPr id="16" name="TextBox 15"/>
-          <p:cNvSpPr txBox="1"/>
-          <p:nvPr/>
-        </p:nvSpPr>
-        <p:spPr>
-          <a:xfrm>
-            <a:off x="6693408" y="5797296"/>
-            <a:ext cx="2374239" cy="237744"/>
+          <p:cNvPr id="14" name="TextBox 13"/>
+          <p:cNvSpPr txBox="1"/>
+          <p:nvPr/>
+        </p:nvSpPr>
+        <p:spPr>
+          <a:xfrm>
+            <a:off x="7833207" y="5797296"/>
+            <a:ext cx="2651760" cy="237744"/>
           </a:xfrm>
           <a:prstGeom prst="rect">
             <a:avLst/>
@@ -9898,48 +9805,6 @@
                 <a:latin typeface="Inter"/>
               </a:rPr>
               <a:t>Raspberry Pi 5</a:t>
-            </a:r>
-          </a:p>
-        </p:txBody>
-      </p:sp>
-      <p:sp>
-        <p:nvSpPr>
-          <p:cNvPr id="17" name="TextBox 16"/>
-          <p:cNvSpPr txBox="1"/>
-          <p:nvPr/>
-        </p:nvSpPr>
-        <p:spPr>
-          <a:xfrm>
-            <a:off x="9250527" y="5797296"/>
-            <a:ext cx="2374239" cy="237744"/>
-          </a:xfrm>
-          <a:prstGeom prst="rect">
-            <a:avLst/>
-          </a:prstGeom>
-          <a:noFill/>
-        </p:spPr>
-        <p:txBody>
-          <a:bodyPr wrap="square" anchor="t" lIns="0" rIns="0" tIns="0" bIns="0">
-            <a:spAutoFit/>
-          </a:bodyPr>
-          <a:lstStyle/>
-          <a:p>
-            <a:pPr algn="ctr">
-              <a:lnSpc>
-                <a:spcPct val="118000"/>
-              </a:lnSpc>
-              <a:spcAft>
-                <a:spcPts val="0"/>
-              </a:spcAft>
-            </a:pPr>
-            <a:r>
-              <a:rPr sz="950" b="0">
-                <a:solidFill>
-                  <a:srgbClr val="475569"/>
-                </a:solidFill>
-                <a:latin typeface="Inter"/>
-              </a:rPr>
-              <a:t>Arduino Uno R4 WiFi</a:t>
             </a:r>
           </a:p>
         </p:txBody>
@@ -17972,7 +17837,7 @@
                 </a:solidFill>
                 <a:latin typeface="Inter"/>
               </a:rPr>
-              <a:t>cell used in the 8S2P pack</a:t>
+              <a:t>NMC tier reference</a:t>
             </a:r>
           </a:p>
         </p:txBody>
@@ -19828,7 +19693,7 @@
                 </a:solidFill>
                 <a:latin typeface="Inter"/>
               </a:rPr>
-              <a:t>Sixteen LG INR21700-M50 cells, 5000 mAh each.</a:t>
+              <a:t>Sixteen NMC cells, 8S2P.</a:t>
             </a:r>
           </a:p>
           <a:p>
